--- a/_implementation-notes/evening-series/FotH Evening Session 7 Slides DRAFT v1.pptx
+++ b/_implementation-notes/evening-series/FotH Evening Session 7 Slides DRAFT v1.pptx
@@ -10,6 +10,7 @@
   <p:sldIdLst>
     <p:sldId id="256" r:id="rId2"/>
     <p:sldId id="277" r:id="rId87"/>
+    <p:sldId id="551" r:id="rId25"/>
     <p:sldId id="278" r:id="rId88"/>
     <p:sldId id="279" r:id="rId89"/>
     <p:sldId id="381" r:id="rId90"/>
@@ -21,7 +22,8 @@
     <p:sldId id="386" r:id="rId96"/>
     <p:sldId id="387" r:id="rId97"/>
     <p:sldId id="388" r:id="rId98"/>
-    <p:sldId id="530" r:id="rId99"/>
+    <p:sldId id="552" r:id="rId26"/>
+    <p:sldId id="553" r:id="rId27"/>
     <p:sldId id="389" r:id="rId100"/>
     <p:sldId id="390" r:id="rId101"/>
   </p:sldIdLst>
@@ -753,6 +755,214 @@
 </p:notes>
 </file>
 
+<file path=ppt/notesSlides/notesSlide17.xml><?xml version="1.0" encoding="utf-8"?>
+<p:notes xmlns:a="http://schemas.openxmlformats.org/drawingml/2006/main" xmlns:p="http://schemas.openxmlformats.org/presentationml/2006/main" xmlns:r="http://schemas.openxmlformats.org/officeDocument/2006/relationships">
+  <p:cSld>
+    <p:spTree>
+      <p:nvGrpSpPr>
+        <p:cNvPr id="1" name=""/>
+        <p:cNvGrpSpPr/>
+        <p:nvPr/>
+      </p:nvGrpSpPr>
+      <p:grpSpPr>
+        <a:xfrm>
+          <a:off x="0" y="0"/>
+          <a:ext cx="0" cy="0"/>
+          <a:chOff x="0" y="0"/>
+          <a:chExt cx="0" cy="0"/>
+        </a:xfrm>
+      </p:grpSpPr>
+      <p:sp>
+        <p:nvSpPr>
+          <p:cNvPr id="2" name="Notes Placeholder 1"/>
+          <p:cNvSpPr>
+            <a:spLocks noGrp="1"/>
+          </p:cNvSpPr>
+          <p:nvPr>
+            <p:ph type="body" idx="1"/>
+          </p:nvPr>
+        </p:nvSpPr>
+        <p:spPr/>
+        <p:txBody>
+          <a:bodyPr/>
+          <a:lstStyle/>
+          <a:p>
+            <a:r>
+              <a:t>S7 · WELCOME · LEAD: CONTAINER HOLDER · GROUNDING — every session opens on this map</a:t>
+            </a:r>
+          </a:p>
+          <a:p>
+            <a:r>
+              <a:t>BEATS:</a:t>
+            </a:r>
+          </a:p>
+          <a:p>
+            <a:r>
+              <a:t>1. Locate tonight on the map, plainly: Session 7 stands in the third box — Connect with God. Each connection makes the next one real (Matt. 22:37–40).</a:t>
+            </a:r>
+          </a:p>
+          <a:p>
+            <a:r>
+              <a:t>2. The four boxes are one journey — each connection makes the next one real — rooted in the two great commandments: love God, love neighbor (Matt 22:37–40).</a:t>
+            </a:r>
+          </a:p>
+          <a:p>
+            <a:r>
+              <a:t>3. This is also the 'where we are on the map' minute the welcome owes any newcomer.</a:t>
+            </a:r>
+          </a:p>
+          <a:p>
+            <a:r>
+              <a:t>CUES: Two minutes at most; then tonight's road.</a:t>
+            </a:r>
+          </a:p>
+        </p:txBody>
+      </p:sp>
+    </p:spTree>
+  </p:cSld>
+  <p:clrMapOvr>
+    <a:masterClrMapping/>
+  </p:clrMapOvr>
+</p:notes>
+</file>
+
+<file path=ppt/notesSlides/notesSlide18.xml><?xml version="1.0" encoding="utf-8"?>
+<p:notes xmlns:a="http://schemas.openxmlformats.org/drawingml/2006/main" xmlns:p="http://schemas.openxmlformats.org/presentationml/2006/main" xmlns:r="http://schemas.openxmlformats.org/officeDocument/2006/relationships">
+  <p:cSld>
+    <p:spTree>
+      <p:nvGrpSpPr>
+        <p:cNvPr id="1" name=""/>
+        <p:cNvGrpSpPr/>
+        <p:nvPr/>
+      </p:nvGrpSpPr>
+      <p:grpSpPr>
+        <a:xfrm>
+          <a:off x="0" y="0"/>
+          <a:ext cx="0" cy="0"/>
+          <a:chOff x="0" y="0"/>
+          <a:chExt cx="0" cy="0"/>
+        </a:xfrm>
+      </p:grpSpPr>
+      <p:sp>
+        <p:nvSpPr>
+          <p:cNvPr id="2" name="Notes Placeholder 1"/>
+          <p:cNvSpPr>
+            <a:spLocks noGrp="1"/>
+          </p:cNvSpPr>
+          <p:nvPr>
+            <p:ph type="body" idx="1"/>
+          </p:nvPr>
+        </p:nvSpPr>
+        <p:spPr/>
+        <p:txBody>
+          <a:bodyPr/>
+          <a:lstStyle/>
+          <a:p>
+            <a:r>
+              <a:t>S7 · COMMISSIONING · LEAD: CONTENT PRESENTER</a:t>
+            </a:r>
+          </a:p>
+          <a:p>
+            <a:r>
+              <a:t>BEATS:</a:t>
+            </a:r>
+          </a:p>
+          <a:p>
+            <a:r>
+              <a:t>1. The sheet on the screen is the sheet in their hands — walk it, don't read it.</a:t>
+            </a:r>
+          </a:p>
+          <a:p>
+            <a:r>
+              <a:t>2. The standing rhythm first: the morning question, the evening journal line — one box per day on the week-grids.</a:t>
+            </a:r>
+          </a:p>
+          <a:p>
+            <a:r>
+              <a:t>3. A missed box is never a failure — it is an invitation to return.</a:t>
+            </a:r>
+          </a:p>
+          <a:p>
+            <a:r>
+              <a:t>CUES: The four parts are the next slide.</a:t>
+            </a:r>
+          </a:p>
+        </p:txBody>
+      </p:sp>
+    </p:spTree>
+  </p:cSld>
+  <p:clrMapOvr>
+    <a:masterClrMapping/>
+  </p:clrMapOvr>
+</p:notes>
+</file>
+
+<file path=ppt/notesSlides/notesSlide19.xml><?xml version="1.0" encoding="utf-8"?>
+<p:notes xmlns:a="http://schemas.openxmlformats.org/drawingml/2006/main" xmlns:p="http://schemas.openxmlformats.org/presentationml/2006/main" xmlns:r="http://schemas.openxmlformats.org/officeDocument/2006/relationships">
+  <p:cSld>
+    <p:spTree>
+      <p:nvGrpSpPr>
+        <p:cNvPr id="1" name=""/>
+        <p:cNvGrpSpPr/>
+        <p:nvPr/>
+      </p:nvGrpSpPr>
+      <p:grpSpPr>
+        <a:xfrm>
+          <a:off x="0" y="0"/>
+          <a:ext cx="0" cy="0"/>
+          <a:chOff x="0" y="0"/>
+          <a:chExt cx="0" cy="0"/>
+        </a:xfrm>
+      </p:grpSpPr>
+      <p:sp>
+        <p:nvSpPr>
+          <p:cNvPr id="2" name="Notes Placeholder 1"/>
+          <p:cNvSpPr>
+            <a:spLocks noGrp="1"/>
+          </p:cNvSpPr>
+          <p:nvPr>
+            <p:ph type="body" idx="1"/>
+          </p:nvPr>
+        </p:nvSpPr>
+        <p:spPr/>
+        <p:txBody>
+          <a:bodyPr/>
+          <a:lstStyle/>
+          <a:p>
+            <a:r>
+              <a:t>S7 · COMMISSIONING · LEAD: CONTENT PRESENTER</a:t>
+            </a:r>
+          </a:p>
+          <a:p>
+            <a:r>
+              <a:t>BEATS:</a:t>
+            </a:r>
+          </a:p>
+          <a:p>
+            <a:r>
+              <a:t>1. The four parts, in order: the homework practice, week one; the end-of-week-one check-in; the homework practice, week two; one sentence of preparation.</a:t>
+            </a:r>
+          </a:p>
+          <a:p>
+            <a:r>
+              <a:t>2. Check-in partners are named aloud before leaving this slide — the sheet has the line to write the name.</a:t>
+            </a:r>
+          </a:p>
+          <a:p>
+            <a:r>
+              <a:t>GUARD: The sheet-walk, not a re-teach.</a:t>
+            </a:r>
+          </a:p>
+        </p:txBody>
+      </p:sp>
+    </p:spTree>
+  </p:cSld>
+  <p:clrMapOvr>
+    <a:masterClrMapping/>
+  </p:clrMapOvr>
+</p:notes>
+</file>
+
 <file path=ppt/notesSlides/notesSlide85.xml><?xml version="1.0" encoding="utf-8"?>
 <p:notes xmlns:a="http://schemas.openxmlformats.org/drawingml/2006/main" xmlns:r="http://schemas.openxmlformats.org/officeDocument/2006/relationships" xmlns:p="http://schemas.openxmlformats.org/presentationml/2006/main">
   <p:cSld>
@@ -957,20 +1167,22 @@
           <a:lstStyle/>
           <a:p>
             <a:r>
-              <a:rPr lang="en-US" sz="1200"/>
               <a:t>S7 · 7:00–7:08 · LEAD: CONTAINER HOLDER</a:t>
             </a:r>
           </a:p>
           <a:p>
             <a:r>
-              <a:rPr lang="en-US" sz="1200"/>
               <a:t>BEATS: 1. Aaronic blessing first. 2. Container restated SLOWLY — Safe, Present, Clear, Intentional; a container that sat empty over a break needs a minute to hold again. 3. Frame Week 7 as a turn: the interior work prepared us; today hearing God becomes a learnable skill — six steps, a practice that works.</a:t>
             </a:r>
           </a:p>
           <a:p>
             <a:r>
-              <a:rPr lang="en-US" sz="1200"/>
               <a:t>CUES: Run the re-entry gently; let the room land before moving on.</a:t>
+            </a:r>
+          </a:p>
+          <a:p>
+            <a:r>
+              <a:t>PAIR LEAD: name the leading pair in the welcome — two leaders hold tonight, and the room will see the evening handed back and forth between them; that is the design. The pair practices the session together beforehand.</a:t>
             </a:r>
           </a:p>
         </p:txBody>
@@ -1473,59 +1685,6 @@
             <a:r>
               <a:rPr lang="en-US" sz="1200"/>
               <a:t>CUES: Arranged parent begins the word round; anyone may pass.</a:t>
-            </a:r>
-          </a:p>
-        </p:txBody>
-      </p:sp>
-    </p:spTree>
-  </p:cSld>
-  <p:clrMapOvr>
-    <a:masterClrMapping/>
-  </p:clrMapOvr>
-</p:notes>
-</file>
-
-<file path=ppt/notesSlides/notesSlide97.xml><?xml version="1.0" encoding="utf-8"?>
-<p:notes xmlns:a="http://schemas.openxmlformats.org/drawingml/2006/main" xmlns:r="http://schemas.openxmlformats.org/officeDocument/2006/relationships" xmlns:p="http://schemas.openxmlformats.org/presentationml/2006/main">
-  <p:cSld>
-    <p:spTree>
-      <p:nvGrpSpPr>
-        <p:cNvPr id="1" name=""/>
-        <p:cNvGrpSpPr/>
-        <p:nvPr/>
-      </p:nvGrpSpPr>
-      <p:grpSpPr>
-        <a:xfrm>
-          <a:off x="0" y="0"/>
-          <a:ext cx="0" cy="0"/>
-          <a:chOff x="0" y="0"/>
-          <a:chExt cx="0" cy="0"/>
-        </a:xfrm>
-      </p:grpSpPr>
-      <p:sp>
-        <p:nvSpPr>
-          <p:cNvPr id="2" name="Notes Placeholder 1"/>
-          <p:cNvSpPr>
-            <a:spLocks noGrp="1"/>
-          </p:cNvSpPr>
-          <p:nvPr>
-            <p:ph type="body" idx="1"/>
-          </p:nvPr>
-        </p:nvSpPr>
-        <p:spPr/>
-        <p:txBody>
-          <a:bodyPr/>
-          <a:lstStyle/>
-          <a:p>
-            <a:r>
-              <a:rPr lang="en-US" sz="1200"/>
-              <a:t>S7 · 8:19–8:20 · LEAD: CONTENT PRESENTER</a:t>
-            </a:r>
-          </a:p>
-          <a:p>
-            <a:r>
-              <a:rPr lang="en-US" sz="1200"/>
-              <a:t>BEATS: 1. Send the check-off card home — fridge, mirror, journal pocket. 2. Four rows this week: daily PROAPT (the new anchor practice), morning question, evening note, Five-Minute Examen. 3. A missed box is never a failure — it is an invitation to return. 4. Ask each person to name a specific time of day for their PROAPT aloud — the spoken commitment makes the practice happen.</a:t>
             </a:r>
           </a:p>
         </p:txBody>
@@ -4855,7 +5014,7 @@
 </p:sld>
 </file>
 
-<file path=ppt/slides/slide100.xml><?xml version="1.0" encoding="utf-8"?>
+<file path=ppt/slides/slide10.xml><?xml version="1.0" encoding="utf-8"?>
 <p:sld xmlns:a="http://schemas.openxmlformats.org/drawingml/2006/main" xmlns:r="http://schemas.openxmlformats.org/officeDocument/2006/relationships" xmlns:p="http://schemas.openxmlformats.org/presentationml/2006/main">
   <p:cSld>
     <p:spTree>
@@ -4935,7 +5094,7 @@
                 </a:solidFill>
                 <a:latin typeface="Cambria"/>
               </a:rPr>
-              <a:t>Closing the Container + Aaronic Blessing</a:t>
+              <a:t>Bridge to the pairs — Pair Structure</a:t>
             </a:r>
           </a:p>
         </p:txBody>
@@ -4948,8 +5107,8 @@
         </p:nvSpPr>
         <p:spPr>
           <a:xfrm>
-            <a:off x="822960" y="1600200"/>
-            <a:ext cx="5669280" cy="4572000"/>
+            <a:off x="822960" y="1554480"/>
+            <a:ext cx="10515600" cy="4892040"/>
           </a:xfrm>
           <a:prstGeom prst="rect">
             <a:avLst/>
@@ -4966,7 +5125,7 @@
               </a:spcAft>
             </a:pPr>
             <a:r>
-              <a:rPr sz="2200" b="1" i="0">
+              <a:rPr sz="2400" b="1" i="0">
                 <a:solidFill>
                   <a:srgbClr val="97BC62"/>
                 </a:solidFill>
@@ -4975,250 +5134,113 @@
               <a:t>•  </a:t>
             </a:r>
             <a:r>
-              <a:rPr sz="2200" b="0" i="0">
+              <a:rPr sz="2400" b="0" i="0">
                 <a:solidFill>
                   <a:srgbClr val="222B22"/>
                 </a:solidFill>
                 <a:latin typeface="Calibri"/>
               </a:rPr>
-              <a:t>We close the way we opened — the container, six steps:</a:t>
-            </a:r>
-          </a:p>
-          <a:p>
-            <a:pPr marL="685800" indent="-274320">
-              <a:spcAft>
-                <a:spcPts val="700"/>
-              </a:spcAft>
-            </a:pPr>
-            <a:r>
-              <a:rPr sz="2000" b="1" i="0">
-                <a:solidFill>
-                  <a:srgbClr val="97BC62"/>
-                </a:solidFill>
-                <a:latin typeface="Calibri"/>
-              </a:rPr>
-              <a:t>1   </a:t>
-            </a:r>
-            <a:r>
-              <a:rPr sz="2000" b="0" i="0">
-                <a:solidFill>
-                  <a:srgbClr val="222B22"/>
-                </a:solidFill>
-                <a:latin typeface="Calibri"/>
-              </a:rPr>
-              <a:t>Stand again — same circle, same posture as the open</a:t>
-            </a:r>
-          </a:p>
-          <a:p>
-            <a:pPr marL="685800" indent="-274320">
-              <a:spcAft>
-                <a:spcPts val="700"/>
-              </a:spcAft>
-            </a:pPr>
-            <a:r>
-              <a:rPr sz="2000" b="1" i="0">
-                <a:solidFill>
-                  <a:srgbClr val="97BC62"/>
-                </a:solidFill>
-                <a:latin typeface="Calibri"/>
-              </a:rPr>
-              <a:t>2   </a:t>
-            </a:r>
-            <a:r>
-              <a:rPr sz="2000" b="0" i="0">
-                <a:solidFill>
-                  <a:srgbClr val="222B22"/>
-                </a:solidFill>
-                <a:latin typeface="Calibri"/>
-              </a:rPr>
-              <a:t>One-word landing — compare it to your opening word</a:t>
-            </a:r>
-          </a:p>
-          <a:p>
-            <a:pPr marL="685800" indent="-274320">
-              <a:spcAft>
-                <a:spcPts val="700"/>
-              </a:spcAft>
-            </a:pPr>
-            <a:r>
-              <a:rPr sz="2000" b="1" i="0">
-                <a:solidFill>
-                  <a:srgbClr val="97BC62"/>
-                </a:solidFill>
-                <a:latin typeface="Calibri"/>
-              </a:rPr>
-              <a:t>3   </a:t>
-            </a:r>
-            <a:r>
-              <a:rPr sz="2000" b="0" i="0">
-                <a:solidFill>
-                  <a:srgbClr val="222B22"/>
-                </a:solidFill>
-                <a:latin typeface="Calibri"/>
-              </a:rPr>
-              <a:t>The one thing you are taking from tonight</a:t>
-            </a:r>
-          </a:p>
-          <a:p>
-            <a:pPr marL="685800" indent="-274320">
-              <a:spcAft>
-                <a:spcPts val="700"/>
-              </a:spcAft>
-            </a:pPr>
-            <a:r>
-              <a:rPr sz="2000" b="1" i="0">
-                <a:solidFill>
-                  <a:srgbClr val="97BC62"/>
-                </a:solidFill>
-                <a:latin typeface="Calibri"/>
-              </a:rPr>
-              <a:t>4   </a:t>
-            </a:r>
-            <a:r>
-              <a:rPr sz="2000" b="0" i="0">
-                <a:solidFill>
-                  <a:srgbClr val="222B22"/>
-                </a:solidFill>
-                <a:latin typeface="Calibri"/>
-              </a:rPr>
-              <a:t>The one practice — committed aloud, or modified to one you will actually keep</a:t>
-            </a:r>
-          </a:p>
-          <a:p>
-            <a:pPr marL="685800" indent="-274320">
-              <a:spcAft>
-                <a:spcPts val="700"/>
-              </a:spcAft>
-            </a:pPr>
-            <a:r>
-              <a:rPr sz="2000" b="1" i="0">
-                <a:solidFill>
-                  <a:srgbClr val="97BC62"/>
-                </a:solidFill>
-                <a:latin typeface="Calibri"/>
-              </a:rPr>
-              <a:t>5   </a:t>
-            </a:r>
-            <a:r>
-              <a:rPr sz="2000" b="0" i="0">
-                <a:solidFill>
-                  <a:srgbClr val="222B22"/>
-                </a:solidFill>
-                <a:latin typeface="Calibri"/>
-              </a:rPr>
-              <a:t>Blessings — specific, witnessed, short</a:t>
-            </a:r>
-          </a:p>
-          <a:p>
-            <a:pPr marL="685800" indent="-274320">
-              <a:spcAft>
-                <a:spcPts val="700"/>
-              </a:spcAft>
-            </a:pPr>
-            <a:r>
-              <a:rPr sz="2000" b="1" i="0">
-                <a:solidFill>
-                  <a:srgbClr val="97BC62"/>
-                </a:solidFill>
-                <a:latin typeface="Calibri"/>
-              </a:rPr>
-              <a:t>6   </a:t>
-            </a:r>
-            <a:r>
-              <a:rPr sz="2000" b="0" i="0">
-                <a:solidFill>
-                  <a:srgbClr val="222B22"/>
-                </a:solidFill>
-                <a:latin typeface="Calibri"/>
-              </a:rPr>
-              <a:t>Closing prayer — and the Aaronic blessing, spoken over each other, face to face</a:t>
-            </a:r>
-          </a:p>
-        </p:txBody>
-      </p:sp>
-      <p:sp>
-        <p:nvSpPr>
-          <p:cNvPr id="6" name="TextBox 6"/>
-          <p:cNvSpPr txBox="1"/>
-          <p:nvPr/>
-        </p:nvSpPr>
-        <p:spPr>
-          <a:xfrm>
-            <a:off x="6766560" y="1737360"/>
-            <a:ext cx="4663440" cy="2926080"/>
-          </a:xfrm>
-          <a:prstGeom prst="rect">
-            <a:avLst/>
-          </a:prstGeom>
-          <a:solidFill>
-            <a:srgbClr val="F1F6EC"/>
-          </a:solidFill>
-        </p:spPr>
-        <p:txBody>
-          <a:bodyPr wrap="square" lIns="91440" tIns="91440" rIns="91440" bIns="91440" anchor="ctr"/>
-          <a:lstStyle/>
-          <a:p>
-            <a:pPr>
+              <a:t>Pair up in your family pair — parent with teen, from your own family, by default</a:t>
+            </a:r>
+          </a:p>
+          <a:p>
+            <a:pPr marL="274320" indent="-274320">
               <a:spcAft>
                 <a:spcPts val="900"/>
               </a:spcAft>
             </a:pPr>
             <a:r>
-              <a:rPr sz="1200" b="1" i="0">
+              <a:rPr sz="2400" b="1" i="0">
                 <a:solidFill>
                   <a:srgbClr val="97BC62"/>
                 </a:solidFill>
                 <a:latin typeface="Calibri"/>
               </a:rPr>
-              <a:t>THE AARONIC BLESSING — NUMBERS 6:24–26</a:t>
-            </a:r>
-          </a:p>
-          <a:p>
-            <a:pPr>
+              <a:t>•  </a:t>
+            </a:r>
+            <a:r>
+              <a:rPr sz="2400" b="0" i="0">
+                <a:solidFill>
+                  <a:srgbClr val="222B22"/>
+                </a:solidFill>
+                <a:latin typeface="Calibri"/>
+              </a:rPr>
+              <a:t>One Reader, one Listener — Reader leads the six steps; after twelve minutes, switch</a:t>
+            </a:r>
+          </a:p>
+          <a:p>
+            <a:pPr marL="274320" indent="-274320">
               <a:spcAft>
-                <a:spcPts val="600"/>
+                <a:spcPts val="900"/>
               </a:spcAft>
             </a:pPr>
             <a:r>
-              <a:rPr sz="2400" b="0" i="1">
+              <a:rPr sz="2400" b="1" i="0">
+                <a:solidFill>
+                  <a:srgbClr val="97BC62"/>
+                </a:solidFill>
+                <a:latin typeface="Calibri"/>
+              </a:rPr>
+              <a:t>•  </a:t>
+            </a:r>
+            <a:r>
+              <a:rPr sz="2400" b="0" i="0">
                 <a:solidFill>
                   <a:srgbClr val="222B22"/>
                 </a:solidFill>
-                <a:latin typeface="Cambria"/>
-              </a:rPr>
-              <a:t>“The Lord bless you and keep you;</a:t>
-            </a:r>
-          </a:p>
-          <a:p>
-            <a:pPr>
+                <a:latin typeface="Calibri"/>
+              </a:rPr>
+              <a:t>“Pairing up with your own parent or your own teen is not the consolation-prize version — it is the design working.”</a:t>
+            </a:r>
+          </a:p>
+          <a:p>
+            <a:pPr marL="274320" indent="-274320">
               <a:spcAft>
-                <a:spcPts val="600"/>
+                <a:spcPts val="900"/>
               </a:spcAft>
             </a:pPr>
             <a:r>
-              <a:rPr sz="2400" b="0" i="1">
+              <a:rPr sz="2400" b="1" i="0">
+                <a:solidFill>
+                  <a:srgbClr val="97BC62"/>
+                </a:solidFill>
+                <a:latin typeface="Calibri"/>
+              </a:rPr>
+              <a:t>•  </a:t>
+            </a:r>
+            <a:r>
+              <a:rPr sz="2400" b="0" i="0">
                 <a:solidFill>
                   <a:srgbClr val="222B22"/>
                 </a:solidFill>
-                <a:latin typeface="Cambria"/>
-              </a:rPr>
-              <a:t>the Lord make his face to shine upon you, and be gracious to you;</a:t>
-            </a:r>
-          </a:p>
-          <a:p>
-            <a:pPr>
+                <a:latin typeface="Calibri"/>
+              </a:rPr>
+              <a:t>Your leadsanion settles the pairs and completes any odd numbers</a:t>
+            </a:r>
+          </a:p>
+          <a:p>
+            <a:pPr marL="274320" indent="-274320">
               <a:spcAft>
-                <a:spcPts val="600"/>
+                <a:spcPts val="900"/>
               </a:spcAft>
             </a:pPr>
             <a:r>
-              <a:rPr sz="2400" b="0" i="1">
+              <a:rPr sz="2400" b="1" i="0">
+                <a:solidFill>
+                  <a:srgbClr val="97BC62"/>
+                </a:solidFill>
+                <a:latin typeface="Calibri"/>
+              </a:rPr>
+              <a:t>•  </a:t>
+            </a:r>
+            <a:r>
+              <a:rPr sz="2400" b="0" i="0">
                 <a:solidFill>
                   <a:srgbClr val="222B22"/>
                 </a:solidFill>
-                <a:latin typeface="Cambria"/>
-              </a:rPr>
-              <a:t>the Lord lift up his countenance upon you, and give you peace.”</a:t>
+                <a:latin typeface="Calibri"/>
+              </a:rPr>
+              <a:t>Small room (about ten or fewer)? Stay as one circle and pair up in place</a:t>
             </a:r>
           </a:p>
         </p:txBody>
@@ -5245,7 +5267,7 @@
           <a:p>
             <a:pPr algn="r"/>
             <a:r>
-              <a:t>100</a:t>
+              <a:t>94</a:t>
             </a:r>
             <a:endParaRPr sz="1000" b="1">
               <a:solidFill>
@@ -5264,7 +5286,7 @@
 </p:sld>
 </file>
 
-<file path=ppt/slides/slide86.xml><?xml version="1.0" encoding="utf-8"?>
+<file path=ppt/slides/slide11.xml><?xml version="1.0" encoding="utf-8"?>
 <p:sld xmlns:a="http://schemas.openxmlformats.org/drawingml/2006/main" xmlns:r="http://schemas.openxmlformats.org/officeDocument/2006/relationships" xmlns:p="http://schemas.openxmlformats.org/presentationml/2006/main">
   <p:cSld>
     <p:spTree>
@@ -5301,77 +5323,25 @@
           <a:ln>
             <a:noFill/>
           </a:ln>
-          <a:effectLst/>
-        </p:spPr>
-        <p:style>
-          <a:lnRef idx="1">
-            <a:schemeClr val="accent1"/>
-          </a:lnRef>
-          <a:fillRef idx="3">
-            <a:schemeClr val="accent1"/>
-          </a:fillRef>
-          <a:effectRef idx="2">
-            <a:schemeClr val="accent1"/>
-          </a:effectRef>
-          <a:fontRef idx="minor">
-            <a:schemeClr val="lt1"/>
-          </a:fontRef>
-        </p:style>
-        <p:txBody>
-          <a:bodyPr rtlCol="0" anchor="ctr"/>
-          <a:lstStyle/>
-          <a:p>
-            <a:pPr algn="ctr"/>
+        </p:spPr>
+        <p:txBody>
+          <a:bodyPr/>
+          <a:lstStyle/>
+          <a:p>
             <a:endParaRPr/>
           </a:p>
         </p:txBody>
       </p:sp>
-      <p:pic>
-        <p:nvPicPr>
-          <p:cNvPr id="3" name="Picture 2" descr="wk06-proapt.jpg"/>
-          <p:cNvPicPr>
-            <a:picLocks noChangeAspect="1"/>
-          </p:cNvPicPr>
-          <p:nvPr/>
-        </p:nvPicPr>
-        <p:blipFill>
-          <a:blip r:embed="rId3"/>
-          <a:stretch>
-            <a:fillRect/>
-          </a:stretch>
-        </p:blipFill>
-        <p:spPr>
-          <a:xfrm>
-            <a:off x="6309360" y="1405889"/>
-            <a:ext cx="5394960" cy="4046220"/>
-          </a:xfrm>
-          <a:prstGeom prst="rect">
-            <a:avLst/>
-          </a:prstGeom>
-          <a:ln w="76200">
-            <a:solidFill>
-              <a:srgbClr val="FFFFFF"/>
-            </a:solidFill>
-          </a:ln>
-          <a:effectLst>
-            <a:outerShdw blurRad="63500" dist="25400" dir="5400000" rotWithShape="0">
-              <a:srgbClr val="000000">
-                <a:alpha val="35000"/>
-              </a:srgbClr>
-            </a:outerShdw>
-          </a:effectLst>
-        </p:spPr>
-      </p:pic>
-      <p:sp>
-        <p:nvSpPr>
-          <p:cNvPr id="4" name="TextBox 3"/>
+      <p:sp>
+        <p:nvSpPr>
+          <p:cNvPr id="3" name="TextBox 2"/>
           <p:cNvSpPr txBox="1"/>
           <p:nvPr/>
         </p:nvSpPr>
         <p:spPr>
           <a:xfrm>
-            <a:off x="822960" y="1828800"/>
-            <a:ext cx="5212080" cy="3291840"/>
+            <a:off x="822960" y="502920"/>
+            <a:ext cx="10515600" cy="822960"/>
           </a:xfrm>
           <a:prstGeom prst="rect">
             <a:avLst/>
@@ -5390,59 +5360,27 @@
               </a:spcAft>
             </a:pPr>
             <a:r>
-              <a:rPr sz="1800" b="1" i="0">
-                <a:solidFill>
-                  <a:srgbClr val="97BC62"/>
-                </a:solidFill>
-                <a:latin typeface="Calibri"/>
-              </a:rPr>
-              <a:t>SESSION 7</a:t>
-            </a:r>
-          </a:p>
-          <a:p>
-            <a:pPr algn="l">
-              <a:spcAft>
-                <a:spcPts val="1000"/>
-              </a:spcAft>
-            </a:pPr>
-            <a:r>
-              <a:rPr sz="3300" b="1" i="0">
+              <a:rPr sz="2800" b="1" i="0">
                 <a:solidFill>
                   <a:srgbClr val="2C5F2D"/>
                 </a:solidFill>
                 <a:latin typeface="Cambria"/>
               </a:rPr>
-              <a:t>Hearing God in Scripture — PROAPT I</a:t>
-            </a:r>
-          </a:p>
-          <a:p>
-            <a:pPr algn="l">
-              <a:spcAft>
-                <a:spcPts val="600"/>
-              </a:spcAft>
-            </a:pPr>
-            <a:r>
-              <a:rPr sz="1800" b="0" i="1">
-                <a:solidFill>
-                  <a:srgbClr val="595959"/>
-                </a:solidFill>
-                <a:latin typeface="Calibri"/>
-              </a:rPr>
-              <a:t>PROAPT — the systematic practice of hearing; the first walk-through, received before it is led</a:t>
-            </a:r>
-          </a:p>
-        </p:txBody>
-      </p:sp>
-      <p:sp>
-        <p:nvSpPr>
-          <p:cNvPr id="5" name="TextBox 4"/>
+              <a:t>PROAPT in Family Pairs</a:t>
+            </a:r>
+          </a:p>
+        </p:txBody>
+      </p:sp>
+      <p:sp>
+        <p:nvSpPr>
+          <p:cNvPr id="4" name="TextBox 4"/>
           <p:cNvSpPr txBox="1"/>
           <p:nvPr/>
         </p:nvSpPr>
         <p:spPr>
           <a:xfrm>
-            <a:off x="822960" y="6126480"/>
-            <a:ext cx="7315200" cy="457200"/>
+            <a:off x="822960" y="1554480"/>
+            <a:ext cx="10515600" cy="4892040"/>
           </a:xfrm>
           <a:prstGeom prst="rect">
             <a:avLst/>
@@ -5450,24 +5388,156 @@
           <a:noFill/>
         </p:spPr>
         <p:txBody>
-          <a:bodyPr wrap="square">
-            <a:spAutoFit/>
-          </a:bodyPr>
-          <a:lstStyle/>
-          <a:p>
-            <a:pPr algn="l">
+          <a:bodyPr wrap="square" lIns="91440" tIns="91440" rIns="91440" bIns="91440"/>
+          <a:lstStyle/>
+          <a:p>
+            <a:pPr marL="342900" indent="-342900">
               <a:spcAft>
-                <a:spcPts val="600"/>
+                <a:spcPts val="750"/>
               </a:spcAft>
             </a:pPr>
             <a:r>
-              <a:rPr sz="1800" b="0" i="0">
-                <a:solidFill>
-                  <a:srgbClr val="595959"/>
-                </a:solidFill>
-                <a:latin typeface="Calibri"/>
-              </a:rPr>
-              <a:t>Quarter 2: Connect with God</a:t>
+              <a:rPr sz="2800" b="1" i="0">
+                <a:solidFill>
+                  <a:srgbClr val="97BC62"/>
+                </a:solidFill>
+                <a:latin typeface="Calibri"/>
+              </a:rPr>
+              <a:t>1   </a:t>
+            </a:r>
+            <a:r>
+              <a:rPr sz="2800" b="0" i="0">
+                <a:solidFill>
+                  <a:srgbClr val="222B22"/>
+                </a:solidFill>
+                <a:latin typeface="Calibri"/>
+              </a:rPr>
+              <a:t>First pass (12 min) — Reader leads PROAPT; Listener works alongside without interrupting</a:t>
+            </a:r>
+          </a:p>
+          <a:p>
+            <a:pPr marL="342900" indent="-342900">
+              <a:spcAft>
+                <a:spcPts val="750"/>
+              </a:spcAft>
+            </a:pPr>
+            <a:r>
+              <a:rPr sz="2800" b="1" i="0">
+                <a:solidFill>
+                  <a:srgbClr val="97BC62"/>
+                </a:solidFill>
+                <a:latin typeface="Calibri"/>
+              </a:rPr>
+              <a:t>2   </a:t>
+            </a:r>
+            <a:r>
+              <a:rPr sz="2800" b="0" i="0">
+                <a:solidFill>
+                  <a:srgbClr val="222B22"/>
+                </a:solidFill>
+                <a:latin typeface="Calibri"/>
+              </a:rPr>
+              <a:t>Reader’s Tell at the end goes to the Listener — one sentence</a:t>
+            </a:r>
+          </a:p>
+          <a:p>
+            <a:pPr marL="342900" indent="-342900">
+              <a:spcAft>
+                <a:spcPts val="750"/>
+              </a:spcAft>
+            </a:pPr>
+            <a:r>
+              <a:rPr sz="2800" b="1" i="0">
+                <a:solidFill>
+                  <a:srgbClr val="97BC62"/>
+                </a:solidFill>
+                <a:latin typeface="Calibri"/>
+              </a:rPr>
+              <a:t>3   </a:t>
+            </a:r>
+            <a:r>
+              <a:rPr sz="2800" b="0" i="0">
+                <a:solidFill>
+                  <a:srgbClr val="222B22"/>
+                </a:solidFill>
+                <a:latin typeface="Calibri"/>
+              </a:rPr>
+              <a:t>Switch roles — new passage or stay with Mark 1</a:t>
+            </a:r>
+          </a:p>
+          <a:p>
+            <a:pPr marL="342900" indent="-342900">
+              <a:spcAft>
+                <a:spcPts val="750"/>
+              </a:spcAft>
+            </a:pPr>
+            <a:r>
+              <a:rPr sz="2800" b="1" i="0">
+                <a:solidFill>
+                  <a:srgbClr val="97BC62"/>
+                </a:solidFill>
+                <a:latin typeface="Calibri"/>
+              </a:rPr>
+              <a:t>4   </a:t>
+            </a:r>
+            <a:r>
+              <a:rPr sz="2800" b="0" i="0">
+                <a:solidFill>
+                  <a:srgbClr val="222B22"/>
+                </a:solidFill>
+                <a:latin typeface="Calibri"/>
+              </a:rPr>
+              <a:t>Second pass (12 min) — same structure, roles reversed</a:t>
+            </a:r>
+          </a:p>
+          <a:p>
+            <a:pPr marL="274320" indent="-274320">
+              <a:spcAft>
+                <a:spcPts val="750"/>
+              </a:spcAft>
+            </a:pPr>
+            <a:r>
+              <a:rPr sz="2800" b="1" i="0">
+                <a:solidFill>
+                  <a:srgbClr val="97BC62"/>
+                </a:solidFill>
+                <a:latin typeface="Calibri"/>
+              </a:rPr>
+              <a:t>•  </a:t>
+            </a:r>
+            <a:r>
+              <a:rPr sz="2800" b="0" i="0">
+                <a:solidFill>
+                  <a:srgbClr val="222B22"/>
+                </a:solidFill>
+                <a:latin typeface="Calibri"/>
+              </a:rPr>
+              <a:t>Stuck on Observe? “What’s one specific word or phrase that caught your attention?”</a:t>
+            </a:r>
+          </a:p>
+          <a:p>
+            <a:pPr marL="274320" indent="-274320">
+              <a:spcAft>
+                <a:spcPts val="750"/>
+              </a:spcAft>
+            </a:pPr>
+            <a:r>
+              <a:rPr sz="2800" b="1" i="0">
+                <a:solidFill>
+                  <a:srgbClr val="97BC62"/>
+                </a:solidFill>
+                <a:latin typeface="Calibri"/>
+              </a:rPr>
+              <a:t>•  </a:t>
+            </a:r>
+            <a:r>
+              <a:rPr sz="2800" b="0" i="0">
+                <a:solidFill>
+                  <a:srgbClr val="222B22"/>
+                </a:solidFill>
+                <a:latin typeface="Calibri"/>
+              </a:rPr>
+              <a:t>“Slow down. The Spirit isn’t in a hurry.” — and if you finish early, get reps with another passage</a:t>
             </a:r>
           </a:p>
         </p:txBody>
@@ -5494,7 +5564,7 @@
           <a:p>
             <a:pPr algn="r"/>
             <a:r>
-              <a:t>86</a:t>
+              <a:t>95</a:t>
             </a:r>
             <a:endParaRPr sz="1000" b="1">
               <a:solidFill>
@@ -5513,7 +5583,7 @@
 </p:sld>
 </file>
 
-<file path=ppt/slides/slide87.xml><?xml version="1.0" encoding="utf-8"?>
+<file path=ppt/slides/slide12.xml><?xml version="1.0" encoding="utf-8"?>
 <p:sld xmlns:a="http://schemas.openxmlformats.org/drawingml/2006/main" xmlns:r="http://schemas.openxmlformats.org/officeDocument/2006/relationships" xmlns:p="http://schemas.openxmlformats.org/presentationml/2006/main">
   <p:cSld>
     <p:spTree>
@@ -5550,27 +5620,11 @@
           <a:ln>
             <a:noFill/>
           </a:ln>
-          <a:effectLst/>
-        </p:spPr>
-        <p:style>
-          <a:lnRef idx="1">
-            <a:schemeClr val="accent1"/>
-          </a:lnRef>
-          <a:fillRef idx="3">
-            <a:schemeClr val="accent1"/>
-          </a:fillRef>
-          <a:effectRef idx="2">
-            <a:schemeClr val="accent1"/>
-          </a:effectRef>
-          <a:fontRef idx="minor">
-            <a:schemeClr val="lt1"/>
-          </a:fontRef>
-        </p:style>
-        <p:txBody>
-          <a:bodyPr rtlCol="0" anchor="ctr"/>
-          <a:lstStyle/>
-          <a:p>
-            <a:pPr algn="ctr"/>
+        </p:spPr>
+        <p:txBody>
+          <a:bodyPr/>
+          <a:lstStyle/>
+          <a:p>
             <a:endParaRPr/>
           </a:p>
         </p:txBody>
@@ -5609,93 +5663,21 @@
                 </a:solidFill>
                 <a:latin typeface="Cambria"/>
               </a:rPr>
-              <a:t>Week 7 — My Story: The Eye Test</a:t>
-            </a:r>
-          </a:p>
-        </p:txBody>
-      </p:sp>
-      <p:pic>
-        <p:nvPicPr>
-          <p:cNvPr id="4" name="Picture 3" descr="4c-phoropter.jpg"/>
-          <p:cNvPicPr>
-            <a:picLocks noChangeAspect="1"/>
-          </p:cNvPicPr>
-          <p:nvPr/>
-        </p:nvPicPr>
-        <p:blipFill>
-          <a:blip r:embed="rId3"/>
-          <a:stretch>
-            <a:fillRect/>
-          </a:stretch>
-        </p:blipFill>
-        <p:spPr>
-          <a:xfrm>
-            <a:off x="822960" y="1645920"/>
-            <a:ext cx="4754880" cy="3566160"/>
-          </a:xfrm>
-          <a:prstGeom prst="rect">
-            <a:avLst/>
-          </a:prstGeom>
-          <a:ln w="76200">
-            <a:solidFill>
-              <a:srgbClr val="FFFFFF"/>
-            </a:solidFill>
-          </a:ln>
-          <a:effectLst>
-            <a:outerShdw blurRad="63500" dist="25400" dir="5400000" rotWithShape="0">
-              <a:srgbClr val="000000">
-                <a:alpha val="35000"/>
-              </a:srgbClr>
-            </a:outerShdw>
-          </a:effectLst>
-        </p:spPr>
-      </p:pic>
-      <p:pic>
-        <p:nvPicPr>
-          <p:cNvPr id="5" name="Picture 4" descr="4c-eyechart.jpg"/>
-          <p:cNvPicPr>
-            <a:picLocks noChangeAspect="1"/>
-          </p:cNvPicPr>
-          <p:nvPr/>
-        </p:nvPicPr>
-        <p:blipFill>
-          <a:blip r:embed="rId4"/>
-          <a:stretch>
-            <a:fillRect/>
-          </a:stretch>
-        </p:blipFill>
-        <p:spPr>
-          <a:xfrm>
-            <a:off x="5971032" y="1645920"/>
-            <a:ext cx="2139696" cy="3566160"/>
-          </a:xfrm>
-          <a:prstGeom prst="rect">
-            <a:avLst/>
-          </a:prstGeom>
-          <a:ln w="76200">
-            <a:solidFill>
-              <a:srgbClr val="FFFFFF"/>
-            </a:solidFill>
-          </a:ln>
-          <a:effectLst>
-            <a:outerShdw blurRad="63500" dist="25400" dir="5400000" rotWithShape="0">
-              <a:srgbClr val="000000">
-                <a:alpha val="35000"/>
-              </a:srgbClr>
-            </a:outerShdw>
-          </a:effectLst>
-        </p:spPr>
-      </p:pic>
-      <p:sp>
-        <p:nvSpPr>
-          <p:cNvPr id="6" name="TextBox 5"/>
+              <a:t>Tell Step — Sharing in the pair</a:t>
+            </a:r>
+          </a:p>
+        </p:txBody>
+      </p:sp>
+      <p:sp>
+        <p:nvSpPr>
+          <p:cNvPr id="4" name="TextBox 4"/>
           <p:cNvSpPr txBox="1"/>
           <p:nvPr/>
         </p:nvSpPr>
         <p:spPr>
           <a:xfrm>
-            <a:off x="8503920" y="1737360"/>
-            <a:ext cx="3108960" cy="3566160"/>
+            <a:off x="822960" y="1554480"/>
+            <a:ext cx="10515600" cy="4892040"/>
           </a:xfrm>
           <a:prstGeom prst="rect">
             <a:avLst/>
@@ -5703,54 +5685,145 @@
           <a:noFill/>
         </p:spPr>
         <p:txBody>
-          <a:bodyPr wrap="square" anchor="ctr">
-            <a:spAutoFit/>
-          </a:bodyPr>
-          <a:lstStyle/>
-          <a:p>
-            <a:pPr algn="l">
+          <a:bodyPr wrap="square" lIns="91440" tIns="91440" rIns="91440" bIns="91440"/>
+          <a:lstStyle/>
+          <a:p>
+            <a:pPr marL="274320" indent="-274320">
               <a:spcAft>
-                <a:spcPts val="600"/>
+                <a:spcPts val="900"/>
               </a:spcAft>
             </a:pPr>
             <a:r>
-              <a:rPr sz="2800" b="1" i="1">
-                <a:solidFill>
-                  <a:srgbClr val="2C5F2D"/>
-                </a:solidFill>
-                <a:latin typeface="Calibri"/>
-              </a:rPr>
-              <a:t>“The more I obey what I have heard, the finer print I can read.”</a:t>
-            </a:r>
-          </a:p>
-          <a:p>
-            <a:pPr algn="l">
+              <a:rPr sz="2800" b="1" i="0">
+                <a:solidFill>
+                  <a:srgbClr val="97BC62"/>
+                </a:solidFill>
+                <a:latin typeface="Calibri"/>
+              </a:rPr>
+              <a:t>•  </a:t>
+            </a:r>
+            <a:r>
+              <a:rPr sz="2800" b="0" i="0">
+                <a:solidFill>
+                  <a:srgbClr val="222B22"/>
+                </a:solidFill>
+                <a:latin typeface="Calibri"/>
+              </a:rPr>
+              <a:t>Back in the family pair — each of us tells ONE specific thing we heard tonight</a:t>
+            </a:r>
+          </a:p>
+          <a:p>
+            <a:pPr marL="274320" indent="-274320">
               <a:spcAft>
-                <a:spcPts val="600"/>
+                <a:spcPts val="900"/>
               </a:spcAft>
             </a:pPr>
             <a:r>
-              <a:rPr sz="1800" b="0" i="1">
-                <a:solidFill>
-                  <a:srgbClr val="595959"/>
-                </a:solidFill>
-                <a:latin typeface="Calibri"/>
-              </a:rPr>
-              <a:t>— the founder’s story, told live</a:t>
-            </a:r>
-          </a:p>
-        </p:txBody>
-      </p:sp>
-      <p:sp>
-        <p:nvSpPr>
-          <p:cNvPr id="7" name="TextBox 6"/>
+              <a:rPr sz="2800" b="1" i="0">
+                <a:solidFill>
+                  <a:srgbClr val="97BC62"/>
+                </a:solidFill>
+                <a:latin typeface="Calibri"/>
+              </a:rPr>
+              <a:t>•  </a:t>
+            </a:r>
+            <a:r>
+              <a:rPr sz="2800" b="0" i="0">
+                <a:solidFill>
+                  <a:srgbClr val="222B22"/>
+                </a:solidFill>
+                <a:latin typeface="Calibri"/>
+              </a:rPr>
+              <a:t>“Specific. One sentence. We listen to receive, like Week 3.”</a:t>
+            </a:r>
+          </a:p>
+          <a:p>
+            <a:pPr marL="274320" indent="-274320">
+              <a:spcAft>
+                <a:spcPts val="900"/>
+              </a:spcAft>
+            </a:pPr>
+            <a:r>
+              <a:rPr sz="2800" b="1" i="0">
+                <a:solidFill>
+                  <a:srgbClr val="97BC62"/>
+                </a:solidFill>
+                <a:latin typeface="Calibri"/>
+              </a:rPr>
+              <a:t>•  </a:t>
+            </a:r>
+            <a:r>
+              <a:rPr sz="2800" b="0" i="0">
+                <a:solidFill>
+                  <a:srgbClr val="222B22"/>
+                </a:solidFill>
+                <a:latin typeface="Calibri"/>
+              </a:rPr>
+              <a:t>A parent opens the round — arranged beforehand, never a cold call on a teen; pass-anytime holds</a:t>
+            </a:r>
+          </a:p>
+          <a:p>
+            <a:pPr marL="274320" indent="-274320">
+              <a:spcAft>
+                <a:spcPts val="900"/>
+              </a:spcAft>
+            </a:pPr>
+            <a:r>
+              <a:rPr sz="2800" b="1" i="0">
+                <a:solidFill>
+                  <a:srgbClr val="97BC62"/>
+                </a:solidFill>
+                <a:latin typeface="Calibri"/>
+              </a:rPr>
+              <a:t>•  </a:t>
+            </a:r>
+            <a:r>
+              <a:rPr sz="2800" b="0" i="0">
+                <a:solidFill>
+                  <a:srgbClr val="222B22"/>
+                </a:solidFill>
+                <a:latin typeface="Calibri"/>
+              </a:rPr>
+              <a:t>Receive without preaching — “We hear that.” “Thank you for naming that.”</a:t>
+            </a:r>
+          </a:p>
+          <a:p>
+            <a:pPr marL="274320" indent="-274320">
+              <a:spcAft>
+                <a:spcPts val="900"/>
+              </a:spcAft>
+            </a:pPr>
+            <a:r>
+              <a:rPr sz="2800" b="1" i="0">
+                <a:solidFill>
+                  <a:srgbClr val="97BC62"/>
+                </a:solidFill>
+                <a:latin typeface="Calibri"/>
+              </a:rPr>
+              <a:t>•  </a:t>
+            </a:r>
+            <a:r>
+              <a:rPr sz="2800" b="0" i="0">
+                <a:solidFill>
+                  <a:srgbClr val="222B22"/>
+                </a:solidFill>
+                <a:latin typeface="Calibri"/>
+              </a:rPr>
+              <a:t>“What we heard tonight is not just for us — it is given to us to walk out.”</a:t>
+            </a:r>
+          </a:p>
+        </p:txBody>
+      </p:sp>
+      <p:sp>
+        <p:nvSpPr>
+          <p:cNvPr id="90" name="SlideNum"/>
           <p:cNvSpPr txBox="1"/>
           <p:nvPr/>
         </p:nvSpPr>
         <p:spPr>
           <a:xfrm>
-            <a:off x="822960" y="5669280"/>
-            <a:ext cx="10607040" cy="822960"/>
+            <a:off x="11384280" y="6446520"/>
+            <a:ext cx="640080" cy="292608"/>
           </a:xfrm>
           <a:prstGeom prst="rect">
             <a:avLst/>
@@ -5758,51 +5831,12 @@
           <a:noFill/>
         </p:spPr>
         <p:txBody>
-          <a:bodyPr wrap="square">
-            <a:spAutoFit/>
-          </a:bodyPr>
-          <a:lstStyle/>
-          <a:p>
-            <a:pPr algn="l">
-              <a:spcAft>
-                <a:spcPts val="600"/>
-              </a:spcAft>
-            </a:pPr>
-            <a:r>
-              <a:rPr sz="1800" b="0" i="1">
-                <a:solidFill>
-                  <a:srgbClr val="222B22"/>
-                </a:solidFill>
-                <a:latin typeface="Calibri"/>
-              </a:rPr>
-              <a:t>Hearing God is a practice that grows with obedience — tonight we learn the practice.</a:t>
-            </a:r>
-          </a:p>
-        </p:txBody>
-      </p:sp>
-      <p:sp>
-        <p:nvSpPr>
-          <p:cNvPr id="90" name="SlideNum"/>
-          <p:cNvSpPr txBox="1"/>
-          <p:nvPr/>
-        </p:nvSpPr>
-        <p:spPr>
-          <a:xfrm>
-            <a:off x="11384280" y="6446520"/>
-            <a:ext cx="640080" cy="292608"/>
-          </a:xfrm>
-          <a:prstGeom prst="rect">
-            <a:avLst/>
-          </a:prstGeom>
-          <a:noFill/>
-        </p:spPr>
-        <p:txBody>
           <a:bodyPr wrap="none" lIns="0" tIns="0" rIns="45720" bIns="0" anchor="ctr"/>
           <a:lstStyle/>
           <a:p>
             <a:pPr algn="r"/>
             <a:r>
-              <a:t>87</a:t>
+              <a:t>96</a:t>
             </a:r>
             <a:endParaRPr sz="1000" b="1">
               <a:solidFill>
@@ -5821,7 +5855,7 @@
 </p:sld>
 </file>
 
-<file path=ppt/slides/slide88.xml><?xml version="1.0" encoding="utf-8"?>
+<file path=ppt/slides/slide13.xml><?xml version="1.0" encoding="utf-8"?>
 <p:sld xmlns:a="http://schemas.openxmlformats.org/drawingml/2006/main" xmlns:r="http://schemas.openxmlformats.org/officeDocument/2006/relationships" xmlns:p="http://schemas.openxmlformats.org/presentationml/2006/main">
   <p:cSld>
     <p:spTree>
@@ -5858,27 +5892,11 @@
           <a:ln>
             <a:noFill/>
           </a:ln>
-          <a:effectLst/>
-        </p:spPr>
-        <p:style>
-          <a:lnRef idx="1">
-            <a:schemeClr val="accent1"/>
-          </a:lnRef>
-          <a:fillRef idx="3">
-            <a:schemeClr val="accent1"/>
-          </a:fillRef>
-          <a:effectRef idx="2">
-            <a:schemeClr val="accent1"/>
-          </a:effectRef>
-          <a:fontRef idx="minor">
-            <a:schemeClr val="lt1"/>
-          </a:fontRef>
-        </p:style>
-        <p:txBody>
-          <a:bodyPr rtlCol="0" anchor="ctr"/>
-          <a:lstStyle/>
-          <a:p>
-            <a:pPr algn="ctr"/>
+        </p:spPr>
+        <p:txBody>
+          <a:bodyPr/>
+          <a:lstStyle/>
+          <a:p>
             <a:endParaRPr/>
           </a:p>
         </p:txBody>
@@ -5917,21 +5935,21 @@
                 </a:solidFill>
                 <a:latin typeface="Cambria"/>
               </a:rPr>
-              <a:t>Session 7 — Tonight’s Road</a:t>
-            </a:r>
-          </a:p>
-        </p:txBody>
-      </p:sp>
-      <p:sp>
-        <p:nvSpPr>
-          <p:cNvPr id="4" name="TextBox 3"/>
+              <a:t>Merge and Homework Practice</a:t>
+            </a:r>
+          </a:p>
+        </p:txBody>
+      </p:sp>
+      <p:sp>
+        <p:nvSpPr>
+          <p:cNvPr id="4" name="TextBox 4"/>
           <p:cNvSpPr txBox="1"/>
           <p:nvPr/>
         </p:nvSpPr>
         <p:spPr>
           <a:xfrm>
-            <a:off x="822960" y="1508760"/>
-            <a:ext cx="7040880" cy="4754880"/>
+            <a:off x="822960" y="1554480"/>
+            <a:ext cx="6675120" cy="4892040"/>
           </a:xfrm>
           <a:prstGeom prst="rect">
             <a:avLst/>
@@ -5939,258 +5957,156 @@
           <a:noFill/>
         </p:spPr>
         <p:txBody>
-          <a:bodyPr wrap="square">
-            <a:spAutoFit/>
-          </a:bodyPr>
-          <a:lstStyle/>
-          <a:p>
-            <a:pPr>
+          <a:bodyPr wrap="square" lIns="91440" tIns="91440" rIns="91440" bIns="91440"/>
+          <a:lstStyle/>
+          <a:p>
+            <a:pPr marL="274320" indent="-274320">
               <a:spcAft>
-                <a:spcPts val="500"/>
+                <a:spcPts val="750"/>
               </a:spcAft>
             </a:pPr>
             <a:r>
-              <a:rPr sz="2800" b="1">
+              <a:rPr sz="2200" b="1" i="0">
                 <a:solidFill>
                   <a:srgbClr val="97BC62"/>
                 </a:solidFill>
                 <a:latin typeface="Calibri"/>
               </a:rPr>
-              <a:t>1   </a:t>
-            </a:r>
-            <a:r>
-              <a:rPr sz="2800">
+              <a:t>•  </a:t>
+            </a:r>
+            <a:r>
+              <a:rPr sz="2200" b="0" i="0">
                 <a:solidFill>
                   <a:srgbClr val="222B22"/>
                 </a:solidFill>
                 <a:latin typeface="Calibri"/>
               </a:rPr>
-              <a:t>Welcome and centering</a:t>
-            </a:r>
-          </a:p>
-          <a:p>
-            <a:pPr>
+              <a:t>One word each — not what you heard (that’s yours), but what tonight’s practice was like; a parent begins</a:t>
+            </a:r>
+          </a:p>
+          <a:p>
+            <a:pPr marL="274320" indent="-274320">
               <a:spcAft>
-                <a:spcPts val="500"/>
+                <a:spcPts val="750"/>
               </a:spcAft>
             </a:pPr>
             <a:r>
-              <a:rPr sz="2800" b="1">
+              <a:rPr sz="2200" b="1" i="0">
                 <a:solidFill>
                   <a:srgbClr val="97BC62"/>
                 </a:solidFill>
                 <a:latin typeface="Calibri"/>
               </a:rPr>
-              <a:t>2   </a:t>
-            </a:r>
-            <a:r>
-              <a:rPr sz="2800">
+              <a:t>•  </a:t>
+            </a:r>
+            <a:r>
+              <a:rPr sz="2200" b="0" i="0">
                 <a:solidFill>
                   <a:srgbClr val="222B22"/>
                 </a:solidFill>
                 <a:latin typeface="Calibri"/>
               </a:rPr>
-              <a:t>Re-entry — and the room reads itself</a:t>
-            </a:r>
-          </a:p>
-          <a:p>
-            <a:pPr>
+              <a:t>Daily PROAPT — one passage per day, every day, for the next week — five to ten minutes</a:t>
+            </a:r>
+          </a:p>
+          <a:p>
+            <a:pPr marL="274320" indent="-274320">
               <a:spcAft>
-                <a:spcPts val="500"/>
+                <a:spcPts val="750"/>
               </a:spcAft>
             </a:pPr>
             <a:r>
-              <a:rPr sz="2800" b="1">
+              <a:rPr sz="2200" b="1" i="0">
                 <a:solidFill>
                   <a:srgbClr val="97BC62"/>
                 </a:solidFill>
                 <a:latin typeface="Calibri"/>
               </a:rPr>
-              <a:t>3   </a:t>
-            </a:r>
-            <a:r>
-              <a:rPr sz="2800">
+              <a:t>•  </a:t>
+            </a:r>
+            <a:r>
+              <a:rPr sz="2200" b="0" i="0">
                 <a:solidFill>
                   <a:srgbClr val="222B22"/>
                 </a:solidFill>
                 <a:latin typeface="Calibri"/>
               </a:rPr>
-              <a:t>Romans 10:17 — the chain</a:t>
-            </a:r>
-          </a:p>
-          <a:p>
-            <a:pPr>
+              <a:t>The journal Week 7 pages have a daily PROAPT template</a:t>
+            </a:r>
+          </a:p>
+          <a:p>
+            <a:pPr marL="274320" indent="-274320">
               <a:spcAft>
-                <a:spcPts val="500"/>
+                <a:spcPts val="750"/>
               </a:spcAft>
             </a:pPr>
             <a:r>
-              <a:rPr sz="2800" b="1">
+              <a:rPr sz="2200" b="1" i="0">
                 <a:solidFill>
                   <a:srgbClr val="97BC62"/>
                 </a:solidFill>
                 <a:latin typeface="Calibri"/>
               </a:rPr>
-              <a:t>4   </a:t>
-            </a:r>
-            <a:r>
-              <a:rPr sz="2800">
+              <a:t>•  </a:t>
+            </a:r>
+            <a:r>
+              <a:rPr sz="2200" b="0" i="0">
                 <a:solidFill>
                   <a:srgbClr val="222B22"/>
                 </a:solidFill>
                 <a:latin typeface="Calibri"/>
               </a:rPr>
-              <a:t>PROAPT walked together</a:t>
-            </a:r>
-          </a:p>
-          <a:p>
-            <a:pPr>
+              <a:t>Passage paths on the handout — the Gospel of Mark, the Sermon on the Mount, or Romans 8</a:t>
+            </a:r>
+          </a:p>
+          <a:p>
+            <a:pPr marL="274320" indent="-274320">
               <a:spcAft>
-                <a:spcPts val="500"/>
+                <a:spcPts val="750"/>
               </a:spcAft>
             </a:pPr>
             <a:r>
-              <a:rPr sz="2800" b="1">
+              <a:rPr sz="2200" b="1" i="0">
                 <a:solidFill>
                   <a:srgbClr val="97BC62"/>
                 </a:solidFill>
                 <a:latin typeface="Calibri"/>
               </a:rPr>
-              <a:t>5   </a:t>
-            </a:r>
-            <a:r>
-              <a:rPr sz="2800">
+              <a:t>•  </a:t>
+            </a:r>
+            <a:r>
+              <a:rPr sz="2200" b="0" i="0">
                 <a:solidFill>
                   <a:srgbClr val="222B22"/>
                 </a:solidFill>
                 <a:latin typeface="Calibri"/>
               </a:rPr>
-              <a:t>Bridge to the pairs and pair structure</a:t>
-            </a:r>
-          </a:p>
-          <a:p>
-            <a:pPr>
+              <a:t>Commit aloud to a specific time of day — “Morning before school” / “Right after dinner”</a:t>
+            </a:r>
+          </a:p>
+          <a:p>
+            <a:pPr marL="274320" indent="-274320">
               <a:spcAft>
-                <a:spcPts val="500"/>
+                <a:spcPts val="750"/>
               </a:spcAft>
             </a:pPr>
             <a:r>
-              <a:rPr sz="2800" b="1">
+              <a:rPr sz="2200" b="1" i="0">
                 <a:solidFill>
                   <a:srgbClr val="97BC62"/>
                 </a:solidFill>
                 <a:latin typeface="Calibri"/>
               </a:rPr>
-              <a:t>6   </a:t>
-            </a:r>
-            <a:r>
-              <a:rPr sz="2800">
+              <a:t>•  </a:t>
+            </a:r>
+            <a:r>
+              <a:rPr sz="2200" b="0" i="0">
                 <a:solidFill>
                   <a:srgbClr val="222B22"/>
                 </a:solidFill>
                 <a:latin typeface="Calibri"/>
               </a:rPr>
-              <a:t>PROAPT in family pairs in pairs</a:t>
-            </a:r>
-          </a:p>
-          <a:p>
-            <a:pPr>
-              <a:spcAft>
-                <a:spcPts val="500"/>
-              </a:spcAft>
-            </a:pPr>
-            <a:r>
-              <a:rPr sz="2800" b="1">
-                <a:solidFill>
-                  <a:srgbClr val="97BC62"/>
-                </a:solidFill>
-                <a:latin typeface="Calibri"/>
-              </a:rPr>
-              <a:t>7   </a:t>
-            </a:r>
-            <a:r>
-              <a:rPr sz="2800">
-                <a:solidFill>
-                  <a:srgbClr val="222B22"/>
-                </a:solidFill>
-                <a:latin typeface="Calibri"/>
-              </a:rPr>
-              <a:t>Tell step — sharing in the pair</a:t>
-            </a:r>
-          </a:p>
-          <a:p>
-            <a:pPr>
-              <a:spcAft>
-                <a:spcPts val="500"/>
-              </a:spcAft>
-            </a:pPr>
-            <a:r>
-              <a:rPr sz="2800" b="1">
-                <a:solidFill>
-                  <a:srgbClr val="97BC62"/>
-                </a:solidFill>
-                <a:latin typeface="Calibri"/>
-              </a:rPr>
-              <a:t>8   </a:t>
-            </a:r>
-            <a:r>
-              <a:rPr sz="2800">
-                <a:solidFill>
-                  <a:srgbClr val="222B22"/>
-                </a:solidFill>
-                <a:latin typeface="Calibri"/>
-              </a:rPr>
-              <a:t>Merge and between-session</a:t>
-            </a:r>
-          </a:p>
-          <a:p>
-            <a:pPr>
-              <a:spcAft>
-                <a:spcPts val="500"/>
-              </a:spcAft>
-            </a:pPr>
-            <a:r>
-              <a:rPr sz="2800" b="1">
-                <a:solidFill>
-                  <a:srgbClr val="97BC62"/>
-                </a:solidFill>
-                <a:latin typeface="Calibri"/>
-              </a:rPr>
-              <a:t>9   </a:t>
-            </a:r>
-            <a:r>
-              <a:rPr sz="2800">
-                <a:solidFill>
-                  <a:srgbClr val="222B22"/>
-                </a:solidFill>
-                <a:latin typeface="Calibri"/>
-              </a:rPr>
-              <a:t>The Leader Feedback Round — both leaders</a:t>
-            </a:r>
-          </a:p>
-          <a:p>
-            <a:pPr>
-              <a:spcAft>
-                <a:spcPts val="500"/>
-              </a:spcAft>
-            </a:pPr>
-            <a:r>
-              <a:rPr sz="2800" b="1">
-                <a:solidFill>
-                  <a:srgbClr val="97BC62"/>
-                </a:solidFill>
-                <a:latin typeface="Calibri"/>
-              </a:rPr>
-              <a:t>10   </a:t>
-            </a:r>
-            <a:r>
-              <a:rPr sz="2800">
-                <a:solidFill>
-                  <a:srgbClr val="222B22"/>
-                </a:solidFill>
-                <a:latin typeface="Calibri"/>
-              </a:rPr>
-              <a:t>Closing container</a:t>
+              <a:t>“The chain only works if we work it.”</a:t>
             </a:r>
           </a:p>
         </p:txBody>
@@ -6217,7 +6133,7 @@
           <a:p>
             <a:pPr algn="r"/>
             <a:r>
-              <a:t>88</a:t>
+              <a:t>97</a:t>
             </a:r>
             <a:endParaRPr sz="1000" b="1">
               <a:solidFill>
@@ -6230,7 +6146,7 @@
       </p:sp>
       <p:pic>
         <p:nvPicPr>
-          <p:cNvPr id="31" name="Picture 31" descr="the open container bowl"/>
+          <p:cNvPr id="33" name="Picture 33" descr="seedling - what grows between Wednesdays"/>
           <p:cNvPicPr>
             <a:picLocks noChangeAspect="1"/>
           </p:cNvPicPr>
@@ -6244,8 +6160,8 @@
         </p:blipFill>
         <p:spPr>
           <a:xfrm>
-            <a:off x="8001000" y="1554480"/>
-            <a:ext cx="3017520" cy="4526280"/>
+            <a:off x="8103612" y="1463040"/>
+            <a:ext cx="3262379" cy="4892040"/>
           </a:xfrm>
           <a:prstGeom prst="rect">
             <a:avLst/>
@@ -6272,7 +6188,7 @@
 </p:sld>
 </file>
 
-<file path=ppt/slides/slide89.xml><?xml version="1.0" encoding="utf-8"?>
+<file path=ppt/slides/slide15.xml><?xml version="1.0" encoding="utf-8"?>
 <p:sld xmlns:a="http://schemas.openxmlformats.org/drawingml/2006/main" xmlns:r="http://schemas.openxmlformats.org/officeDocument/2006/relationships" xmlns:p="http://schemas.openxmlformats.org/presentationml/2006/main">
   <p:cSld>
     <p:spTree>
@@ -6352,7 +6268,7 @@
                 </a:solidFill>
                 <a:latin typeface="Cambria"/>
               </a:rPr>
-              <a:t>Opening Container — the Eight Steps</a:t>
+              <a:t>The Leader Feedback Round</a:t>
             </a:r>
           </a:p>
         </p:txBody>
@@ -6366,7 +6282,7 @@
         <p:spPr>
           <a:xfrm>
             <a:off x="822960" y="1554480"/>
-            <a:ext cx="10515600" cy="4892040"/>
+            <a:ext cx="6675120" cy="4892040"/>
           </a:xfrm>
           <a:prstGeom prst="rect">
             <a:avLst/>
@@ -6377,203 +6293,153 @@
           <a:bodyPr wrap="square" lIns="91440" tIns="91440" rIns="91440" bIns="91440"/>
           <a:lstStyle/>
           <a:p>
-            <a:pPr marL="342900" indent="-342900">
+            <a:pPr marL="274320" indent="-274320">
               <a:spcAft>
-                <a:spcPts val="650"/>
+                <a:spcPts val="900"/>
               </a:spcAft>
             </a:pPr>
             <a:r>
-              <a:rPr sz="2400" b="1" i="0">
+              <a:rPr sz="2800" b="1" i="0">
                 <a:solidFill>
                   <a:srgbClr val="97BC62"/>
                 </a:solidFill>
                 <a:latin typeface="Calibri"/>
               </a:rPr>
-              <a:t>1   </a:t>
-            </a:r>
-            <a:r>
-              <a:rPr sz="2400" b="0" i="0">
+              <a:t>•  </a:t>
+            </a:r>
+            <a:r>
+              <a:rPr sz="2800" b="0" i="0">
                 <a:solidFill>
                   <a:srgbClr val="222B22"/>
                 </a:solidFill>
                 <a:latin typeface="Calibri"/>
               </a:rPr>
-              <a:t>Welcome — five minutes to open the container</a:t>
-            </a:r>
-          </a:p>
-          <a:p>
-            <a:pPr marL="342900" indent="-342900">
+              <a:t>Two rounds, same as every session — the container holder first, then the content presenter: three things each</a:t>
+            </a:r>
+          </a:p>
+          <a:p>
+            <a:pPr marL="685800" indent="-274320">
               <a:spcAft>
-                <a:spcPts val="650"/>
+                <a:spcPts val="700"/>
               </a:spcAft>
             </a:pPr>
             <a:r>
-              <a:rPr sz="2400" b="1" i="0">
+              <a:rPr sz="2000" b="1" i="0">
                 <a:solidFill>
                   <a:srgbClr val="97BC62"/>
                 </a:solidFill>
                 <a:latin typeface="Calibri"/>
               </a:rPr>
-              <a:t>2   </a:t>
-            </a:r>
-            <a:r>
-              <a:rPr sz="2400" b="0" i="0">
+              <a:t>–  </a:t>
+            </a:r>
+            <a:r>
+              <a:rPr sz="2000" b="0" i="1">
                 <a:solidFill>
                   <a:srgbClr val="222B22"/>
                 </a:solidFill>
                 <a:latin typeface="Calibri"/>
               </a:rPr>
-              <a:t>Phones silenced and put away</a:t>
-            </a:r>
-          </a:p>
-          <a:p>
-            <a:pPr marL="342900" indent="-342900">
+              <a:t>“What I think went well tonight: ______”</a:t>
+            </a:r>
+          </a:p>
+          <a:p>
+            <a:pPr marL="685800" indent="-274320">
               <a:spcAft>
-                <a:spcPts val="650"/>
+                <a:spcPts val="700"/>
               </a:spcAft>
             </a:pPr>
             <a:r>
-              <a:rPr sz="2400" b="1" i="0">
+              <a:rPr sz="2000" b="1" i="0">
                 <a:solidFill>
                   <a:srgbClr val="97BC62"/>
                 </a:solidFill>
                 <a:latin typeface="Calibri"/>
               </a:rPr>
-              <a:t>3   </a:t>
-            </a:r>
-            <a:r>
-              <a:rPr sz="2400" b="0" i="0">
+              <a:t>–  </a:t>
+            </a:r>
+            <a:r>
+              <a:rPr sz="2000" b="0" i="1">
                 <a:solidFill>
                   <a:srgbClr val="222B22"/>
                 </a:solidFill>
                 <a:latin typeface="Calibri"/>
               </a:rPr>
-              <a:t>Stand in a circle</a:t>
-            </a:r>
-          </a:p>
-          <a:p>
-            <a:pPr marL="342900" indent="-342900">
+              <a:t>“What I’d do differently next time: ______”</a:t>
+            </a:r>
+          </a:p>
+          <a:p>
+            <a:pPr marL="685800" indent="-274320">
               <a:spcAft>
-                <a:spcPts val="650"/>
+                <a:spcPts val="700"/>
               </a:spcAft>
             </a:pPr>
             <a:r>
-              <a:rPr sz="2400" b="1" i="0">
+              <a:rPr sz="2000" b="1" i="0">
                 <a:solidFill>
                   <a:srgbClr val="97BC62"/>
                 </a:solidFill>
                 <a:latin typeface="Calibri"/>
               </a:rPr>
-              <a:t>4   </a:t>
-            </a:r>
-            <a:r>
-              <a:rPr sz="2400" b="0" i="0">
+              <a:t>–  </a:t>
+            </a:r>
+            <a:r>
+              <a:rPr sz="2000" b="0" i="1">
                 <a:solidFill>
                   <a:srgbClr val="222B22"/>
                 </a:solidFill>
                 <a:latin typeface="Calibri"/>
               </a:rPr>
-              <a:t>One-word check-in — how you actually are, right now</a:t>
-            </a:r>
-          </a:p>
-          <a:p>
-            <a:pPr marL="342900" indent="-342900">
+              <a:t>“If I were to teach tonight’s process to someone, I would tell them: ______”</a:t>
+            </a:r>
+          </a:p>
+          <a:p>
+            <a:pPr marL="274320" indent="-274320">
               <a:spcAft>
-                <a:spcPts val="650"/>
+                <a:spcPts val="900"/>
               </a:spcAft>
             </a:pPr>
             <a:r>
-              <a:rPr sz="2400" b="1" i="0">
+              <a:rPr sz="2800" b="1" i="0">
                 <a:solidFill>
                   <a:srgbClr val="97BC62"/>
                 </a:solidFill>
                 <a:latin typeface="Calibri"/>
               </a:rPr>
-              <a:t>5   </a:t>
-            </a:r>
-            <a:r>
-              <a:rPr sz="2400" b="0" i="0">
+              <a:t>•  </a:t>
+            </a:r>
+            <a:r>
+              <a:rPr sz="2800" b="0" i="0">
                 <a:solidFill>
                   <a:srgbClr val="222B22"/>
                 </a:solidFill>
                 <a:latin typeface="Calibri"/>
               </a:rPr>
-              <a:t>Put out / bring in — set something down; bring a blessing in</a:t>
-            </a:r>
-          </a:p>
-          <a:p>
-            <a:pPr marL="342900" indent="-342900">
+              <a:t>Then the room — the same two questions about tonight</a:t>
+            </a:r>
+          </a:p>
+          <a:p>
+            <a:pPr marL="274320" indent="-274320">
               <a:spcAft>
-                <a:spcPts val="650"/>
+                <a:spcPts val="900"/>
               </a:spcAft>
             </a:pPr>
             <a:r>
-              <a:rPr sz="2400" b="1" i="0">
+              <a:rPr sz="2800" b="1" i="0">
                 <a:solidFill>
                   <a:srgbClr val="97BC62"/>
                 </a:solidFill>
                 <a:latin typeface="Calibri"/>
               </a:rPr>
-              <a:t>6   </a:t>
-            </a:r>
-            <a:r>
-              <a:rPr sz="2400" b="0" i="0">
+              <a:t>•  </a:t>
+            </a:r>
+            <a:r>
+              <a:rPr sz="2800" b="0" i="0">
                 <a:solidFill>
                   <a:srgbClr val="222B22"/>
                 </a:solidFill>
                 <a:latin typeface="Calibri"/>
               </a:rPr>
-              <a:t>Spoken commitment: “I am here. I am paying attention. I am willing to be moved.”</a:t>
-            </a:r>
-          </a:p>
-          <a:p>
-            <a:pPr marL="342900" indent="-342900">
-              <a:spcAft>
-                <a:spcPts val="650"/>
-              </a:spcAft>
-            </a:pPr>
-            <a:r>
-              <a:rPr sz="2400" b="1" i="0">
-                <a:solidFill>
-                  <a:srgbClr val="97BC62"/>
-                </a:solidFill>
-                <a:latin typeface="Calibri"/>
-              </a:rPr>
-              <a:t>7   </a:t>
-            </a:r>
-            <a:r>
-              <a:rPr sz="2400" b="0" i="0">
-                <a:solidFill>
-                  <a:srgbClr val="222B22"/>
-                </a:solidFill>
-                <a:latin typeface="Calibri"/>
-              </a:rPr>
-              <a:t>Opening prayer — “Holy Spirit, you are welcome here. Speak. We are listening.”</a:t>
-            </a:r>
-          </a:p>
-          <a:p>
-            <a:pPr marL="342900" indent="-342900">
-              <a:spcAft>
-                <a:spcPts val="650"/>
-              </a:spcAft>
-            </a:pPr>
-            <a:r>
-              <a:rPr sz="2400" b="1" i="0">
-                <a:solidFill>
-                  <a:srgbClr val="97BC62"/>
-                </a:solidFill>
-                <a:latin typeface="Calibri"/>
-              </a:rPr>
-              <a:t>8   </a:t>
-            </a:r>
-            <a:r>
-              <a:rPr sz="2400" b="0" i="0">
-                <a:solidFill>
-                  <a:srgbClr val="222B22"/>
-                </a:solidFill>
-                <a:latin typeface="Calibri"/>
-              </a:rPr>
-              <a:t>Sit. Begin.</a:t>
+              <a:t>The leaders receive without defending — “thank you” is the whole response</a:t>
             </a:r>
           </a:p>
         </p:txBody>
@@ -6600,7 +6466,7 @@
           <a:p>
             <a:pPr algn="r"/>
             <a:r>
-              <a:t>89</a:t>
+              <a:t>99</a:t>
             </a:r>
             <a:endParaRPr sz="1000" b="1">
               <a:solidFill>
@@ -6611,6 +6477,42 @@
           </a:p>
         </p:txBody>
       </p:sp>
+      <p:pic>
+        <p:nvPicPr>
+          <p:cNvPr id="33" name="Picture 33" descr="compass on the trail - the weekly bearing check"/>
+          <p:cNvPicPr>
+            <a:picLocks noChangeAspect="1"/>
+          </p:cNvPicPr>
+          <p:nvPr/>
+        </p:nvPicPr>
+        <p:blipFill>
+          <a:blip r:embed="rId3"/>
+          <a:stretch>
+            <a:fillRect/>
+          </a:stretch>
+        </p:blipFill>
+        <p:spPr>
+          <a:xfrm>
+            <a:off x="8106160" y="1463040"/>
+            <a:ext cx="3259831" cy="4892040"/>
+          </a:xfrm>
+          <a:prstGeom prst="rect">
+            <a:avLst/>
+          </a:prstGeom>
+          <a:ln w="76200">
+            <a:solidFill>
+              <a:srgbClr val="FFFFFF"/>
+            </a:solidFill>
+          </a:ln>
+          <a:effectLst>
+            <a:outerShdw blurRad="63500" dist="25400" dir="5400000" rotWithShape="0">
+              <a:srgbClr val="000000">
+                <a:alpha val="35000"/>
+              </a:srgbClr>
+            </a:outerShdw>
+          </a:effectLst>
+        </p:spPr>
+      </p:pic>
     </p:spTree>
   </p:cSld>
   <p:clrMapOvr>
@@ -6619,7 +6521,7 @@
 </p:sld>
 </file>
 
-<file path=ppt/slides/slide90.xml><?xml version="1.0" encoding="utf-8"?>
+<file path=ppt/slides/slide16.xml><?xml version="1.0" encoding="utf-8"?>
 <p:sld xmlns:a="http://schemas.openxmlformats.org/drawingml/2006/main" xmlns:r="http://schemas.openxmlformats.org/officeDocument/2006/relationships" xmlns:p="http://schemas.openxmlformats.org/presentationml/2006/main">
   <p:cSld>
     <p:spTree>
@@ -6699,7 +6601,7 @@
                 </a:solidFill>
                 <a:latin typeface="Cambria"/>
               </a:rPr>
-              <a:t>Re-Entry Check-In</a:t>
+              <a:t>Closing the Container + Aaronic Blessing</a:t>
             </a:r>
           </a:p>
         </p:txBody>
@@ -6712,8 +6614,8 @@
         </p:nvSpPr>
         <p:spPr>
           <a:xfrm>
-            <a:off x="822960" y="1554480"/>
-            <a:ext cx="6675120" cy="4892040"/>
+            <a:off x="822960" y="1600200"/>
+            <a:ext cx="5669280" cy="4572000"/>
           </a:xfrm>
           <a:prstGeom prst="rect">
             <a:avLst/>
@@ -6730,7 +6632,7 @@
               </a:spcAft>
             </a:pPr>
             <a:r>
-              <a:rPr sz="2400" b="1" i="0">
+              <a:rPr sz="2200" b="1" i="0">
                 <a:solidFill>
                   <a:srgbClr val="97BC62"/>
                 </a:solidFill>
@@ -6739,38 +6641,13 @@
               <a:t>•  </a:t>
             </a:r>
             <a:r>
-              <a:rPr sz="2400" b="0" i="0">
+              <a:rPr sz="2200" b="0" i="0">
                 <a:solidFill>
                   <a:srgbClr val="222B22"/>
                 </a:solidFill>
                 <a:latin typeface="Calibri"/>
               </a:rPr>
-              <a:t>First gathering of Quarter 2 — the container re-held slowly after the break</a:t>
-            </a:r>
-          </a:p>
-          <a:p>
-            <a:pPr marL="274320" indent="-274320">
-              <a:spcAft>
-                <a:spcPts val="900"/>
-              </a:spcAft>
-            </a:pPr>
-            <a:r>
-              <a:rPr sz="2400" b="1" i="0">
-                <a:solidFill>
-                  <a:srgbClr val="97BC62"/>
-                </a:solidFill>
-                <a:latin typeface="Calibri"/>
-              </a:rPr>
-              <a:t>•  </a:t>
-            </a:r>
-            <a:r>
-              <a:rPr sz="2400" b="0" i="0">
-                <a:solidFill>
-                  <a:srgbClr val="222B22"/>
-                </a:solidFill>
-                <a:latin typeface="Calibri"/>
-              </a:rPr>
-              <a:t>“Take ninety seconds: one sentence about the Examen, or about how the break treated your practice, or anything that has shifted.”</a:t>
+              <a:t>We close the way we opened — the container, six steps:</a:t>
             </a:r>
           </a:p>
           <a:p>
@@ -6780,72 +6657,234 @@
               </a:spcAft>
             </a:pPr>
             <a:r>
-              <a:rPr sz="1800" b="1" i="0">
+              <a:rPr sz="2000" b="1" i="0">
                 <a:solidFill>
                   <a:srgbClr val="97BC62"/>
                 </a:solidFill>
                 <a:latin typeface="Calibri"/>
               </a:rPr>
-              <a:t>–  </a:t>
-            </a:r>
-            <a:r>
-              <a:rPr sz="1800" b="0" i="1">
+              <a:t>1   </a:t>
+            </a:r>
+            <a:r>
+              <a:rPr sz="2000" b="0" i="0">
                 <a:solidFill>
                   <a:srgbClr val="222B22"/>
                 </a:solidFill>
                 <a:latin typeface="Calibri"/>
               </a:rPr>
-              <a:t>“Thinned out over the break is a completely normal answer — the practice picks up where you are.”</a:t>
-            </a:r>
-          </a:p>
-          <a:p>
-            <a:pPr marL="274320" indent="-274320">
+              <a:t>Stand again — same circle, same posture as the open</a:t>
+            </a:r>
+          </a:p>
+          <a:p>
+            <a:pPr marL="685800" indent="-274320">
+              <a:spcAft>
+                <a:spcPts val="700"/>
+              </a:spcAft>
+            </a:pPr>
+            <a:r>
+              <a:rPr sz="2000" b="1" i="0">
+                <a:solidFill>
+                  <a:srgbClr val="97BC62"/>
+                </a:solidFill>
+                <a:latin typeface="Calibri"/>
+              </a:rPr>
+              <a:t>2   </a:t>
+            </a:r>
+            <a:r>
+              <a:rPr sz="2000" b="0" i="0">
+                <a:solidFill>
+                  <a:srgbClr val="222B22"/>
+                </a:solidFill>
+                <a:latin typeface="Calibri"/>
+              </a:rPr>
+              <a:t>One-word landing — compare it to your opening word</a:t>
+            </a:r>
+          </a:p>
+          <a:p>
+            <a:pPr marL="685800" indent="-274320">
+              <a:spcAft>
+                <a:spcPts val="700"/>
+              </a:spcAft>
+            </a:pPr>
+            <a:r>
+              <a:rPr sz="2000" b="1" i="0">
+                <a:solidFill>
+                  <a:srgbClr val="97BC62"/>
+                </a:solidFill>
+                <a:latin typeface="Calibri"/>
+              </a:rPr>
+              <a:t>3   </a:t>
+            </a:r>
+            <a:r>
+              <a:rPr sz="2000" b="0" i="0">
+                <a:solidFill>
+                  <a:srgbClr val="222B22"/>
+                </a:solidFill>
+                <a:latin typeface="Calibri"/>
+              </a:rPr>
+              <a:t>The one thing you are taking from tonight</a:t>
+            </a:r>
+          </a:p>
+          <a:p>
+            <a:pPr marL="685800" indent="-274320">
+              <a:spcAft>
+                <a:spcPts val="700"/>
+              </a:spcAft>
+            </a:pPr>
+            <a:r>
+              <a:rPr sz="2000" b="1" i="0">
+                <a:solidFill>
+                  <a:srgbClr val="97BC62"/>
+                </a:solidFill>
+                <a:latin typeface="Calibri"/>
+              </a:rPr>
+              <a:t>4   </a:t>
+            </a:r>
+            <a:r>
+              <a:rPr sz="2000" b="0" i="0">
+                <a:solidFill>
+                  <a:srgbClr val="222B22"/>
+                </a:solidFill>
+                <a:latin typeface="Calibri"/>
+              </a:rPr>
+              <a:t>The one practice — committed aloud, or modified to one you will actually keep</a:t>
+            </a:r>
+          </a:p>
+          <a:p>
+            <a:pPr marL="685800" indent="-274320">
+              <a:spcAft>
+                <a:spcPts val="700"/>
+              </a:spcAft>
+            </a:pPr>
+            <a:r>
+              <a:rPr sz="2000" b="1" i="0">
+                <a:solidFill>
+                  <a:srgbClr val="97BC62"/>
+                </a:solidFill>
+                <a:latin typeface="Calibri"/>
+              </a:rPr>
+              <a:t>5   </a:t>
+            </a:r>
+            <a:r>
+              <a:rPr sz="2000" b="0" i="0">
+                <a:solidFill>
+                  <a:srgbClr val="222B22"/>
+                </a:solidFill>
+                <a:latin typeface="Calibri"/>
+              </a:rPr>
+              <a:t>Blessings — specific, witnessed, short</a:t>
+            </a:r>
+          </a:p>
+          <a:p>
+            <a:pPr marL="685800" indent="-274320">
+              <a:spcAft>
+                <a:spcPts val="700"/>
+              </a:spcAft>
+            </a:pPr>
+            <a:r>
+              <a:rPr sz="2000" b="1" i="0">
+                <a:solidFill>
+                  <a:srgbClr val="97BC62"/>
+                </a:solidFill>
+                <a:latin typeface="Calibri"/>
+              </a:rPr>
+              <a:t>6   </a:t>
+            </a:r>
+            <a:r>
+              <a:rPr sz="2000" b="0" i="0">
+                <a:solidFill>
+                  <a:srgbClr val="222B22"/>
+                </a:solidFill>
+                <a:latin typeface="Calibri"/>
+              </a:rPr>
+              <a:t>Closing prayer — and the Aaronic blessing, spoken over each other, face to face</a:t>
+            </a:r>
+          </a:p>
+        </p:txBody>
+      </p:sp>
+      <p:sp>
+        <p:nvSpPr>
+          <p:cNvPr id="6" name="TextBox 6"/>
+          <p:cNvSpPr txBox="1"/>
+          <p:nvPr/>
+        </p:nvSpPr>
+        <p:spPr>
+          <a:xfrm>
+            <a:off x="6766560" y="1737360"/>
+            <a:ext cx="4663440" cy="2926080"/>
+          </a:xfrm>
+          <a:prstGeom prst="rect">
+            <a:avLst/>
+          </a:prstGeom>
+          <a:solidFill>
+            <a:srgbClr val="F1F6EC"/>
+          </a:solidFill>
+        </p:spPr>
+        <p:txBody>
+          <a:bodyPr wrap="square" lIns="91440" tIns="91440" rIns="91440" bIns="91440" anchor="ctr"/>
+          <a:lstStyle/>
+          <a:p>
+            <a:pPr>
               <a:spcAft>
                 <a:spcPts val="900"/>
               </a:spcAft>
             </a:pPr>
             <a:r>
-              <a:rPr sz="2400" b="1" i="0">
+              <a:rPr sz="1200" b="1" i="0">
                 <a:solidFill>
                   <a:srgbClr val="97BC62"/>
                 </a:solidFill>
                 <a:latin typeface="Calibri"/>
               </a:rPr>
-              <a:t>•  </a:t>
-            </a:r>
-            <a:r>
-              <a:rPr sz="2400" b="0" i="0">
-                <a:solidFill>
-                  <a:srgbClr val="222B22"/>
-                </a:solidFill>
-                <a:latin typeface="Calibri"/>
-              </a:rPr>
-              <a:t>A parent starts the round — pass-anytime holds</a:t>
-            </a:r>
-          </a:p>
-          <a:p>
-            <a:pPr marL="274320" indent="-274320">
+              <a:t>THE AARONIC BLESSING — NUMBERS 6:24–26</a:t>
+            </a:r>
+          </a:p>
+          <a:p>
+            <a:pPr>
               <a:spcAft>
-                <a:spcPts val="900"/>
+                <a:spcPts val="600"/>
               </a:spcAft>
             </a:pPr>
             <a:r>
-              <a:rPr sz="2400" b="1" i="0">
-                <a:solidFill>
-                  <a:srgbClr val="97BC62"/>
-                </a:solidFill>
-                <a:latin typeface="Calibri"/>
-              </a:rPr>
-              <a:t>•  </a:t>
-            </a:r>
-            <a:r>
-              <a:rPr sz="2400" b="0" i="0">
+              <a:rPr sz="2400" b="0" i="1">
                 <a:solidFill>
                   <a:srgbClr val="222B22"/>
                 </a:solidFill>
-                <a:latin typeface="Calibri"/>
-              </a:rPr>
-              <a:t>Week 6 still sitting heavy? “The team is here. Find one of us before you leave tonight.”</a:t>
+                <a:latin typeface="Cambria"/>
+              </a:rPr>
+              <a:t>“The Lord bless you and keep you;</a:t>
+            </a:r>
+          </a:p>
+          <a:p>
+            <a:pPr>
+              <a:spcAft>
+                <a:spcPts val="600"/>
+              </a:spcAft>
+            </a:pPr>
+            <a:r>
+              <a:rPr sz="2400" b="0" i="1">
+                <a:solidFill>
+                  <a:srgbClr val="222B22"/>
+                </a:solidFill>
+                <a:latin typeface="Cambria"/>
+              </a:rPr>
+              <a:t>the Lord make his face to shine upon you, and be gracious to you;</a:t>
+            </a:r>
+          </a:p>
+          <a:p>
+            <a:pPr>
+              <a:spcAft>
+                <a:spcPts val="600"/>
+              </a:spcAft>
+            </a:pPr>
+            <a:r>
+              <a:rPr sz="2400" b="0" i="1">
+                <a:solidFill>
+                  <a:srgbClr val="222B22"/>
+                </a:solidFill>
+                <a:latin typeface="Cambria"/>
+              </a:rPr>
+              <a:t>the Lord lift up his countenance upon you, and give you peace.”</a:t>
             </a:r>
           </a:p>
         </p:txBody>
@@ -6872,7 +6911,7 @@
           <a:p>
             <a:pPr algn="r"/>
             <a:r>
-              <a:t>90</a:t>
+              <a:t>100</a:t>
             </a:r>
             <a:endParaRPr sz="1000" b="1">
               <a:solidFill>
@@ -6883,42 +6922,6 @@
           </a:p>
         </p:txBody>
       </p:sp>
-      <p:pic>
-        <p:nvPicPr>
-          <p:cNvPr id="32" name="Picture 32" descr="trail cairn - the weekly check-in"/>
-          <p:cNvPicPr>
-            <a:picLocks noChangeAspect="1"/>
-          </p:cNvPicPr>
-          <p:nvPr/>
-        </p:nvPicPr>
-        <p:blipFill>
-          <a:blip r:embed="rId3"/>
-          <a:stretch>
-            <a:fillRect/>
-          </a:stretch>
-        </p:blipFill>
-        <p:spPr>
-          <a:xfrm>
-            <a:off x="8103612" y="1463040"/>
-            <a:ext cx="3262379" cy="4892040"/>
-          </a:xfrm>
-          <a:prstGeom prst="rect">
-            <a:avLst/>
-          </a:prstGeom>
-          <a:ln w="76200">
-            <a:solidFill>
-              <a:srgbClr val="FFFFFF"/>
-            </a:solidFill>
-          </a:ln>
-          <a:effectLst>
-            <a:outerShdw blurRad="63500" dist="25400" dir="5400000" rotWithShape="0">
-              <a:srgbClr val="000000">
-                <a:alpha val="35000"/>
-              </a:srgbClr>
-            </a:outerShdw>
-          </a:effectLst>
-        </p:spPr>
-      </p:pic>
     </p:spTree>
   </p:cSld>
   <p:clrMapOvr>
@@ -6927,7 +6930,596 @@
 </p:sld>
 </file>
 
-<file path=ppt/slides/slide91.xml><?xml version="1.0" encoding="utf-8"?>
+<file path=ppt/slides/slide17.xml><?xml version="1.0" encoding="utf-8"?>
+<p:sld xmlns:a="http://schemas.openxmlformats.org/drawingml/2006/main" xmlns:p="http://schemas.openxmlformats.org/presentationml/2006/main" xmlns:r="http://schemas.openxmlformats.org/officeDocument/2006/relationships">
+  <p:cSld>
+    <p:spTree>
+      <p:nvGrpSpPr>
+        <p:cNvPr id="1" name=""/>
+        <p:cNvGrpSpPr/>
+        <p:nvPr/>
+      </p:nvGrpSpPr>
+      <p:grpSpPr/>
+      <p:sp>
+        <p:nvSpPr>
+          <p:cNvPr id="2" name="Rectangle 1"/>
+          <p:cNvSpPr/>
+          <p:nvPr/>
+        </p:nvSpPr>
+        <p:spPr>
+          <a:xfrm>
+            <a:off x="0" y="0"/>
+            <a:ext cx="12192000" cy="6858000"/>
+          </a:xfrm>
+          <a:prstGeom prst="rect">
+            <a:avLst/>
+          </a:prstGeom>
+          <a:solidFill>
+            <a:srgbClr val="FFFFFF"/>
+          </a:solidFill>
+          <a:ln>
+            <a:noFill/>
+          </a:ln>
+          <a:effectLst/>
+        </p:spPr>
+        <p:style>
+          <a:lnRef idx="1">
+            <a:schemeClr val="accent1"/>
+          </a:lnRef>
+          <a:fillRef idx="3">
+            <a:schemeClr val="accent1"/>
+          </a:fillRef>
+          <a:effectRef idx="2">
+            <a:schemeClr val="accent1"/>
+          </a:effectRef>
+          <a:fontRef idx="minor">
+            <a:schemeClr val="lt1"/>
+          </a:fontRef>
+        </p:style>
+        <p:txBody>
+          <a:bodyPr rtlCol="0" anchor="ctr"/>
+          <a:lstStyle/>
+          <a:p>
+            <a:pPr algn="ctr"/>
+          </a:p>
+        </p:txBody>
+      </p:sp>
+      <p:sp>
+        <p:nvSpPr>
+          <p:cNvPr id="3" name="TextBox 2"/>
+          <p:cNvSpPr txBox="1"/>
+          <p:nvPr/>
+        </p:nvSpPr>
+        <p:spPr>
+          <a:xfrm>
+            <a:off x="822960" y="502920"/>
+            <a:ext cx="10515600" cy="822960"/>
+          </a:xfrm>
+          <a:prstGeom prst="rect">
+            <a:avLst/>
+          </a:prstGeom>
+          <a:noFill/>
+        </p:spPr>
+        <p:txBody>
+          <a:bodyPr wrap="square">
+            <a:spAutoFit/>
+          </a:bodyPr>
+          <a:lstStyle/>
+          <a:p>
+            <a:r>
+              <a:rPr sz="2800" b="1">
+                <a:solidFill>
+                  <a:srgbClr val="2C5F2D"/>
+                </a:solidFill>
+                <a:latin typeface="Cambria"/>
+              </a:rPr>
+              <a:t>Where We Are — the Four Connects</a:t>
+            </a:r>
+          </a:p>
+        </p:txBody>
+      </p:sp>
+      <p:pic>
+        <p:nvPicPr>
+          <p:cNvPr id="4" name="Picture 3" descr="four-connects.png"/>
+          <p:cNvPicPr>
+            <a:picLocks noChangeAspect="1"/>
+          </p:cNvPicPr>
+          <p:nvPr/>
+        </p:nvPicPr>
+        <p:blipFill>
+          <a:blip r:embed="rId2"/>
+          <a:stretch>
+            <a:fillRect/>
+          </a:stretch>
+        </p:blipFill>
+        <p:spPr>
+          <a:xfrm>
+            <a:off x="932688" y="1645920"/>
+            <a:ext cx="10332720" cy="3708663"/>
+          </a:xfrm>
+          <a:prstGeom prst="rect">
+            <a:avLst/>
+          </a:prstGeom>
+        </p:spPr>
+      </p:pic>
+      <p:sp>
+        <p:nvSpPr>
+          <p:cNvPr id="5" name="TextBox 4"/>
+          <p:cNvSpPr txBox="1"/>
+          <p:nvPr/>
+        </p:nvSpPr>
+        <p:spPr>
+          <a:xfrm>
+            <a:off x="822960" y="5623560"/>
+            <a:ext cx="10515600" cy="914400"/>
+          </a:xfrm>
+          <a:prstGeom prst="rect">
+            <a:avLst/>
+          </a:prstGeom>
+          <a:noFill/>
+        </p:spPr>
+        <p:txBody>
+          <a:bodyPr wrap="square">
+            <a:spAutoFit/>
+          </a:bodyPr>
+          <a:lstStyle/>
+          <a:p>
+            <a:r>
+              <a:rPr sz="1800" b="0">
+                <a:solidFill>
+                  <a:srgbClr val="222B22"/>
+                </a:solidFill>
+                <a:latin typeface="Calibri"/>
+              </a:rPr>
+              <a:t>Session 7 stands in the third box — </a:t>
+            </a:r>
+            <a:r>
+              <a:rPr sz="1800" b="1">
+                <a:solidFill>
+                  <a:srgbClr val="2C5F2D"/>
+                </a:solidFill>
+                <a:latin typeface="Calibri"/>
+              </a:rPr>
+              <a:t>Connect with God</a:t>
+            </a:r>
+            <a:r>
+              <a:rPr sz="1800" b="0">
+                <a:solidFill>
+                  <a:srgbClr val="222B22"/>
+                </a:solidFill>
+                <a:latin typeface="Calibri"/>
+              </a:rPr>
+              <a:t>. Each connection makes the next one real (Matt. 22:37–40).</a:t>
+            </a:r>
+          </a:p>
+        </p:txBody>
+      </p:sp>
+      <p:sp>
+        <p:nvSpPr>
+          <p:cNvPr id="90" name="SlideNum"/>
+          <p:cNvSpPr txBox="1"/>
+          <p:nvPr/>
+        </p:nvSpPr>
+        <p:spPr>
+          <a:xfrm>
+            <a:off x="11384280" y="6446520"/>
+            <a:ext cx="640080" cy="292608"/>
+          </a:xfrm>
+          <a:prstGeom prst="rect">
+            <a:avLst/>
+          </a:prstGeom>
+          <a:noFill/>
+        </p:spPr>
+        <p:txBody>
+          <a:bodyPr wrap="none" lIns="0" tIns="0" rIns="45720" bIns="0" anchor="ctr"/>
+          <a:lstStyle/>
+          <a:p>
+            <a:pPr algn="r"/>
+            <a:r>
+              <a:t>86a</a:t>
+            </a:r>
+            <a:endParaRPr sz="1000" b="1">
+              <a:solidFill>
+                <a:srgbClr val="7A8A6E"/>
+              </a:solidFill>
+              <a:latin typeface="Calibri"/>
+            </a:endParaRPr>
+          </a:p>
+        </p:txBody>
+      </p:sp>
+    </p:spTree>
+  </p:cSld>
+  <p:clrMapOvr>
+    <a:masterClrMapping/>
+  </p:clrMapOvr>
+</p:sld>
+</file>
+
+<file path=ppt/slides/slide18.xml><?xml version="1.0" encoding="utf-8"?>
+<p:sld xmlns:a="http://schemas.openxmlformats.org/drawingml/2006/main" xmlns:p="http://schemas.openxmlformats.org/presentationml/2006/main" xmlns:r="http://schemas.openxmlformats.org/officeDocument/2006/relationships">
+  <p:cSld>
+    <p:spTree>
+      <p:nvGrpSpPr>
+        <p:cNvPr id="1" name=""/>
+        <p:cNvGrpSpPr/>
+        <p:nvPr/>
+      </p:nvGrpSpPr>
+      <p:grpSpPr/>
+      <p:sp>
+        <p:nvSpPr>
+          <p:cNvPr id="2" name="Rectangle 1"/>
+          <p:cNvSpPr/>
+          <p:nvPr/>
+        </p:nvSpPr>
+        <p:spPr>
+          <a:xfrm>
+            <a:off x="0" y="0"/>
+            <a:ext cx="12192000" cy="6858000"/>
+          </a:xfrm>
+          <a:prstGeom prst="rect">
+            <a:avLst/>
+          </a:prstGeom>
+          <a:solidFill>
+            <a:srgbClr val="FFFFFF"/>
+          </a:solidFill>
+          <a:ln>
+            <a:noFill/>
+          </a:ln>
+          <a:effectLst/>
+        </p:spPr>
+        <p:style>
+          <a:lnRef idx="1">
+            <a:schemeClr val="accent1"/>
+          </a:lnRef>
+          <a:fillRef idx="3">
+            <a:schemeClr val="accent1"/>
+          </a:fillRef>
+          <a:effectRef idx="2">
+            <a:schemeClr val="accent1"/>
+          </a:effectRef>
+          <a:fontRef idx="minor">
+            <a:schemeClr val="lt1"/>
+          </a:fontRef>
+        </p:style>
+        <p:txBody>
+          <a:bodyPr rtlCol="0" anchor="ctr"/>
+          <a:lstStyle/>
+          <a:p>
+            <a:pPr algn="ctr"/>
+          </a:p>
+        </p:txBody>
+      </p:sp>
+      <p:sp>
+        <p:nvSpPr>
+          <p:cNvPr id="3" name="TextBox 2"/>
+          <p:cNvSpPr txBox="1"/>
+          <p:nvPr/>
+        </p:nvSpPr>
+        <p:spPr>
+          <a:xfrm>
+            <a:off x="822960" y="502920"/>
+            <a:ext cx="10515600" cy="822960"/>
+          </a:xfrm>
+          <a:prstGeom prst="rect">
+            <a:avLst/>
+          </a:prstGeom>
+          <a:noFill/>
+        </p:spPr>
+        <p:txBody>
+          <a:bodyPr wrap="square">
+            <a:spAutoFit/>
+          </a:bodyPr>
+          <a:lstStyle/>
+          <a:p>
+            <a:r>
+              <a:rPr sz="2800" b="1">
+                <a:solidFill>
+                  <a:srgbClr val="2C5F2D"/>
+                </a:solidFill>
+                <a:latin typeface="Cambria"/>
+              </a:rPr>
+              <a:t>The Take-Home Sheet — the Daily Rhythm</a:t>
+            </a:r>
+          </a:p>
+        </p:txBody>
+      </p:sp>
+      <p:pic>
+        <p:nvPicPr>
+          <p:cNvPr id="4" name="Picture 3" descr="s7_part1.png"/>
+          <p:cNvPicPr>
+            <a:picLocks noChangeAspect="1"/>
+          </p:cNvPicPr>
+          <p:nvPr/>
+        </p:nvPicPr>
+        <p:blipFill>
+          <a:blip r:embed="rId2"/>
+          <a:stretch>
+            <a:fillRect/>
+          </a:stretch>
+        </p:blipFill>
+        <p:spPr>
+          <a:xfrm>
+            <a:off x="1798167" y="1463040"/>
+            <a:ext cx="8595360" cy="4039819"/>
+          </a:xfrm>
+          <a:prstGeom prst="rect">
+            <a:avLst/>
+          </a:prstGeom>
+          <a:ln w="12700">
+            <a:solidFill>
+              <a:srgbClr val="C8C8C8"/>
+            </a:solidFill>
+          </a:ln>
+        </p:spPr>
+      </p:pic>
+      <p:sp>
+        <p:nvSpPr>
+          <p:cNvPr id="5" name="TextBox 4"/>
+          <p:cNvSpPr txBox="1"/>
+          <p:nvPr/>
+        </p:nvSpPr>
+        <p:spPr>
+          <a:xfrm>
+            <a:off x="822960" y="6355080"/>
+            <a:ext cx="10515600" cy="411480"/>
+          </a:xfrm>
+          <a:prstGeom prst="rect">
+            <a:avLst/>
+          </a:prstGeom>
+          <a:noFill/>
+        </p:spPr>
+        <p:txBody>
+          <a:bodyPr wrap="square">
+            <a:spAutoFit/>
+          </a:bodyPr>
+          <a:lstStyle/>
+          <a:p>
+            <a:r>
+              <a:rPr sz="1400" i="1">
+                <a:solidFill>
+                  <a:srgbClr val="595959"/>
+                </a:solidFill>
+                <a:latin typeface="Calibri"/>
+              </a:rPr>
+              <a:t>Handed out now — this is the sheet in your hands.</a:t>
+            </a:r>
+          </a:p>
+        </p:txBody>
+      </p:sp>
+      <p:sp>
+        <p:nvSpPr>
+          <p:cNvPr id="90" name="SlideNum"/>
+          <p:cNvSpPr txBox="1"/>
+          <p:nvPr/>
+        </p:nvSpPr>
+        <p:spPr>
+          <a:xfrm>
+            <a:off x="11384280" y="6446520"/>
+            <a:ext cx="640080" cy="292608"/>
+          </a:xfrm>
+          <a:prstGeom prst="rect">
+            <a:avLst/>
+          </a:prstGeom>
+          <a:noFill/>
+        </p:spPr>
+        <p:txBody>
+          <a:bodyPr wrap="none" lIns="0" tIns="0" rIns="45720" bIns="0" anchor="ctr"/>
+          <a:lstStyle/>
+          <a:p>
+            <a:pPr algn="r"/>
+            <a:r>
+              <a:t>98</a:t>
+            </a:r>
+            <a:endParaRPr sz="1000" b="1">
+              <a:solidFill>
+                <a:srgbClr val="7A8A6E"/>
+              </a:solidFill>
+              <a:latin typeface="Calibri"/>
+            </a:endParaRPr>
+          </a:p>
+        </p:txBody>
+      </p:sp>
+    </p:spTree>
+  </p:cSld>
+  <p:clrMapOvr>
+    <a:masterClrMapping/>
+  </p:clrMapOvr>
+</p:sld>
+</file>
+
+<file path=ppt/slides/slide19.xml><?xml version="1.0" encoding="utf-8"?>
+<p:sld xmlns:a="http://schemas.openxmlformats.org/drawingml/2006/main" xmlns:p="http://schemas.openxmlformats.org/presentationml/2006/main" xmlns:r="http://schemas.openxmlformats.org/officeDocument/2006/relationships">
+  <p:cSld>
+    <p:spTree>
+      <p:nvGrpSpPr>
+        <p:cNvPr id="1" name=""/>
+        <p:cNvGrpSpPr/>
+        <p:nvPr/>
+      </p:nvGrpSpPr>
+      <p:grpSpPr/>
+      <p:sp>
+        <p:nvSpPr>
+          <p:cNvPr id="2" name="Rectangle 1"/>
+          <p:cNvSpPr/>
+          <p:nvPr/>
+        </p:nvSpPr>
+        <p:spPr>
+          <a:xfrm>
+            <a:off x="0" y="0"/>
+            <a:ext cx="12192000" cy="6858000"/>
+          </a:xfrm>
+          <a:prstGeom prst="rect">
+            <a:avLst/>
+          </a:prstGeom>
+          <a:solidFill>
+            <a:srgbClr val="FFFFFF"/>
+          </a:solidFill>
+          <a:ln>
+            <a:noFill/>
+          </a:ln>
+          <a:effectLst/>
+        </p:spPr>
+        <p:style>
+          <a:lnRef idx="1">
+            <a:schemeClr val="accent1"/>
+          </a:lnRef>
+          <a:fillRef idx="3">
+            <a:schemeClr val="accent1"/>
+          </a:fillRef>
+          <a:effectRef idx="2">
+            <a:schemeClr val="accent1"/>
+          </a:effectRef>
+          <a:fontRef idx="minor">
+            <a:schemeClr val="lt1"/>
+          </a:fontRef>
+        </p:style>
+        <p:txBody>
+          <a:bodyPr rtlCol="0" anchor="ctr"/>
+          <a:lstStyle/>
+          <a:p>
+            <a:pPr algn="ctr"/>
+          </a:p>
+        </p:txBody>
+      </p:sp>
+      <p:sp>
+        <p:nvSpPr>
+          <p:cNvPr id="3" name="TextBox 2"/>
+          <p:cNvSpPr txBox="1"/>
+          <p:nvPr/>
+        </p:nvSpPr>
+        <p:spPr>
+          <a:xfrm>
+            <a:off x="822960" y="502920"/>
+            <a:ext cx="10515600" cy="822960"/>
+          </a:xfrm>
+          <a:prstGeom prst="rect">
+            <a:avLst/>
+          </a:prstGeom>
+          <a:noFill/>
+        </p:spPr>
+        <p:txBody>
+          <a:bodyPr wrap="square">
+            <a:spAutoFit/>
+          </a:bodyPr>
+          <a:lstStyle/>
+          <a:p>
+            <a:r>
+              <a:rPr sz="2800" b="1">
+                <a:solidFill>
+                  <a:srgbClr val="2C5F2D"/>
+                </a:solidFill>
+                <a:latin typeface="Cambria"/>
+              </a:rPr>
+              <a:t>The Take-Home Sheet — the Four Parts</a:t>
+            </a:r>
+          </a:p>
+        </p:txBody>
+      </p:sp>
+      <p:pic>
+        <p:nvPicPr>
+          <p:cNvPr id="4" name="Picture 3" descr="s7_part2.png"/>
+          <p:cNvPicPr>
+            <a:picLocks noChangeAspect="1"/>
+          </p:cNvPicPr>
+          <p:nvPr/>
+        </p:nvPicPr>
+        <p:blipFill>
+          <a:blip r:embed="rId2"/>
+          <a:stretch>
+            <a:fillRect/>
+          </a:stretch>
+        </p:blipFill>
+        <p:spPr>
+          <a:xfrm>
+            <a:off x="2066004" y="1463040"/>
+            <a:ext cx="8059687" cy="4709160"/>
+          </a:xfrm>
+          <a:prstGeom prst="rect">
+            <a:avLst/>
+          </a:prstGeom>
+          <a:ln w="12700">
+            <a:solidFill>
+              <a:srgbClr val="C8C8C8"/>
+            </a:solidFill>
+          </a:ln>
+        </p:spPr>
+      </p:pic>
+      <p:sp>
+        <p:nvSpPr>
+          <p:cNvPr id="5" name="TextBox 4"/>
+          <p:cNvSpPr txBox="1"/>
+          <p:nvPr/>
+        </p:nvSpPr>
+        <p:spPr>
+          <a:xfrm>
+            <a:off x="822960" y="6355080"/>
+            <a:ext cx="10515600" cy="411480"/>
+          </a:xfrm>
+          <a:prstGeom prst="rect">
+            <a:avLst/>
+          </a:prstGeom>
+          <a:noFill/>
+        </p:spPr>
+        <p:txBody>
+          <a:bodyPr wrap="square">
+            <a:spAutoFit/>
+          </a:bodyPr>
+          <a:lstStyle/>
+          <a:p>
+            <a:r>
+              <a:rPr sz="1400" i="1">
+                <a:solidFill>
+                  <a:srgbClr val="595959"/>
+                </a:solidFill>
+                <a:latin typeface="Calibri"/>
+              </a:rPr>
+              <a:t>One practice at a time — and a partner expecting you at the end of week one.</a:t>
+            </a:r>
+          </a:p>
+        </p:txBody>
+      </p:sp>
+      <p:sp>
+        <p:nvSpPr>
+          <p:cNvPr id="90" name="SlideNum"/>
+          <p:cNvSpPr txBox="1"/>
+          <p:nvPr/>
+        </p:nvSpPr>
+        <p:spPr>
+          <a:xfrm>
+            <a:off x="11384280" y="6446520"/>
+            <a:ext cx="640080" cy="292608"/>
+          </a:xfrm>
+          <a:prstGeom prst="rect">
+            <a:avLst/>
+          </a:prstGeom>
+          <a:noFill/>
+        </p:spPr>
+        <p:txBody>
+          <a:bodyPr wrap="none" lIns="0" tIns="0" rIns="45720" bIns="0" anchor="ctr"/>
+          <a:lstStyle/>
+          <a:p>
+            <a:pPr algn="r"/>
+            <a:r>
+              <a:t>98a</a:t>
+            </a:r>
+            <a:endParaRPr sz="1000" b="1">
+              <a:solidFill>
+                <a:srgbClr val="7A8A6E"/>
+              </a:solidFill>
+              <a:latin typeface="Calibri"/>
+            </a:endParaRPr>
+          </a:p>
+        </p:txBody>
+      </p:sp>
+    </p:spTree>
+  </p:cSld>
+  <p:clrMapOvr>
+    <a:masterClrMapping/>
+  </p:clrMapOvr>
+</p:sld>
+</file>
+
+<file path=ppt/slides/slide2.xml><?xml version="1.0" encoding="utf-8"?>
 <p:sld xmlns:a="http://schemas.openxmlformats.org/drawingml/2006/main" xmlns:r="http://schemas.openxmlformats.org/officeDocument/2006/relationships" xmlns:p="http://schemas.openxmlformats.org/presentationml/2006/main">
   <p:cSld>
     <p:spTree>
@@ -6964,25 +7556,77 @@
           <a:ln>
             <a:noFill/>
           </a:ln>
-        </p:spPr>
-        <p:txBody>
-          <a:bodyPr/>
-          <a:lstStyle/>
-          <a:p>
+          <a:effectLst/>
+        </p:spPr>
+        <p:style>
+          <a:lnRef idx="1">
+            <a:schemeClr val="accent1"/>
+          </a:lnRef>
+          <a:fillRef idx="3">
+            <a:schemeClr val="accent1"/>
+          </a:fillRef>
+          <a:effectRef idx="2">
+            <a:schemeClr val="accent1"/>
+          </a:effectRef>
+          <a:fontRef idx="minor">
+            <a:schemeClr val="lt1"/>
+          </a:fontRef>
+        </p:style>
+        <p:txBody>
+          <a:bodyPr rtlCol="0" anchor="ctr"/>
+          <a:lstStyle/>
+          <a:p>
+            <a:pPr algn="ctr"/>
             <a:endParaRPr/>
           </a:p>
         </p:txBody>
       </p:sp>
-      <p:sp>
-        <p:nvSpPr>
-          <p:cNvPr id="3" name="TextBox 2"/>
+      <p:pic>
+        <p:nvPicPr>
+          <p:cNvPr id="3" name="Picture 2" descr="wk06-proapt.jpg"/>
+          <p:cNvPicPr>
+            <a:picLocks noChangeAspect="1"/>
+          </p:cNvPicPr>
+          <p:nvPr/>
+        </p:nvPicPr>
+        <p:blipFill>
+          <a:blip r:embed="rId3"/>
+          <a:stretch>
+            <a:fillRect/>
+          </a:stretch>
+        </p:blipFill>
+        <p:spPr>
+          <a:xfrm>
+            <a:off x="6309360" y="1405889"/>
+            <a:ext cx="5394960" cy="4046220"/>
+          </a:xfrm>
+          <a:prstGeom prst="rect">
+            <a:avLst/>
+          </a:prstGeom>
+          <a:ln w="76200">
+            <a:solidFill>
+              <a:srgbClr val="FFFFFF"/>
+            </a:solidFill>
+          </a:ln>
+          <a:effectLst>
+            <a:outerShdw blurRad="63500" dist="25400" dir="5400000" rotWithShape="0">
+              <a:srgbClr val="000000">
+                <a:alpha val="35000"/>
+              </a:srgbClr>
+            </a:outerShdw>
+          </a:effectLst>
+        </p:spPr>
+      </p:pic>
+      <p:sp>
+        <p:nvSpPr>
+          <p:cNvPr id="4" name="TextBox 3"/>
           <p:cNvSpPr txBox="1"/>
           <p:nvPr/>
         </p:nvSpPr>
         <p:spPr>
           <a:xfrm>
-            <a:off x="822960" y="502920"/>
-            <a:ext cx="10515600" cy="822960"/>
+            <a:off x="822960" y="1828800"/>
+            <a:ext cx="5212080" cy="3291840"/>
           </a:xfrm>
           <a:prstGeom prst="rect">
             <a:avLst/>
@@ -7001,27 +7645,59 @@
               </a:spcAft>
             </a:pPr>
             <a:r>
-              <a:rPr sz="2800" b="1" i="0">
+              <a:rPr sz="1800" b="1" i="0">
+                <a:solidFill>
+                  <a:srgbClr val="97BC62"/>
+                </a:solidFill>
+                <a:latin typeface="Calibri"/>
+              </a:rPr>
+              <a:t>SESSION 7</a:t>
+            </a:r>
+          </a:p>
+          <a:p>
+            <a:pPr algn="l">
+              <a:spcAft>
+                <a:spcPts val="1000"/>
+              </a:spcAft>
+            </a:pPr>
+            <a:r>
+              <a:rPr sz="3300" b="1" i="0">
                 <a:solidFill>
                   <a:srgbClr val="2C5F2D"/>
                 </a:solidFill>
                 <a:latin typeface="Cambria"/>
               </a:rPr>
-              <a:t>The Round, for All of Us</a:t>
-            </a:r>
-          </a:p>
-        </p:txBody>
-      </p:sp>
-      <p:sp>
-        <p:nvSpPr>
-          <p:cNvPr id="90" name="SlideNum"/>
+              <a:t>Hearing God in Scripture — PROAPT I</a:t>
+            </a:r>
+          </a:p>
+          <a:p>
+            <a:pPr algn="l">
+              <a:spcAft>
+                <a:spcPts val="600"/>
+              </a:spcAft>
+            </a:pPr>
+            <a:r>
+              <a:rPr sz="1800" b="0" i="1">
+                <a:solidFill>
+                  <a:srgbClr val="595959"/>
+                </a:solidFill>
+                <a:latin typeface="Calibri"/>
+              </a:rPr>
+              <a:t>PROAPT — the systematic practice of hearing; the first walk-through, received before it is led</a:t>
+            </a:r>
+          </a:p>
+        </p:txBody>
+      </p:sp>
+      <p:sp>
+        <p:nvSpPr>
+          <p:cNvPr id="5" name="TextBox 4"/>
           <p:cNvSpPr txBox="1"/>
           <p:nvPr/>
         </p:nvSpPr>
         <p:spPr>
           <a:xfrm>
-            <a:off x="11384280" y="6446520"/>
-            <a:ext cx="640080" cy="292608"/>
+            <a:off x="822960" y="6126480"/>
+            <a:ext cx="7315200" cy="457200"/>
           </a:xfrm>
           <a:prstGeom prst="rect">
             <a:avLst/>
@@ -7029,12 +7705,51 @@
           <a:noFill/>
         </p:spPr>
         <p:txBody>
+          <a:bodyPr wrap="square">
+            <a:spAutoFit/>
+          </a:bodyPr>
+          <a:lstStyle/>
+          <a:p>
+            <a:pPr algn="l">
+              <a:spcAft>
+                <a:spcPts val="600"/>
+              </a:spcAft>
+            </a:pPr>
+            <a:r>
+              <a:rPr sz="1800" b="0" i="0">
+                <a:solidFill>
+                  <a:srgbClr val="595959"/>
+                </a:solidFill>
+                <a:latin typeface="Calibri"/>
+              </a:rPr>
+              <a:t>Quarter 2: Connect with God</a:t>
+            </a:r>
+          </a:p>
+        </p:txBody>
+      </p:sp>
+      <p:sp>
+        <p:nvSpPr>
+          <p:cNvPr id="90" name="SlideNum"/>
+          <p:cNvSpPr txBox="1"/>
+          <p:nvPr/>
+        </p:nvSpPr>
+        <p:spPr>
+          <a:xfrm>
+            <a:off x="11384280" y="6446520"/>
+            <a:ext cx="640080" cy="292608"/>
+          </a:xfrm>
+          <a:prstGeom prst="rect">
+            <a:avLst/>
+          </a:prstGeom>
+          <a:noFill/>
+        </p:spPr>
+        <p:txBody>
           <a:bodyPr wrap="none" lIns="0" tIns="0" rIns="45720" bIns="0" anchor="ctr"/>
           <a:lstStyle/>
           <a:p>
             <a:pPr algn="r"/>
             <a:r>
-              <a:t>91</a:t>
+              <a:t>86</a:t>
             </a:r>
             <a:endParaRPr sz="1000" b="1">
               <a:solidFill>
@@ -7042,137 +7757,6 @@
               </a:solidFill>
               <a:latin typeface="Calibri"/>
             </a:endParaRPr>
-          </a:p>
-        </p:txBody>
-      </p:sp>
-      <p:sp>
-        <p:nvSpPr>
-          <p:cNvPr id="290" name="RoomSelfRead"/>
-          <p:cNvSpPr txBox="1"/>
-          <p:nvPr/>
-        </p:nvSpPr>
-        <p:spPr>
-          <a:xfrm>
-            <a:off x="822960" y="1417320"/>
-            <a:ext cx="10515600" cy="5029200"/>
-          </a:xfrm>
-          <a:prstGeom prst="rect">
-            <a:avLst/>
-          </a:prstGeom>
-          <a:noFill/>
-        </p:spPr>
-        <p:txBody>
-          <a:bodyPr wrap="square"/>
-          <a:lstStyle/>
-          <a:p>
-            <a:pPr algn="l">
-              <a:spcAft>
-                <a:spcPts val="1300"/>
-              </a:spcAft>
-            </a:pPr>
-            <a:r>
-              <a:rPr sz="1900" b="0" i="0">
-                <a:solidFill>
-                  <a:srgbClr val="222B22"/>
-                </a:solidFill>
-                <a:latin typeface="Calibri"/>
-              </a:rPr>
-              <a:t>Same process as every week’s leader reflection — now for the group:</a:t>
-            </a:r>
-          </a:p>
-          <a:p>
-            <a:pPr algn="l">
-              <a:spcAft>
-                <a:spcPts val="1100"/>
-              </a:spcAft>
-            </a:pPr>
-            <a:r>
-              <a:rPr sz="2400" b="1" i="0">
-                <a:solidFill>
-                  <a:srgbClr val="97BC62"/>
-                </a:solidFill>
-                <a:latin typeface="Calibri"/>
-              </a:rPr>
-              <a:t>1   </a:t>
-            </a:r>
-            <a:r>
-              <a:rPr sz="2400" b="0" i="0">
-                <a:solidFill>
-                  <a:srgbClr val="222B22"/>
-                </a:solidFill>
-                <a:latin typeface="Calibri"/>
-              </a:rPr>
-              <a:t>What’s working well that we ought to keep doing next quarter?</a:t>
-            </a:r>
-          </a:p>
-          <a:p>
-            <a:pPr algn="l">
-              <a:spcAft>
-                <a:spcPts val="1100"/>
-              </a:spcAft>
-            </a:pPr>
-            <a:r>
-              <a:rPr sz="2400" b="1" i="0">
-                <a:solidFill>
-                  <a:srgbClr val="97BC62"/>
-                </a:solidFill>
-                <a:latin typeface="Calibri"/>
-              </a:rPr>
-              <a:t>2   </a:t>
-            </a:r>
-            <a:r>
-              <a:rPr sz="2400" b="0" i="0">
-                <a:solidFill>
-                  <a:srgbClr val="222B22"/>
-                </a:solidFill>
-                <a:latin typeface="Calibri"/>
-              </a:rPr>
-              <a:t>What could we do differently that would make things even better?</a:t>
-            </a:r>
-          </a:p>
-          <a:p>
-            <a:pPr algn="l">
-              <a:spcAft>
-                <a:spcPts val="1100"/>
-              </a:spcAft>
-            </a:pPr>
-            <a:r>
-              <a:rPr sz="2400" b="1" i="0">
-                <a:solidFill>
-                  <a:srgbClr val="97BC62"/>
-                </a:solidFill>
-                <a:latin typeface="Calibri"/>
-              </a:rPr>
-              <a:t>3   </a:t>
-            </a:r>
-            <a:r>
-              <a:rPr sz="2400" b="0" i="0">
-                <a:solidFill>
-                  <a:srgbClr val="222B22"/>
-                </a:solidFill>
-                <a:latin typeface="Calibri"/>
-              </a:rPr>
-              <a:t>What would you tell somebody else about what this group is like?</a:t>
-            </a:r>
-          </a:p>
-          <a:p>
-            <a:pPr algn="l">
-              <a:spcBef>
-                <a:spcPts val="1300"/>
-              </a:spcBef>
-              <a:spcAft>
-                <a:spcPts val="1000"/>
-              </a:spcAft>
-            </a:pPr>
-            <a:r>
-              <a:rPr sz="2000" b="0" i="1">
-                <a:solidFill>
-                  <a:srgbClr val="222B22"/>
-                </a:solidFill>
-                <a:latin typeface="Cambria"/>
-              </a:rPr>
-              <a:t>The leader answers first, same as always. Any question, any order.</a:t>
-            </a:r>
           </a:p>
         </p:txBody>
       </p:sp>
@@ -7184,7 +7768,7 @@
 </p:sld>
 </file>
 
-<file path=ppt/slides/slide92.xml><?xml version="1.0" encoding="utf-8"?>
+<file path=ppt/slides/slide3.xml><?xml version="1.0" encoding="utf-8"?>
 <p:sld xmlns:a="http://schemas.openxmlformats.org/drawingml/2006/main" xmlns:r="http://schemas.openxmlformats.org/officeDocument/2006/relationships" xmlns:p="http://schemas.openxmlformats.org/presentationml/2006/main">
   <p:cSld>
     <p:spTree>
@@ -7221,11 +7805,27 @@
           <a:ln>
             <a:noFill/>
           </a:ln>
-        </p:spPr>
-        <p:txBody>
-          <a:bodyPr/>
-          <a:lstStyle/>
-          <a:p>
+          <a:effectLst/>
+        </p:spPr>
+        <p:style>
+          <a:lnRef idx="1">
+            <a:schemeClr val="accent1"/>
+          </a:lnRef>
+          <a:fillRef idx="3">
+            <a:schemeClr val="accent1"/>
+          </a:fillRef>
+          <a:effectRef idx="2">
+            <a:schemeClr val="accent1"/>
+          </a:effectRef>
+          <a:fontRef idx="minor">
+            <a:schemeClr val="lt1"/>
+          </a:fontRef>
+        </p:style>
+        <p:txBody>
+          <a:bodyPr rtlCol="0" anchor="ctr"/>
+          <a:lstStyle/>
+          <a:p>
+            <a:pPr algn="ctr"/>
             <a:endParaRPr/>
           </a:p>
         </p:txBody>
@@ -7264,21 +7864,93 @@
                 </a:solidFill>
                 <a:latin typeface="Cambria"/>
               </a:rPr>
-              <a:t>Romans 10:17 — The Chain</a:t>
-            </a:r>
-          </a:p>
-        </p:txBody>
-      </p:sp>
-      <p:sp>
-        <p:nvSpPr>
-          <p:cNvPr id="4" name="TextBox 4"/>
+              <a:t>Week 7 — My Story: The Eye Test</a:t>
+            </a:r>
+          </a:p>
+        </p:txBody>
+      </p:sp>
+      <p:pic>
+        <p:nvPicPr>
+          <p:cNvPr id="4" name="Picture 3" descr="4c-phoropter.jpg"/>
+          <p:cNvPicPr>
+            <a:picLocks noChangeAspect="1"/>
+          </p:cNvPicPr>
+          <p:nvPr/>
+        </p:nvPicPr>
+        <p:blipFill>
+          <a:blip r:embed="rId3"/>
+          <a:stretch>
+            <a:fillRect/>
+          </a:stretch>
+        </p:blipFill>
+        <p:spPr>
+          <a:xfrm>
+            <a:off x="822960" y="1645920"/>
+            <a:ext cx="4754880" cy="3566160"/>
+          </a:xfrm>
+          <a:prstGeom prst="rect">
+            <a:avLst/>
+          </a:prstGeom>
+          <a:ln w="76200">
+            <a:solidFill>
+              <a:srgbClr val="FFFFFF"/>
+            </a:solidFill>
+          </a:ln>
+          <a:effectLst>
+            <a:outerShdw blurRad="63500" dist="25400" dir="5400000" rotWithShape="0">
+              <a:srgbClr val="000000">
+                <a:alpha val="35000"/>
+              </a:srgbClr>
+            </a:outerShdw>
+          </a:effectLst>
+        </p:spPr>
+      </p:pic>
+      <p:pic>
+        <p:nvPicPr>
+          <p:cNvPr id="5" name="Picture 4" descr="4c-eyechart.jpg"/>
+          <p:cNvPicPr>
+            <a:picLocks noChangeAspect="1"/>
+          </p:cNvPicPr>
+          <p:nvPr/>
+        </p:nvPicPr>
+        <p:blipFill>
+          <a:blip r:embed="rId4"/>
+          <a:stretch>
+            <a:fillRect/>
+          </a:stretch>
+        </p:blipFill>
+        <p:spPr>
+          <a:xfrm>
+            <a:off x="5971032" y="1645920"/>
+            <a:ext cx="2139696" cy="3566160"/>
+          </a:xfrm>
+          <a:prstGeom prst="rect">
+            <a:avLst/>
+          </a:prstGeom>
+          <a:ln w="76200">
+            <a:solidFill>
+              <a:srgbClr val="FFFFFF"/>
+            </a:solidFill>
+          </a:ln>
+          <a:effectLst>
+            <a:outerShdw blurRad="63500" dist="25400" dir="5400000" rotWithShape="0">
+              <a:srgbClr val="000000">
+                <a:alpha val="35000"/>
+              </a:srgbClr>
+            </a:outerShdw>
+          </a:effectLst>
+        </p:spPr>
+      </p:pic>
+      <p:sp>
+        <p:nvSpPr>
+          <p:cNvPr id="6" name="TextBox 5"/>
           <p:cNvSpPr txBox="1"/>
           <p:nvPr/>
         </p:nvSpPr>
         <p:spPr>
           <a:xfrm>
-            <a:off x="822960" y="1600200"/>
-            <a:ext cx="5669280" cy="4572000"/>
+            <a:off x="8503920" y="1737360"/>
+            <a:ext cx="3108960" cy="3566160"/>
           </a:xfrm>
           <a:prstGeom prst="rect">
             <a:avLst/>
@@ -7286,200 +7958,54 @@
           <a:noFill/>
         </p:spPr>
         <p:txBody>
-          <a:bodyPr wrap="square" lIns="91440" tIns="91440" rIns="91440" bIns="91440"/>
-          <a:lstStyle/>
-          <a:p>
-            <a:pPr marL="274320" indent="-274320">
-              <a:spcAft>
-                <a:spcPts val="800"/>
-              </a:spcAft>
-            </a:pPr>
-            <a:r>
-              <a:rPr sz="2000" b="1" i="0">
-                <a:solidFill>
-                  <a:srgbClr val="97BC62"/>
-                </a:solidFill>
-                <a:latin typeface="Calibri"/>
-              </a:rPr>
-              <a:t>•  </a:t>
-            </a:r>
-            <a:r>
-              <a:rPr sz="2000" b="0" i="0">
-                <a:solidFill>
-                  <a:srgbClr val="222B22"/>
-                </a:solidFill>
-                <a:latin typeface="Calibri"/>
-              </a:rPr>
-              <a:t>One short verse, three steps: Word → Hearing → Faith — the order matters</a:t>
-            </a:r>
-          </a:p>
-          <a:p>
-            <a:pPr marL="274320" indent="-274320">
-              <a:spcAft>
-                <a:spcPts val="800"/>
-              </a:spcAft>
-            </a:pPr>
-            <a:r>
-              <a:rPr sz="2000" b="1" i="0">
-                <a:solidFill>
-                  <a:srgbClr val="97BC62"/>
-                </a:solidFill>
-                <a:latin typeface="Calibri"/>
-              </a:rPr>
-              <a:t>•  </a:t>
-            </a:r>
-            <a:r>
-              <a:rPr sz="2000" b="0" i="0">
-                <a:solidFill>
-                  <a:srgbClr val="222B22"/>
-                </a:solidFill>
-                <a:latin typeface="Calibri"/>
-              </a:rPr>
-              <a:t>Not trying harder, not emotional experience — faith is a fruit of a particular practice</a:t>
-            </a:r>
-          </a:p>
-          <a:p>
-            <a:pPr marL="274320" indent="-274320">
-              <a:spcAft>
-                <a:spcPts val="800"/>
-              </a:spcAft>
-            </a:pPr>
-            <a:r>
-              <a:rPr sz="2000" b="1" i="0">
-                <a:solidFill>
-                  <a:srgbClr val="97BC62"/>
-                </a:solidFill>
-                <a:latin typeface="Calibri"/>
-              </a:rPr>
-              <a:t>•  </a:t>
-            </a:r>
-            <a:r>
-              <a:rPr sz="2000" b="0" i="0">
-                <a:solidFill>
-                  <a:srgbClr val="222B22"/>
-                </a:solidFill>
-                <a:latin typeface="Calibri"/>
-              </a:rPr>
-              <a:t>How much of our “Bible time” is actually hearing, and how much is reading without hearing?</a:t>
-            </a:r>
-          </a:p>
-          <a:p>
-            <a:pPr marL="274320" indent="-274320">
-              <a:spcAft>
-                <a:spcPts val="800"/>
-              </a:spcAft>
-            </a:pPr>
-            <a:r>
-              <a:rPr sz="2000" b="1" i="0">
-                <a:solidFill>
-                  <a:srgbClr val="97BC62"/>
-                </a:solidFill>
-                <a:latin typeface="Calibri"/>
-              </a:rPr>
-              <a:t>•  </a:t>
-            </a:r>
-            <a:r>
-              <a:rPr sz="2000" b="0" i="0">
-                <a:solidFill>
-                  <a:srgbClr val="222B22"/>
-                </a:solidFill>
-                <a:latin typeface="Calibri"/>
-              </a:rPr>
-              <a:t>Hearing is a skill — skills develop with practice</a:t>
-            </a:r>
-          </a:p>
-          <a:p>
-            <a:pPr marL="274320" indent="-274320">
-              <a:spcAft>
-                <a:spcPts val="800"/>
-              </a:spcAft>
-            </a:pPr>
-            <a:r>
-              <a:rPr sz="2000" b="1" i="0">
-                <a:solidFill>
-                  <a:srgbClr val="97BC62"/>
-                </a:solidFill>
-                <a:latin typeface="Calibri"/>
-              </a:rPr>
-              <a:t>•  </a:t>
-            </a:r>
-            <a:r>
-              <a:rPr sz="2000" b="0" i="0">
-                <a:solidFill>
-                  <a:srgbClr val="222B22"/>
-                </a:solidFill>
-                <a:latin typeface="Calibri"/>
-              </a:rPr>
-              <a:t>The practice: PROAPT — Pray, Read, Observe, Apply, Pray again, Tell (Truro Church, 1980s)</a:t>
-            </a:r>
-          </a:p>
-        </p:txBody>
-      </p:sp>
-      <p:sp>
-        <p:nvSpPr>
-          <p:cNvPr id="6" name="TextBox 6"/>
-          <p:cNvSpPr txBox="1"/>
-          <p:nvPr/>
-        </p:nvSpPr>
-        <p:spPr>
-          <a:xfrm>
-            <a:off x="6766560" y="1737360"/>
-            <a:ext cx="4663440" cy="2194560"/>
-          </a:xfrm>
-          <a:prstGeom prst="rect">
-            <a:avLst/>
-          </a:prstGeom>
-          <a:solidFill>
-            <a:srgbClr val="F1F6EC"/>
-          </a:solidFill>
-        </p:spPr>
-        <p:txBody>
-          <a:bodyPr wrap="square" lIns="91440" tIns="91440" rIns="91440" bIns="91440" anchor="ctr"/>
-          <a:lstStyle/>
-          <a:p>
-            <a:pPr>
-              <a:spcAft>
-                <a:spcPts val="900"/>
-              </a:spcAft>
-            </a:pPr>
-            <a:r>
-              <a:rPr sz="1200" b="1" i="0">
-                <a:solidFill>
-                  <a:srgbClr val="97BC62"/>
-                </a:solidFill>
-                <a:latin typeface="Calibri"/>
-              </a:rPr>
-              <a:t>ROMANS 10:17</a:t>
-            </a:r>
-          </a:p>
-          <a:p>
-            <a:pPr>
+          <a:bodyPr wrap="square" anchor="ctr">
+            <a:spAutoFit/>
+          </a:bodyPr>
+          <a:lstStyle/>
+          <a:p>
+            <a:pPr algn="l">
               <a:spcAft>
                 <a:spcPts val="600"/>
               </a:spcAft>
             </a:pPr>
             <a:r>
-              <a:rPr sz="2400" b="0" i="1">
-                <a:solidFill>
-                  <a:srgbClr val="222B22"/>
-                </a:solidFill>
-                <a:latin typeface="Cambria"/>
-              </a:rPr>
-              <a:t>“So faith comes from hearing, and hearing through the word of Christ.”</a:t>
-            </a:r>
-          </a:p>
-        </p:txBody>
-      </p:sp>
-      <p:sp>
-        <p:nvSpPr>
-          <p:cNvPr id="90" name="SlideNum"/>
+              <a:rPr sz="2800" b="1" i="1">
+                <a:solidFill>
+                  <a:srgbClr val="2C5F2D"/>
+                </a:solidFill>
+                <a:latin typeface="Calibri"/>
+              </a:rPr>
+              <a:t>“The more I obey what I have heard, the finer print I can read.”</a:t>
+            </a:r>
+          </a:p>
+          <a:p>
+            <a:pPr algn="l">
+              <a:spcAft>
+                <a:spcPts val="600"/>
+              </a:spcAft>
+            </a:pPr>
+            <a:r>
+              <a:rPr sz="1800" b="0" i="1">
+                <a:solidFill>
+                  <a:srgbClr val="595959"/>
+                </a:solidFill>
+                <a:latin typeface="Calibri"/>
+              </a:rPr>
+              <a:t>— the founder’s story, told live</a:t>
+            </a:r>
+          </a:p>
+        </p:txBody>
+      </p:sp>
+      <p:sp>
+        <p:nvSpPr>
+          <p:cNvPr id="7" name="TextBox 6"/>
           <p:cNvSpPr txBox="1"/>
           <p:nvPr/>
         </p:nvSpPr>
         <p:spPr>
           <a:xfrm>
-            <a:off x="11384280" y="6446520"/>
-            <a:ext cx="640080" cy="292608"/>
+            <a:off x="822960" y="5669280"/>
+            <a:ext cx="10607040" cy="822960"/>
           </a:xfrm>
           <a:prstGeom prst="rect">
             <a:avLst/>
@@ -7487,12 +8013,51 @@
           <a:noFill/>
         </p:spPr>
         <p:txBody>
+          <a:bodyPr wrap="square">
+            <a:spAutoFit/>
+          </a:bodyPr>
+          <a:lstStyle/>
+          <a:p>
+            <a:pPr algn="l">
+              <a:spcAft>
+                <a:spcPts val="600"/>
+              </a:spcAft>
+            </a:pPr>
+            <a:r>
+              <a:rPr sz="1800" b="0" i="1">
+                <a:solidFill>
+                  <a:srgbClr val="222B22"/>
+                </a:solidFill>
+                <a:latin typeface="Calibri"/>
+              </a:rPr>
+              <a:t>Hearing God is a practice that grows with obedience — tonight we learn the practice.</a:t>
+            </a:r>
+          </a:p>
+        </p:txBody>
+      </p:sp>
+      <p:sp>
+        <p:nvSpPr>
+          <p:cNvPr id="90" name="SlideNum"/>
+          <p:cNvSpPr txBox="1"/>
+          <p:nvPr/>
+        </p:nvSpPr>
+        <p:spPr>
+          <a:xfrm>
+            <a:off x="11384280" y="6446520"/>
+            <a:ext cx="640080" cy="292608"/>
+          </a:xfrm>
+          <a:prstGeom prst="rect">
+            <a:avLst/>
+          </a:prstGeom>
+          <a:noFill/>
+        </p:spPr>
+        <p:txBody>
           <a:bodyPr wrap="none" lIns="0" tIns="0" rIns="45720" bIns="0" anchor="ctr"/>
           <a:lstStyle/>
           <a:p>
             <a:pPr algn="r"/>
             <a:r>
-              <a:t>92</a:t>
+              <a:t>87</a:t>
             </a:r>
             <a:endParaRPr sz="1000" b="1">
               <a:solidFill>
@@ -7511,7 +8076,7 @@
 </p:sld>
 </file>
 
-<file path=ppt/slides/slide93.xml><?xml version="1.0" encoding="utf-8"?>
+<file path=ppt/slides/slide4.xml><?xml version="1.0" encoding="utf-8"?>
 <p:sld xmlns:a="http://schemas.openxmlformats.org/drawingml/2006/main" xmlns:r="http://schemas.openxmlformats.org/officeDocument/2006/relationships" xmlns:p="http://schemas.openxmlformats.org/presentationml/2006/main">
   <p:cSld>
     <p:spTree>
@@ -7548,11 +8113,27 @@
           <a:ln>
             <a:noFill/>
           </a:ln>
-        </p:spPr>
-        <p:txBody>
-          <a:bodyPr/>
-          <a:lstStyle/>
-          <a:p>
+          <a:effectLst/>
+        </p:spPr>
+        <p:style>
+          <a:lnRef idx="1">
+            <a:schemeClr val="accent1"/>
+          </a:lnRef>
+          <a:fillRef idx="3">
+            <a:schemeClr val="accent1"/>
+          </a:fillRef>
+          <a:effectRef idx="2">
+            <a:schemeClr val="accent1"/>
+          </a:effectRef>
+          <a:fontRef idx="minor">
+            <a:schemeClr val="lt1"/>
+          </a:fontRef>
+        </p:style>
+        <p:txBody>
+          <a:bodyPr rtlCol="0" anchor="ctr"/>
+          <a:lstStyle/>
+          <a:p>
+            <a:pPr algn="ctr"/>
             <a:endParaRPr/>
           </a:p>
         </p:txBody>
@@ -7591,21 +8172,21 @@
                 </a:solidFill>
                 <a:latin typeface="Cambria"/>
               </a:rPr>
-              <a:t>PROAPT Walked Together — Mark 1:14–20</a:t>
-            </a:r>
-          </a:p>
-        </p:txBody>
-      </p:sp>
-      <p:sp>
-        <p:nvSpPr>
-          <p:cNvPr id="4" name="TextBox 4"/>
+              <a:t>Session 7 — Tonight’s Road</a:t>
+            </a:r>
+          </a:p>
+        </p:txBody>
+      </p:sp>
+      <p:sp>
+        <p:nvSpPr>
+          <p:cNvPr id="4" name="TextBox 3"/>
           <p:cNvSpPr txBox="1"/>
           <p:nvPr/>
         </p:nvSpPr>
         <p:spPr>
           <a:xfrm>
-            <a:off x="822960" y="1554480"/>
-            <a:ext cx="6675120" cy="4892040"/>
+            <a:off x="822960" y="1508760"/>
+            <a:ext cx="7040880" cy="4754880"/>
           </a:xfrm>
           <a:prstGeom prst="rect">
             <a:avLst/>
@@ -7613,16 +8194,18 @@
           <a:noFill/>
         </p:spPr>
         <p:txBody>
-          <a:bodyPr wrap="square" lIns="91440" tIns="91440" rIns="91440" bIns="91440"/>
-          <a:lstStyle/>
-          <a:p>
-            <a:pPr marL="342900" indent="-342900">
+          <a:bodyPr wrap="square">
+            <a:spAutoFit/>
+          </a:bodyPr>
+          <a:lstStyle/>
+          <a:p>
+            <a:pPr>
               <a:spcAft>
-                <a:spcPts val="750"/>
+                <a:spcPts val="500"/>
               </a:spcAft>
             </a:pPr>
             <a:r>
-              <a:rPr sz="2000" b="1" i="0">
+              <a:rPr sz="2800" b="1">
                 <a:solidFill>
                   <a:srgbClr val="97BC62"/>
                 </a:solidFill>
@@ -7631,23 +8214,23 @@
               <a:t>1   </a:t>
             </a:r>
             <a:r>
-              <a:rPr sz="2000" b="0" i="0">
+              <a:rPr sz="2800">
                 <a:solidFill>
                   <a:srgbClr val="222B22"/>
                 </a:solidFill>
                 <a:latin typeface="Calibri"/>
               </a:rPr>
-              <a:t>Pray — “Holy Spirit, you are welcome here. Speak. We are listening.”</a:t>
-            </a:r>
-          </a:p>
-          <a:p>
-            <a:pPr marL="342900" indent="-342900">
+              <a:t>Welcome and centering</a:t>
+            </a:r>
+          </a:p>
+          <a:p>
+            <a:pPr>
               <a:spcAft>
-                <a:spcPts val="750"/>
+                <a:spcPts val="500"/>
               </a:spcAft>
             </a:pPr>
             <a:r>
-              <a:rPr sz="2000" b="1" i="0">
+              <a:rPr sz="2800" b="1">
                 <a:solidFill>
                   <a:srgbClr val="97BC62"/>
                 </a:solidFill>
@@ -7656,23 +8239,23 @@
               <a:t>2   </a:t>
             </a:r>
             <a:r>
-              <a:rPr sz="2000" b="0" i="0">
+              <a:rPr sz="2800">
                 <a:solidFill>
                   <a:srgbClr val="222B22"/>
                 </a:solidFill>
                 <a:latin typeface="Calibri"/>
               </a:rPr>
-              <a:t>Read — slowly, to receive it; don’t analyze yet</a:t>
-            </a:r>
-          </a:p>
-          <a:p>
-            <a:pPr marL="342900" indent="-342900">
+              <a:t>Re-entry — and the room reads itself</a:t>
+            </a:r>
+          </a:p>
+          <a:p>
+            <a:pPr>
               <a:spcAft>
-                <a:spcPts val="750"/>
+                <a:spcPts val="500"/>
               </a:spcAft>
             </a:pPr>
             <a:r>
-              <a:rPr sz="2000" b="1" i="0">
+              <a:rPr sz="2800" b="1">
                 <a:solidFill>
                   <a:srgbClr val="97BC62"/>
                 </a:solidFill>
@@ -7681,23 +8264,23 @@
               <a:t>3   </a:t>
             </a:r>
             <a:r>
-              <a:rPr sz="2000" b="0" i="0">
+              <a:rPr sz="2800">
                 <a:solidFill>
                   <a:srgbClr val="222B22"/>
                 </a:solidFill>
                 <a:latin typeface="Calibri"/>
               </a:rPr>
-              <a:t>Observe — two layers, in order: first the data (who, what, when, where — straight off the page), then the interpretation — what stands out or surprises you in it</a:t>
-            </a:r>
-          </a:p>
-          <a:p>
-            <a:pPr marL="342900" indent="-342900">
+              <a:t>Romans 10:17 — the chain</a:t>
+            </a:r>
+          </a:p>
+          <a:p>
+            <a:pPr>
               <a:spcAft>
-                <a:spcPts val="750"/>
+                <a:spcPts val="500"/>
               </a:spcAft>
             </a:pPr>
             <a:r>
-              <a:rPr sz="2000" b="1" i="0">
+              <a:rPr sz="2800" b="1">
                 <a:solidFill>
                   <a:srgbClr val="97BC62"/>
                 </a:solidFill>
@@ -7706,23 +8289,23 @@
               <a:t>4   </a:t>
             </a:r>
             <a:r>
-              <a:rPr sz="2000" b="0" i="0">
+              <a:rPr sz="2800">
                 <a:solidFill>
                   <a:srgbClr val="222B22"/>
                 </a:solidFill>
                 <a:latin typeface="Calibri"/>
               </a:rPr>
-              <a:t>Apply — “What does this passage mean FOR YOU, TODAY, in your specific life?” — logos becomes rhema</a:t>
-            </a:r>
-          </a:p>
-          <a:p>
-            <a:pPr marL="342900" indent="-342900">
+              <a:t>PROAPT walked together</a:t>
+            </a:r>
+          </a:p>
+          <a:p>
+            <a:pPr>
               <a:spcAft>
-                <a:spcPts val="750"/>
+                <a:spcPts val="500"/>
               </a:spcAft>
             </a:pPr>
             <a:r>
-              <a:rPr sz="2000" b="1" i="0">
+              <a:rPr sz="2800" b="1">
                 <a:solidFill>
                   <a:srgbClr val="97BC62"/>
                 </a:solidFill>
@@ -7731,23 +8314,23 @@
               <a:t>5   </a:t>
             </a:r>
             <a:r>
-              <a:rPr sz="2000" b="0" i="0">
+              <a:rPr sz="2800">
                 <a:solidFill>
                   <a:srgbClr val="222B22"/>
                 </a:solidFill>
                 <a:latin typeface="Calibri"/>
               </a:rPr>
-              <a:t>Pray again — tell God what you heard, what you are willing to do, what you’re struggling to be willing to do</a:t>
-            </a:r>
-          </a:p>
-          <a:p>
-            <a:pPr marL="342900" indent="-342900">
+              <a:t>Bridge to the pairs and pair structure</a:t>
+            </a:r>
+          </a:p>
+          <a:p>
+            <a:pPr>
               <a:spcAft>
-                <a:spcPts val="750"/>
+                <a:spcPts val="500"/>
               </a:spcAft>
             </a:pPr>
             <a:r>
-              <a:rPr sz="2000" b="1" i="0">
+              <a:rPr sz="2800" b="1">
                 <a:solidFill>
                   <a:srgbClr val="97BC62"/>
                 </a:solidFill>
@@ -7756,13 +8339,113 @@
               <a:t>6   </a:t>
             </a:r>
             <a:r>
-              <a:rPr sz="2000" b="0" i="0">
+              <a:rPr sz="2800">
                 <a:solidFill>
                   <a:srgbClr val="222B22"/>
                 </a:solidFill>
                 <a:latin typeface="Calibri"/>
               </a:rPr>
-              <a:t>Tell — the most-often-skipped step; hearing spoken aloud has a different staying power</a:t>
+              <a:t>PROAPT in family pairs in pairs</a:t>
+            </a:r>
+          </a:p>
+          <a:p>
+            <a:pPr>
+              <a:spcAft>
+                <a:spcPts val="500"/>
+              </a:spcAft>
+            </a:pPr>
+            <a:r>
+              <a:rPr sz="2800" b="1">
+                <a:solidFill>
+                  <a:srgbClr val="97BC62"/>
+                </a:solidFill>
+                <a:latin typeface="Calibri"/>
+              </a:rPr>
+              <a:t>7   </a:t>
+            </a:r>
+            <a:r>
+              <a:rPr sz="2800">
+                <a:solidFill>
+                  <a:srgbClr val="222B22"/>
+                </a:solidFill>
+                <a:latin typeface="Calibri"/>
+              </a:rPr>
+              <a:t>Tell step — sharing in the pair</a:t>
+            </a:r>
+          </a:p>
+          <a:p>
+            <a:pPr>
+              <a:spcAft>
+                <a:spcPts val="500"/>
+              </a:spcAft>
+            </a:pPr>
+            <a:r>
+              <a:rPr sz="2800" b="1">
+                <a:solidFill>
+                  <a:srgbClr val="97BC62"/>
+                </a:solidFill>
+                <a:latin typeface="Calibri"/>
+              </a:rPr>
+              <a:t>8   </a:t>
+            </a:r>
+            <a:r>
+              <a:rPr sz="2800">
+                <a:solidFill>
+                  <a:srgbClr val="222B22"/>
+                </a:solidFill>
+                <a:latin typeface="Calibri"/>
+              </a:rPr>
+              <a:t>Merge and homework</a:t>
+            </a:r>
+          </a:p>
+          <a:p>
+            <a:pPr>
+              <a:spcAft>
+                <a:spcPts val="500"/>
+              </a:spcAft>
+            </a:pPr>
+            <a:r>
+              <a:rPr sz="2800" b="1">
+                <a:solidFill>
+                  <a:srgbClr val="97BC62"/>
+                </a:solidFill>
+                <a:latin typeface="Calibri"/>
+              </a:rPr>
+              <a:t>9   </a:t>
+            </a:r>
+            <a:r>
+              <a:rPr sz="2800">
+                <a:solidFill>
+                  <a:srgbClr val="222B22"/>
+                </a:solidFill>
+                <a:latin typeface="Calibri"/>
+              </a:rPr>
+              <a:t>The Leader Feedback Round — both leaders</a:t>
+            </a:r>
+          </a:p>
+          <a:p>
+            <a:pPr>
+              <a:spcAft>
+                <a:spcPts val="500"/>
+              </a:spcAft>
+            </a:pPr>
+            <a:r>
+              <a:rPr sz="2800" b="1">
+                <a:solidFill>
+                  <a:srgbClr val="97BC62"/>
+                </a:solidFill>
+                <a:latin typeface="Calibri"/>
+              </a:rPr>
+              <a:t>10   </a:t>
+            </a:r>
+            <a:r>
+              <a:rPr sz="2800">
+                <a:solidFill>
+                  <a:srgbClr val="222B22"/>
+                </a:solidFill>
+                <a:latin typeface="Calibri"/>
+              </a:rPr>
+              <a:t>Closing container</a:t>
             </a:r>
           </a:p>
         </p:txBody>
@@ -7789,7 +8472,7 @@
           <a:p>
             <a:pPr algn="r"/>
             <a:r>
-              <a:t>93</a:t>
+              <a:t>88</a:t>
             </a:r>
             <a:endParaRPr sz="1000" b="1">
               <a:solidFill>
@@ -7802,7 +8485,7 @@
       </p:sp>
       <p:pic>
         <p:nvPicPr>
-          <p:cNvPr id="91" name="Picture 91" descr="an old wooden boat left ashore among moss and pines"/>
+          <p:cNvPr id="31" name="Picture 31" descr="the open container bowl"/>
           <p:cNvPicPr>
             <a:picLocks noChangeAspect="1"/>
           </p:cNvPicPr>
@@ -7816,8 +8499,8 @@
         </p:blipFill>
         <p:spPr>
           <a:xfrm>
-            <a:off x="7696962" y="1463040"/>
-            <a:ext cx="3669030" cy="4892040"/>
+            <a:off x="8001000" y="1554480"/>
+            <a:ext cx="3017520" cy="4526280"/>
           </a:xfrm>
           <a:prstGeom prst="rect">
             <a:avLst/>
@@ -7844,7 +8527,7 @@
 </p:sld>
 </file>
 
-<file path=ppt/slides/slide94.xml><?xml version="1.0" encoding="utf-8"?>
+<file path=ppt/slides/slide5.xml><?xml version="1.0" encoding="utf-8"?>
 <p:sld xmlns:a="http://schemas.openxmlformats.org/drawingml/2006/main" xmlns:r="http://schemas.openxmlformats.org/officeDocument/2006/relationships" xmlns:p="http://schemas.openxmlformats.org/presentationml/2006/main">
   <p:cSld>
     <p:spTree>
@@ -7924,7 +8607,7 @@
                 </a:solidFill>
                 <a:latin typeface="Cambria"/>
               </a:rPr>
-              <a:t>Bridge to the pairs — Pair Structure</a:t>
+              <a:t>Opening Container — the Eight Steps</a:t>
             </a:r>
           </a:p>
         </p:txBody>
@@ -7949,9 +8632,9 @@
           <a:bodyPr wrap="square" lIns="91440" tIns="91440" rIns="91440" bIns="91440"/>
           <a:lstStyle/>
           <a:p>
-            <a:pPr marL="274320" indent="-274320">
+            <a:pPr marL="342900" indent="-342900">
               <a:spcAft>
-                <a:spcPts val="900"/>
+                <a:spcPts val="650"/>
               </a:spcAft>
             </a:pPr>
             <a:r>
@@ -7961,7 +8644,7 @@
                 </a:solidFill>
                 <a:latin typeface="Calibri"/>
               </a:rPr>
-              <a:t>•  </a:t>
+              <a:t>1   </a:t>
             </a:r>
             <a:r>
               <a:rPr sz="2400" b="0" i="0">
@@ -7970,13 +8653,13 @@
                 </a:solidFill>
                 <a:latin typeface="Calibri"/>
               </a:rPr>
-              <a:t>Pair up in your family pair — parent with teen, from your own family, by default</a:t>
-            </a:r>
-          </a:p>
-          <a:p>
-            <a:pPr marL="274320" indent="-274320">
+              <a:t>Welcome — five minutes to open the container</a:t>
+            </a:r>
+          </a:p>
+          <a:p>
+            <a:pPr marL="342900" indent="-342900">
               <a:spcAft>
-                <a:spcPts val="900"/>
+                <a:spcPts val="650"/>
               </a:spcAft>
             </a:pPr>
             <a:r>
@@ -7986,7 +8669,7 @@
                 </a:solidFill>
                 <a:latin typeface="Calibri"/>
               </a:rPr>
-              <a:t>•  </a:t>
+              <a:t>2   </a:t>
             </a:r>
             <a:r>
               <a:rPr sz="2400" b="0" i="0">
@@ -7995,13 +8678,13 @@
                 </a:solidFill>
                 <a:latin typeface="Calibri"/>
               </a:rPr>
-              <a:t>One Reader, one Listener — Reader leads the six steps; after twelve minutes, switch</a:t>
-            </a:r>
-          </a:p>
-          <a:p>
-            <a:pPr marL="274320" indent="-274320">
+              <a:t>Phones silenced and put away</a:t>
+            </a:r>
+          </a:p>
+          <a:p>
+            <a:pPr marL="342900" indent="-342900">
               <a:spcAft>
-                <a:spcPts val="900"/>
+                <a:spcPts val="650"/>
               </a:spcAft>
             </a:pPr>
             <a:r>
@@ -8011,7 +8694,7 @@
                 </a:solidFill>
                 <a:latin typeface="Calibri"/>
               </a:rPr>
-              <a:t>•  </a:t>
+              <a:t>3   </a:t>
             </a:r>
             <a:r>
               <a:rPr sz="2400" b="0" i="0">
@@ -8020,13 +8703,13 @@
                 </a:solidFill>
                 <a:latin typeface="Calibri"/>
               </a:rPr>
-              <a:t>“Pairing up with your own parent or your own teen is not the consolation-prize version — it is the design working.”</a:t>
-            </a:r>
-          </a:p>
-          <a:p>
-            <a:pPr marL="274320" indent="-274320">
+              <a:t>Stand in a circle</a:t>
+            </a:r>
+          </a:p>
+          <a:p>
+            <a:pPr marL="342900" indent="-342900">
               <a:spcAft>
-                <a:spcPts val="900"/>
+                <a:spcPts val="650"/>
               </a:spcAft>
             </a:pPr>
             <a:r>
@@ -8036,7 +8719,7 @@
                 </a:solidFill>
                 <a:latin typeface="Calibri"/>
               </a:rPr>
-              <a:t>•  </a:t>
+              <a:t>4   </a:t>
             </a:r>
             <a:r>
               <a:rPr sz="2400" b="0" i="0">
@@ -8045,13 +8728,13 @@
                 </a:solidFill>
                 <a:latin typeface="Calibri"/>
               </a:rPr>
-              <a:t>Your leadsanion settles the pairs and completes any odd numbers</a:t>
-            </a:r>
-          </a:p>
-          <a:p>
-            <a:pPr marL="274320" indent="-274320">
+              <a:t>One-word check-in — how you actually are, right now</a:t>
+            </a:r>
+          </a:p>
+          <a:p>
+            <a:pPr marL="342900" indent="-342900">
               <a:spcAft>
-                <a:spcPts val="900"/>
+                <a:spcPts val="650"/>
               </a:spcAft>
             </a:pPr>
             <a:r>
@@ -8061,7 +8744,7 @@
                 </a:solidFill>
                 <a:latin typeface="Calibri"/>
               </a:rPr>
-              <a:t>•  </a:t>
+              <a:t>5   </a:t>
             </a:r>
             <a:r>
               <a:rPr sz="2400" b="0" i="0">
@@ -8070,7 +8753,82 @@
                 </a:solidFill>
                 <a:latin typeface="Calibri"/>
               </a:rPr>
-              <a:t>Small room (about ten or fewer)? Stay as one circle and pair up in place</a:t>
+              <a:t>Put out / bring in — set something down; bring a blessing in</a:t>
+            </a:r>
+          </a:p>
+          <a:p>
+            <a:pPr marL="342900" indent="-342900">
+              <a:spcAft>
+                <a:spcPts val="650"/>
+              </a:spcAft>
+            </a:pPr>
+            <a:r>
+              <a:rPr sz="2400" b="1" i="0">
+                <a:solidFill>
+                  <a:srgbClr val="97BC62"/>
+                </a:solidFill>
+                <a:latin typeface="Calibri"/>
+              </a:rPr>
+              <a:t>6   </a:t>
+            </a:r>
+            <a:r>
+              <a:rPr sz="2400" b="0" i="0">
+                <a:solidFill>
+                  <a:srgbClr val="222B22"/>
+                </a:solidFill>
+                <a:latin typeface="Calibri"/>
+              </a:rPr>
+              <a:t>Spoken commitment: “I am here. I am paying attention. I am willing to be moved.”</a:t>
+            </a:r>
+          </a:p>
+          <a:p>
+            <a:pPr marL="342900" indent="-342900">
+              <a:spcAft>
+                <a:spcPts val="650"/>
+              </a:spcAft>
+            </a:pPr>
+            <a:r>
+              <a:rPr sz="2400" b="1" i="0">
+                <a:solidFill>
+                  <a:srgbClr val="97BC62"/>
+                </a:solidFill>
+                <a:latin typeface="Calibri"/>
+              </a:rPr>
+              <a:t>7   </a:t>
+            </a:r>
+            <a:r>
+              <a:rPr sz="2400" b="0" i="0">
+                <a:solidFill>
+                  <a:srgbClr val="222B22"/>
+                </a:solidFill>
+                <a:latin typeface="Calibri"/>
+              </a:rPr>
+              <a:t>Opening prayer — “Holy Spirit, you are welcome here. Speak. We are listening.”</a:t>
+            </a:r>
+          </a:p>
+          <a:p>
+            <a:pPr marL="342900" indent="-342900">
+              <a:spcAft>
+                <a:spcPts val="650"/>
+              </a:spcAft>
+            </a:pPr>
+            <a:r>
+              <a:rPr sz="2400" b="1" i="0">
+                <a:solidFill>
+                  <a:srgbClr val="97BC62"/>
+                </a:solidFill>
+                <a:latin typeface="Calibri"/>
+              </a:rPr>
+              <a:t>8   </a:t>
+            </a:r>
+            <a:r>
+              <a:rPr sz="2400" b="0" i="0">
+                <a:solidFill>
+                  <a:srgbClr val="222B22"/>
+                </a:solidFill>
+                <a:latin typeface="Calibri"/>
+              </a:rPr>
+              <a:t>Sit. Begin.</a:t>
             </a:r>
           </a:p>
         </p:txBody>
@@ -8097,7 +8855,7 @@
           <a:p>
             <a:pPr algn="r"/>
             <a:r>
-              <a:t>94</a:t>
+              <a:t>89</a:t>
             </a:r>
             <a:endParaRPr sz="1000" b="1">
               <a:solidFill>
@@ -8116,7 +8874,7 @@
 </p:sld>
 </file>
 
-<file path=ppt/slides/slide95.xml><?xml version="1.0" encoding="utf-8"?>
+<file path=ppt/slides/slide6.xml><?xml version="1.0" encoding="utf-8"?>
 <p:sld xmlns:a="http://schemas.openxmlformats.org/drawingml/2006/main" xmlns:r="http://schemas.openxmlformats.org/officeDocument/2006/relationships" xmlns:p="http://schemas.openxmlformats.org/presentationml/2006/main">
   <p:cSld>
     <p:spTree>
@@ -8196,7 +8954,7 @@
                 </a:solidFill>
                 <a:latin typeface="Cambria"/>
               </a:rPr>
-              <a:t>PROAPT in Family Pairs</a:t>
+              <a:t>Re-Entry Check-In</a:t>
             </a:r>
           </a:p>
         </p:txBody>
@@ -8210,7 +8968,7 @@
         <p:spPr>
           <a:xfrm>
             <a:off x="822960" y="1554480"/>
-            <a:ext cx="10515600" cy="4892040"/>
+            <a:ext cx="6675120" cy="4892040"/>
           </a:xfrm>
           <a:prstGeom prst="rect">
             <a:avLst/>
@@ -8221,113 +8979,113 @@
           <a:bodyPr wrap="square" lIns="91440" tIns="91440" rIns="91440" bIns="91440"/>
           <a:lstStyle/>
           <a:p>
-            <a:pPr marL="342900" indent="-342900">
+            <a:pPr marL="274320" indent="-274320">
               <a:spcAft>
-                <a:spcPts val="750"/>
+                <a:spcPts val="900"/>
               </a:spcAft>
             </a:pPr>
             <a:r>
-              <a:rPr sz="2800" b="1" i="0">
+              <a:rPr sz="2400" b="1" i="0">
                 <a:solidFill>
                   <a:srgbClr val="97BC62"/>
                 </a:solidFill>
                 <a:latin typeface="Calibri"/>
               </a:rPr>
-              <a:t>1   </a:t>
-            </a:r>
-            <a:r>
-              <a:rPr sz="2800" b="0" i="0">
+              <a:t>•  </a:t>
+            </a:r>
+            <a:r>
+              <a:rPr sz="2400" b="0" i="0">
                 <a:solidFill>
                   <a:srgbClr val="222B22"/>
                 </a:solidFill>
                 <a:latin typeface="Calibri"/>
               </a:rPr>
-              <a:t>First pass (12 min) — Reader leads PROAPT; Listener works alongside without interrupting</a:t>
-            </a:r>
-          </a:p>
-          <a:p>
-            <a:pPr marL="342900" indent="-342900">
+              <a:t>First gathering of Quarter 2 — the container re-held slowly after the break</a:t>
+            </a:r>
+          </a:p>
+          <a:p>
+            <a:pPr marL="274320" indent="-274320">
               <a:spcAft>
-                <a:spcPts val="750"/>
+                <a:spcPts val="900"/>
               </a:spcAft>
             </a:pPr>
             <a:r>
-              <a:rPr sz="2800" b="1" i="0">
+              <a:rPr sz="2400" b="1" i="0">
                 <a:solidFill>
                   <a:srgbClr val="97BC62"/>
                 </a:solidFill>
                 <a:latin typeface="Calibri"/>
               </a:rPr>
-              <a:t>2   </a:t>
-            </a:r>
-            <a:r>
-              <a:rPr sz="2800" b="0" i="0">
+              <a:t>•  </a:t>
+            </a:r>
+            <a:r>
+              <a:rPr sz="2400" b="0" i="0">
                 <a:solidFill>
                   <a:srgbClr val="222B22"/>
                 </a:solidFill>
                 <a:latin typeface="Calibri"/>
               </a:rPr>
-              <a:t>Reader’s Tell at the end goes to the Listener — one sentence</a:t>
-            </a:r>
-          </a:p>
-          <a:p>
-            <a:pPr marL="342900" indent="-342900">
+              <a:t>“Take ninety seconds: one sentence about the Examen, or about how the break treated your practice, or anything that has shifted.”</a:t>
+            </a:r>
+          </a:p>
+          <a:p>
+            <a:pPr marL="685800" indent="-274320">
               <a:spcAft>
-                <a:spcPts val="750"/>
+                <a:spcPts val="700"/>
               </a:spcAft>
             </a:pPr>
             <a:r>
-              <a:rPr sz="2800" b="1" i="0">
+              <a:rPr sz="1800" b="1" i="0">
                 <a:solidFill>
                   <a:srgbClr val="97BC62"/>
                 </a:solidFill>
                 <a:latin typeface="Calibri"/>
               </a:rPr>
-              <a:t>3   </a:t>
-            </a:r>
-            <a:r>
-              <a:rPr sz="2800" b="0" i="0">
+              <a:t>–  </a:t>
+            </a:r>
+            <a:r>
+              <a:rPr sz="1800" b="0" i="1">
                 <a:solidFill>
                   <a:srgbClr val="222B22"/>
                 </a:solidFill>
                 <a:latin typeface="Calibri"/>
               </a:rPr>
-              <a:t>Switch roles — new passage or stay with Mark 1</a:t>
-            </a:r>
-          </a:p>
-          <a:p>
-            <a:pPr marL="342900" indent="-342900">
+              <a:t>“Thinned out over the break is a completely normal answer — the practice picks up where you are.”</a:t>
+            </a:r>
+          </a:p>
+          <a:p>
+            <a:pPr marL="274320" indent="-274320">
               <a:spcAft>
-                <a:spcPts val="750"/>
+                <a:spcPts val="900"/>
               </a:spcAft>
             </a:pPr>
             <a:r>
-              <a:rPr sz="2800" b="1" i="0">
+              <a:rPr sz="2400" b="1" i="0">
                 <a:solidFill>
                   <a:srgbClr val="97BC62"/>
                 </a:solidFill>
                 <a:latin typeface="Calibri"/>
               </a:rPr>
-              <a:t>4   </a:t>
-            </a:r>
-            <a:r>
-              <a:rPr sz="2800" b="0" i="0">
+              <a:t>•  </a:t>
+            </a:r>
+            <a:r>
+              <a:rPr sz="2400" b="0" i="0">
                 <a:solidFill>
                   <a:srgbClr val="222B22"/>
                 </a:solidFill>
                 <a:latin typeface="Calibri"/>
               </a:rPr>
-              <a:t>Second pass (12 min) — same structure, roles reversed</a:t>
+              <a:t>A parent starts the round — pass-anytime holds</a:t>
             </a:r>
           </a:p>
           <a:p>
             <a:pPr marL="274320" indent="-274320">
               <a:spcAft>
-                <a:spcPts val="750"/>
+                <a:spcPts val="900"/>
               </a:spcAft>
             </a:pPr>
             <a:r>
-              <a:rPr sz="2800" b="1" i="0">
+              <a:rPr sz="2400" b="1" i="0">
                 <a:solidFill>
                   <a:srgbClr val="97BC62"/>
                 </a:solidFill>
@@ -8336,38 +9094,13 @@
               <a:t>•  </a:t>
             </a:r>
             <a:r>
-              <a:rPr sz="2800" b="0" i="0">
+              <a:rPr sz="2400" b="0" i="0">
                 <a:solidFill>
                   <a:srgbClr val="222B22"/>
                 </a:solidFill>
                 <a:latin typeface="Calibri"/>
               </a:rPr>
-              <a:t>Stuck on Observe? “What’s one specific word or phrase that caught your attention?”</a:t>
-            </a:r>
-          </a:p>
-          <a:p>
-            <a:pPr marL="274320" indent="-274320">
-              <a:spcAft>
-                <a:spcPts val="750"/>
-              </a:spcAft>
-            </a:pPr>
-            <a:r>
-              <a:rPr sz="2800" b="1" i="0">
-                <a:solidFill>
-                  <a:srgbClr val="97BC62"/>
-                </a:solidFill>
-                <a:latin typeface="Calibri"/>
-              </a:rPr>
-              <a:t>•  </a:t>
-            </a:r>
-            <a:r>
-              <a:rPr sz="2800" b="0" i="0">
-                <a:solidFill>
-                  <a:srgbClr val="222B22"/>
-                </a:solidFill>
-                <a:latin typeface="Calibri"/>
-              </a:rPr>
-              <a:t>“Slow down. The Spirit isn’t in a hurry.” — and if you finish early, get reps with another passage</a:t>
+              <a:t>Week 6 still sitting heavy? “The team is here. Find one of us before you leave tonight.”</a:t>
             </a:r>
           </a:p>
         </p:txBody>
@@ -8394,7 +9127,7 @@
           <a:p>
             <a:pPr algn="r"/>
             <a:r>
-              <a:t>95</a:t>
+              <a:t>90</a:t>
             </a:r>
             <a:endParaRPr sz="1000" b="1">
               <a:solidFill>
@@ -8405,6 +9138,42 @@
           </a:p>
         </p:txBody>
       </p:sp>
+      <p:pic>
+        <p:nvPicPr>
+          <p:cNvPr id="32" name="Picture 32" descr="trail cairn - the weekly check-in"/>
+          <p:cNvPicPr>
+            <a:picLocks noChangeAspect="1"/>
+          </p:cNvPicPr>
+          <p:nvPr/>
+        </p:nvPicPr>
+        <p:blipFill>
+          <a:blip r:embed="rId3"/>
+          <a:stretch>
+            <a:fillRect/>
+          </a:stretch>
+        </p:blipFill>
+        <p:spPr>
+          <a:xfrm>
+            <a:off x="8103612" y="1463040"/>
+            <a:ext cx="3262379" cy="4892040"/>
+          </a:xfrm>
+          <a:prstGeom prst="rect">
+            <a:avLst/>
+          </a:prstGeom>
+          <a:ln w="76200">
+            <a:solidFill>
+              <a:srgbClr val="FFFFFF"/>
+            </a:solidFill>
+          </a:ln>
+          <a:effectLst>
+            <a:outerShdw blurRad="63500" dist="25400" dir="5400000" rotWithShape="0">
+              <a:srgbClr val="000000">
+                <a:alpha val="35000"/>
+              </a:srgbClr>
+            </a:outerShdw>
+          </a:effectLst>
+        </p:spPr>
+      </p:pic>
     </p:spTree>
   </p:cSld>
   <p:clrMapOvr>
@@ -8413,7 +9182,7 @@
 </p:sld>
 </file>
 
-<file path=ppt/slides/slide96.xml><?xml version="1.0" encoding="utf-8"?>
+<file path=ppt/slides/slide7.xml><?xml version="1.0" encoding="utf-8"?>
 <p:sld xmlns:a="http://schemas.openxmlformats.org/drawingml/2006/main" xmlns:r="http://schemas.openxmlformats.org/officeDocument/2006/relationships" xmlns:p="http://schemas.openxmlformats.org/presentationml/2006/main">
   <p:cSld>
     <p:spTree>
@@ -8493,21 +9262,21 @@
                 </a:solidFill>
                 <a:latin typeface="Cambria"/>
               </a:rPr>
-              <a:t>Tell Step — Sharing in the pair</a:t>
-            </a:r>
-          </a:p>
-        </p:txBody>
-      </p:sp>
-      <p:sp>
-        <p:nvSpPr>
-          <p:cNvPr id="4" name="TextBox 4"/>
+              <a:t>The Round, for All of Us</a:t>
+            </a:r>
+          </a:p>
+        </p:txBody>
+      </p:sp>
+      <p:sp>
+        <p:nvSpPr>
+          <p:cNvPr id="90" name="SlideNum"/>
           <p:cNvSpPr txBox="1"/>
           <p:nvPr/>
         </p:nvSpPr>
         <p:spPr>
           <a:xfrm>
-            <a:off x="822960" y="1554480"/>
-            <a:ext cx="10515600" cy="4892040"/>
+            <a:off x="11384280" y="6446520"/>
+            <a:ext cx="640080" cy="292608"/>
           </a:xfrm>
           <a:prstGeom prst="rect">
             <a:avLst/>
@@ -8515,158 +9284,12 @@
           <a:noFill/>
         </p:spPr>
         <p:txBody>
-          <a:bodyPr wrap="square" lIns="91440" tIns="91440" rIns="91440" bIns="91440"/>
-          <a:lstStyle/>
-          <a:p>
-            <a:pPr marL="274320" indent="-274320">
-              <a:spcAft>
-                <a:spcPts val="900"/>
-              </a:spcAft>
-            </a:pPr>
-            <a:r>
-              <a:rPr sz="2800" b="1" i="0">
-                <a:solidFill>
-                  <a:srgbClr val="97BC62"/>
-                </a:solidFill>
-                <a:latin typeface="Calibri"/>
-              </a:rPr>
-              <a:t>•  </a:t>
-            </a:r>
-            <a:r>
-              <a:rPr sz="2800" b="0" i="0">
-                <a:solidFill>
-                  <a:srgbClr val="222B22"/>
-                </a:solidFill>
-                <a:latin typeface="Calibri"/>
-              </a:rPr>
-              <a:t>Back in the family pair — each of us tells ONE specific thing we heard tonight</a:t>
-            </a:r>
-          </a:p>
-          <a:p>
-            <a:pPr marL="274320" indent="-274320">
-              <a:spcAft>
-                <a:spcPts val="900"/>
-              </a:spcAft>
-            </a:pPr>
-            <a:r>
-              <a:rPr sz="2800" b="1" i="0">
-                <a:solidFill>
-                  <a:srgbClr val="97BC62"/>
-                </a:solidFill>
-                <a:latin typeface="Calibri"/>
-              </a:rPr>
-              <a:t>•  </a:t>
-            </a:r>
-            <a:r>
-              <a:rPr sz="2800" b="0" i="0">
-                <a:solidFill>
-                  <a:srgbClr val="222B22"/>
-                </a:solidFill>
-                <a:latin typeface="Calibri"/>
-              </a:rPr>
-              <a:t>“Specific. One sentence. We listen to receive, like Week 3.”</a:t>
-            </a:r>
-          </a:p>
-          <a:p>
-            <a:pPr marL="274320" indent="-274320">
-              <a:spcAft>
-                <a:spcPts val="900"/>
-              </a:spcAft>
-            </a:pPr>
-            <a:r>
-              <a:rPr sz="2800" b="1" i="0">
-                <a:solidFill>
-                  <a:srgbClr val="97BC62"/>
-                </a:solidFill>
-                <a:latin typeface="Calibri"/>
-              </a:rPr>
-              <a:t>•  </a:t>
-            </a:r>
-            <a:r>
-              <a:rPr sz="2800" b="0" i="0">
-                <a:solidFill>
-                  <a:srgbClr val="222B22"/>
-                </a:solidFill>
-                <a:latin typeface="Calibri"/>
-              </a:rPr>
-              <a:t>A parent opens the round — arranged beforehand, never a cold call on a teen; pass-anytime holds</a:t>
-            </a:r>
-          </a:p>
-          <a:p>
-            <a:pPr marL="274320" indent="-274320">
-              <a:spcAft>
-                <a:spcPts val="900"/>
-              </a:spcAft>
-            </a:pPr>
-            <a:r>
-              <a:rPr sz="2800" b="1" i="0">
-                <a:solidFill>
-                  <a:srgbClr val="97BC62"/>
-                </a:solidFill>
-                <a:latin typeface="Calibri"/>
-              </a:rPr>
-              <a:t>•  </a:t>
-            </a:r>
-            <a:r>
-              <a:rPr sz="2800" b="0" i="0">
-                <a:solidFill>
-                  <a:srgbClr val="222B22"/>
-                </a:solidFill>
-                <a:latin typeface="Calibri"/>
-              </a:rPr>
-              <a:t>Receive without preaching — “We hear that.” “Thank you for naming that.”</a:t>
-            </a:r>
-          </a:p>
-          <a:p>
-            <a:pPr marL="274320" indent="-274320">
-              <a:spcAft>
-                <a:spcPts val="900"/>
-              </a:spcAft>
-            </a:pPr>
-            <a:r>
-              <a:rPr sz="2800" b="1" i="0">
-                <a:solidFill>
-                  <a:srgbClr val="97BC62"/>
-                </a:solidFill>
-                <a:latin typeface="Calibri"/>
-              </a:rPr>
-              <a:t>•  </a:t>
-            </a:r>
-            <a:r>
-              <a:rPr sz="2800" b="0" i="0">
-                <a:solidFill>
-                  <a:srgbClr val="222B22"/>
-                </a:solidFill>
-                <a:latin typeface="Calibri"/>
-              </a:rPr>
-              <a:t>“What we heard tonight is not just for us — it is given to us to walk out.”</a:t>
-            </a:r>
-          </a:p>
-        </p:txBody>
-      </p:sp>
-      <p:sp>
-        <p:nvSpPr>
-          <p:cNvPr id="90" name="SlideNum"/>
-          <p:cNvSpPr txBox="1"/>
-          <p:nvPr/>
-        </p:nvSpPr>
-        <p:spPr>
-          <a:xfrm>
-            <a:off x="11384280" y="6446520"/>
-            <a:ext cx="640080" cy="292608"/>
-          </a:xfrm>
-          <a:prstGeom prst="rect">
-            <a:avLst/>
-          </a:prstGeom>
-          <a:noFill/>
-        </p:spPr>
-        <p:txBody>
           <a:bodyPr wrap="none" lIns="0" tIns="0" rIns="45720" bIns="0" anchor="ctr"/>
           <a:lstStyle/>
           <a:p>
             <a:pPr algn="r"/>
             <a:r>
-              <a:t>96</a:t>
+              <a:t>91</a:t>
             </a:r>
             <a:endParaRPr sz="1000" b="1">
               <a:solidFill>
@@ -8674,6 +9297,137 @@
               </a:solidFill>
               <a:latin typeface="Calibri"/>
             </a:endParaRPr>
+          </a:p>
+        </p:txBody>
+      </p:sp>
+      <p:sp>
+        <p:nvSpPr>
+          <p:cNvPr id="290" name="RoomSelfRead"/>
+          <p:cNvSpPr txBox="1"/>
+          <p:nvPr/>
+        </p:nvSpPr>
+        <p:spPr>
+          <a:xfrm>
+            <a:off x="822960" y="1417320"/>
+            <a:ext cx="10515600" cy="5029200"/>
+          </a:xfrm>
+          <a:prstGeom prst="rect">
+            <a:avLst/>
+          </a:prstGeom>
+          <a:noFill/>
+        </p:spPr>
+        <p:txBody>
+          <a:bodyPr wrap="square"/>
+          <a:lstStyle/>
+          <a:p>
+            <a:pPr algn="l">
+              <a:spcAft>
+                <a:spcPts val="1300"/>
+              </a:spcAft>
+            </a:pPr>
+            <a:r>
+              <a:rPr sz="1900" b="0" i="0">
+                <a:solidFill>
+                  <a:srgbClr val="222B22"/>
+                </a:solidFill>
+                <a:latin typeface="Calibri"/>
+              </a:rPr>
+              <a:t>Same process as every week’s leader reflection — now for the group:</a:t>
+            </a:r>
+          </a:p>
+          <a:p>
+            <a:pPr algn="l">
+              <a:spcAft>
+                <a:spcPts val="1100"/>
+              </a:spcAft>
+            </a:pPr>
+            <a:r>
+              <a:rPr sz="2400" b="1" i="0">
+                <a:solidFill>
+                  <a:srgbClr val="97BC62"/>
+                </a:solidFill>
+                <a:latin typeface="Calibri"/>
+              </a:rPr>
+              <a:t>1   </a:t>
+            </a:r>
+            <a:r>
+              <a:rPr sz="2400" b="0" i="0">
+                <a:solidFill>
+                  <a:srgbClr val="222B22"/>
+                </a:solidFill>
+                <a:latin typeface="Calibri"/>
+              </a:rPr>
+              <a:t>What’s working well that we ought to keep doing next quarter?</a:t>
+            </a:r>
+          </a:p>
+          <a:p>
+            <a:pPr algn="l">
+              <a:spcAft>
+                <a:spcPts val="1100"/>
+              </a:spcAft>
+            </a:pPr>
+            <a:r>
+              <a:rPr sz="2400" b="1" i="0">
+                <a:solidFill>
+                  <a:srgbClr val="97BC62"/>
+                </a:solidFill>
+                <a:latin typeface="Calibri"/>
+              </a:rPr>
+              <a:t>2   </a:t>
+            </a:r>
+            <a:r>
+              <a:rPr sz="2400" b="0" i="0">
+                <a:solidFill>
+                  <a:srgbClr val="222B22"/>
+                </a:solidFill>
+                <a:latin typeface="Calibri"/>
+              </a:rPr>
+              <a:t>What could we do differently that would make things even better?</a:t>
+            </a:r>
+          </a:p>
+          <a:p>
+            <a:pPr algn="l">
+              <a:spcAft>
+                <a:spcPts val="1100"/>
+              </a:spcAft>
+            </a:pPr>
+            <a:r>
+              <a:rPr sz="2400" b="1" i="0">
+                <a:solidFill>
+                  <a:srgbClr val="97BC62"/>
+                </a:solidFill>
+                <a:latin typeface="Calibri"/>
+              </a:rPr>
+              <a:t>3   </a:t>
+            </a:r>
+            <a:r>
+              <a:rPr sz="2400" b="0" i="0">
+                <a:solidFill>
+                  <a:srgbClr val="222B22"/>
+                </a:solidFill>
+                <a:latin typeface="Calibri"/>
+              </a:rPr>
+              <a:t>What would you tell somebody else about what this group is like?</a:t>
+            </a:r>
+          </a:p>
+          <a:p>
+            <a:pPr algn="l">
+              <a:spcBef>
+                <a:spcPts val="1300"/>
+              </a:spcBef>
+              <a:spcAft>
+                <a:spcPts val="1000"/>
+              </a:spcAft>
+            </a:pPr>
+            <a:r>
+              <a:rPr sz="2000" b="0" i="1">
+                <a:solidFill>
+                  <a:srgbClr val="222B22"/>
+                </a:solidFill>
+                <a:latin typeface="Cambria"/>
+              </a:rPr>
+              <a:t>The leader answers first, same as always. Any question, any order.</a:t>
+            </a:r>
           </a:p>
         </p:txBody>
       </p:sp>
@@ -8685,7 +9439,7 @@
 </p:sld>
 </file>
 
-<file path=ppt/slides/slide97.xml><?xml version="1.0" encoding="utf-8"?>
+<file path=ppt/slides/slide8.xml><?xml version="1.0" encoding="utf-8"?>
 <p:sld xmlns:a="http://schemas.openxmlformats.org/drawingml/2006/main" xmlns:r="http://schemas.openxmlformats.org/officeDocument/2006/relationships" xmlns:p="http://schemas.openxmlformats.org/presentationml/2006/main">
   <p:cSld>
     <p:spTree>
@@ -8765,7 +9519,7 @@
                 </a:solidFill>
                 <a:latin typeface="Cambria"/>
               </a:rPr>
-              <a:t>Merge and Between-Session Practice</a:t>
+              <a:t>Romans 10:17 — The Chain</a:t>
             </a:r>
           </a:p>
         </p:txBody>
@@ -8778,8 +9532,8 @@
         </p:nvSpPr>
         <p:spPr>
           <a:xfrm>
-            <a:off x="822960" y="1554480"/>
-            <a:ext cx="6675120" cy="4892040"/>
+            <a:off x="822960" y="1600200"/>
+            <a:ext cx="5669280" cy="4572000"/>
           </a:xfrm>
           <a:prstGeom prst="rect">
             <a:avLst/>
@@ -8792,11 +9546,11 @@
           <a:p>
             <a:pPr marL="274320" indent="-274320">
               <a:spcAft>
-                <a:spcPts val="750"/>
+                <a:spcPts val="800"/>
               </a:spcAft>
             </a:pPr>
             <a:r>
-              <a:rPr sz="2200" b="1" i="0">
+              <a:rPr sz="2000" b="1" i="0">
                 <a:solidFill>
                   <a:srgbClr val="97BC62"/>
                 </a:solidFill>
@@ -8805,23 +9559,23 @@
               <a:t>•  </a:t>
             </a:r>
             <a:r>
-              <a:rPr sz="2200" b="0" i="0">
+              <a:rPr sz="2000" b="0" i="0">
                 <a:solidFill>
                   <a:srgbClr val="222B22"/>
                 </a:solidFill>
                 <a:latin typeface="Calibri"/>
               </a:rPr>
-              <a:t>One word each — not what you heard (that’s yours), but what tonight’s practice was like; a parent begins</a:t>
+              <a:t>One short verse, three steps: Word → Hearing → Faith — the order matters</a:t>
             </a:r>
           </a:p>
           <a:p>
             <a:pPr marL="274320" indent="-274320">
               <a:spcAft>
-                <a:spcPts val="750"/>
+                <a:spcPts val="800"/>
               </a:spcAft>
             </a:pPr>
             <a:r>
-              <a:rPr sz="2200" b="1" i="0">
+              <a:rPr sz="2000" b="1" i="0">
                 <a:solidFill>
                   <a:srgbClr val="97BC62"/>
                 </a:solidFill>
@@ -8830,23 +9584,23 @@
               <a:t>•  </a:t>
             </a:r>
             <a:r>
-              <a:rPr sz="2200" b="0" i="0">
+              <a:rPr sz="2000" b="0" i="0">
                 <a:solidFill>
                   <a:srgbClr val="222B22"/>
                 </a:solidFill>
                 <a:latin typeface="Calibri"/>
               </a:rPr>
-              <a:t>Daily PROAPT — one passage per day, every day, for the next week — five to ten minutes</a:t>
+              <a:t>Not trying harder, not emotional experience — faith is a fruit of a particular practice</a:t>
             </a:r>
           </a:p>
           <a:p>
             <a:pPr marL="274320" indent="-274320">
               <a:spcAft>
-                <a:spcPts val="750"/>
+                <a:spcPts val="800"/>
               </a:spcAft>
             </a:pPr>
             <a:r>
-              <a:rPr sz="2200" b="1" i="0">
+              <a:rPr sz="2000" b="1" i="0">
                 <a:solidFill>
                   <a:srgbClr val="97BC62"/>
                 </a:solidFill>
@@ -8855,23 +9609,23 @@
               <a:t>•  </a:t>
             </a:r>
             <a:r>
-              <a:rPr sz="2200" b="0" i="0">
+              <a:rPr sz="2000" b="0" i="0">
                 <a:solidFill>
                   <a:srgbClr val="222B22"/>
                 </a:solidFill>
                 <a:latin typeface="Calibri"/>
               </a:rPr>
-              <a:t>The journal Week 7 pages have a daily PROAPT template</a:t>
+              <a:t>How much of our “Bible time” is actually hearing, and how much is reading without hearing?</a:t>
             </a:r>
           </a:p>
           <a:p>
             <a:pPr marL="274320" indent="-274320">
               <a:spcAft>
-                <a:spcPts val="750"/>
+                <a:spcPts val="800"/>
               </a:spcAft>
             </a:pPr>
             <a:r>
-              <a:rPr sz="2200" b="1" i="0">
+              <a:rPr sz="2000" b="1" i="0">
                 <a:solidFill>
                   <a:srgbClr val="97BC62"/>
                 </a:solidFill>
@@ -8880,23 +9634,23 @@
               <a:t>•  </a:t>
             </a:r>
             <a:r>
-              <a:rPr sz="2200" b="0" i="0">
+              <a:rPr sz="2000" b="0" i="0">
                 <a:solidFill>
                   <a:srgbClr val="222B22"/>
                 </a:solidFill>
                 <a:latin typeface="Calibri"/>
               </a:rPr>
-              <a:t>Passage paths on the handout — the Gospel of Mark, the Sermon on the Mount, or Romans 8</a:t>
+              <a:t>Hearing is a skill — skills develop with practice</a:t>
             </a:r>
           </a:p>
           <a:p>
             <a:pPr marL="274320" indent="-274320">
               <a:spcAft>
-                <a:spcPts val="750"/>
+                <a:spcPts val="800"/>
               </a:spcAft>
             </a:pPr>
             <a:r>
-              <a:rPr sz="2200" b="1" i="0">
+              <a:rPr sz="2000" b="1" i="0">
                 <a:solidFill>
                   <a:srgbClr val="97BC62"/>
                 </a:solidFill>
@@ -8905,38 +9659,68 @@
               <a:t>•  </a:t>
             </a:r>
             <a:r>
-              <a:rPr sz="2200" b="0" i="0">
+              <a:rPr sz="2000" b="0" i="0">
                 <a:solidFill>
                   <a:srgbClr val="222B22"/>
                 </a:solidFill>
                 <a:latin typeface="Calibri"/>
               </a:rPr>
-              <a:t>Commit aloud to a specific time of day — “Morning before school” / “Right after dinner”</a:t>
-            </a:r>
-          </a:p>
-          <a:p>
-            <a:pPr marL="274320" indent="-274320">
+              <a:t>The practice: PROAPT — Pray, Read, Observe, Apply, Pray again, Tell (Truro Church, 1980s)</a:t>
+            </a:r>
+          </a:p>
+        </p:txBody>
+      </p:sp>
+      <p:sp>
+        <p:nvSpPr>
+          <p:cNvPr id="6" name="TextBox 6"/>
+          <p:cNvSpPr txBox="1"/>
+          <p:nvPr/>
+        </p:nvSpPr>
+        <p:spPr>
+          <a:xfrm>
+            <a:off x="6766560" y="1737360"/>
+            <a:ext cx="4663440" cy="2194560"/>
+          </a:xfrm>
+          <a:prstGeom prst="rect">
+            <a:avLst/>
+          </a:prstGeom>
+          <a:solidFill>
+            <a:srgbClr val="F1F6EC"/>
+          </a:solidFill>
+        </p:spPr>
+        <p:txBody>
+          <a:bodyPr wrap="square" lIns="91440" tIns="91440" rIns="91440" bIns="91440" anchor="ctr"/>
+          <a:lstStyle/>
+          <a:p>
+            <a:pPr>
               <a:spcAft>
-                <a:spcPts val="750"/>
+                <a:spcPts val="900"/>
               </a:spcAft>
             </a:pPr>
             <a:r>
-              <a:rPr sz="2200" b="1" i="0">
+              <a:rPr sz="1200" b="1" i="0">
                 <a:solidFill>
                   <a:srgbClr val="97BC62"/>
                 </a:solidFill>
                 <a:latin typeface="Calibri"/>
               </a:rPr>
-              <a:t>•  </a:t>
-            </a:r>
-            <a:r>
-              <a:rPr sz="2200" b="0" i="0">
+              <a:t>ROMANS 10:17</a:t>
+            </a:r>
+          </a:p>
+          <a:p>
+            <a:pPr>
+              <a:spcAft>
+                <a:spcPts val="600"/>
+              </a:spcAft>
+            </a:pPr>
+            <a:r>
+              <a:rPr sz="2400" b="0" i="1">
                 <a:solidFill>
                   <a:srgbClr val="222B22"/>
                 </a:solidFill>
-                <a:latin typeface="Calibri"/>
-              </a:rPr>
-              <a:t>“The chain only works if we work it.”</a:t>
+                <a:latin typeface="Cambria"/>
+              </a:rPr>
+              <a:t>“So faith comes from hearing, and hearing through the word of Christ.”</a:t>
             </a:r>
           </a:p>
         </p:txBody>
@@ -8963,7 +9747,7 @@
           <a:p>
             <a:pPr algn="r"/>
             <a:r>
-              <a:t>97</a:t>
+              <a:t>92</a:t>
             </a:r>
             <a:endParaRPr sz="1000" b="1">
               <a:solidFill>
@@ -8974,42 +9758,6 @@
           </a:p>
         </p:txBody>
       </p:sp>
-      <p:pic>
-        <p:nvPicPr>
-          <p:cNvPr id="33" name="Picture 33" descr="seedling - what grows between Wednesdays"/>
-          <p:cNvPicPr>
-            <a:picLocks noChangeAspect="1"/>
-          </p:cNvPicPr>
-          <p:nvPr/>
-        </p:nvPicPr>
-        <p:blipFill>
-          <a:blip r:embed="rId3"/>
-          <a:stretch>
-            <a:fillRect/>
-          </a:stretch>
-        </p:blipFill>
-        <p:spPr>
-          <a:xfrm>
-            <a:off x="8103612" y="1463040"/>
-            <a:ext cx="3262379" cy="4892040"/>
-          </a:xfrm>
-          <a:prstGeom prst="rect">
-            <a:avLst/>
-          </a:prstGeom>
-          <a:ln w="76200">
-            <a:solidFill>
-              <a:srgbClr val="FFFFFF"/>
-            </a:solidFill>
-          </a:ln>
-          <a:effectLst>
-            <a:outerShdw blurRad="63500" dist="25400" dir="5400000" rotWithShape="0">
-              <a:srgbClr val="000000">
-                <a:alpha val="35000"/>
-              </a:srgbClr>
-            </a:outerShdw>
-          </a:effectLst>
-        </p:spPr>
-      </p:pic>
     </p:spTree>
   </p:cSld>
   <p:clrMapOvr>
@@ -9018,7 +9766,7 @@
 </p:sld>
 </file>
 
-<file path=ppt/slides/slide98.xml><?xml version="1.0" encoding="utf-8"?>
+<file path=ppt/slides/slide9.xml><?xml version="1.0" encoding="utf-8"?>
 <p:sld xmlns:a="http://schemas.openxmlformats.org/drawingml/2006/main" xmlns:r="http://schemas.openxmlformats.org/officeDocument/2006/relationships" xmlns:p="http://schemas.openxmlformats.org/presentationml/2006/main">
   <p:cSld>
     <p:spTree>
@@ -9098,21 +9846,21 @@
                 </a:solidFill>
                 <a:latin typeface="Cambria"/>
               </a:rPr>
-              <a:t>Your Take-Home Card — This Session’s Practice</a:t>
-            </a:r>
-          </a:p>
-        </p:txBody>
-      </p:sp>
-      <p:sp>
-        <p:nvSpPr>
-          <p:cNvPr id="90" name="SlideNum"/>
+              <a:t>PROAPT Walked Together — Mark 1:14–20</a:t>
+            </a:r>
+          </a:p>
+        </p:txBody>
+      </p:sp>
+      <p:sp>
+        <p:nvSpPr>
+          <p:cNvPr id="4" name="TextBox 4"/>
           <p:cNvSpPr txBox="1"/>
           <p:nvPr/>
         </p:nvSpPr>
         <p:spPr>
           <a:xfrm>
-            <a:off x="11384280" y="6446520"/>
-            <a:ext cx="640080" cy="292608"/>
+            <a:off x="822960" y="1554480"/>
+            <a:ext cx="6675120" cy="4892040"/>
           </a:xfrm>
           <a:prstGeom prst="rect">
             <a:avLst/>
@@ -9120,12 +9868,183 @@
           <a:noFill/>
         </p:spPr>
         <p:txBody>
+          <a:bodyPr wrap="square" lIns="91440" tIns="91440" rIns="91440" bIns="91440"/>
+          <a:lstStyle/>
+          <a:p>
+            <a:pPr marL="342900" indent="-342900">
+              <a:spcAft>
+                <a:spcPts val="750"/>
+              </a:spcAft>
+            </a:pPr>
+            <a:r>
+              <a:rPr sz="2000" b="1" i="0">
+                <a:solidFill>
+                  <a:srgbClr val="97BC62"/>
+                </a:solidFill>
+                <a:latin typeface="Calibri"/>
+              </a:rPr>
+              <a:t>1   </a:t>
+            </a:r>
+            <a:r>
+              <a:rPr sz="2000" b="0" i="0">
+                <a:solidFill>
+                  <a:srgbClr val="222B22"/>
+                </a:solidFill>
+                <a:latin typeface="Calibri"/>
+              </a:rPr>
+              <a:t>Pray — “Holy Spirit, you are welcome here. Speak. We are listening.”</a:t>
+            </a:r>
+          </a:p>
+          <a:p>
+            <a:pPr marL="342900" indent="-342900">
+              <a:spcAft>
+                <a:spcPts val="750"/>
+              </a:spcAft>
+            </a:pPr>
+            <a:r>
+              <a:rPr sz="2000" b="1" i="0">
+                <a:solidFill>
+                  <a:srgbClr val="97BC62"/>
+                </a:solidFill>
+                <a:latin typeface="Calibri"/>
+              </a:rPr>
+              <a:t>2   </a:t>
+            </a:r>
+            <a:r>
+              <a:rPr sz="2000" b="0" i="0">
+                <a:solidFill>
+                  <a:srgbClr val="222B22"/>
+                </a:solidFill>
+                <a:latin typeface="Calibri"/>
+              </a:rPr>
+              <a:t>Read — slowly, to receive it; don’t analyze yet</a:t>
+            </a:r>
+          </a:p>
+          <a:p>
+            <a:pPr marL="342900" indent="-342900">
+              <a:spcAft>
+                <a:spcPts val="750"/>
+              </a:spcAft>
+            </a:pPr>
+            <a:r>
+              <a:rPr sz="2000" b="1" i="0">
+                <a:solidFill>
+                  <a:srgbClr val="97BC62"/>
+                </a:solidFill>
+                <a:latin typeface="Calibri"/>
+              </a:rPr>
+              <a:t>3   </a:t>
+            </a:r>
+            <a:r>
+              <a:rPr sz="2000" b="0" i="0">
+                <a:solidFill>
+                  <a:srgbClr val="222B22"/>
+                </a:solidFill>
+                <a:latin typeface="Calibri"/>
+              </a:rPr>
+              <a:t>Observe — two layers, in order: first the data (who, what, when, where — straight off the page), then the interpretation — what stands out or surprises you in it</a:t>
+            </a:r>
+          </a:p>
+          <a:p>
+            <a:pPr marL="342900" indent="-342900">
+              <a:spcAft>
+                <a:spcPts val="750"/>
+              </a:spcAft>
+            </a:pPr>
+            <a:r>
+              <a:rPr sz="2000" b="1" i="0">
+                <a:solidFill>
+                  <a:srgbClr val="97BC62"/>
+                </a:solidFill>
+                <a:latin typeface="Calibri"/>
+              </a:rPr>
+              <a:t>4   </a:t>
+            </a:r>
+            <a:r>
+              <a:rPr sz="2000" b="0" i="0">
+                <a:solidFill>
+                  <a:srgbClr val="222B22"/>
+                </a:solidFill>
+                <a:latin typeface="Calibri"/>
+              </a:rPr>
+              <a:t>Apply — “What does this passage mean FOR YOU, TODAY, in your specific life?” — logos becomes rhema</a:t>
+            </a:r>
+          </a:p>
+          <a:p>
+            <a:pPr marL="342900" indent="-342900">
+              <a:spcAft>
+                <a:spcPts val="750"/>
+              </a:spcAft>
+            </a:pPr>
+            <a:r>
+              <a:rPr sz="2000" b="1" i="0">
+                <a:solidFill>
+                  <a:srgbClr val="97BC62"/>
+                </a:solidFill>
+                <a:latin typeface="Calibri"/>
+              </a:rPr>
+              <a:t>5   </a:t>
+            </a:r>
+            <a:r>
+              <a:rPr sz="2000" b="0" i="0">
+                <a:solidFill>
+                  <a:srgbClr val="222B22"/>
+                </a:solidFill>
+                <a:latin typeface="Calibri"/>
+              </a:rPr>
+              <a:t>Pray again — tell God what you heard, what you are willing to do, what you’re struggling to be willing to do</a:t>
+            </a:r>
+          </a:p>
+          <a:p>
+            <a:pPr marL="342900" indent="-342900">
+              <a:spcAft>
+                <a:spcPts val="750"/>
+              </a:spcAft>
+            </a:pPr>
+            <a:r>
+              <a:rPr sz="2000" b="1" i="0">
+                <a:solidFill>
+                  <a:srgbClr val="97BC62"/>
+                </a:solidFill>
+                <a:latin typeface="Calibri"/>
+              </a:rPr>
+              <a:t>6   </a:t>
+            </a:r>
+            <a:r>
+              <a:rPr sz="2000" b="0" i="0">
+                <a:solidFill>
+                  <a:srgbClr val="222B22"/>
+                </a:solidFill>
+                <a:latin typeface="Calibri"/>
+              </a:rPr>
+              <a:t>Tell — the most-often-skipped step; hearing spoken aloud has a different staying power</a:t>
+            </a:r>
+          </a:p>
+        </p:txBody>
+      </p:sp>
+      <p:sp>
+        <p:nvSpPr>
+          <p:cNvPr id="90" name="SlideNum"/>
+          <p:cNvSpPr txBox="1"/>
+          <p:nvPr/>
+        </p:nvSpPr>
+        <p:spPr>
+          <a:xfrm>
+            <a:off x="11384280" y="6446520"/>
+            <a:ext cx="640080" cy="292608"/>
+          </a:xfrm>
+          <a:prstGeom prst="rect">
+            <a:avLst/>
+          </a:prstGeom>
+          <a:noFill/>
+        </p:spPr>
+        <p:txBody>
           <a:bodyPr wrap="none" lIns="0" tIns="0" rIns="45720" bIns="0" anchor="ctr"/>
           <a:lstStyle/>
           <a:p>
             <a:pPr algn="r"/>
             <a:r>
-              <a:t>98</a:t>
+              <a:t>93</a:t>
             </a:r>
             <a:endParaRPr sz="1000" b="1">
               <a:solidFill>
@@ -9138,7 +10057,7 @@
       </p:sp>
       <p:pic>
         <p:nvPicPr>
-          <p:cNvPr id="270" name="CardImage" descr="the Week 7 check-off card, as handed out"/>
+          <p:cNvPr id="91" name="Picture 91" descr="an old wooden boat left ashore among moss and pines"/>
           <p:cNvPicPr>
             <a:picLocks noChangeAspect="1"/>
           </p:cNvPicPr>
@@ -9152,374 +10071,8 @@
         </p:blipFill>
         <p:spPr>
           <a:xfrm>
-            <a:off x="1158087" y="1554480"/>
-            <a:ext cx="9875520" cy="4430989"/>
-          </a:xfrm>
-          <a:prstGeom prst="rect">
-            <a:avLst/>
-          </a:prstGeom>
-          <a:ln w="76200">
-            <a:solidFill>
-              <a:srgbClr val="FFFFFF"/>
-            </a:solidFill>
-          </a:ln>
-          <a:effectLst>
-            <a:outerShdw blurRad="63500" dist="25400" dir="5400000" rotWithShape="0">
-              <a:srgbClr val="000000">
-                <a:alpha val="35000"/>
-              </a:srgbClr>
-            </a:outerShdw>
-          </a:effectLst>
-        </p:spPr>
-      </p:pic>
-      <p:sp>
-        <p:nvSpPr>
-          <p:cNvPr id="271" name="Caption"/>
-          <p:cNvSpPr txBox="1"/>
-          <p:nvPr/>
-        </p:nvSpPr>
-        <p:spPr>
-          <a:xfrm>
-            <a:off x="822960" y="6168349"/>
-            <a:ext cx="10515600" cy="457200"/>
-          </a:xfrm>
-          <a:prstGeom prst="rect">
-            <a:avLst/>
-          </a:prstGeom>
-          <a:noFill/>
-        </p:spPr>
-        <p:txBody>
-          <a:bodyPr wrap="square"/>
-          <a:lstStyle/>
-          <a:p>
-            <a:pPr algn="ctr"/>
-            <a:r>
-              <a:rPr sz="1800" b="0" i="1">
-                <a:solidFill>
-                  <a:srgbClr val="222B22"/>
-                </a:solidFill>
-                <a:latin typeface="Calibri"/>
-              </a:rPr>
-              <a:t>Handed out now — fridge, mirror, journal pocket.</a:t>
-            </a:r>
-          </a:p>
-        </p:txBody>
-      </p:sp>
-    </p:spTree>
-  </p:cSld>
-  <p:clrMapOvr>
-    <a:masterClrMapping/>
-  </p:clrMapOvr>
-</p:sld>
-</file>
-
-<file path=ppt/slides/slide99.xml><?xml version="1.0" encoding="utf-8"?>
-<p:sld xmlns:a="http://schemas.openxmlformats.org/drawingml/2006/main" xmlns:r="http://schemas.openxmlformats.org/officeDocument/2006/relationships" xmlns:p="http://schemas.openxmlformats.org/presentationml/2006/main">
-  <p:cSld>
-    <p:spTree>
-      <p:nvGrpSpPr>
-        <p:cNvPr id="1" name=""/>
-        <p:cNvGrpSpPr/>
-        <p:nvPr/>
-      </p:nvGrpSpPr>
-      <p:grpSpPr>
-        <a:xfrm>
-          <a:off x="0" y="0"/>
-          <a:ext cx="0" cy="0"/>
-          <a:chOff x="0" y="0"/>
-          <a:chExt cx="0" cy="0"/>
-        </a:xfrm>
-      </p:grpSpPr>
-      <p:sp>
-        <p:nvSpPr>
-          <p:cNvPr id="2" name="Rectangle 1"/>
-          <p:cNvSpPr/>
-          <p:nvPr/>
-        </p:nvSpPr>
-        <p:spPr>
-          <a:xfrm>
-            <a:off x="0" y="0"/>
-            <a:ext cx="12191695" cy="6858000"/>
-          </a:xfrm>
-          <a:prstGeom prst="rect">
-            <a:avLst/>
-          </a:prstGeom>
-          <a:solidFill>
-            <a:srgbClr val="FFFFFF"/>
-          </a:solidFill>
-          <a:ln>
-            <a:noFill/>
-          </a:ln>
-        </p:spPr>
-        <p:txBody>
-          <a:bodyPr/>
-          <a:lstStyle/>
-          <a:p>
-            <a:endParaRPr/>
-          </a:p>
-        </p:txBody>
-      </p:sp>
-      <p:sp>
-        <p:nvSpPr>
-          <p:cNvPr id="3" name="TextBox 2"/>
-          <p:cNvSpPr txBox="1"/>
-          <p:nvPr/>
-        </p:nvSpPr>
-        <p:spPr>
-          <a:xfrm>
-            <a:off x="822960" y="502920"/>
-            <a:ext cx="10515600" cy="822960"/>
-          </a:xfrm>
-          <a:prstGeom prst="rect">
-            <a:avLst/>
-          </a:prstGeom>
-          <a:noFill/>
-        </p:spPr>
-        <p:txBody>
-          <a:bodyPr wrap="square">
-            <a:spAutoFit/>
-          </a:bodyPr>
-          <a:lstStyle/>
-          <a:p>
-            <a:pPr algn="l">
-              <a:spcAft>
-                <a:spcPts val="600"/>
-              </a:spcAft>
-            </a:pPr>
-            <a:r>
-              <a:rPr sz="2800" b="1" i="0">
-                <a:solidFill>
-                  <a:srgbClr val="2C5F2D"/>
-                </a:solidFill>
-                <a:latin typeface="Cambria"/>
-              </a:rPr>
-              <a:t>The Leader Feedback Round</a:t>
-            </a:r>
-          </a:p>
-        </p:txBody>
-      </p:sp>
-      <p:sp>
-        <p:nvSpPr>
-          <p:cNvPr id="4" name="TextBox 4"/>
-          <p:cNvSpPr txBox="1"/>
-          <p:nvPr/>
-        </p:nvSpPr>
-        <p:spPr>
-          <a:xfrm>
-            <a:off x="822960" y="1554480"/>
-            <a:ext cx="6675120" cy="4892040"/>
-          </a:xfrm>
-          <a:prstGeom prst="rect">
-            <a:avLst/>
-          </a:prstGeom>
-          <a:noFill/>
-        </p:spPr>
-        <p:txBody>
-          <a:bodyPr wrap="square" lIns="91440" tIns="91440" rIns="91440" bIns="91440"/>
-          <a:lstStyle/>
-          <a:p>
-            <a:pPr marL="274320" indent="-274320">
-              <a:spcAft>
-                <a:spcPts val="900"/>
-              </a:spcAft>
-            </a:pPr>
-            <a:r>
-              <a:rPr sz="2800" b="1" i="0">
-                <a:solidFill>
-                  <a:srgbClr val="97BC62"/>
-                </a:solidFill>
-                <a:latin typeface="Calibri"/>
-              </a:rPr>
-              <a:t>•  </a:t>
-            </a:r>
-            <a:r>
-              <a:rPr sz="2800" b="0" i="0">
-                <a:solidFill>
-                  <a:srgbClr val="222B22"/>
-                </a:solidFill>
-                <a:latin typeface="Calibri"/>
-              </a:rPr>
-              <a:t>Two rounds, same as every session — the container holder first, then the content presenter: three things each</a:t>
-            </a:r>
-          </a:p>
-          <a:p>
-            <a:pPr marL="685800" indent="-274320">
-              <a:spcAft>
-                <a:spcPts val="700"/>
-              </a:spcAft>
-            </a:pPr>
-            <a:r>
-              <a:rPr sz="2000" b="1" i="0">
-                <a:solidFill>
-                  <a:srgbClr val="97BC62"/>
-                </a:solidFill>
-                <a:latin typeface="Calibri"/>
-              </a:rPr>
-              <a:t>–  </a:t>
-            </a:r>
-            <a:r>
-              <a:rPr sz="2000" b="0" i="1">
-                <a:solidFill>
-                  <a:srgbClr val="222B22"/>
-                </a:solidFill>
-                <a:latin typeface="Calibri"/>
-              </a:rPr>
-              <a:t>“What I think went well tonight: ______”</a:t>
-            </a:r>
-          </a:p>
-          <a:p>
-            <a:pPr marL="685800" indent="-274320">
-              <a:spcAft>
-                <a:spcPts val="700"/>
-              </a:spcAft>
-            </a:pPr>
-            <a:r>
-              <a:rPr sz="2000" b="1" i="0">
-                <a:solidFill>
-                  <a:srgbClr val="97BC62"/>
-                </a:solidFill>
-                <a:latin typeface="Calibri"/>
-              </a:rPr>
-              <a:t>–  </a:t>
-            </a:r>
-            <a:r>
-              <a:rPr sz="2000" b="0" i="1">
-                <a:solidFill>
-                  <a:srgbClr val="222B22"/>
-                </a:solidFill>
-                <a:latin typeface="Calibri"/>
-              </a:rPr>
-              <a:t>“What I’d do differently next time: ______”</a:t>
-            </a:r>
-          </a:p>
-          <a:p>
-            <a:pPr marL="685800" indent="-274320">
-              <a:spcAft>
-                <a:spcPts val="700"/>
-              </a:spcAft>
-            </a:pPr>
-            <a:r>
-              <a:rPr sz="2000" b="1" i="0">
-                <a:solidFill>
-                  <a:srgbClr val="97BC62"/>
-                </a:solidFill>
-                <a:latin typeface="Calibri"/>
-              </a:rPr>
-              <a:t>–  </a:t>
-            </a:r>
-            <a:r>
-              <a:rPr sz="2000" b="0" i="1">
-                <a:solidFill>
-                  <a:srgbClr val="222B22"/>
-                </a:solidFill>
-                <a:latin typeface="Calibri"/>
-              </a:rPr>
-              <a:t>“If I were to teach tonight’s process to someone, I would tell them: ______”</a:t>
-            </a:r>
-          </a:p>
-          <a:p>
-            <a:pPr marL="274320" indent="-274320">
-              <a:spcAft>
-                <a:spcPts val="900"/>
-              </a:spcAft>
-            </a:pPr>
-            <a:r>
-              <a:rPr sz="2800" b="1" i="0">
-                <a:solidFill>
-                  <a:srgbClr val="97BC62"/>
-                </a:solidFill>
-                <a:latin typeface="Calibri"/>
-              </a:rPr>
-              <a:t>•  </a:t>
-            </a:r>
-            <a:r>
-              <a:rPr sz="2800" b="0" i="0">
-                <a:solidFill>
-                  <a:srgbClr val="222B22"/>
-                </a:solidFill>
-                <a:latin typeface="Calibri"/>
-              </a:rPr>
-              <a:t>Then the room — the same two questions about tonight</a:t>
-            </a:r>
-          </a:p>
-          <a:p>
-            <a:pPr marL="274320" indent="-274320">
-              <a:spcAft>
-                <a:spcPts val="900"/>
-              </a:spcAft>
-            </a:pPr>
-            <a:r>
-              <a:rPr sz="2800" b="1" i="0">
-                <a:solidFill>
-                  <a:srgbClr val="97BC62"/>
-                </a:solidFill>
-                <a:latin typeface="Calibri"/>
-              </a:rPr>
-              <a:t>•  </a:t>
-            </a:r>
-            <a:r>
-              <a:rPr sz="2800" b="0" i="0">
-                <a:solidFill>
-                  <a:srgbClr val="222B22"/>
-                </a:solidFill>
-                <a:latin typeface="Calibri"/>
-              </a:rPr>
-              <a:t>The leaders receive without defending — “thank you” is the whole response</a:t>
-            </a:r>
-          </a:p>
-        </p:txBody>
-      </p:sp>
-      <p:sp>
-        <p:nvSpPr>
-          <p:cNvPr id="90" name="SlideNum"/>
-          <p:cNvSpPr txBox="1"/>
-          <p:nvPr/>
-        </p:nvSpPr>
-        <p:spPr>
-          <a:xfrm>
-            <a:off x="11384280" y="6446520"/>
-            <a:ext cx="640080" cy="292608"/>
-          </a:xfrm>
-          <a:prstGeom prst="rect">
-            <a:avLst/>
-          </a:prstGeom>
-          <a:noFill/>
-        </p:spPr>
-        <p:txBody>
-          <a:bodyPr wrap="none" lIns="0" tIns="0" rIns="45720" bIns="0" anchor="ctr"/>
-          <a:lstStyle/>
-          <a:p>
-            <a:pPr algn="r"/>
-            <a:r>
-              <a:t>99</a:t>
-            </a:r>
-            <a:endParaRPr sz="1000" b="1">
-              <a:solidFill>
-                <a:srgbClr val="7A8A6E"/>
-              </a:solidFill>
-              <a:latin typeface="Calibri"/>
-            </a:endParaRPr>
-          </a:p>
-        </p:txBody>
-      </p:sp>
-      <p:pic>
-        <p:nvPicPr>
-          <p:cNvPr id="33" name="Picture 33" descr="compass on the trail - the weekly bearing check"/>
-          <p:cNvPicPr>
-            <a:picLocks noChangeAspect="1"/>
-          </p:cNvPicPr>
-          <p:nvPr/>
-        </p:nvPicPr>
-        <p:blipFill>
-          <a:blip r:embed="rId3"/>
-          <a:stretch>
-            <a:fillRect/>
-          </a:stretch>
-        </p:blipFill>
-        <p:spPr>
-          <a:xfrm>
-            <a:off x="8106160" y="1463040"/>
-            <a:ext cx="3259831" cy="4892040"/>
+            <a:off x="7696962" y="1463040"/>
+            <a:ext cx="3669030" cy="4892040"/>
           </a:xfrm>
           <a:prstGeom prst="rect">
             <a:avLst/>

--- a/_implementation-notes/evening-series/FotH Evening Session 7 Slides DRAFT v1.pptx
+++ b/_implementation-notes/evening-series/FotH Evening Session 7 Slides DRAFT v1.pptx
@@ -5094,7 +5094,7 @@
                 </a:solidFill>
                 <a:latin typeface="Cambria"/>
               </a:rPr>
-              <a:t>Bridge to the pairs — Pair Structure</a:t>
+              <a:t>PROAPT Walked Together — Mark 1:14–20</a:t>
             </a:r>
           </a:p>
         </p:txBody>
@@ -5108,7 +5108,7 @@
         <p:spPr>
           <a:xfrm>
             <a:off x="822960" y="1554480"/>
-            <a:ext cx="10515600" cy="4892040"/>
+            <a:ext cx="6675120" cy="4892040"/>
           </a:xfrm>
           <a:prstGeom prst="rect">
             <a:avLst/>
@@ -5119,128 +5119,153 @@
           <a:bodyPr wrap="square" lIns="91440" tIns="91440" rIns="91440" bIns="91440"/>
           <a:lstStyle/>
           <a:p>
-            <a:pPr marL="274320" indent="-274320">
+            <a:pPr marL="342900" indent="-342900">
               <a:spcAft>
-                <a:spcPts val="900"/>
+                <a:spcPts val="750"/>
               </a:spcAft>
             </a:pPr>
             <a:r>
-              <a:rPr sz="2400" b="1" i="0">
+              <a:rPr sz="2000" b="1" i="0">
                 <a:solidFill>
                   <a:srgbClr val="97BC62"/>
                 </a:solidFill>
                 <a:latin typeface="Calibri"/>
               </a:rPr>
-              <a:t>•  </a:t>
-            </a:r>
-            <a:r>
-              <a:rPr sz="2400" b="0" i="0">
+              <a:t>1   </a:t>
+            </a:r>
+            <a:r>
+              <a:rPr sz="2000" b="0" i="0">
                 <a:solidFill>
                   <a:srgbClr val="222B22"/>
                 </a:solidFill>
                 <a:latin typeface="Calibri"/>
               </a:rPr>
-              <a:t>Pair up in your family pair — parent with teen, from your own family, by default</a:t>
-            </a:r>
-          </a:p>
-          <a:p>
-            <a:pPr marL="274320" indent="-274320">
+              <a:t>Pray — “Holy Spirit, you are welcome here. Speak. We are listening.”</a:t>
+            </a:r>
+          </a:p>
+          <a:p>
+            <a:pPr marL="342900" indent="-342900">
               <a:spcAft>
-                <a:spcPts val="900"/>
+                <a:spcPts val="750"/>
               </a:spcAft>
             </a:pPr>
             <a:r>
-              <a:rPr sz="2400" b="1" i="0">
+              <a:rPr sz="2000" b="1" i="0">
                 <a:solidFill>
                   <a:srgbClr val="97BC62"/>
                 </a:solidFill>
                 <a:latin typeface="Calibri"/>
               </a:rPr>
-              <a:t>•  </a:t>
-            </a:r>
-            <a:r>
-              <a:rPr sz="2400" b="0" i="0">
+              <a:t>2   </a:t>
+            </a:r>
+            <a:r>
+              <a:rPr sz="2000" b="0" i="0">
                 <a:solidFill>
                   <a:srgbClr val="222B22"/>
                 </a:solidFill>
                 <a:latin typeface="Calibri"/>
               </a:rPr>
-              <a:t>One Reader, one Listener — Reader leads the six steps; after twelve minutes, switch</a:t>
-            </a:r>
-          </a:p>
-          <a:p>
-            <a:pPr marL="274320" indent="-274320">
+              <a:t>Read — slowly, to receive it; don’t analyze yet</a:t>
+            </a:r>
+          </a:p>
+          <a:p>
+            <a:pPr marL="342900" indent="-342900">
               <a:spcAft>
-                <a:spcPts val="900"/>
+                <a:spcPts val="750"/>
               </a:spcAft>
             </a:pPr>
             <a:r>
-              <a:rPr sz="2400" b="1" i="0">
+              <a:rPr sz="2000" b="1" i="0">
                 <a:solidFill>
                   <a:srgbClr val="97BC62"/>
                 </a:solidFill>
                 <a:latin typeface="Calibri"/>
               </a:rPr>
-              <a:t>•  </a:t>
-            </a:r>
-            <a:r>
-              <a:rPr sz="2400" b="0" i="0">
+              <a:t>3   </a:t>
+            </a:r>
+            <a:r>
+              <a:rPr sz="2000" b="0" i="0">
                 <a:solidFill>
                   <a:srgbClr val="222B22"/>
                 </a:solidFill>
                 <a:latin typeface="Calibri"/>
               </a:rPr>
-              <a:t>“Pairing up with your own parent or your own teen is not the consolation-prize version — it is the design working.”</a:t>
-            </a:r>
-          </a:p>
-          <a:p>
-            <a:pPr marL="274320" indent="-274320">
+              <a:t>Observe — two layers, in order: first the data (who, what, when, where — straight off the page), then the interpretation — what stands out or surprises you in it</a:t>
+            </a:r>
+          </a:p>
+          <a:p>
+            <a:pPr marL="342900" indent="-342900">
               <a:spcAft>
-                <a:spcPts val="900"/>
+                <a:spcPts val="750"/>
               </a:spcAft>
             </a:pPr>
             <a:r>
-              <a:rPr sz="2400" b="1" i="0">
+              <a:rPr sz="2000" b="1" i="0">
                 <a:solidFill>
                   <a:srgbClr val="97BC62"/>
                 </a:solidFill>
                 <a:latin typeface="Calibri"/>
               </a:rPr>
-              <a:t>•  </a:t>
-            </a:r>
-            <a:r>
-              <a:rPr sz="2400" b="0" i="0">
+              <a:t>4   </a:t>
+            </a:r>
+            <a:r>
+              <a:rPr sz="2000" b="0" i="0">
                 <a:solidFill>
                   <a:srgbClr val="222B22"/>
                 </a:solidFill>
                 <a:latin typeface="Calibri"/>
               </a:rPr>
-              <a:t>Your leadsanion settles the pairs and completes any odd numbers</a:t>
-            </a:r>
-          </a:p>
-          <a:p>
-            <a:pPr marL="274320" indent="-274320">
+              <a:t>Apply — “What does this passage mean FOR YOU, TODAY, in your specific life?” — logos becomes rhema</a:t>
+            </a:r>
+          </a:p>
+          <a:p>
+            <a:pPr marL="342900" indent="-342900">
               <a:spcAft>
-                <a:spcPts val="900"/>
+                <a:spcPts val="750"/>
               </a:spcAft>
             </a:pPr>
             <a:r>
-              <a:rPr sz="2400" b="1" i="0">
+              <a:rPr sz="2000" b="1" i="0">
                 <a:solidFill>
                   <a:srgbClr val="97BC62"/>
                 </a:solidFill>
                 <a:latin typeface="Calibri"/>
               </a:rPr>
-              <a:t>•  </a:t>
-            </a:r>
-            <a:r>
-              <a:rPr sz="2400" b="0" i="0">
+              <a:t>5   </a:t>
+            </a:r>
+            <a:r>
+              <a:rPr sz="2000" b="0" i="0">
                 <a:solidFill>
                   <a:srgbClr val="222B22"/>
                 </a:solidFill>
                 <a:latin typeface="Calibri"/>
               </a:rPr>
-              <a:t>Small room (about ten or fewer)? Stay as one circle and pair up in place</a:t>
+              <a:t>Pray again — tell God what you heard, what you are willing to do, what you’re struggling to be willing to do</a:t>
+            </a:r>
+          </a:p>
+          <a:p>
+            <a:pPr marL="342900" indent="-342900">
+              <a:spcAft>
+                <a:spcPts val="750"/>
+              </a:spcAft>
+            </a:pPr>
+            <a:r>
+              <a:rPr sz="2000" b="1" i="0">
+                <a:solidFill>
+                  <a:srgbClr val="97BC62"/>
+                </a:solidFill>
+                <a:latin typeface="Calibri"/>
+              </a:rPr>
+              <a:t>6   </a:t>
+            </a:r>
+            <a:r>
+              <a:rPr sz="2000" b="0" i="0">
+                <a:solidFill>
+                  <a:srgbClr val="222B22"/>
+                </a:solidFill>
+                <a:latin typeface="Calibri"/>
+              </a:rPr>
+              <a:t>Tell — the most-often-skipped step; hearing spoken aloud has a different staying power</a:t>
             </a:r>
           </a:p>
         </p:txBody>
@@ -5267,7 +5292,7 @@
           <a:p>
             <a:pPr algn="r"/>
             <a:r>
-              <a:t>94</a:t>
+              <a:t>93</a:t>
             </a:r>
             <a:endParaRPr sz="1000" b="1">
               <a:solidFill>
@@ -5278,6 +5303,42 @@
           </a:p>
         </p:txBody>
       </p:sp>
+      <p:pic>
+        <p:nvPicPr>
+          <p:cNvPr id="91" name="Picture 91" descr="an old wooden boat left ashore among moss and pines"/>
+          <p:cNvPicPr>
+            <a:picLocks noChangeAspect="1"/>
+          </p:cNvPicPr>
+          <p:nvPr/>
+        </p:nvPicPr>
+        <p:blipFill>
+          <a:blip r:embed="rId3"/>
+          <a:stretch>
+            <a:fillRect/>
+          </a:stretch>
+        </p:blipFill>
+        <p:spPr>
+          <a:xfrm>
+            <a:off x="7696962" y="1463040"/>
+            <a:ext cx="3669030" cy="4892040"/>
+          </a:xfrm>
+          <a:prstGeom prst="rect">
+            <a:avLst/>
+          </a:prstGeom>
+          <a:ln w="76200">
+            <a:solidFill>
+              <a:srgbClr val="FFFFFF"/>
+            </a:solidFill>
+          </a:ln>
+          <a:effectLst>
+            <a:outerShdw blurRad="63500" dist="25400" dir="5400000" rotWithShape="0">
+              <a:srgbClr val="000000">
+                <a:alpha val="35000"/>
+              </a:srgbClr>
+            </a:outerShdw>
+          </a:effectLst>
+        </p:spPr>
+      </p:pic>
     </p:spTree>
   </p:cSld>
   <p:clrMapOvr>
@@ -5366,7 +5427,7 @@
                 </a:solidFill>
                 <a:latin typeface="Cambria"/>
               </a:rPr>
-              <a:t>PROAPT in Family Pairs</a:t>
+              <a:t>Bridge to the pairs — Pair Structure</a:t>
             </a:r>
           </a:p>
         </p:txBody>
@@ -5391,113 +5452,113 @@
           <a:bodyPr wrap="square" lIns="91440" tIns="91440" rIns="91440" bIns="91440"/>
           <a:lstStyle/>
           <a:p>
-            <a:pPr marL="342900" indent="-342900">
+            <a:pPr marL="274320" indent="-274320">
               <a:spcAft>
-                <a:spcPts val="750"/>
+                <a:spcPts val="900"/>
               </a:spcAft>
             </a:pPr>
             <a:r>
-              <a:rPr sz="2800" b="1" i="0">
+              <a:rPr sz="2400" b="1" i="0">
                 <a:solidFill>
                   <a:srgbClr val="97BC62"/>
                 </a:solidFill>
                 <a:latin typeface="Calibri"/>
               </a:rPr>
-              <a:t>1   </a:t>
-            </a:r>
-            <a:r>
-              <a:rPr sz="2800" b="0" i="0">
+              <a:t>•  </a:t>
+            </a:r>
+            <a:r>
+              <a:rPr sz="2400" b="0" i="0">
                 <a:solidFill>
                   <a:srgbClr val="222B22"/>
                 </a:solidFill>
                 <a:latin typeface="Calibri"/>
               </a:rPr>
-              <a:t>First pass (12 min) — Reader leads PROAPT; Listener works alongside without interrupting</a:t>
-            </a:r>
-          </a:p>
-          <a:p>
-            <a:pPr marL="342900" indent="-342900">
+              <a:t>Pair up in your family pair — parent with teen, from your own family, by default</a:t>
+            </a:r>
+          </a:p>
+          <a:p>
+            <a:pPr marL="274320" indent="-274320">
               <a:spcAft>
-                <a:spcPts val="750"/>
+                <a:spcPts val="900"/>
               </a:spcAft>
             </a:pPr>
             <a:r>
-              <a:rPr sz="2800" b="1" i="0">
+              <a:rPr sz="2400" b="1" i="0">
                 <a:solidFill>
                   <a:srgbClr val="97BC62"/>
                 </a:solidFill>
                 <a:latin typeface="Calibri"/>
               </a:rPr>
-              <a:t>2   </a:t>
-            </a:r>
-            <a:r>
-              <a:rPr sz="2800" b="0" i="0">
+              <a:t>•  </a:t>
+            </a:r>
+            <a:r>
+              <a:rPr sz="2400" b="0" i="0">
                 <a:solidFill>
                   <a:srgbClr val="222B22"/>
                 </a:solidFill>
                 <a:latin typeface="Calibri"/>
               </a:rPr>
-              <a:t>Reader’s Tell at the end goes to the Listener — one sentence</a:t>
-            </a:r>
-          </a:p>
-          <a:p>
-            <a:pPr marL="342900" indent="-342900">
+              <a:t>One Reader, one Listener — Reader leads the six steps; after twelve minutes, switch</a:t>
+            </a:r>
+          </a:p>
+          <a:p>
+            <a:pPr marL="274320" indent="-274320">
               <a:spcAft>
-                <a:spcPts val="750"/>
+                <a:spcPts val="900"/>
               </a:spcAft>
             </a:pPr>
             <a:r>
-              <a:rPr sz="2800" b="1" i="0">
+              <a:rPr sz="2400" b="1" i="0">
                 <a:solidFill>
                   <a:srgbClr val="97BC62"/>
                 </a:solidFill>
                 <a:latin typeface="Calibri"/>
               </a:rPr>
-              <a:t>3   </a:t>
-            </a:r>
-            <a:r>
-              <a:rPr sz="2800" b="0" i="0">
+              <a:t>•  </a:t>
+            </a:r>
+            <a:r>
+              <a:rPr sz="2400" b="0" i="0">
                 <a:solidFill>
                   <a:srgbClr val="222B22"/>
                 </a:solidFill>
                 <a:latin typeface="Calibri"/>
               </a:rPr>
-              <a:t>Switch roles — new passage or stay with Mark 1</a:t>
-            </a:r>
-          </a:p>
-          <a:p>
-            <a:pPr marL="342900" indent="-342900">
+              <a:t>“Pairing up with your own parent or your own teen is not the consolation-prize version — it is the design working.”</a:t>
+            </a:r>
+          </a:p>
+          <a:p>
+            <a:pPr marL="274320" indent="-274320">
               <a:spcAft>
-                <a:spcPts val="750"/>
+                <a:spcPts val="900"/>
               </a:spcAft>
             </a:pPr>
             <a:r>
-              <a:rPr sz="2800" b="1" i="0">
+              <a:rPr sz="2400" b="1" i="0">
                 <a:solidFill>
                   <a:srgbClr val="97BC62"/>
                 </a:solidFill>
                 <a:latin typeface="Calibri"/>
               </a:rPr>
-              <a:t>4   </a:t>
-            </a:r>
-            <a:r>
-              <a:rPr sz="2800" b="0" i="0">
+              <a:t>•  </a:t>
+            </a:r>
+            <a:r>
+              <a:rPr sz="2400" b="0" i="0">
                 <a:solidFill>
                   <a:srgbClr val="222B22"/>
                 </a:solidFill>
                 <a:latin typeface="Calibri"/>
               </a:rPr>
-              <a:t>Second pass (12 min) — same structure, roles reversed</a:t>
+              <a:t>Your leadsanion settles the pairs and completes any odd numbers</a:t>
             </a:r>
           </a:p>
           <a:p>
             <a:pPr marL="274320" indent="-274320">
               <a:spcAft>
-                <a:spcPts val="750"/>
+                <a:spcPts val="900"/>
               </a:spcAft>
             </a:pPr>
             <a:r>
-              <a:rPr sz="2800" b="1" i="0">
+              <a:rPr sz="2400" b="1" i="0">
                 <a:solidFill>
                   <a:srgbClr val="97BC62"/>
                 </a:solidFill>
@@ -5506,38 +5567,13 @@
               <a:t>•  </a:t>
             </a:r>
             <a:r>
-              <a:rPr sz="2800" b="0" i="0">
+              <a:rPr sz="2400" b="0" i="0">
                 <a:solidFill>
                   <a:srgbClr val="222B22"/>
                 </a:solidFill>
                 <a:latin typeface="Calibri"/>
               </a:rPr>
-              <a:t>Stuck on Observe? “What’s one specific word or phrase that caught your attention?”</a:t>
-            </a:r>
-          </a:p>
-          <a:p>
-            <a:pPr marL="274320" indent="-274320">
-              <a:spcAft>
-                <a:spcPts val="750"/>
-              </a:spcAft>
-            </a:pPr>
-            <a:r>
-              <a:rPr sz="2800" b="1" i="0">
-                <a:solidFill>
-                  <a:srgbClr val="97BC62"/>
-                </a:solidFill>
-                <a:latin typeface="Calibri"/>
-              </a:rPr>
-              <a:t>•  </a:t>
-            </a:r>
-            <a:r>
-              <a:rPr sz="2800" b="0" i="0">
-                <a:solidFill>
-                  <a:srgbClr val="222B22"/>
-                </a:solidFill>
-                <a:latin typeface="Calibri"/>
-              </a:rPr>
-              <a:t>“Slow down. The Spirit isn’t in a hurry.” — and if you finish early, get reps with another passage</a:t>
+              <a:t>Small room (about ten or fewer)? Stay as one circle and pair up in place</a:t>
             </a:r>
           </a:p>
         </p:txBody>
@@ -5564,7 +5600,7 @@
           <a:p>
             <a:pPr algn="r"/>
             <a:r>
-              <a:t>95</a:t>
+              <a:t>94</a:t>
             </a:r>
             <a:endParaRPr sz="1000" b="1">
               <a:solidFill>
@@ -5663,7 +5699,7 @@
                 </a:solidFill>
                 <a:latin typeface="Cambria"/>
               </a:rPr>
-              <a:t>Tell Step — Sharing in the pair</a:t>
+              <a:t>PROAPT in Family Pairs</a:t>
             </a:r>
           </a:p>
         </p:txBody>
@@ -5688,9 +5724,109 @@
           <a:bodyPr wrap="square" lIns="91440" tIns="91440" rIns="91440" bIns="91440"/>
           <a:lstStyle/>
           <a:p>
+            <a:pPr marL="342900" indent="-342900">
+              <a:spcAft>
+                <a:spcPts val="750"/>
+              </a:spcAft>
+            </a:pPr>
+            <a:r>
+              <a:rPr sz="2800" b="1" i="0">
+                <a:solidFill>
+                  <a:srgbClr val="97BC62"/>
+                </a:solidFill>
+                <a:latin typeface="Calibri"/>
+              </a:rPr>
+              <a:t>1   </a:t>
+            </a:r>
+            <a:r>
+              <a:rPr sz="2800" b="0" i="0">
+                <a:solidFill>
+                  <a:srgbClr val="222B22"/>
+                </a:solidFill>
+                <a:latin typeface="Calibri"/>
+              </a:rPr>
+              <a:t>First pass (12 min) — Reader leads PROAPT; Listener works alongside without interrupting</a:t>
+            </a:r>
+          </a:p>
+          <a:p>
+            <a:pPr marL="342900" indent="-342900">
+              <a:spcAft>
+                <a:spcPts val="750"/>
+              </a:spcAft>
+            </a:pPr>
+            <a:r>
+              <a:rPr sz="2800" b="1" i="0">
+                <a:solidFill>
+                  <a:srgbClr val="97BC62"/>
+                </a:solidFill>
+                <a:latin typeface="Calibri"/>
+              </a:rPr>
+              <a:t>2   </a:t>
+            </a:r>
+            <a:r>
+              <a:rPr sz="2800" b="0" i="0">
+                <a:solidFill>
+                  <a:srgbClr val="222B22"/>
+                </a:solidFill>
+                <a:latin typeface="Calibri"/>
+              </a:rPr>
+              <a:t>Reader’s Tell at the end goes to the Listener — one sentence</a:t>
+            </a:r>
+          </a:p>
+          <a:p>
+            <a:pPr marL="342900" indent="-342900">
+              <a:spcAft>
+                <a:spcPts val="750"/>
+              </a:spcAft>
+            </a:pPr>
+            <a:r>
+              <a:rPr sz="2800" b="1" i="0">
+                <a:solidFill>
+                  <a:srgbClr val="97BC62"/>
+                </a:solidFill>
+                <a:latin typeface="Calibri"/>
+              </a:rPr>
+              <a:t>3   </a:t>
+            </a:r>
+            <a:r>
+              <a:rPr sz="2800" b="0" i="0">
+                <a:solidFill>
+                  <a:srgbClr val="222B22"/>
+                </a:solidFill>
+                <a:latin typeface="Calibri"/>
+              </a:rPr>
+              <a:t>Switch roles — new passage or stay with Mark 1</a:t>
+            </a:r>
+          </a:p>
+          <a:p>
+            <a:pPr marL="342900" indent="-342900">
+              <a:spcAft>
+                <a:spcPts val="750"/>
+              </a:spcAft>
+            </a:pPr>
+            <a:r>
+              <a:rPr sz="2800" b="1" i="0">
+                <a:solidFill>
+                  <a:srgbClr val="97BC62"/>
+                </a:solidFill>
+                <a:latin typeface="Calibri"/>
+              </a:rPr>
+              <a:t>4   </a:t>
+            </a:r>
+            <a:r>
+              <a:rPr sz="2800" b="0" i="0">
+                <a:solidFill>
+                  <a:srgbClr val="222B22"/>
+                </a:solidFill>
+                <a:latin typeface="Calibri"/>
+              </a:rPr>
+              <a:t>Second pass (12 min) — same structure, roles reversed</a:t>
+            </a:r>
+          </a:p>
+          <a:p>
             <a:pPr marL="274320" indent="-274320">
               <a:spcAft>
-                <a:spcPts val="900"/>
+                <a:spcPts val="750"/>
               </a:spcAft>
             </a:pPr>
             <a:r>
@@ -5709,13 +5845,13 @@
                 </a:solidFill>
                 <a:latin typeface="Calibri"/>
               </a:rPr>
-              <a:t>Back in the family pair — each of us tells ONE specific thing we heard tonight</a:t>
+              <a:t>Stuck on Observe? “What’s one specific word or phrase that caught your attention?”</a:t>
             </a:r>
           </a:p>
           <a:p>
             <a:pPr marL="274320" indent="-274320">
               <a:spcAft>
-                <a:spcPts val="900"/>
+                <a:spcPts val="750"/>
               </a:spcAft>
             </a:pPr>
             <a:r>
@@ -5734,82 +5870,7 @@
                 </a:solidFill>
                 <a:latin typeface="Calibri"/>
               </a:rPr>
-              <a:t>“Specific. One sentence. We listen to receive, like Week 3.”</a:t>
-            </a:r>
-          </a:p>
-          <a:p>
-            <a:pPr marL="274320" indent="-274320">
-              <a:spcAft>
-                <a:spcPts val="900"/>
-              </a:spcAft>
-            </a:pPr>
-            <a:r>
-              <a:rPr sz="2800" b="1" i="0">
-                <a:solidFill>
-                  <a:srgbClr val="97BC62"/>
-                </a:solidFill>
-                <a:latin typeface="Calibri"/>
-              </a:rPr>
-              <a:t>•  </a:t>
-            </a:r>
-            <a:r>
-              <a:rPr sz="2800" b="0" i="0">
-                <a:solidFill>
-                  <a:srgbClr val="222B22"/>
-                </a:solidFill>
-                <a:latin typeface="Calibri"/>
-              </a:rPr>
-              <a:t>A parent opens the round — arranged beforehand, never a cold call on a teen; pass-anytime holds</a:t>
-            </a:r>
-          </a:p>
-          <a:p>
-            <a:pPr marL="274320" indent="-274320">
-              <a:spcAft>
-                <a:spcPts val="900"/>
-              </a:spcAft>
-            </a:pPr>
-            <a:r>
-              <a:rPr sz="2800" b="1" i="0">
-                <a:solidFill>
-                  <a:srgbClr val="97BC62"/>
-                </a:solidFill>
-                <a:latin typeface="Calibri"/>
-              </a:rPr>
-              <a:t>•  </a:t>
-            </a:r>
-            <a:r>
-              <a:rPr sz="2800" b="0" i="0">
-                <a:solidFill>
-                  <a:srgbClr val="222B22"/>
-                </a:solidFill>
-                <a:latin typeface="Calibri"/>
-              </a:rPr>
-              <a:t>Receive without preaching — “We hear that.” “Thank you for naming that.”</a:t>
-            </a:r>
-          </a:p>
-          <a:p>
-            <a:pPr marL="274320" indent="-274320">
-              <a:spcAft>
-                <a:spcPts val="900"/>
-              </a:spcAft>
-            </a:pPr>
-            <a:r>
-              <a:rPr sz="2800" b="1" i="0">
-                <a:solidFill>
-                  <a:srgbClr val="97BC62"/>
-                </a:solidFill>
-                <a:latin typeface="Calibri"/>
-              </a:rPr>
-              <a:t>•  </a:t>
-            </a:r>
-            <a:r>
-              <a:rPr sz="2800" b="0" i="0">
-                <a:solidFill>
-                  <a:srgbClr val="222B22"/>
-                </a:solidFill>
-                <a:latin typeface="Calibri"/>
-              </a:rPr>
-              <a:t>“What we heard tonight is not just for us — it is given to us to walk out.”</a:t>
+              <a:t>“Slow down. The Spirit isn’t in a hurry.” — and if you finish early, get reps with another passage</a:t>
             </a:r>
           </a:p>
         </p:txBody>
@@ -5836,7 +5897,7 @@
           <a:p>
             <a:pPr algn="r"/>
             <a:r>
-              <a:t>96</a:t>
+              <a:t>95</a:t>
             </a:r>
             <a:endParaRPr sz="1000" b="1">
               <a:solidFill>
@@ -5935,7 +5996,7 @@
                 </a:solidFill>
                 <a:latin typeface="Cambria"/>
               </a:rPr>
-              <a:t>Merge and Homework Practice</a:t>
+              <a:t>Tell Step — Sharing in the pair</a:t>
             </a:r>
           </a:p>
         </p:txBody>
@@ -5949,7 +6010,7 @@
         <p:spPr>
           <a:xfrm>
             <a:off x="822960" y="1554480"/>
-            <a:ext cx="6675120" cy="4892040"/>
+            <a:ext cx="10515600" cy="4892040"/>
           </a:xfrm>
           <a:prstGeom prst="rect">
             <a:avLst/>
@@ -5962,11 +6023,11 @@
           <a:p>
             <a:pPr marL="274320" indent="-274320">
               <a:spcAft>
-                <a:spcPts val="750"/>
+                <a:spcPts val="900"/>
               </a:spcAft>
             </a:pPr>
             <a:r>
-              <a:rPr sz="2200" b="1" i="0">
+              <a:rPr sz="2800" b="1" i="0">
                 <a:solidFill>
                   <a:srgbClr val="97BC62"/>
                 </a:solidFill>
@@ -5975,23 +6036,23 @@
               <a:t>•  </a:t>
             </a:r>
             <a:r>
-              <a:rPr sz="2200" b="0" i="0">
+              <a:rPr sz="2800" b="0" i="0">
                 <a:solidFill>
                   <a:srgbClr val="222B22"/>
                 </a:solidFill>
                 <a:latin typeface="Calibri"/>
               </a:rPr>
-              <a:t>One word each — not what you heard (that’s yours), but what tonight’s practice was like; a parent begins</a:t>
+              <a:t>Back in the family pair — each of us tells ONE specific thing we heard tonight</a:t>
             </a:r>
           </a:p>
           <a:p>
             <a:pPr marL="274320" indent="-274320">
               <a:spcAft>
-                <a:spcPts val="750"/>
+                <a:spcPts val="900"/>
               </a:spcAft>
             </a:pPr>
             <a:r>
-              <a:rPr sz="2200" b="1" i="0">
+              <a:rPr sz="2800" b="1" i="0">
                 <a:solidFill>
                   <a:srgbClr val="97BC62"/>
                 </a:solidFill>
@@ -6000,23 +6061,23 @@
               <a:t>•  </a:t>
             </a:r>
             <a:r>
-              <a:rPr sz="2200" b="0" i="0">
+              <a:rPr sz="2800" b="0" i="0">
                 <a:solidFill>
                   <a:srgbClr val="222B22"/>
                 </a:solidFill>
                 <a:latin typeface="Calibri"/>
               </a:rPr>
-              <a:t>Daily PROAPT — one passage per day, every day, for the next week — five to ten minutes</a:t>
+              <a:t>“Specific. One sentence. We listen to receive, like Week 3.”</a:t>
             </a:r>
           </a:p>
           <a:p>
             <a:pPr marL="274320" indent="-274320">
               <a:spcAft>
-                <a:spcPts val="750"/>
+                <a:spcPts val="900"/>
               </a:spcAft>
             </a:pPr>
             <a:r>
-              <a:rPr sz="2200" b="1" i="0">
+              <a:rPr sz="2800" b="1" i="0">
                 <a:solidFill>
                   <a:srgbClr val="97BC62"/>
                 </a:solidFill>
@@ -6025,23 +6086,23 @@
               <a:t>•  </a:t>
             </a:r>
             <a:r>
-              <a:rPr sz="2200" b="0" i="0">
+              <a:rPr sz="2800" b="0" i="0">
                 <a:solidFill>
                   <a:srgbClr val="222B22"/>
                 </a:solidFill>
                 <a:latin typeface="Calibri"/>
               </a:rPr>
-              <a:t>The journal Week 7 pages have a daily PROAPT template</a:t>
+              <a:t>A parent opens the round — arranged beforehand, never a cold call on a teen; pass-anytime holds</a:t>
             </a:r>
           </a:p>
           <a:p>
             <a:pPr marL="274320" indent="-274320">
               <a:spcAft>
-                <a:spcPts val="750"/>
+                <a:spcPts val="900"/>
               </a:spcAft>
             </a:pPr>
             <a:r>
-              <a:rPr sz="2200" b="1" i="0">
+              <a:rPr sz="2800" b="1" i="0">
                 <a:solidFill>
                   <a:srgbClr val="97BC62"/>
                 </a:solidFill>
@@ -6050,23 +6111,23 @@
               <a:t>•  </a:t>
             </a:r>
             <a:r>
-              <a:rPr sz="2200" b="0" i="0">
+              <a:rPr sz="2800" b="0" i="0">
                 <a:solidFill>
                   <a:srgbClr val="222B22"/>
                 </a:solidFill>
                 <a:latin typeface="Calibri"/>
               </a:rPr>
-              <a:t>Passage paths on the handout — the Gospel of Mark, the Sermon on the Mount, or Romans 8</a:t>
+              <a:t>Receive without preaching — “We hear that.” “Thank you for naming that.”</a:t>
             </a:r>
           </a:p>
           <a:p>
             <a:pPr marL="274320" indent="-274320">
               <a:spcAft>
-                <a:spcPts val="750"/>
+                <a:spcPts val="900"/>
               </a:spcAft>
             </a:pPr>
             <a:r>
-              <a:rPr sz="2200" b="1" i="0">
+              <a:rPr sz="2800" b="1" i="0">
                 <a:solidFill>
                   <a:srgbClr val="97BC62"/>
                 </a:solidFill>
@@ -6075,38 +6136,13 @@
               <a:t>•  </a:t>
             </a:r>
             <a:r>
-              <a:rPr sz="2200" b="0" i="0">
+              <a:rPr sz="2800" b="0" i="0">
                 <a:solidFill>
                   <a:srgbClr val="222B22"/>
                 </a:solidFill>
                 <a:latin typeface="Calibri"/>
               </a:rPr>
-              <a:t>Commit aloud to a specific time of day — “Morning before school” / “Right after dinner”</a:t>
-            </a:r>
-          </a:p>
-          <a:p>
-            <a:pPr marL="274320" indent="-274320">
-              <a:spcAft>
-                <a:spcPts val="750"/>
-              </a:spcAft>
-            </a:pPr>
-            <a:r>
-              <a:rPr sz="2200" b="1" i="0">
-                <a:solidFill>
-                  <a:srgbClr val="97BC62"/>
-                </a:solidFill>
-                <a:latin typeface="Calibri"/>
-              </a:rPr>
-              <a:t>•  </a:t>
-            </a:r>
-            <a:r>
-              <a:rPr sz="2200" b="0" i="0">
-                <a:solidFill>
-                  <a:srgbClr val="222B22"/>
-                </a:solidFill>
-                <a:latin typeface="Calibri"/>
-              </a:rPr>
-              <a:t>“The chain only works if we work it.”</a:t>
+              <a:t>“What we heard tonight is not just for us — it is given to us to walk out.”</a:t>
             </a:r>
           </a:p>
         </p:txBody>
@@ -6133,7 +6169,7 @@
           <a:p>
             <a:pPr algn="r"/>
             <a:r>
-              <a:t>97</a:t>
+              <a:t>96</a:t>
             </a:r>
             <a:endParaRPr sz="1000" b="1">
               <a:solidFill>
@@ -6144,42 +6180,6 @@
           </a:p>
         </p:txBody>
       </p:sp>
-      <p:pic>
-        <p:nvPicPr>
-          <p:cNvPr id="33" name="Picture 33" descr="seedling - what grows between Wednesdays"/>
-          <p:cNvPicPr>
-            <a:picLocks noChangeAspect="1"/>
-          </p:cNvPicPr>
-          <p:nvPr/>
-        </p:nvPicPr>
-        <p:blipFill>
-          <a:blip r:embed="rId3"/>
-          <a:stretch>
-            <a:fillRect/>
-          </a:stretch>
-        </p:blipFill>
-        <p:spPr>
-          <a:xfrm>
-            <a:off x="8103612" y="1463040"/>
-            <a:ext cx="3262379" cy="4892040"/>
-          </a:xfrm>
-          <a:prstGeom prst="rect">
-            <a:avLst/>
-          </a:prstGeom>
-          <a:ln w="76200">
-            <a:solidFill>
-              <a:srgbClr val="FFFFFF"/>
-            </a:solidFill>
-          </a:ln>
-          <a:effectLst>
-            <a:outerShdw blurRad="63500" dist="25400" dir="5400000" rotWithShape="0">
-              <a:srgbClr val="000000">
-                <a:alpha val="35000"/>
-              </a:srgbClr>
-            </a:outerShdw>
-          </a:effectLst>
-        </p:spPr>
-      </p:pic>
     </p:spTree>
   </p:cSld>
   <p:clrMapOvr>
@@ -6188,7 +6188,7 @@
 </p:sld>
 </file>
 
-<file path=ppt/slides/slide15.xml><?xml version="1.0" encoding="utf-8"?>
+<file path=ppt/slides/slide14.xml><?xml version="1.0" encoding="utf-8"?>
 <p:sld xmlns:a="http://schemas.openxmlformats.org/drawingml/2006/main" xmlns:r="http://schemas.openxmlformats.org/officeDocument/2006/relationships" xmlns:p="http://schemas.openxmlformats.org/presentationml/2006/main">
   <p:cSld>
     <p:spTree>
@@ -6268,7 +6268,7 @@
                 </a:solidFill>
                 <a:latin typeface="Cambria"/>
               </a:rPr>
-              <a:t>The Leader Feedback Round</a:t>
+              <a:t>Merge and Homework Practice</a:t>
             </a:r>
           </a:p>
         </p:txBody>
@@ -6295,11 +6295,11 @@
           <a:p>
             <a:pPr marL="274320" indent="-274320">
               <a:spcAft>
-                <a:spcPts val="900"/>
+                <a:spcPts val="750"/>
               </a:spcAft>
             </a:pPr>
             <a:r>
-              <a:rPr sz="2800" b="1" i="0">
+              <a:rPr sz="2200" b="1" i="0">
                 <a:solidFill>
                   <a:srgbClr val="97BC62"/>
                 </a:solidFill>
@@ -6308,98 +6308,98 @@
               <a:t>•  </a:t>
             </a:r>
             <a:r>
-              <a:rPr sz="2800" b="0" i="0">
+              <a:rPr sz="2200" b="0" i="0">
                 <a:solidFill>
                   <a:srgbClr val="222B22"/>
                 </a:solidFill>
                 <a:latin typeface="Calibri"/>
               </a:rPr>
-              <a:t>Two rounds, same as every session — the container holder first, then the content presenter: three things each</a:t>
-            </a:r>
-          </a:p>
-          <a:p>
-            <a:pPr marL="685800" indent="-274320">
+              <a:t>One word each — not what you heard (that’s yours), but what tonight’s practice was like; a parent begins</a:t>
+            </a:r>
+          </a:p>
+          <a:p>
+            <a:pPr marL="274320" indent="-274320">
               <a:spcAft>
-                <a:spcPts val="700"/>
+                <a:spcPts val="750"/>
               </a:spcAft>
             </a:pPr>
             <a:r>
-              <a:rPr sz="2000" b="1" i="0">
+              <a:rPr sz="2200" b="1" i="0">
                 <a:solidFill>
                   <a:srgbClr val="97BC62"/>
                 </a:solidFill>
                 <a:latin typeface="Calibri"/>
               </a:rPr>
-              <a:t>–  </a:t>
-            </a:r>
-            <a:r>
-              <a:rPr sz="2000" b="0" i="1">
+              <a:t>•  </a:t>
+            </a:r>
+            <a:r>
+              <a:rPr sz="2200" b="0" i="0">
                 <a:solidFill>
                   <a:srgbClr val="222B22"/>
                 </a:solidFill>
                 <a:latin typeface="Calibri"/>
               </a:rPr>
-              <a:t>“What I think went well tonight: ______”</a:t>
-            </a:r>
-          </a:p>
-          <a:p>
-            <a:pPr marL="685800" indent="-274320">
+              <a:t>Daily PROAPT — one passage per day, every day, for the next week — five to ten minutes</a:t>
+            </a:r>
+          </a:p>
+          <a:p>
+            <a:pPr marL="274320" indent="-274320">
               <a:spcAft>
-                <a:spcPts val="700"/>
+                <a:spcPts val="750"/>
               </a:spcAft>
             </a:pPr>
             <a:r>
-              <a:rPr sz="2000" b="1" i="0">
+              <a:rPr sz="2200" b="1" i="0">
                 <a:solidFill>
                   <a:srgbClr val="97BC62"/>
                 </a:solidFill>
                 <a:latin typeface="Calibri"/>
               </a:rPr>
-              <a:t>–  </a:t>
-            </a:r>
-            <a:r>
-              <a:rPr sz="2000" b="0" i="1">
+              <a:t>•  </a:t>
+            </a:r>
+            <a:r>
+              <a:rPr sz="2200" b="0" i="0">
                 <a:solidFill>
                   <a:srgbClr val="222B22"/>
                 </a:solidFill>
                 <a:latin typeface="Calibri"/>
               </a:rPr>
-              <a:t>“What I’d do differently next time: ______”</a:t>
-            </a:r>
-          </a:p>
-          <a:p>
-            <a:pPr marL="685800" indent="-274320">
+              <a:t>The journal Week 7 pages have a daily PROAPT template</a:t>
+            </a:r>
+          </a:p>
+          <a:p>
+            <a:pPr marL="274320" indent="-274320">
               <a:spcAft>
-                <a:spcPts val="700"/>
+                <a:spcPts val="750"/>
               </a:spcAft>
             </a:pPr>
             <a:r>
-              <a:rPr sz="2000" b="1" i="0">
+              <a:rPr sz="2200" b="1" i="0">
                 <a:solidFill>
                   <a:srgbClr val="97BC62"/>
                 </a:solidFill>
                 <a:latin typeface="Calibri"/>
               </a:rPr>
-              <a:t>–  </a:t>
-            </a:r>
-            <a:r>
-              <a:rPr sz="2000" b="0" i="1">
+              <a:t>•  </a:t>
+            </a:r>
+            <a:r>
+              <a:rPr sz="2200" b="0" i="0">
                 <a:solidFill>
                   <a:srgbClr val="222B22"/>
                 </a:solidFill>
                 <a:latin typeface="Calibri"/>
               </a:rPr>
-              <a:t>“If I were to teach tonight’s process to someone, I would tell them: ______”</a:t>
+              <a:t>Passage paths on the handout — the Gospel of Mark, the Sermon on the Mount, or Romans 8</a:t>
             </a:r>
           </a:p>
           <a:p>
             <a:pPr marL="274320" indent="-274320">
               <a:spcAft>
-                <a:spcPts val="900"/>
+                <a:spcPts val="750"/>
               </a:spcAft>
             </a:pPr>
             <a:r>
-              <a:rPr sz="2800" b="1" i="0">
+              <a:rPr sz="2200" b="1" i="0">
                 <a:solidFill>
                   <a:srgbClr val="97BC62"/>
                 </a:solidFill>
@@ -6408,23 +6408,23 @@
               <a:t>•  </a:t>
             </a:r>
             <a:r>
-              <a:rPr sz="2800" b="0" i="0">
+              <a:rPr sz="2200" b="0" i="0">
                 <a:solidFill>
                   <a:srgbClr val="222B22"/>
                 </a:solidFill>
                 <a:latin typeface="Calibri"/>
               </a:rPr>
-              <a:t>Then the room — the same two questions about tonight</a:t>
+              <a:t>Commit aloud to a specific time of day — “Morning before school” / “Right after dinner”</a:t>
             </a:r>
           </a:p>
           <a:p>
             <a:pPr marL="274320" indent="-274320">
               <a:spcAft>
-                <a:spcPts val="900"/>
+                <a:spcPts val="750"/>
               </a:spcAft>
             </a:pPr>
             <a:r>
-              <a:rPr sz="2800" b="1" i="0">
+              <a:rPr sz="2200" b="1" i="0">
                 <a:solidFill>
                   <a:srgbClr val="97BC62"/>
                 </a:solidFill>
@@ -6433,13 +6433,13 @@
               <a:t>•  </a:t>
             </a:r>
             <a:r>
-              <a:rPr sz="2800" b="0" i="0">
+              <a:rPr sz="2200" b="0" i="0">
                 <a:solidFill>
                   <a:srgbClr val="222B22"/>
                 </a:solidFill>
                 <a:latin typeface="Calibri"/>
               </a:rPr>
-              <a:t>The leaders receive without defending — “thank you” is the whole response</a:t>
+              <a:t>“The chain only works if we work it.”</a:t>
             </a:r>
           </a:p>
         </p:txBody>
@@ -6466,7 +6466,7 @@
           <a:p>
             <a:pPr algn="r"/>
             <a:r>
-              <a:t>99</a:t>
+              <a:t>97</a:t>
             </a:r>
             <a:endParaRPr sz="1000" b="1">
               <a:solidFill>
@@ -6479,7 +6479,7 @@
       </p:sp>
       <p:pic>
         <p:nvPicPr>
-          <p:cNvPr id="33" name="Picture 33" descr="compass on the trail - the weekly bearing check"/>
+          <p:cNvPr id="33" name="Picture 33" descr="seedling - what grows between Wednesdays"/>
           <p:cNvPicPr>
             <a:picLocks noChangeAspect="1"/>
           </p:cNvPicPr>
@@ -6493,8 +6493,8 @@
         </p:blipFill>
         <p:spPr>
           <a:xfrm>
-            <a:off x="8106160" y="1463040"/>
-            <a:ext cx="3259831" cy="4892040"/>
+            <a:off x="8103612" y="1463040"/>
+            <a:ext cx="3262379" cy="4892040"/>
           </a:xfrm>
           <a:prstGeom prst="rect">
             <a:avLst/>
@@ -6521,7 +6521,391 @@
 </p:sld>
 </file>
 
+<file path=ppt/slides/slide15.xml><?xml version="1.0" encoding="utf-8"?>
+<p:sld xmlns:a="http://schemas.openxmlformats.org/drawingml/2006/main" xmlns:p="http://schemas.openxmlformats.org/presentationml/2006/main" xmlns:r="http://schemas.openxmlformats.org/officeDocument/2006/relationships">
+  <p:cSld>
+    <p:spTree>
+      <p:nvGrpSpPr>
+        <p:cNvPr id="1" name=""/>
+        <p:cNvGrpSpPr/>
+        <p:nvPr/>
+      </p:nvGrpSpPr>
+      <p:grpSpPr/>
+      <p:sp>
+        <p:nvSpPr>
+          <p:cNvPr id="2" name="Rectangle 1"/>
+          <p:cNvSpPr/>
+          <p:nvPr/>
+        </p:nvSpPr>
+        <p:spPr>
+          <a:xfrm>
+            <a:off x="0" y="0"/>
+            <a:ext cx="12192000" cy="6858000"/>
+          </a:xfrm>
+          <a:prstGeom prst="rect">
+            <a:avLst/>
+          </a:prstGeom>
+          <a:solidFill>
+            <a:srgbClr val="FFFFFF"/>
+          </a:solidFill>
+          <a:ln>
+            <a:noFill/>
+          </a:ln>
+          <a:effectLst/>
+        </p:spPr>
+        <p:style>
+          <a:lnRef idx="1">
+            <a:schemeClr val="accent1"/>
+          </a:lnRef>
+          <a:fillRef idx="3">
+            <a:schemeClr val="accent1"/>
+          </a:fillRef>
+          <a:effectRef idx="2">
+            <a:schemeClr val="accent1"/>
+          </a:effectRef>
+          <a:fontRef idx="minor">
+            <a:schemeClr val="lt1"/>
+          </a:fontRef>
+        </p:style>
+        <p:txBody>
+          <a:bodyPr rtlCol="0" anchor="ctr"/>
+          <a:lstStyle/>
+          <a:p>
+            <a:pPr algn="ctr"/>
+          </a:p>
+        </p:txBody>
+      </p:sp>
+      <p:sp>
+        <p:nvSpPr>
+          <p:cNvPr id="3" name="TextBox 2"/>
+          <p:cNvSpPr txBox="1"/>
+          <p:nvPr/>
+        </p:nvSpPr>
+        <p:spPr>
+          <a:xfrm>
+            <a:off x="822960" y="502920"/>
+            <a:ext cx="10515600" cy="822960"/>
+          </a:xfrm>
+          <a:prstGeom prst="rect">
+            <a:avLst/>
+          </a:prstGeom>
+          <a:noFill/>
+        </p:spPr>
+        <p:txBody>
+          <a:bodyPr wrap="square">
+            <a:spAutoFit/>
+          </a:bodyPr>
+          <a:lstStyle/>
+          <a:p>
+            <a:r>
+              <a:rPr sz="2800" b="1">
+                <a:solidFill>
+                  <a:srgbClr val="2C5F2D"/>
+                </a:solidFill>
+                <a:latin typeface="Cambria"/>
+              </a:rPr>
+              <a:t>The Take-Home Sheet — the Daily Rhythm</a:t>
+            </a:r>
+          </a:p>
+        </p:txBody>
+      </p:sp>
+      <p:pic>
+        <p:nvPicPr>
+          <p:cNvPr id="4" name="Picture 3" descr="s7_part1.png"/>
+          <p:cNvPicPr>
+            <a:picLocks noChangeAspect="1"/>
+          </p:cNvPicPr>
+          <p:nvPr/>
+        </p:nvPicPr>
+        <p:blipFill>
+          <a:blip r:embed="rId2"/>
+          <a:stretch>
+            <a:fillRect/>
+          </a:stretch>
+        </p:blipFill>
+        <p:spPr>
+          <a:xfrm>
+            <a:off x="1798167" y="1463040"/>
+            <a:ext cx="8595360" cy="4039819"/>
+          </a:xfrm>
+          <a:prstGeom prst="rect">
+            <a:avLst/>
+          </a:prstGeom>
+          <a:ln w="12700">
+            <a:solidFill>
+              <a:srgbClr val="C8C8C8"/>
+            </a:solidFill>
+          </a:ln>
+        </p:spPr>
+      </p:pic>
+      <p:sp>
+        <p:nvSpPr>
+          <p:cNvPr id="5" name="TextBox 4"/>
+          <p:cNvSpPr txBox="1"/>
+          <p:nvPr/>
+        </p:nvSpPr>
+        <p:spPr>
+          <a:xfrm>
+            <a:off x="822960" y="6355080"/>
+            <a:ext cx="10515600" cy="411480"/>
+          </a:xfrm>
+          <a:prstGeom prst="rect">
+            <a:avLst/>
+          </a:prstGeom>
+          <a:noFill/>
+        </p:spPr>
+        <p:txBody>
+          <a:bodyPr wrap="square">
+            <a:spAutoFit/>
+          </a:bodyPr>
+          <a:lstStyle/>
+          <a:p>
+            <a:r>
+              <a:rPr sz="1400" i="1">
+                <a:solidFill>
+                  <a:srgbClr val="595959"/>
+                </a:solidFill>
+                <a:latin typeface="Calibri"/>
+              </a:rPr>
+              <a:t>Handed out now — this is the sheet in your hands.</a:t>
+            </a:r>
+          </a:p>
+        </p:txBody>
+      </p:sp>
+      <p:sp>
+        <p:nvSpPr>
+          <p:cNvPr id="90" name="SlideNum"/>
+          <p:cNvSpPr txBox="1"/>
+          <p:nvPr/>
+        </p:nvSpPr>
+        <p:spPr>
+          <a:xfrm>
+            <a:off x="11384280" y="6446520"/>
+            <a:ext cx="640080" cy="292608"/>
+          </a:xfrm>
+          <a:prstGeom prst="rect">
+            <a:avLst/>
+          </a:prstGeom>
+          <a:noFill/>
+        </p:spPr>
+        <p:txBody>
+          <a:bodyPr wrap="none" lIns="0" tIns="0" rIns="45720" bIns="0" anchor="ctr"/>
+          <a:lstStyle/>
+          <a:p>
+            <a:pPr algn="r"/>
+            <a:r>
+              <a:t>98</a:t>
+            </a:r>
+            <a:endParaRPr sz="1000" b="1">
+              <a:solidFill>
+                <a:srgbClr val="7A8A6E"/>
+              </a:solidFill>
+              <a:latin typeface="Calibri"/>
+            </a:endParaRPr>
+          </a:p>
+        </p:txBody>
+      </p:sp>
+    </p:spTree>
+  </p:cSld>
+  <p:clrMapOvr>
+    <a:masterClrMapping/>
+  </p:clrMapOvr>
+</p:sld>
+</file>
+
 <file path=ppt/slides/slide16.xml><?xml version="1.0" encoding="utf-8"?>
+<p:sld xmlns:a="http://schemas.openxmlformats.org/drawingml/2006/main" xmlns:p="http://schemas.openxmlformats.org/presentationml/2006/main" xmlns:r="http://schemas.openxmlformats.org/officeDocument/2006/relationships">
+  <p:cSld>
+    <p:spTree>
+      <p:nvGrpSpPr>
+        <p:cNvPr id="1" name=""/>
+        <p:cNvGrpSpPr/>
+        <p:nvPr/>
+      </p:nvGrpSpPr>
+      <p:grpSpPr/>
+      <p:sp>
+        <p:nvSpPr>
+          <p:cNvPr id="2" name="Rectangle 1"/>
+          <p:cNvSpPr/>
+          <p:nvPr/>
+        </p:nvSpPr>
+        <p:spPr>
+          <a:xfrm>
+            <a:off x="0" y="0"/>
+            <a:ext cx="12192000" cy="6858000"/>
+          </a:xfrm>
+          <a:prstGeom prst="rect">
+            <a:avLst/>
+          </a:prstGeom>
+          <a:solidFill>
+            <a:srgbClr val="FFFFFF"/>
+          </a:solidFill>
+          <a:ln>
+            <a:noFill/>
+          </a:ln>
+          <a:effectLst/>
+        </p:spPr>
+        <p:style>
+          <a:lnRef idx="1">
+            <a:schemeClr val="accent1"/>
+          </a:lnRef>
+          <a:fillRef idx="3">
+            <a:schemeClr val="accent1"/>
+          </a:fillRef>
+          <a:effectRef idx="2">
+            <a:schemeClr val="accent1"/>
+          </a:effectRef>
+          <a:fontRef idx="minor">
+            <a:schemeClr val="lt1"/>
+          </a:fontRef>
+        </p:style>
+        <p:txBody>
+          <a:bodyPr rtlCol="0" anchor="ctr"/>
+          <a:lstStyle/>
+          <a:p>
+            <a:pPr algn="ctr"/>
+          </a:p>
+        </p:txBody>
+      </p:sp>
+      <p:sp>
+        <p:nvSpPr>
+          <p:cNvPr id="3" name="TextBox 2"/>
+          <p:cNvSpPr txBox="1"/>
+          <p:nvPr/>
+        </p:nvSpPr>
+        <p:spPr>
+          <a:xfrm>
+            <a:off x="822960" y="502920"/>
+            <a:ext cx="10515600" cy="822960"/>
+          </a:xfrm>
+          <a:prstGeom prst="rect">
+            <a:avLst/>
+          </a:prstGeom>
+          <a:noFill/>
+        </p:spPr>
+        <p:txBody>
+          <a:bodyPr wrap="square">
+            <a:spAutoFit/>
+          </a:bodyPr>
+          <a:lstStyle/>
+          <a:p>
+            <a:r>
+              <a:rPr sz="2800" b="1">
+                <a:solidFill>
+                  <a:srgbClr val="2C5F2D"/>
+                </a:solidFill>
+                <a:latin typeface="Cambria"/>
+              </a:rPr>
+              <a:t>The Take-Home Sheet — the Four Parts</a:t>
+            </a:r>
+          </a:p>
+        </p:txBody>
+      </p:sp>
+      <p:pic>
+        <p:nvPicPr>
+          <p:cNvPr id="4" name="Picture 3" descr="s7_part2.png"/>
+          <p:cNvPicPr>
+            <a:picLocks noChangeAspect="1"/>
+          </p:cNvPicPr>
+          <p:nvPr/>
+        </p:nvPicPr>
+        <p:blipFill>
+          <a:blip r:embed="rId2"/>
+          <a:stretch>
+            <a:fillRect/>
+          </a:stretch>
+        </p:blipFill>
+        <p:spPr>
+          <a:xfrm>
+            <a:off x="2066004" y="1463040"/>
+            <a:ext cx="8059687" cy="4709160"/>
+          </a:xfrm>
+          <a:prstGeom prst="rect">
+            <a:avLst/>
+          </a:prstGeom>
+          <a:ln w="12700">
+            <a:solidFill>
+              <a:srgbClr val="C8C8C8"/>
+            </a:solidFill>
+          </a:ln>
+        </p:spPr>
+      </p:pic>
+      <p:sp>
+        <p:nvSpPr>
+          <p:cNvPr id="5" name="TextBox 4"/>
+          <p:cNvSpPr txBox="1"/>
+          <p:nvPr/>
+        </p:nvSpPr>
+        <p:spPr>
+          <a:xfrm>
+            <a:off x="822960" y="6355080"/>
+            <a:ext cx="10515600" cy="411480"/>
+          </a:xfrm>
+          <a:prstGeom prst="rect">
+            <a:avLst/>
+          </a:prstGeom>
+          <a:noFill/>
+        </p:spPr>
+        <p:txBody>
+          <a:bodyPr wrap="square">
+            <a:spAutoFit/>
+          </a:bodyPr>
+          <a:lstStyle/>
+          <a:p>
+            <a:r>
+              <a:rPr sz="1400" i="1">
+                <a:solidFill>
+                  <a:srgbClr val="595959"/>
+                </a:solidFill>
+                <a:latin typeface="Calibri"/>
+              </a:rPr>
+              <a:t>One practice at a time — and a partner expecting you at the end of week one.</a:t>
+            </a:r>
+          </a:p>
+        </p:txBody>
+      </p:sp>
+      <p:sp>
+        <p:nvSpPr>
+          <p:cNvPr id="90" name="SlideNum"/>
+          <p:cNvSpPr txBox="1"/>
+          <p:nvPr/>
+        </p:nvSpPr>
+        <p:spPr>
+          <a:xfrm>
+            <a:off x="11384280" y="6446520"/>
+            <a:ext cx="640080" cy="292608"/>
+          </a:xfrm>
+          <a:prstGeom prst="rect">
+            <a:avLst/>
+          </a:prstGeom>
+          <a:noFill/>
+        </p:spPr>
+        <p:txBody>
+          <a:bodyPr wrap="none" lIns="0" tIns="0" rIns="45720" bIns="0" anchor="ctr"/>
+          <a:lstStyle/>
+          <a:p>
+            <a:pPr algn="r"/>
+            <a:r>
+              <a:t>98a</a:t>
+            </a:r>
+            <a:endParaRPr sz="1000" b="1">
+              <a:solidFill>
+                <a:srgbClr val="7A8A6E"/>
+              </a:solidFill>
+              <a:latin typeface="Calibri"/>
+            </a:endParaRPr>
+          </a:p>
+        </p:txBody>
+      </p:sp>
+    </p:spTree>
+  </p:cSld>
+  <p:clrMapOvr>
+    <a:masterClrMapping/>
+  </p:clrMapOvr>
+</p:sld>
+</file>
+
+<file path=ppt/slides/slide17.xml><?xml version="1.0" encoding="utf-8"?>
 <p:sld xmlns:a="http://schemas.openxmlformats.org/drawingml/2006/main" xmlns:r="http://schemas.openxmlformats.org/officeDocument/2006/relationships" xmlns:p="http://schemas.openxmlformats.org/presentationml/2006/main">
   <p:cSld>
     <p:spTree>
@@ -6601,7 +6985,7 @@
                 </a:solidFill>
                 <a:latin typeface="Cambria"/>
               </a:rPr>
-              <a:t>Closing the Container + Aaronic Blessing</a:t>
+              <a:t>The Leader Feedback Round</a:t>
             </a:r>
           </a:p>
         </p:txBody>
@@ -6614,8 +6998,8 @@
         </p:nvSpPr>
         <p:spPr>
           <a:xfrm>
-            <a:off x="822960" y="1600200"/>
-            <a:ext cx="5669280" cy="4572000"/>
+            <a:off x="822960" y="1554480"/>
+            <a:ext cx="6675120" cy="4892040"/>
           </a:xfrm>
           <a:prstGeom prst="rect">
             <a:avLst/>
@@ -6632,7 +7016,7 @@
               </a:spcAft>
             </a:pPr>
             <a:r>
-              <a:rPr sz="2200" b="1" i="0">
+              <a:rPr sz="2800" b="1" i="0">
                 <a:solidFill>
                   <a:srgbClr val="97BC62"/>
                 </a:solidFill>
@@ -6641,13 +7025,13 @@
               <a:t>•  </a:t>
             </a:r>
             <a:r>
-              <a:rPr sz="2200" b="0" i="0">
+              <a:rPr sz="2800" b="0" i="0">
                 <a:solidFill>
                   <a:srgbClr val="222B22"/>
                 </a:solidFill>
                 <a:latin typeface="Calibri"/>
               </a:rPr>
-              <a:t>We close the way we opened — the container, six steps:</a:t>
+              <a:t>Two rounds, same as every session — the container holder first, then the content presenter: three things each</a:t>
             </a:r>
           </a:p>
           <a:p>
@@ -6663,16 +7047,16 @@
                 </a:solidFill>
                 <a:latin typeface="Calibri"/>
               </a:rPr>
-              <a:t>1   </a:t>
-            </a:r>
-            <a:r>
-              <a:rPr sz="2000" b="0" i="0">
+              <a:t>–  </a:t>
+            </a:r>
+            <a:r>
+              <a:rPr sz="2000" b="0" i="1">
                 <a:solidFill>
                   <a:srgbClr val="222B22"/>
                 </a:solidFill>
                 <a:latin typeface="Calibri"/>
               </a:rPr>
-              <a:t>Stand again — same circle, same posture as the open</a:t>
+              <a:t>“What I think went well tonight: ______”</a:t>
             </a:r>
           </a:p>
           <a:p>
@@ -6688,16 +7072,16 @@
                 </a:solidFill>
                 <a:latin typeface="Calibri"/>
               </a:rPr>
-              <a:t>2   </a:t>
-            </a:r>
-            <a:r>
-              <a:rPr sz="2000" b="0" i="0">
+              <a:t>–  </a:t>
+            </a:r>
+            <a:r>
+              <a:rPr sz="2000" b="0" i="1">
                 <a:solidFill>
                   <a:srgbClr val="222B22"/>
                 </a:solidFill>
                 <a:latin typeface="Calibri"/>
               </a:rPr>
-              <a:t>One-word landing — compare it to your opening word</a:t>
+              <a:t>“What I’d do differently next time: ______”</a:t>
             </a:r>
           </a:p>
           <a:p>
@@ -6713,178 +7097,66 @@
                 </a:solidFill>
                 <a:latin typeface="Calibri"/>
               </a:rPr>
-              <a:t>3   </a:t>
-            </a:r>
-            <a:r>
-              <a:rPr sz="2000" b="0" i="0">
+              <a:t>–  </a:t>
+            </a:r>
+            <a:r>
+              <a:rPr sz="2000" b="0" i="1">
                 <a:solidFill>
                   <a:srgbClr val="222B22"/>
                 </a:solidFill>
                 <a:latin typeface="Calibri"/>
               </a:rPr>
-              <a:t>The one thing you are taking from tonight</a:t>
-            </a:r>
-          </a:p>
-          <a:p>
-            <a:pPr marL="685800" indent="-274320">
-              <a:spcAft>
-                <a:spcPts val="700"/>
-              </a:spcAft>
-            </a:pPr>
-            <a:r>
-              <a:rPr sz="2000" b="1" i="0">
-                <a:solidFill>
-                  <a:srgbClr val="97BC62"/>
-                </a:solidFill>
-                <a:latin typeface="Calibri"/>
-              </a:rPr>
-              <a:t>4   </a:t>
-            </a:r>
-            <a:r>
-              <a:rPr sz="2000" b="0" i="0">
-                <a:solidFill>
-                  <a:srgbClr val="222B22"/>
-                </a:solidFill>
-                <a:latin typeface="Calibri"/>
-              </a:rPr>
-              <a:t>The one practice — committed aloud, or modified to one you will actually keep</a:t>
-            </a:r>
-          </a:p>
-          <a:p>
-            <a:pPr marL="685800" indent="-274320">
-              <a:spcAft>
-                <a:spcPts val="700"/>
-              </a:spcAft>
-            </a:pPr>
-            <a:r>
-              <a:rPr sz="2000" b="1" i="0">
-                <a:solidFill>
-                  <a:srgbClr val="97BC62"/>
-                </a:solidFill>
-                <a:latin typeface="Calibri"/>
-              </a:rPr>
-              <a:t>5   </a:t>
-            </a:r>
-            <a:r>
-              <a:rPr sz="2000" b="0" i="0">
-                <a:solidFill>
-                  <a:srgbClr val="222B22"/>
-                </a:solidFill>
-                <a:latin typeface="Calibri"/>
-              </a:rPr>
-              <a:t>Blessings — specific, witnessed, short</a:t>
-            </a:r>
-          </a:p>
-          <a:p>
-            <a:pPr marL="685800" indent="-274320">
-              <a:spcAft>
-                <a:spcPts val="700"/>
-              </a:spcAft>
-            </a:pPr>
-            <a:r>
-              <a:rPr sz="2000" b="1" i="0">
-                <a:solidFill>
-                  <a:srgbClr val="97BC62"/>
-                </a:solidFill>
-                <a:latin typeface="Calibri"/>
-              </a:rPr>
-              <a:t>6   </a:t>
-            </a:r>
-            <a:r>
-              <a:rPr sz="2000" b="0" i="0">
-                <a:solidFill>
-                  <a:srgbClr val="222B22"/>
-                </a:solidFill>
-                <a:latin typeface="Calibri"/>
-              </a:rPr>
-              <a:t>Closing prayer — and the Aaronic blessing, spoken over each other, face to face</a:t>
-            </a:r>
-          </a:p>
-        </p:txBody>
-      </p:sp>
-      <p:sp>
-        <p:nvSpPr>
-          <p:cNvPr id="6" name="TextBox 6"/>
-          <p:cNvSpPr txBox="1"/>
-          <p:nvPr/>
-        </p:nvSpPr>
-        <p:spPr>
-          <a:xfrm>
-            <a:off x="6766560" y="1737360"/>
-            <a:ext cx="4663440" cy="2926080"/>
-          </a:xfrm>
-          <a:prstGeom prst="rect">
-            <a:avLst/>
-          </a:prstGeom>
-          <a:solidFill>
-            <a:srgbClr val="F1F6EC"/>
-          </a:solidFill>
-        </p:spPr>
-        <p:txBody>
-          <a:bodyPr wrap="square" lIns="91440" tIns="91440" rIns="91440" bIns="91440" anchor="ctr"/>
-          <a:lstStyle/>
-          <a:p>
-            <a:pPr>
+              <a:t>“If I were to teach tonight’s process to someone, I would tell them: ______”</a:t>
+            </a:r>
+          </a:p>
+          <a:p>
+            <a:pPr marL="274320" indent="-274320">
               <a:spcAft>
                 <a:spcPts val="900"/>
               </a:spcAft>
             </a:pPr>
             <a:r>
-              <a:rPr sz="1200" b="1" i="0">
+              <a:rPr sz="2800" b="1" i="0">
                 <a:solidFill>
                   <a:srgbClr val="97BC62"/>
                 </a:solidFill>
                 <a:latin typeface="Calibri"/>
               </a:rPr>
-              <a:t>THE AARONIC BLESSING — NUMBERS 6:24–26</a:t>
-            </a:r>
-          </a:p>
-          <a:p>
-            <a:pPr>
+              <a:t>•  </a:t>
+            </a:r>
+            <a:r>
+              <a:rPr sz="2800" b="0" i="0">
+                <a:solidFill>
+                  <a:srgbClr val="222B22"/>
+                </a:solidFill>
+                <a:latin typeface="Calibri"/>
+              </a:rPr>
+              <a:t>Then the room — the same two questions about tonight</a:t>
+            </a:r>
+          </a:p>
+          <a:p>
+            <a:pPr marL="274320" indent="-274320">
               <a:spcAft>
-                <a:spcPts val="600"/>
+                <a:spcPts val="900"/>
               </a:spcAft>
             </a:pPr>
             <a:r>
-              <a:rPr sz="2400" b="0" i="1">
+              <a:rPr sz="2800" b="1" i="0">
+                <a:solidFill>
+                  <a:srgbClr val="97BC62"/>
+                </a:solidFill>
+                <a:latin typeface="Calibri"/>
+              </a:rPr>
+              <a:t>•  </a:t>
+            </a:r>
+            <a:r>
+              <a:rPr sz="2800" b="0" i="0">
                 <a:solidFill>
                   <a:srgbClr val="222B22"/>
                 </a:solidFill>
-                <a:latin typeface="Cambria"/>
-              </a:rPr>
-              <a:t>“The Lord bless you and keep you;</a:t>
-            </a:r>
-          </a:p>
-          <a:p>
-            <a:pPr>
-              <a:spcAft>
-                <a:spcPts val="600"/>
-              </a:spcAft>
-            </a:pPr>
-            <a:r>
-              <a:rPr sz="2400" b="0" i="1">
-                <a:solidFill>
-                  <a:srgbClr val="222B22"/>
-                </a:solidFill>
-                <a:latin typeface="Cambria"/>
-              </a:rPr>
-              <a:t>the Lord make his face to shine upon you, and be gracious to you;</a:t>
-            </a:r>
-          </a:p>
-          <a:p>
-            <a:pPr>
-              <a:spcAft>
-                <a:spcPts val="600"/>
-              </a:spcAft>
-            </a:pPr>
-            <a:r>
-              <a:rPr sz="2400" b="0" i="1">
-                <a:solidFill>
-                  <a:srgbClr val="222B22"/>
-                </a:solidFill>
-                <a:latin typeface="Cambria"/>
-              </a:rPr>
-              <a:t>the Lord lift up his countenance upon you, and give you peace.”</a:t>
+                <a:latin typeface="Calibri"/>
+              </a:rPr>
+              <a:t>The leaders receive without defending — “thank you” is the whole response</a:t>
             </a:r>
           </a:p>
         </p:txBody>
@@ -6911,7 +7183,7 @@
           <a:p>
             <a:pPr algn="r"/>
             <a:r>
-              <a:t>100</a:t>
+              <a:t>99</a:t>
             </a:r>
             <a:endParaRPr sz="1000" b="1">
               <a:solidFill>
@@ -6922,6 +7194,42 @@
           </a:p>
         </p:txBody>
       </p:sp>
+      <p:pic>
+        <p:nvPicPr>
+          <p:cNvPr id="33" name="Picture 33" descr="compass on the trail - the weekly bearing check"/>
+          <p:cNvPicPr>
+            <a:picLocks noChangeAspect="1"/>
+          </p:cNvPicPr>
+          <p:nvPr/>
+        </p:nvPicPr>
+        <p:blipFill>
+          <a:blip r:embed="rId3"/>
+          <a:stretch>
+            <a:fillRect/>
+          </a:stretch>
+        </p:blipFill>
+        <p:spPr>
+          <a:xfrm>
+            <a:off x="8106160" y="1463040"/>
+            <a:ext cx="3259831" cy="4892040"/>
+          </a:xfrm>
+          <a:prstGeom prst="rect">
+            <a:avLst/>
+          </a:prstGeom>
+          <a:ln w="76200">
+            <a:solidFill>
+              <a:srgbClr val="FFFFFF"/>
+            </a:solidFill>
+          </a:ln>
+          <a:effectLst>
+            <a:outerShdw blurRad="63500" dist="25400" dir="5400000" rotWithShape="0">
+              <a:srgbClr val="000000">
+                <a:alpha val="35000"/>
+              </a:srgbClr>
+            </a:outerShdw>
+          </a:effectLst>
+        </p:spPr>
+      </p:pic>
     </p:spTree>
   </p:cSld>
   <p:clrMapOvr>
@@ -6930,8 +7238,8 @@
 </p:sld>
 </file>
 
-<file path=ppt/slides/slide17.xml><?xml version="1.0" encoding="utf-8"?>
-<p:sld xmlns:a="http://schemas.openxmlformats.org/drawingml/2006/main" xmlns:p="http://schemas.openxmlformats.org/presentationml/2006/main" xmlns:r="http://schemas.openxmlformats.org/officeDocument/2006/relationships">
+<file path=ppt/slides/slide18.xml><?xml version="1.0" encoding="utf-8"?>
+<p:sld xmlns:a="http://schemas.openxmlformats.org/drawingml/2006/main" xmlns:r="http://schemas.openxmlformats.org/officeDocument/2006/relationships" xmlns:p="http://schemas.openxmlformats.org/presentationml/2006/main">
   <p:cSld>
     <p:spTree>
       <p:nvGrpSpPr>
@@ -6939,7 +7247,14 @@
         <p:cNvGrpSpPr/>
         <p:nvPr/>
       </p:nvGrpSpPr>
-      <p:grpSpPr/>
+      <p:grpSpPr>
+        <a:xfrm>
+          <a:off x="0" y="0"/>
+          <a:ext cx="0" cy="0"/>
+          <a:chOff x="0" y="0"/>
+          <a:chExt cx="0" cy="0"/>
+        </a:xfrm>
+      </p:grpSpPr>
       <p:sp>
         <p:nvSpPr>
           <p:cNvPr id="2" name="Rectangle 1"/>
@@ -6949,7 +7264,7 @@
         <p:spPr>
           <a:xfrm>
             <a:off x="0" y="0"/>
-            <a:ext cx="12192000" cy="6858000"/>
+            <a:ext cx="12191695" cy="6858000"/>
           </a:xfrm>
           <a:prstGeom prst="rect">
             <a:avLst/>
@@ -6960,27 +7275,12 @@
           <a:ln>
             <a:noFill/>
           </a:ln>
-          <a:effectLst/>
-        </p:spPr>
-        <p:style>
-          <a:lnRef idx="1">
-            <a:schemeClr val="accent1"/>
-          </a:lnRef>
-          <a:fillRef idx="3">
-            <a:schemeClr val="accent1"/>
-          </a:fillRef>
-          <a:effectRef idx="2">
-            <a:schemeClr val="accent1"/>
-          </a:effectRef>
-          <a:fontRef idx="minor">
-            <a:schemeClr val="lt1"/>
-          </a:fontRef>
-        </p:style>
-        <p:txBody>
-          <a:bodyPr rtlCol="0" anchor="ctr"/>
-          <a:lstStyle/>
-          <a:p>
-            <a:pPr algn="ctr"/>
+        </p:spPr>
+        <p:txBody>
+          <a:bodyPr/>
+          <a:lstStyle/>
+          <a:p>
+            <a:endParaRPr/>
           </a:p>
         </p:txBody>
       </p:sp>
@@ -7006,52 +7306,33 @@
           </a:bodyPr>
           <a:lstStyle/>
           <a:p>
-            <a:r>
-              <a:rPr sz="2800" b="1">
+            <a:pPr algn="l">
+              <a:spcAft>
+                <a:spcPts val="600"/>
+              </a:spcAft>
+            </a:pPr>
+            <a:r>
+              <a:rPr sz="2800" b="1" i="0">
                 <a:solidFill>
                   <a:srgbClr val="2C5F2D"/>
                 </a:solidFill>
                 <a:latin typeface="Cambria"/>
               </a:rPr>
-              <a:t>Where We Are — the Four Connects</a:t>
-            </a:r>
-          </a:p>
-        </p:txBody>
-      </p:sp>
-      <p:pic>
-        <p:nvPicPr>
-          <p:cNvPr id="4" name="Picture 3" descr="four-connects.png"/>
-          <p:cNvPicPr>
-            <a:picLocks noChangeAspect="1"/>
-          </p:cNvPicPr>
-          <p:nvPr/>
-        </p:nvPicPr>
-        <p:blipFill>
-          <a:blip r:embed="rId2"/>
-          <a:stretch>
-            <a:fillRect/>
-          </a:stretch>
-        </p:blipFill>
-        <p:spPr>
-          <a:xfrm>
-            <a:off x="932688" y="1645920"/>
-            <a:ext cx="10332720" cy="3708663"/>
-          </a:xfrm>
-          <a:prstGeom prst="rect">
-            <a:avLst/>
-          </a:prstGeom>
-        </p:spPr>
-      </p:pic>
-      <p:sp>
-        <p:nvSpPr>
-          <p:cNvPr id="5" name="TextBox 4"/>
+              <a:t>Closing the Container + Aaronic Blessing</a:t>
+            </a:r>
+          </a:p>
+        </p:txBody>
+      </p:sp>
+      <p:sp>
+        <p:nvSpPr>
+          <p:cNvPr id="4" name="TextBox 4"/>
           <p:cNvSpPr txBox="1"/>
           <p:nvPr/>
         </p:nvSpPr>
         <p:spPr>
           <a:xfrm>
-            <a:off x="822960" y="5623560"/>
-            <a:ext cx="10515600" cy="914400"/>
+            <a:off x="822960" y="1600200"/>
+            <a:ext cx="5669280" cy="4572000"/>
           </a:xfrm>
           <a:prstGeom prst="rect">
             <a:avLst/>
@@ -7059,37 +7340,268 @@
           <a:noFill/>
         </p:spPr>
         <p:txBody>
-          <a:bodyPr wrap="square">
-            <a:spAutoFit/>
-          </a:bodyPr>
-          <a:lstStyle/>
-          <a:p>
-            <a:r>
-              <a:rPr sz="1800" b="0">
+          <a:bodyPr wrap="square" lIns="91440" tIns="91440" rIns="91440" bIns="91440"/>
+          <a:lstStyle/>
+          <a:p>
+            <a:pPr marL="274320" indent="-274320">
+              <a:spcAft>
+                <a:spcPts val="900"/>
+              </a:spcAft>
+            </a:pPr>
+            <a:r>
+              <a:rPr sz="2200" b="1" i="0">
+                <a:solidFill>
+                  <a:srgbClr val="97BC62"/>
+                </a:solidFill>
+                <a:latin typeface="Calibri"/>
+              </a:rPr>
+              <a:t>•  </a:t>
+            </a:r>
+            <a:r>
+              <a:rPr sz="2200" b="0" i="0">
                 <a:solidFill>
                   <a:srgbClr val="222B22"/>
                 </a:solidFill>
                 <a:latin typeface="Calibri"/>
               </a:rPr>
-              <a:t>Session 7 stands in the third box — </a:t>
-            </a:r>
-            <a:r>
-              <a:rPr sz="1800" b="1">
-                <a:solidFill>
-                  <a:srgbClr val="2C5F2D"/>
-                </a:solidFill>
-                <a:latin typeface="Calibri"/>
-              </a:rPr>
-              <a:t>Connect with God</a:t>
-            </a:r>
-            <a:r>
-              <a:rPr sz="1800" b="0">
+              <a:t>We close the way we opened — the container, six steps:</a:t>
+            </a:r>
+          </a:p>
+          <a:p>
+            <a:pPr marL="685800" indent="-274320">
+              <a:spcAft>
+                <a:spcPts val="700"/>
+              </a:spcAft>
+            </a:pPr>
+            <a:r>
+              <a:rPr sz="2000" b="1" i="0">
+                <a:solidFill>
+                  <a:srgbClr val="97BC62"/>
+                </a:solidFill>
+                <a:latin typeface="Calibri"/>
+              </a:rPr>
+              <a:t>1   </a:t>
+            </a:r>
+            <a:r>
+              <a:rPr sz="2000" b="0" i="0">
                 <a:solidFill>
                   <a:srgbClr val="222B22"/>
                 </a:solidFill>
                 <a:latin typeface="Calibri"/>
               </a:rPr>
-              <a:t>. Each connection makes the next one real (Matt. 22:37–40).</a:t>
+              <a:t>Stand again — same circle, same posture as the open</a:t>
+            </a:r>
+          </a:p>
+          <a:p>
+            <a:pPr marL="685800" indent="-274320">
+              <a:spcAft>
+                <a:spcPts val="700"/>
+              </a:spcAft>
+            </a:pPr>
+            <a:r>
+              <a:rPr sz="2000" b="1" i="0">
+                <a:solidFill>
+                  <a:srgbClr val="97BC62"/>
+                </a:solidFill>
+                <a:latin typeface="Calibri"/>
+              </a:rPr>
+              <a:t>2   </a:t>
+            </a:r>
+            <a:r>
+              <a:rPr sz="2000" b="0" i="0">
+                <a:solidFill>
+                  <a:srgbClr val="222B22"/>
+                </a:solidFill>
+                <a:latin typeface="Calibri"/>
+              </a:rPr>
+              <a:t>One-word landing — compare it to your opening word</a:t>
+            </a:r>
+          </a:p>
+          <a:p>
+            <a:pPr marL="685800" indent="-274320">
+              <a:spcAft>
+                <a:spcPts val="700"/>
+              </a:spcAft>
+            </a:pPr>
+            <a:r>
+              <a:rPr sz="2000" b="1" i="0">
+                <a:solidFill>
+                  <a:srgbClr val="97BC62"/>
+                </a:solidFill>
+                <a:latin typeface="Calibri"/>
+              </a:rPr>
+              <a:t>3   </a:t>
+            </a:r>
+            <a:r>
+              <a:rPr sz="2000" b="0" i="0">
+                <a:solidFill>
+                  <a:srgbClr val="222B22"/>
+                </a:solidFill>
+                <a:latin typeface="Calibri"/>
+              </a:rPr>
+              <a:t>The one thing you are taking from tonight</a:t>
+            </a:r>
+          </a:p>
+          <a:p>
+            <a:pPr marL="685800" indent="-274320">
+              <a:spcAft>
+                <a:spcPts val="700"/>
+              </a:spcAft>
+            </a:pPr>
+            <a:r>
+              <a:rPr sz="2000" b="1" i="0">
+                <a:solidFill>
+                  <a:srgbClr val="97BC62"/>
+                </a:solidFill>
+                <a:latin typeface="Calibri"/>
+              </a:rPr>
+              <a:t>4   </a:t>
+            </a:r>
+            <a:r>
+              <a:rPr sz="2000" b="0" i="0">
+                <a:solidFill>
+                  <a:srgbClr val="222B22"/>
+                </a:solidFill>
+                <a:latin typeface="Calibri"/>
+              </a:rPr>
+              <a:t>The one practice — committed aloud, or modified to one you will actually keep</a:t>
+            </a:r>
+          </a:p>
+          <a:p>
+            <a:pPr marL="685800" indent="-274320">
+              <a:spcAft>
+                <a:spcPts val="700"/>
+              </a:spcAft>
+            </a:pPr>
+            <a:r>
+              <a:rPr sz="2000" b="1" i="0">
+                <a:solidFill>
+                  <a:srgbClr val="97BC62"/>
+                </a:solidFill>
+                <a:latin typeface="Calibri"/>
+              </a:rPr>
+              <a:t>5   </a:t>
+            </a:r>
+            <a:r>
+              <a:rPr sz="2000" b="0" i="0">
+                <a:solidFill>
+                  <a:srgbClr val="222B22"/>
+                </a:solidFill>
+                <a:latin typeface="Calibri"/>
+              </a:rPr>
+              <a:t>Blessings — specific, witnessed, short</a:t>
+            </a:r>
+          </a:p>
+          <a:p>
+            <a:pPr marL="685800" indent="-274320">
+              <a:spcAft>
+                <a:spcPts val="700"/>
+              </a:spcAft>
+            </a:pPr>
+            <a:r>
+              <a:rPr sz="2000" b="1" i="0">
+                <a:solidFill>
+                  <a:srgbClr val="97BC62"/>
+                </a:solidFill>
+                <a:latin typeface="Calibri"/>
+              </a:rPr>
+              <a:t>6   </a:t>
+            </a:r>
+            <a:r>
+              <a:rPr sz="2000" b="0" i="0">
+                <a:solidFill>
+                  <a:srgbClr val="222B22"/>
+                </a:solidFill>
+                <a:latin typeface="Calibri"/>
+              </a:rPr>
+              <a:t>Closing prayer — and the Aaronic blessing, spoken over each other, face to face</a:t>
+            </a:r>
+          </a:p>
+        </p:txBody>
+      </p:sp>
+      <p:sp>
+        <p:nvSpPr>
+          <p:cNvPr id="6" name="TextBox 6"/>
+          <p:cNvSpPr txBox="1"/>
+          <p:nvPr/>
+        </p:nvSpPr>
+        <p:spPr>
+          <a:xfrm>
+            <a:off x="6766560" y="1737360"/>
+            <a:ext cx="4663440" cy="2926080"/>
+          </a:xfrm>
+          <a:prstGeom prst="rect">
+            <a:avLst/>
+          </a:prstGeom>
+          <a:solidFill>
+            <a:srgbClr val="F1F6EC"/>
+          </a:solidFill>
+        </p:spPr>
+        <p:txBody>
+          <a:bodyPr wrap="square" lIns="91440" tIns="91440" rIns="91440" bIns="91440" anchor="ctr"/>
+          <a:lstStyle/>
+          <a:p>
+            <a:pPr>
+              <a:spcAft>
+                <a:spcPts val="900"/>
+              </a:spcAft>
+            </a:pPr>
+            <a:r>
+              <a:rPr sz="1200" b="1" i="0">
+                <a:solidFill>
+                  <a:srgbClr val="97BC62"/>
+                </a:solidFill>
+                <a:latin typeface="Calibri"/>
+              </a:rPr>
+              <a:t>THE AARONIC BLESSING — NUMBERS 6:24–26</a:t>
+            </a:r>
+          </a:p>
+          <a:p>
+            <a:pPr>
+              <a:spcAft>
+                <a:spcPts val="600"/>
+              </a:spcAft>
+            </a:pPr>
+            <a:r>
+              <a:rPr sz="2400" b="0" i="1">
+                <a:solidFill>
+                  <a:srgbClr val="222B22"/>
+                </a:solidFill>
+                <a:latin typeface="Cambria"/>
+              </a:rPr>
+              <a:t>“The Lord bless you and keep you;</a:t>
+            </a:r>
+          </a:p>
+          <a:p>
+            <a:pPr>
+              <a:spcAft>
+                <a:spcPts val="600"/>
+              </a:spcAft>
+            </a:pPr>
+            <a:r>
+              <a:rPr sz="2400" b="0" i="1">
+                <a:solidFill>
+                  <a:srgbClr val="222B22"/>
+                </a:solidFill>
+                <a:latin typeface="Cambria"/>
+              </a:rPr>
+              <a:t>the Lord make his face to shine upon you, and be gracious to you;</a:t>
+            </a:r>
+          </a:p>
+          <a:p>
+            <a:pPr>
+              <a:spcAft>
+                <a:spcPts val="600"/>
+              </a:spcAft>
+            </a:pPr>
+            <a:r>
+              <a:rPr sz="2400" b="0" i="1">
+                <a:solidFill>
+                  <a:srgbClr val="222B22"/>
+                </a:solidFill>
+                <a:latin typeface="Cambria"/>
+              </a:rPr>
+              <a:t>the Lord lift up his countenance upon you, and give you peace.”</a:t>
             </a:r>
           </a:p>
         </p:txBody>
@@ -7116,391 +7628,7 @@
           <a:p>
             <a:pPr algn="r"/>
             <a:r>
-              <a:t>86a</a:t>
-            </a:r>
-            <a:endParaRPr sz="1000" b="1">
-              <a:solidFill>
-                <a:srgbClr val="7A8A6E"/>
-              </a:solidFill>
-              <a:latin typeface="Calibri"/>
-            </a:endParaRPr>
-          </a:p>
-        </p:txBody>
-      </p:sp>
-    </p:spTree>
-  </p:cSld>
-  <p:clrMapOvr>
-    <a:masterClrMapping/>
-  </p:clrMapOvr>
-</p:sld>
-</file>
-
-<file path=ppt/slides/slide18.xml><?xml version="1.0" encoding="utf-8"?>
-<p:sld xmlns:a="http://schemas.openxmlformats.org/drawingml/2006/main" xmlns:p="http://schemas.openxmlformats.org/presentationml/2006/main" xmlns:r="http://schemas.openxmlformats.org/officeDocument/2006/relationships">
-  <p:cSld>
-    <p:spTree>
-      <p:nvGrpSpPr>
-        <p:cNvPr id="1" name=""/>
-        <p:cNvGrpSpPr/>
-        <p:nvPr/>
-      </p:nvGrpSpPr>
-      <p:grpSpPr/>
-      <p:sp>
-        <p:nvSpPr>
-          <p:cNvPr id="2" name="Rectangle 1"/>
-          <p:cNvSpPr/>
-          <p:nvPr/>
-        </p:nvSpPr>
-        <p:spPr>
-          <a:xfrm>
-            <a:off x="0" y="0"/>
-            <a:ext cx="12192000" cy="6858000"/>
-          </a:xfrm>
-          <a:prstGeom prst="rect">
-            <a:avLst/>
-          </a:prstGeom>
-          <a:solidFill>
-            <a:srgbClr val="FFFFFF"/>
-          </a:solidFill>
-          <a:ln>
-            <a:noFill/>
-          </a:ln>
-          <a:effectLst/>
-        </p:spPr>
-        <p:style>
-          <a:lnRef idx="1">
-            <a:schemeClr val="accent1"/>
-          </a:lnRef>
-          <a:fillRef idx="3">
-            <a:schemeClr val="accent1"/>
-          </a:fillRef>
-          <a:effectRef idx="2">
-            <a:schemeClr val="accent1"/>
-          </a:effectRef>
-          <a:fontRef idx="minor">
-            <a:schemeClr val="lt1"/>
-          </a:fontRef>
-        </p:style>
-        <p:txBody>
-          <a:bodyPr rtlCol="0" anchor="ctr"/>
-          <a:lstStyle/>
-          <a:p>
-            <a:pPr algn="ctr"/>
-          </a:p>
-        </p:txBody>
-      </p:sp>
-      <p:sp>
-        <p:nvSpPr>
-          <p:cNvPr id="3" name="TextBox 2"/>
-          <p:cNvSpPr txBox="1"/>
-          <p:nvPr/>
-        </p:nvSpPr>
-        <p:spPr>
-          <a:xfrm>
-            <a:off x="822960" y="502920"/>
-            <a:ext cx="10515600" cy="822960"/>
-          </a:xfrm>
-          <a:prstGeom prst="rect">
-            <a:avLst/>
-          </a:prstGeom>
-          <a:noFill/>
-        </p:spPr>
-        <p:txBody>
-          <a:bodyPr wrap="square">
-            <a:spAutoFit/>
-          </a:bodyPr>
-          <a:lstStyle/>
-          <a:p>
-            <a:r>
-              <a:rPr sz="2800" b="1">
-                <a:solidFill>
-                  <a:srgbClr val="2C5F2D"/>
-                </a:solidFill>
-                <a:latin typeface="Cambria"/>
-              </a:rPr>
-              <a:t>The Take-Home Sheet — the Daily Rhythm</a:t>
-            </a:r>
-          </a:p>
-        </p:txBody>
-      </p:sp>
-      <p:pic>
-        <p:nvPicPr>
-          <p:cNvPr id="4" name="Picture 3" descr="s7_part1.png"/>
-          <p:cNvPicPr>
-            <a:picLocks noChangeAspect="1"/>
-          </p:cNvPicPr>
-          <p:nvPr/>
-        </p:nvPicPr>
-        <p:blipFill>
-          <a:blip r:embed="rId2"/>
-          <a:stretch>
-            <a:fillRect/>
-          </a:stretch>
-        </p:blipFill>
-        <p:spPr>
-          <a:xfrm>
-            <a:off x="1798167" y="1463040"/>
-            <a:ext cx="8595360" cy="4039819"/>
-          </a:xfrm>
-          <a:prstGeom prst="rect">
-            <a:avLst/>
-          </a:prstGeom>
-          <a:ln w="12700">
-            <a:solidFill>
-              <a:srgbClr val="C8C8C8"/>
-            </a:solidFill>
-          </a:ln>
-        </p:spPr>
-      </p:pic>
-      <p:sp>
-        <p:nvSpPr>
-          <p:cNvPr id="5" name="TextBox 4"/>
-          <p:cNvSpPr txBox="1"/>
-          <p:nvPr/>
-        </p:nvSpPr>
-        <p:spPr>
-          <a:xfrm>
-            <a:off x="822960" y="6355080"/>
-            <a:ext cx="10515600" cy="411480"/>
-          </a:xfrm>
-          <a:prstGeom prst="rect">
-            <a:avLst/>
-          </a:prstGeom>
-          <a:noFill/>
-        </p:spPr>
-        <p:txBody>
-          <a:bodyPr wrap="square">
-            <a:spAutoFit/>
-          </a:bodyPr>
-          <a:lstStyle/>
-          <a:p>
-            <a:r>
-              <a:rPr sz="1400" i="1">
-                <a:solidFill>
-                  <a:srgbClr val="595959"/>
-                </a:solidFill>
-                <a:latin typeface="Calibri"/>
-              </a:rPr>
-              <a:t>Handed out now — this is the sheet in your hands.</a:t>
-            </a:r>
-          </a:p>
-        </p:txBody>
-      </p:sp>
-      <p:sp>
-        <p:nvSpPr>
-          <p:cNvPr id="90" name="SlideNum"/>
-          <p:cNvSpPr txBox="1"/>
-          <p:nvPr/>
-        </p:nvSpPr>
-        <p:spPr>
-          <a:xfrm>
-            <a:off x="11384280" y="6446520"/>
-            <a:ext cx="640080" cy="292608"/>
-          </a:xfrm>
-          <a:prstGeom prst="rect">
-            <a:avLst/>
-          </a:prstGeom>
-          <a:noFill/>
-        </p:spPr>
-        <p:txBody>
-          <a:bodyPr wrap="none" lIns="0" tIns="0" rIns="45720" bIns="0" anchor="ctr"/>
-          <a:lstStyle/>
-          <a:p>
-            <a:pPr algn="r"/>
-            <a:r>
-              <a:t>98</a:t>
-            </a:r>
-            <a:endParaRPr sz="1000" b="1">
-              <a:solidFill>
-                <a:srgbClr val="7A8A6E"/>
-              </a:solidFill>
-              <a:latin typeface="Calibri"/>
-            </a:endParaRPr>
-          </a:p>
-        </p:txBody>
-      </p:sp>
-    </p:spTree>
-  </p:cSld>
-  <p:clrMapOvr>
-    <a:masterClrMapping/>
-  </p:clrMapOvr>
-</p:sld>
-</file>
-
-<file path=ppt/slides/slide19.xml><?xml version="1.0" encoding="utf-8"?>
-<p:sld xmlns:a="http://schemas.openxmlformats.org/drawingml/2006/main" xmlns:p="http://schemas.openxmlformats.org/presentationml/2006/main" xmlns:r="http://schemas.openxmlformats.org/officeDocument/2006/relationships">
-  <p:cSld>
-    <p:spTree>
-      <p:nvGrpSpPr>
-        <p:cNvPr id="1" name=""/>
-        <p:cNvGrpSpPr/>
-        <p:nvPr/>
-      </p:nvGrpSpPr>
-      <p:grpSpPr/>
-      <p:sp>
-        <p:nvSpPr>
-          <p:cNvPr id="2" name="Rectangle 1"/>
-          <p:cNvSpPr/>
-          <p:nvPr/>
-        </p:nvSpPr>
-        <p:spPr>
-          <a:xfrm>
-            <a:off x="0" y="0"/>
-            <a:ext cx="12192000" cy="6858000"/>
-          </a:xfrm>
-          <a:prstGeom prst="rect">
-            <a:avLst/>
-          </a:prstGeom>
-          <a:solidFill>
-            <a:srgbClr val="FFFFFF"/>
-          </a:solidFill>
-          <a:ln>
-            <a:noFill/>
-          </a:ln>
-          <a:effectLst/>
-        </p:spPr>
-        <p:style>
-          <a:lnRef idx="1">
-            <a:schemeClr val="accent1"/>
-          </a:lnRef>
-          <a:fillRef idx="3">
-            <a:schemeClr val="accent1"/>
-          </a:fillRef>
-          <a:effectRef idx="2">
-            <a:schemeClr val="accent1"/>
-          </a:effectRef>
-          <a:fontRef idx="minor">
-            <a:schemeClr val="lt1"/>
-          </a:fontRef>
-        </p:style>
-        <p:txBody>
-          <a:bodyPr rtlCol="0" anchor="ctr"/>
-          <a:lstStyle/>
-          <a:p>
-            <a:pPr algn="ctr"/>
-          </a:p>
-        </p:txBody>
-      </p:sp>
-      <p:sp>
-        <p:nvSpPr>
-          <p:cNvPr id="3" name="TextBox 2"/>
-          <p:cNvSpPr txBox="1"/>
-          <p:nvPr/>
-        </p:nvSpPr>
-        <p:spPr>
-          <a:xfrm>
-            <a:off x="822960" y="502920"/>
-            <a:ext cx="10515600" cy="822960"/>
-          </a:xfrm>
-          <a:prstGeom prst="rect">
-            <a:avLst/>
-          </a:prstGeom>
-          <a:noFill/>
-        </p:spPr>
-        <p:txBody>
-          <a:bodyPr wrap="square">
-            <a:spAutoFit/>
-          </a:bodyPr>
-          <a:lstStyle/>
-          <a:p>
-            <a:r>
-              <a:rPr sz="2800" b="1">
-                <a:solidFill>
-                  <a:srgbClr val="2C5F2D"/>
-                </a:solidFill>
-                <a:latin typeface="Cambria"/>
-              </a:rPr>
-              <a:t>The Take-Home Sheet — the Four Parts</a:t>
-            </a:r>
-          </a:p>
-        </p:txBody>
-      </p:sp>
-      <p:pic>
-        <p:nvPicPr>
-          <p:cNvPr id="4" name="Picture 3" descr="s7_part2.png"/>
-          <p:cNvPicPr>
-            <a:picLocks noChangeAspect="1"/>
-          </p:cNvPicPr>
-          <p:nvPr/>
-        </p:nvPicPr>
-        <p:blipFill>
-          <a:blip r:embed="rId2"/>
-          <a:stretch>
-            <a:fillRect/>
-          </a:stretch>
-        </p:blipFill>
-        <p:spPr>
-          <a:xfrm>
-            <a:off x="2066004" y="1463040"/>
-            <a:ext cx="8059687" cy="4709160"/>
-          </a:xfrm>
-          <a:prstGeom prst="rect">
-            <a:avLst/>
-          </a:prstGeom>
-          <a:ln w="12700">
-            <a:solidFill>
-              <a:srgbClr val="C8C8C8"/>
-            </a:solidFill>
-          </a:ln>
-        </p:spPr>
-      </p:pic>
-      <p:sp>
-        <p:nvSpPr>
-          <p:cNvPr id="5" name="TextBox 4"/>
-          <p:cNvSpPr txBox="1"/>
-          <p:nvPr/>
-        </p:nvSpPr>
-        <p:spPr>
-          <a:xfrm>
-            <a:off x="822960" y="6355080"/>
-            <a:ext cx="10515600" cy="411480"/>
-          </a:xfrm>
-          <a:prstGeom prst="rect">
-            <a:avLst/>
-          </a:prstGeom>
-          <a:noFill/>
-        </p:spPr>
-        <p:txBody>
-          <a:bodyPr wrap="square">
-            <a:spAutoFit/>
-          </a:bodyPr>
-          <a:lstStyle/>
-          <a:p>
-            <a:r>
-              <a:rPr sz="1400" i="1">
-                <a:solidFill>
-                  <a:srgbClr val="595959"/>
-                </a:solidFill>
-                <a:latin typeface="Calibri"/>
-              </a:rPr>
-              <a:t>One practice at a time — and a partner expecting you at the end of week one.</a:t>
-            </a:r>
-          </a:p>
-        </p:txBody>
-      </p:sp>
-      <p:sp>
-        <p:nvSpPr>
-          <p:cNvPr id="90" name="SlideNum"/>
-          <p:cNvSpPr txBox="1"/>
-          <p:nvPr/>
-        </p:nvSpPr>
-        <p:spPr>
-          <a:xfrm>
-            <a:off x="11384280" y="6446520"/>
-            <a:ext cx="640080" cy="292608"/>
-          </a:xfrm>
-          <a:prstGeom prst="rect">
-            <a:avLst/>
-          </a:prstGeom>
-          <a:noFill/>
-        </p:spPr>
-        <p:txBody>
-          <a:bodyPr wrap="none" lIns="0" tIns="0" rIns="45720" bIns="0" anchor="ctr"/>
-          <a:lstStyle/>
-          <a:p>
-            <a:pPr algn="r"/>
-            <a:r>
-              <a:t>98a</a:t>
+              <a:t>100</a:t>
             </a:r>
             <a:endParaRPr sz="1000" b="1">
               <a:solidFill>
@@ -7769,7 +7897,7 @@
 </file>
 
 <file path=ppt/slides/slide3.xml><?xml version="1.0" encoding="utf-8"?>
-<p:sld xmlns:a="http://schemas.openxmlformats.org/drawingml/2006/main" xmlns:r="http://schemas.openxmlformats.org/officeDocument/2006/relationships" xmlns:p="http://schemas.openxmlformats.org/presentationml/2006/main">
+<p:sld xmlns:a="http://schemas.openxmlformats.org/drawingml/2006/main" xmlns:p="http://schemas.openxmlformats.org/presentationml/2006/main" xmlns:r="http://schemas.openxmlformats.org/officeDocument/2006/relationships">
   <p:cSld>
     <p:spTree>
       <p:nvGrpSpPr>
@@ -7777,14 +7905,7 @@
         <p:cNvGrpSpPr/>
         <p:nvPr/>
       </p:nvGrpSpPr>
-      <p:grpSpPr>
-        <a:xfrm>
-          <a:off x="0" y="0"/>
-          <a:ext cx="0" cy="0"/>
-          <a:chOff x="0" y="0"/>
-          <a:chExt cx="0" cy="0"/>
-        </a:xfrm>
-      </p:grpSpPr>
+      <p:grpSpPr/>
       <p:sp>
         <p:nvSpPr>
           <p:cNvPr id="2" name="Rectangle 1"/>
@@ -7794,7 +7915,7 @@
         <p:spPr>
           <a:xfrm>
             <a:off x="0" y="0"/>
-            <a:ext cx="12191695" cy="6858000"/>
+            <a:ext cx="12192000" cy="6858000"/>
           </a:xfrm>
           <a:prstGeom prst="rect">
             <a:avLst/>
@@ -7826,7 +7947,6 @@
           <a:lstStyle/>
           <a:p>
             <a:pPr algn="ctr"/>
-            <a:endParaRPr/>
           </a:p>
         </p:txBody>
       </p:sp>
@@ -7852,62 +7972,106 @@
           </a:bodyPr>
           <a:lstStyle/>
           <a:p>
-            <a:pPr algn="l">
-              <a:spcAft>
-                <a:spcPts val="600"/>
-              </a:spcAft>
-            </a:pPr>
-            <a:r>
-              <a:rPr sz="2800" b="1" i="0">
+            <a:r>
+              <a:rPr sz="2800" b="1">
                 <a:solidFill>
                   <a:srgbClr val="2C5F2D"/>
                 </a:solidFill>
                 <a:latin typeface="Cambria"/>
               </a:rPr>
-              <a:t>Week 7 — My Story: The Eye Test</a:t>
-            </a:r>
-          </a:p>
-        </p:txBody>
-      </p:sp>
-      <p:pic>
-        <p:nvPicPr>
-          <p:cNvPr id="4" name="Picture 3" descr="4c-phoropter.jpg"/>
-          <p:cNvPicPr>
-            <a:picLocks noChangeAspect="1"/>
-          </p:cNvPicPr>
+              <a:t>Where We Are — the Four Connects</a:t>
+            </a:r>
+          </a:p>
+        </p:txBody>
+      </p:sp>
+      <p:sp>
+        <p:nvSpPr>
+          <p:cNvPr id="5" name="TextBox 4"/>
+          <p:cNvSpPr txBox="1"/>
           <p:nvPr/>
-        </p:nvPicPr>
-        <p:blipFill>
-          <a:blip r:embed="rId3"/>
-          <a:stretch>
-            <a:fillRect/>
-          </a:stretch>
-        </p:blipFill>
-        <p:spPr>
-          <a:xfrm>
-            <a:off x="822960" y="1645920"/>
-            <a:ext cx="4754880" cy="3566160"/>
+        </p:nvSpPr>
+        <p:spPr>
+          <a:xfrm>
+            <a:off x="822960" y="5623560"/>
+            <a:ext cx="10515600" cy="914400"/>
           </a:xfrm>
           <a:prstGeom prst="rect">
             <a:avLst/>
           </a:prstGeom>
-          <a:ln w="76200">
-            <a:solidFill>
-              <a:srgbClr val="FFFFFF"/>
-            </a:solidFill>
-          </a:ln>
-          <a:effectLst>
-            <a:outerShdw blurRad="63500" dist="25400" dir="5400000" rotWithShape="0">
-              <a:srgbClr val="000000">
-                <a:alpha val="35000"/>
-              </a:srgbClr>
-            </a:outerShdw>
-          </a:effectLst>
-        </p:spPr>
-      </p:pic>
+          <a:noFill/>
+        </p:spPr>
+        <p:txBody>
+          <a:bodyPr wrap="square">
+            <a:spAutoFit/>
+          </a:bodyPr>
+          <a:lstStyle/>
+          <a:p>
+            <a:r>
+              <a:rPr sz="1800" b="0">
+                <a:solidFill>
+                  <a:srgbClr val="222B22"/>
+                </a:solidFill>
+                <a:latin typeface="Calibri"/>
+              </a:rPr>
+              <a:t>Session 7 stands in the third box — </a:t>
+            </a:r>
+            <a:r>
+              <a:rPr sz="1800" b="1">
+                <a:solidFill>
+                  <a:srgbClr val="2C5F2D"/>
+                </a:solidFill>
+                <a:latin typeface="Calibri"/>
+              </a:rPr>
+              <a:t>Connect with God</a:t>
+            </a:r>
+            <a:r>
+              <a:rPr sz="1800" b="0">
+                <a:solidFill>
+                  <a:srgbClr val="222B22"/>
+                </a:solidFill>
+                <a:latin typeface="Calibri"/>
+              </a:rPr>
+              <a:t>. Each connection makes the next one real (Matt. 22:37–40).</a:t>
+            </a:r>
+          </a:p>
+        </p:txBody>
+      </p:sp>
+      <p:sp>
+        <p:nvSpPr>
+          <p:cNvPr id="90" name="SlideNum"/>
+          <p:cNvSpPr txBox="1"/>
+          <p:nvPr/>
+        </p:nvSpPr>
+        <p:spPr>
+          <a:xfrm>
+            <a:off x="11384280" y="6446520"/>
+            <a:ext cx="640080" cy="292608"/>
+          </a:xfrm>
+          <a:prstGeom prst="rect">
+            <a:avLst/>
+          </a:prstGeom>
+          <a:noFill/>
+        </p:spPr>
+        <p:txBody>
+          <a:bodyPr wrap="none" lIns="0" tIns="0" rIns="45720" bIns="0" anchor="ctr"/>
+          <a:lstStyle/>
+          <a:p>
+            <a:pPr algn="r"/>
+            <a:r>
+              <a:t>86a</a:t>
+            </a:r>
+            <a:endParaRPr sz="1000" b="1">
+              <a:solidFill>
+                <a:srgbClr val="7A8A6E"/>
+              </a:solidFill>
+              <a:latin typeface="Calibri"/>
+            </a:endParaRPr>
+          </a:p>
+        </p:txBody>
+      </p:sp>
       <p:pic>
         <p:nvPicPr>
-          <p:cNvPr id="5" name="Picture 4" descr="4c-eyechart.jpg"/>
+          <p:cNvPr id="91" name="Picture 90" descr="four-connects.png"/>
           <p:cNvPicPr>
             <a:picLocks noChangeAspect="1"/>
           </p:cNvPicPr>
@@ -7921,153 +8085,14 @@
         </p:blipFill>
         <p:spPr>
           <a:xfrm>
-            <a:off x="5971032" y="1645920"/>
-            <a:ext cx="2139696" cy="3566160"/>
+            <a:off x="932688" y="1645920"/>
+            <a:ext cx="10332720" cy="3708663"/>
           </a:xfrm>
           <a:prstGeom prst="rect">
             <a:avLst/>
           </a:prstGeom>
-          <a:ln w="76200">
-            <a:solidFill>
-              <a:srgbClr val="FFFFFF"/>
-            </a:solidFill>
-          </a:ln>
-          <a:effectLst>
-            <a:outerShdw blurRad="63500" dist="25400" dir="5400000" rotWithShape="0">
-              <a:srgbClr val="000000">
-                <a:alpha val="35000"/>
-              </a:srgbClr>
-            </a:outerShdw>
-          </a:effectLst>
         </p:spPr>
       </p:pic>
-      <p:sp>
-        <p:nvSpPr>
-          <p:cNvPr id="6" name="TextBox 5"/>
-          <p:cNvSpPr txBox="1"/>
-          <p:nvPr/>
-        </p:nvSpPr>
-        <p:spPr>
-          <a:xfrm>
-            <a:off x="8503920" y="1737360"/>
-            <a:ext cx="3108960" cy="3566160"/>
-          </a:xfrm>
-          <a:prstGeom prst="rect">
-            <a:avLst/>
-          </a:prstGeom>
-          <a:noFill/>
-        </p:spPr>
-        <p:txBody>
-          <a:bodyPr wrap="square" anchor="ctr">
-            <a:spAutoFit/>
-          </a:bodyPr>
-          <a:lstStyle/>
-          <a:p>
-            <a:pPr algn="l">
-              <a:spcAft>
-                <a:spcPts val="600"/>
-              </a:spcAft>
-            </a:pPr>
-            <a:r>
-              <a:rPr sz="2800" b="1" i="1">
-                <a:solidFill>
-                  <a:srgbClr val="2C5F2D"/>
-                </a:solidFill>
-                <a:latin typeface="Calibri"/>
-              </a:rPr>
-              <a:t>“The more I obey what I have heard, the finer print I can read.”</a:t>
-            </a:r>
-          </a:p>
-          <a:p>
-            <a:pPr algn="l">
-              <a:spcAft>
-                <a:spcPts val="600"/>
-              </a:spcAft>
-            </a:pPr>
-            <a:r>
-              <a:rPr sz="1800" b="0" i="1">
-                <a:solidFill>
-                  <a:srgbClr val="595959"/>
-                </a:solidFill>
-                <a:latin typeface="Calibri"/>
-              </a:rPr>
-              <a:t>— the founder’s story, told live</a:t>
-            </a:r>
-          </a:p>
-        </p:txBody>
-      </p:sp>
-      <p:sp>
-        <p:nvSpPr>
-          <p:cNvPr id="7" name="TextBox 6"/>
-          <p:cNvSpPr txBox="1"/>
-          <p:nvPr/>
-        </p:nvSpPr>
-        <p:spPr>
-          <a:xfrm>
-            <a:off x="822960" y="5669280"/>
-            <a:ext cx="10607040" cy="822960"/>
-          </a:xfrm>
-          <a:prstGeom prst="rect">
-            <a:avLst/>
-          </a:prstGeom>
-          <a:noFill/>
-        </p:spPr>
-        <p:txBody>
-          <a:bodyPr wrap="square">
-            <a:spAutoFit/>
-          </a:bodyPr>
-          <a:lstStyle/>
-          <a:p>
-            <a:pPr algn="l">
-              <a:spcAft>
-                <a:spcPts val="600"/>
-              </a:spcAft>
-            </a:pPr>
-            <a:r>
-              <a:rPr sz="1800" b="0" i="1">
-                <a:solidFill>
-                  <a:srgbClr val="222B22"/>
-                </a:solidFill>
-                <a:latin typeface="Calibri"/>
-              </a:rPr>
-              <a:t>Hearing God is a practice that grows with obedience — tonight we learn the practice.</a:t>
-            </a:r>
-          </a:p>
-        </p:txBody>
-      </p:sp>
-      <p:sp>
-        <p:nvSpPr>
-          <p:cNvPr id="90" name="SlideNum"/>
-          <p:cNvSpPr txBox="1"/>
-          <p:nvPr/>
-        </p:nvSpPr>
-        <p:spPr>
-          <a:xfrm>
-            <a:off x="11384280" y="6446520"/>
-            <a:ext cx="640080" cy="292608"/>
-          </a:xfrm>
-          <a:prstGeom prst="rect">
-            <a:avLst/>
-          </a:prstGeom>
-          <a:noFill/>
-        </p:spPr>
-        <p:txBody>
-          <a:bodyPr wrap="none" lIns="0" tIns="0" rIns="45720" bIns="0" anchor="ctr"/>
-          <a:lstStyle/>
-          <a:p>
-            <a:pPr algn="r"/>
-            <a:r>
-              <a:t>87</a:t>
-            </a:r>
-            <a:endParaRPr sz="1000" b="1">
-              <a:solidFill>
-                <a:srgbClr val="7A8A6E"/>
-              </a:solidFill>
-              <a:latin typeface="Calibri"/>
-            </a:endParaRPr>
-          </a:p>
-        </p:txBody>
-      </p:sp>
     </p:spTree>
   </p:cSld>
   <p:clrMapOvr>
@@ -8172,320 +8197,14 @@
                 </a:solidFill>
                 <a:latin typeface="Cambria"/>
               </a:rPr>
-              <a:t>Session 7 — Tonight’s Road</a:t>
-            </a:r>
-          </a:p>
-        </p:txBody>
-      </p:sp>
-      <p:sp>
-        <p:nvSpPr>
-          <p:cNvPr id="4" name="TextBox 3"/>
-          <p:cNvSpPr txBox="1"/>
-          <p:nvPr/>
-        </p:nvSpPr>
-        <p:spPr>
-          <a:xfrm>
-            <a:off x="822960" y="1508760"/>
-            <a:ext cx="7040880" cy="4754880"/>
-          </a:xfrm>
-          <a:prstGeom prst="rect">
-            <a:avLst/>
-          </a:prstGeom>
-          <a:noFill/>
-        </p:spPr>
-        <p:txBody>
-          <a:bodyPr wrap="square">
-            <a:spAutoFit/>
-          </a:bodyPr>
-          <a:lstStyle/>
-          <a:p>
-            <a:pPr>
-              <a:spcAft>
-                <a:spcPts val="500"/>
-              </a:spcAft>
-            </a:pPr>
-            <a:r>
-              <a:rPr sz="2800" b="1">
-                <a:solidFill>
-                  <a:srgbClr val="97BC62"/>
-                </a:solidFill>
-                <a:latin typeface="Calibri"/>
-              </a:rPr>
-              <a:t>1   </a:t>
-            </a:r>
-            <a:r>
-              <a:rPr sz="2800">
-                <a:solidFill>
-                  <a:srgbClr val="222B22"/>
-                </a:solidFill>
-                <a:latin typeface="Calibri"/>
-              </a:rPr>
-              <a:t>Welcome and centering</a:t>
-            </a:r>
-          </a:p>
-          <a:p>
-            <a:pPr>
-              <a:spcAft>
-                <a:spcPts val="500"/>
-              </a:spcAft>
-            </a:pPr>
-            <a:r>
-              <a:rPr sz="2800" b="1">
-                <a:solidFill>
-                  <a:srgbClr val="97BC62"/>
-                </a:solidFill>
-                <a:latin typeface="Calibri"/>
-              </a:rPr>
-              <a:t>2   </a:t>
-            </a:r>
-            <a:r>
-              <a:rPr sz="2800">
-                <a:solidFill>
-                  <a:srgbClr val="222B22"/>
-                </a:solidFill>
-                <a:latin typeface="Calibri"/>
-              </a:rPr>
-              <a:t>Re-entry — and the room reads itself</a:t>
-            </a:r>
-          </a:p>
-          <a:p>
-            <a:pPr>
-              <a:spcAft>
-                <a:spcPts val="500"/>
-              </a:spcAft>
-            </a:pPr>
-            <a:r>
-              <a:rPr sz="2800" b="1">
-                <a:solidFill>
-                  <a:srgbClr val="97BC62"/>
-                </a:solidFill>
-                <a:latin typeface="Calibri"/>
-              </a:rPr>
-              <a:t>3   </a:t>
-            </a:r>
-            <a:r>
-              <a:rPr sz="2800">
-                <a:solidFill>
-                  <a:srgbClr val="222B22"/>
-                </a:solidFill>
-                <a:latin typeface="Calibri"/>
-              </a:rPr>
-              <a:t>Romans 10:17 — the chain</a:t>
-            </a:r>
-          </a:p>
-          <a:p>
-            <a:pPr>
-              <a:spcAft>
-                <a:spcPts val="500"/>
-              </a:spcAft>
-            </a:pPr>
-            <a:r>
-              <a:rPr sz="2800" b="1">
-                <a:solidFill>
-                  <a:srgbClr val="97BC62"/>
-                </a:solidFill>
-                <a:latin typeface="Calibri"/>
-              </a:rPr>
-              <a:t>4   </a:t>
-            </a:r>
-            <a:r>
-              <a:rPr sz="2800">
-                <a:solidFill>
-                  <a:srgbClr val="222B22"/>
-                </a:solidFill>
-                <a:latin typeface="Calibri"/>
-              </a:rPr>
-              <a:t>PROAPT walked together</a:t>
-            </a:r>
-          </a:p>
-          <a:p>
-            <a:pPr>
-              <a:spcAft>
-                <a:spcPts val="500"/>
-              </a:spcAft>
-            </a:pPr>
-            <a:r>
-              <a:rPr sz="2800" b="1">
-                <a:solidFill>
-                  <a:srgbClr val="97BC62"/>
-                </a:solidFill>
-                <a:latin typeface="Calibri"/>
-              </a:rPr>
-              <a:t>5   </a:t>
-            </a:r>
-            <a:r>
-              <a:rPr sz="2800">
-                <a:solidFill>
-                  <a:srgbClr val="222B22"/>
-                </a:solidFill>
-                <a:latin typeface="Calibri"/>
-              </a:rPr>
-              <a:t>Bridge to the pairs and pair structure</a:t>
-            </a:r>
-          </a:p>
-          <a:p>
-            <a:pPr>
-              <a:spcAft>
-                <a:spcPts val="500"/>
-              </a:spcAft>
-            </a:pPr>
-            <a:r>
-              <a:rPr sz="2800" b="1">
-                <a:solidFill>
-                  <a:srgbClr val="97BC62"/>
-                </a:solidFill>
-                <a:latin typeface="Calibri"/>
-              </a:rPr>
-              <a:t>6   </a:t>
-            </a:r>
-            <a:r>
-              <a:rPr sz="2800">
-                <a:solidFill>
-                  <a:srgbClr val="222B22"/>
-                </a:solidFill>
-                <a:latin typeface="Calibri"/>
-              </a:rPr>
-              <a:t>PROAPT in family pairs in pairs</a:t>
-            </a:r>
-          </a:p>
-          <a:p>
-            <a:pPr>
-              <a:spcAft>
-                <a:spcPts val="500"/>
-              </a:spcAft>
-            </a:pPr>
-            <a:r>
-              <a:rPr sz="2800" b="1">
-                <a:solidFill>
-                  <a:srgbClr val="97BC62"/>
-                </a:solidFill>
-                <a:latin typeface="Calibri"/>
-              </a:rPr>
-              <a:t>7   </a:t>
-            </a:r>
-            <a:r>
-              <a:rPr sz="2800">
-                <a:solidFill>
-                  <a:srgbClr val="222B22"/>
-                </a:solidFill>
-                <a:latin typeface="Calibri"/>
-              </a:rPr>
-              <a:t>Tell step — sharing in the pair</a:t>
-            </a:r>
-          </a:p>
-          <a:p>
-            <a:pPr>
-              <a:spcAft>
-                <a:spcPts val="500"/>
-              </a:spcAft>
-            </a:pPr>
-            <a:r>
-              <a:rPr sz="2800" b="1">
-                <a:solidFill>
-                  <a:srgbClr val="97BC62"/>
-                </a:solidFill>
-                <a:latin typeface="Calibri"/>
-              </a:rPr>
-              <a:t>8   </a:t>
-            </a:r>
-            <a:r>
-              <a:rPr sz="2800">
-                <a:solidFill>
-                  <a:srgbClr val="222B22"/>
-                </a:solidFill>
-                <a:latin typeface="Calibri"/>
-              </a:rPr>
-              <a:t>Merge and homework</a:t>
-            </a:r>
-          </a:p>
-          <a:p>
-            <a:pPr>
-              <a:spcAft>
-                <a:spcPts val="500"/>
-              </a:spcAft>
-            </a:pPr>
-            <a:r>
-              <a:rPr sz="2800" b="1">
-                <a:solidFill>
-                  <a:srgbClr val="97BC62"/>
-                </a:solidFill>
-                <a:latin typeface="Calibri"/>
-              </a:rPr>
-              <a:t>9   </a:t>
-            </a:r>
-            <a:r>
-              <a:rPr sz="2800">
-                <a:solidFill>
-                  <a:srgbClr val="222B22"/>
-                </a:solidFill>
-                <a:latin typeface="Calibri"/>
-              </a:rPr>
-              <a:t>The Leader Feedback Round — both leaders</a:t>
-            </a:r>
-          </a:p>
-          <a:p>
-            <a:pPr>
-              <a:spcAft>
-                <a:spcPts val="500"/>
-              </a:spcAft>
-            </a:pPr>
-            <a:r>
-              <a:rPr sz="2800" b="1">
-                <a:solidFill>
-                  <a:srgbClr val="97BC62"/>
-                </a:solidFill>
-                <a:latin typeface="Calibri"/>
-              </a:rPr>
-              <a:t>10   </a:t>
-            </a:r>
-            <a:r>
-              <a:rPr sz="2800">
-                <a:solidFill>
-                  <a:srgbClr val="222B22"/>
-                </a:solidFill>
-                <a:latin typeface="Calibri"/>
-              </a:rPr>
-              <a:t>Closing container</a:t>
-            </a:r>
-          </a:p>
-        </p:txBody>
-      </p:sp>
-      <p:sp>
-        <p:nvSpPr>
-          <p:cNvPr id="90" name="SlideNum"/>
-          <p:cNvSpPr txBox="1"/>
-          <p:nvPr/>
-        </p:nvSpPr>
-        <p:spPr>
-          <a:xfrm>
-            <a:off x="11384280" y="6446520"/>
-            <a:ext cx="640080" cy="292608"/>
-          </a:xfrm>
-          <a:prstGeom prst="rect">
-            <a:avLst/>
-          </a:prstGeom>
-          <a:noFill/>
-        </p:spPr>
-        <p:txBody>
-          <a:bodyPr wrap="none" lIns="0" tIns="0" rIns="45720" bIns="0" anchor="ctr"/>
-          <a:lstStyle/>
-          <a:p>
-            <a:pPr algn="r"/>
-            <a:r>
-              <a:t>88</a:t>
-            </a:r>
-            <a:endParaRPr sz="1000" b="1">
-              <a:solidFill>
-                <a:srgbClr val="7A8A6E"/>
-              </a:solidFill>
-              <a:latin typeface="Calibri"/>
-            </a:endParaRPr>
+              <a:t>Week 7 — My Story: The Eye Test</a:t>
+            </a:r>
           </a:p>
         </p:txBody>
       </p:sp>
       <p:pic>
         <p:nvPicPr>
-          <p:cNvPr id="31" name="Picture 31" descr="the open container bowl"/>
+          <p:cNvPr id="4" name="Picture 3" descr="4c-phoropter.jpg"/>
           <p:cNvPicPr>
             <a:picLocks noChangeAspect="1"/>
           </p:cNvPicPr>
@@ -8499,8 +8218,8 @@
         </p:blipFill>
         <p:spPr>
           <a:xfrm>
-            <a:off x="8001000" y="1554480"/>
-            <a:ext cx="3017520" cy="4526280"/>
+            <a:off x="822960" y="1645920"/>
+            <a:ext cx="4754880" cy="3566160"/>
           </a:xfrm>
           <a:prstGeom prst="rect">
             <a:avLst/>
@@ -8519,6 +8238,169 @@
           </a:effectLst>
         </p:spPr>
       </p:pic>
+      <p:pic>
+        <p:nvPicPr>
+          <p:cNvPr id="5" name="Picture 4" descr="4c-eyechart.jpg"/>
+          <p:cNvPicPr>
+            <a:picLocks noChangeAspect="1"/>
+          </p:cNvPicPr>
+          <p:nvPr/>
+        </p:nvPicPr>
+        <p:blipFill>
+          <a:blip r:embed="rId4"/>
+          <a:stretch>
+            <a:fillRect/>
+          </a:stretch>
+        </p:blipFill>
+        <p:spPr>
+          <a:xfrm>
+            <a:off x="5971032" y="1645920"/>
+            <a:ext cx="2139696" cy="3566160"/>
+          </a:xfrm>
+          <a:prstGeom prst="rect">
+            <a:avLst/>
+          </a:prstGeom>
+          <a:ln w="76200">
+            <a:solidFill>
+              <a:srgbClr val="FFFFFF"/>
+            </a:solidFill>
+          </a:ln>
+          <a:effectLst>
+            <a:outerShdw blurRad="63500" dist="25400" dir="5400000" rotWithShape="0">
+              <a:srgbClr val="000000">
+                <a:alpha val="35000"/>
+              </a:srgbClr>
+            </a:outerShdw>
+          </a:effectLst>
+        </p:spPr>
+      </p:pic>
+      <p:sp>
+        <p:nvSpPr>
+          <p:cNvPr id="6" name="TextBox 5"/>
+          <p:cNvSpPr txBox="1"/>
+          <p:nvPr/>
+        </p:nvSpPr>
+        <p:spPr>
+          <a:xfrm>
+            <a:off x="8503920" y="1737360"/>
+            <a:ext cx="3108960" cy="3566160"/>
+          </a:xfrm>
+          <a:prstGeom prst="rect">
+            <a:avLst/>
+          </a:prstGeom>
+          <a:noFill/>
+        </p:spPr>
+        <p:txBody>
+          <a:bodyPr wrap="square" anchor="ctr">
+            <a:spAutoFit/>
+          </a:bodyPr>
+          <a:lstStyle/>
+          <a:p>
+            <a:pPr algn="l">
+              <a:spcAft>
+                <a:spcPts val="600"/>
+              </a:spcAft>
+            </a:pPr>
+            <a:r>
+              <a:rPr sz="2800" b="1" i="1">
+                <a:solidFill>
+                  <a:srgbClr val="2C5F2D"/>
+                </a:solidFill>
+                <a:latin typeface="Calibri"/>
+              </a:rPr>
+              <a:t>“The more I obey what I have heard, the finer print I can read.”</a:t>
+            </a:r>
+          </a:p>
+          <a:p>
+            <a:pPr algn="l">
+              <a:spcAft>
+                <a:spcPts val="600"/>
+              </a:spcAft>
+            </a:pPr>
+            <a:r>
+              <a:rPr sz="1800" b="0" i="1">
+                <a:solidFill>
+                  <a:srgbClr val="595959"/>
+                </a:solidFill>
+                <a:latin typeface="Calibri"/>
+              </a:rPr>
+              <a:t>— the founder’s story, told live</a:t>
+            </a:r>
+          </a:p>
+        </p:txBody>
+      </p:sp>
+      <p:sp>
+        <p:nvSpPr>
+          <p:cNvPr id="7" name="TextBox 6"/>
+          <p:cNvSpPr txBox="1"/>
+          <p:nvPr/>
+        </p:nvSpPr>
+        <p:spPr>
+          <a:xfrm>
+            <a:off x="822960" y="5669280"/>
+            <a:ext cx="10607040" cy="822960"/>
+          </a:xfrm>
+          <a:prstGeom prst="rect">
+            <a:avLst/>
+          </a:prstGeom>
+          <a:noFill/>
+        </p:spPr>
+        <p:txBody>
+          <a:bodyPr wrap="square">
+            <a:spAutoFit/>
+          </a:bodyPr>
+          <a:lstStyle/>
+          <a:p>
+            <a:pPr algn="l">
+              <a:spcAft>
+                <a:spcPts val="600"/>
+              </a:spcAft>
+            </a:pPr>
+            <a:r>
+              <a:rPr sz="1800" b="0" i="1">
+                <a:solidFill>
+                  <a:srgbClr val="222B22"/>
+                </a:solidFill>
+                <a:latin typeface="Calibri"/>
+              </a:rPr>
+              <a:t>Hearing God is a practice that grows with obedience — tonight we learn the practice.</a:t>
+            </a:r>
+          </a:p>
+        </p:txBody>
+      </p:sp>
+      <p:sp>
+        <p:nvSpPr>
+          <p:cNvPr id="90" name="SlideNum"/>
+          <p:cNvSpPr txBox="1"/>
+          <p:nvPr/>
+        </p:nvSpPr>
+        <p:spPr>
+          <a:xfrm>
+            <a:off x="11384280" y="6446520"/>
+            <a:ext cx="640080" cy="292608"/>
+          </a:xfrm>
+          <a:prstGeom prst="rect">
+            <a:avLst/>
+          </a:prstGeom>
+          <a:noFill/>
+        </p:spPr>
+        <p:txBody>
+          <a:bodyPr wrap="none" lIns="0" tIns="0" rIns="45720" bIns="0" anchor="ctr"/>
+          <a:lstStyle/>
+          <a:p>
+            <a:pPr algn="r"/>
+            <a:r>
+              <a:t>87</a:t>
+            </a:r>
+            <a:endParaRPr sz="1000" b="1">
+              <a:solidFill>
+                <a:srgbClr val="7A8A6E"/>
+              </a:solidFill>
+              <a:latin typeface="Calibri"/>
+            </a:endParaRPr>
+          </a:p>
+        </p:txBody>
+      </p:sp>
     </p:spTree>
   </p:cSld>
   <p:clrMapOvr>
@@ -8564,11 +8446,27 @@
           <a:ln>
             <a:noFill/>
           </a:ln>
-        </p:spPr>
-        <p:txBody>
-          <a:bodyPr/>
-          <a:lstStyle/>
-          <a:p>
+          <a:effectLst/>
+        </p:spPr>
+        <p:style>
+          <a:lnRef idx="1">
+            <a:schemeClr val="accent1"/>
+          </a:lnRef>
+          <a:fillRef idx="3">
+            <a:schemeClr val="accent1"/>
+          </a:fillRef>
+          <a:effectRef idx="2">
+            <a:schemeClr val="accent1"/>
+          </a:effectRef>
+          <a:fontRef idx="minor">
+            <a:schemeClr val="lt1"/>
+          </a:fontRef>
+        </p:style>
+        <p:txBody>
+          <a:bodyPr rtlCol="0" anchor="ctr"/>
+          <a:lstStyle/>
+          <a:p>
+            <a:pPr algn="ctr"/>
             <a:endParaRPr/>
           </a:p>
         </p:txBody>
@@ -8607,21 +8505,21 @@
                 </a:solidFill>
                 <a:latin typeface="Cambria"/>
               </a:rPr>
-              <a:t>Opening Container — the Eight Steps</a:t>
-            </a:r>
-          </a:p>
-        </p:txBody>
-      </p:sp>
-      <p:sp>
-        <p:nvSpPr>
-          <p:cNvPr id="4" name="TextBox 4"/>
+              <a:t>Session 7 — Tonight’s Road</a:t>
+            </a:r>
+          </a:p>
+        </p:txBody>
+      </p:sp>
+      <p:sp>
+        <p:nvSpPr>
+          <p:cNvPr id="4" name="TextBox 3"/>
           <p:cNvSpPr txBox="1"/>
           <p:nvPr/>
         </p:nvSpPr>
         <p:spPr>
           <a:xfrm>
-            <a:off x="822960" y="1554480"/>
-            <a:ext cx="10515600" cy="4892040"/>
+            <a:off x="822960" y="1508760"/>
+            <a:ext cx="7040880" cy="4754880"/>
           </a:xfrm>
           <a:prstGeom prst="rect">
             <a:avLst/>
@@ -8629,16 +8527,18 @@
           <a:noFill/>
         </p:spPr>
         <p:txBody>
-          <a:bodyPr wrap="square" lIns="91440" tIns="91440" rIns="91440" bIns="91440"/>
-          <a:lstStyle/>
-          <a:p>
-            <a:pPr marL="342900" indent="-342900">
+          <a:bodyPr wrap="square">
+            <a:spAutoFit/>
+          </a:bodyPr>
+          <a:lstStyle/>
+          <a:p>
+            <a:pPr>
               <a:spcAft>
-                <a:spcPts val="650"/>
+                <a:spcPts val="500"/>
               </a:spcAft>
             </a:pPr>
             <a:r>
-              <a:rPr sz="2400" b="1" i="0">
+              <a:rPr sz="2800" b="1">
                 <a:solidFill>
                   <a:srgbClr val="97BC62"/>
                 </a:solidFill>
@@ -8647,23 +8547,23 @@
               <a:t>1   </a:t>
             </a:r>
             <a:r>
-              <a:rPr sz="2400" b="0" i="0">
+              <a:rPr sz="2800">
                 <a:solidFill>
                   <a:srgbClr val="222B22"/>
                 </a:solidFill>
                 <a:latin typeface="Calibri"/>
               </a:rPr>
-              <a:t>Welcome — five minutes to open the container</a:t>
-            </a:r>
-          </a:p>
-          <a:p>
-            <a:pPr marL="342900" indent="-342900">
+              <a:t>Welcome and centering</a:t>
+            </a:r>
+          </a:p>
+          <a:p>
+            <a:pPr>
               <a:spcAft>
-                <a:spcPts val="650"/>
+                <a:spcPts val="500"/>
               </a:spcAft>
             </a:pPr>
             <a:r>
-              <a:rPr sz="2400" b="1" i="0">
+              <a:rPr sz="2800" b="1">
                 <a:solidFill>
                   <a:srgbClr val="97BC62"/>
                 </a:solidFill>
@@ -8672,23 +8572,23 @@
               <a:t>2   </a:t>
             </a:r>
             <a:r>
-              <a:rPr sz="2400" b="0" i="0">
+              <a:rPr sz="2800">
                 <a:solidFill>
                   <a:srgbClr val="222B22"/>
                 </a:solidFill>
                 <a:latin typeface="Calibri"/>
               </a:rPr>
-              <a:t>Phones silenced and put away</a:t>
-            </a:r>
-          </a:p>
-          <a:p>
-            <a:pPr marL="342900" indent="-342900">
+              <a:t>Re-entry — and the room reads itself</a:t>
+            </a:r>
+          </a:p>
+          <a:p>
+            <a:pPr>
               <a:spcAft>
-                <a:spcPts val="650"/>
+                <a:spcPts val="500"/>
               </a:spcAft>
             </a:pPr>
             <a:r>
-              <a:rPr sz="2400" b="1" i="0">
+              <a:rPr sz="2800" b="1">
                 <a:solidFill>
                   <a:srgbClr val="97BC62"/>
                 </a:solidFill>
@@ -8697,23 +8597,23 @@
               <a:t>3   </a:t>
             </a:r>
             <a:r>
-              <a:rPr sz="2400" b="0" i="0">
+              <a:rPr sz="2800">
                 <a:solidFill>
                   <a:srgbClr val="222B22"/>
                 </a:solidFill>
                 <a:latin typeface="Calibri"/>
               </a:rPr>
-              <a:t>Stand in a circle</a:t>
-            </a:r>
-          </a:p>
-          <a:p>
-            <a:pPr marL="342900" indent="-342900">
+              <a:t>Romans 10:17 — the chain</a:t>
+            </a:r>
+          </a:p>
+          <a:p>
+            <a:pPr>
               <a:spcAft>
-                <a:spcPts val="650"/>
+                <a:spcPts val="500"/>
               </a:spcAft>
             </a:pPr>
             <a:r>
-              <a:rPr sz="2400" b="1" i="0">
+              <a:rPr sz="2800" b="1">
                 <a:solidFill>
                   <a:srgbClr val="97BC62"/>
                 </a:solidFill>
@@ -8722,23 +8622,23 @@
               <a:t>4   </a:t>
             </a:r>
             <a:r>
-              <a:rPr sz="2400" b="0" i="0">
+              <a:rPr sz="2800">
                 <a:solidFill>
                   <a:srgbClr val="222B22"/>
                 </a:solidFill>
                 <a:latin typeface="Calibri"/>
               </a:rPr>
-              <a:t>One-word check-in — how you actually are, right now</a:t>
-            </a:r>
-          </a:p>
-          <a:p>
-            <a:pPr marL="342900" indent="-342900">
+              <a:t>PROAPT walked together</a:t>
+            </a:r>
+          </a:p>
+          <a:p>
+            <a:pPr>
               <a:spcAft>
-                <a:spcPts val="650"/>
+                <a:spcPts val="500"/>
               </a:spcAft>
             </a:pPr>
             <a:r>
-              <a:rPr sz="2400" b="1" i="0">
+              <a:rPr sz="2800" b="1">
                 <a:solidFill>
                   <a:srgbClr val="97BC62"/>
                 </a:solidFill>
@@ -8747,23 +8647,23 @@
               <a:t>5   </a:t>
             </a:r>
             <a:r>
-              <a:rPr sz="2400" b="0" i="0">
+              <a:rPr sz="2800">
                 <a:solidFill>
                   <a:srgbClr val="222B22"/>
                 </a:solidFill>
                 <a:latin typeface="Calibri"/>
               </a:rPr>
-              <a:t>Put out / bring in — set something down; bring a blessing in</a:t>
-            </a:r>
-          </a:p>
-          <a:p>
-            <a:pPr marL="342900" indent="-342900">
+              <a:t>Bridge to the pairs and pair structure</a:t>
+            </a:r>
+          </a:p>
+          <a:p>
+            <a:pPr>
               <a:spcAft>
-                <a:spcPts val="650"/>
+                <a:spcPts val="500"/>
               </a:spcAft>
             </a:pPr>
             <a:r>
-              <a:rPr sz="2400" b="1" i="0">
+              <a:rPr sz="2800" b="1">
                 <a:solidFill>
                   <a:srgbClr val="97BC62"/>
                 </a:solidFill>
@@ -8772,23 +8672,23 @@
               <a:t>6   </a:t>
             </a:r>
             <a:r>
-              <a:rPr sz="2400" b="0" i="0">
+              <a:rPr sz="2800">
                 <a:solidFill>
                   <a:srgbClr val="222B22"/>
                 </a:solidFill>
                 <a:latin typeface="Calibri"/>
               </a:rPr>
-              <a:t>Spoken commitment: “I am here. I am paying attention. I am willing to be moved.”</a:t>
-            </a:r>
-          </a:p>
-          <a:p>
-            <a:pPr marL="342900" indent="-342900">
+              <a:t>PROAPT in family pairs in pairs</a:t>
+            </a:r>
+          </a:p>
+          <a:p>
+            <a:pPr>
               <a:spcAft>
-                <a:spcPts val="650"/>
+                <a:spcPts val="500"/>
               </a:spcAft>
             </a:pPr>
             <a:r>
-              <a:rPr sz="2400" b="1" i="0">
+              <a:rPr sz="2800" b="1">
                 <a:solidFill>
                   <a:srgbClr val="97BC62"/>
                 </a:solidFill>
@@ -8797,23 +8697,23 @@
               <a:t>7   </a:t>
             </a:r>
             <a:r>
-              <a:rPr sz="2400" b="0" i="0">
+              <a:rPr sz="2800">
                 <a:solidFill>
                   <a:srgbClr val="222B22"/>
                 </a:solidFill>
                 <a:latin typeface="Calibri"/>
               </a:rPr>
-              <a:t>Opening prayer — “Holy Spirit, you are welcome here. Speak. We are listening.”</a:t>
-            </a:r>
-          </a:p>
-          <a:p>
-            <a:pPr marL="342900" indent="-342900">
+              <a:t>Tell step — sharing in the pair</a:t>
+            </a:r>
+          </a:p>
+          <a:p>
+            <a:pPr>
               <a:spcAft>
-                <a:spcPts val="650"/>
+                <a:spcPts val="500"/>
               </a:spcAft>
             </a:pPr>
             <a:r>
-              <a:rPr sz="2400" b="1" i="0">
+              <a:rPr sz="2800" b="1">
                 <a:solidFill>
                   <a:srgbClr val="97BC62"/>
                 </a:solidFill>
@@ -8822,13 +8722,63 @@
               <a:t>8   </a:t>
             </a:r>
             <a:r>
-              <a:rPr sz="2400" b="0" i="0">
+              <a:rPr sz="2800">
                 <a:solidFill>
                   <a:srgbClr val="222B22"/>
                 </a:solidFill>
                 <a:latin typeface="Calibri"/>
               </a:rPr>
-              <a:t>Sit. Begin.</a:t>
+              <a:t>Merge and homework</a:t>
+            </a:r>
+          </a:p>
+          <a:p>
+            <a:pPr>
+              <a:spcAft>
+                <a:spcPts val="500"/>
+              </a:spcAft>
+            </a:pPr>
+            <a:r>
+              <a:rPr sz="2800" b="1">
+                <a:solidFill>
+                  <a:srgbClr val="97BC62"/>
+                </a:solidFill>
+                <a:latin typeface="Calibri"/>
+              </a:rPr>
+              <a:t>9   </a:t>
+            </a:r>
+            <a:r>
+              <a:rPr sz="2800">
+                <a:solidFill>
+                  <a:srgbClr val="222B22"/>
+                </a:solidFill>
+                <a:latin typeface="Calibri"/>
+              </a:rPr>
+              <a:t>The Leader Feedback Round — both leaders</a:t>
+            </a:r>
+          </a:p>
+          <a:p>
+            <a:pPr>
+              <a:spcAft>
+                <a:spcPts val="500"/>
+              </a:spcAft>
+            </a:pPr>
+            <a:r>
+              <a:rPr sz="2800" b="1">
+                <a:solidFill>
+                  <a:srgbClr val="97BC62"/>
+                </a:solidFill>
+                <a:latin typeface="Calibri"/>
+              </a:rPr>
+              <a:t>10   </a:t>
+            </a:r>
+            <a:r>
+              <a:rPr sz="2800">
+                <a:solidFill>
+                  <a:srgbClr val="222B22"/>
+                </a:solidFill>
+                <a:latin typeface="Calibri"/>
+              </a:rPr>
+              <a:t>Closing container</a:t>
             </a:r>
           </a:p>
         </p:txBody>
@@ -8855,7 +8805,7 @@
           <a:p>
             <a:pPr algn="r"/>
             <a:r>
-              <a:t>89</a:t>
+              <a:t>88</a:t>
             </a:r>
             <a:endParaRPr sz="1000" b="1">
               <a:solidFill>
@@ -8866,6 +8816,42 @@
           </a:p>
         </p:txBody>
       </p:sp>
+      <p:pic>
+        <p:nvPicPr>
+          <p:cNvPr id="31" name="Picture 31" descr="the open container bowl"/>
+          <p:cNvPicPr>
+            <a:picLocks noChangeAspect="1"/>
+          </p:cNvPicPr>
+          <p:nvPr/>
+        </p:nvPicPr>
+        <p:blipFill>
+          <a:blip r:embed="rId3"/>
+          <a:stretch>
+            <a:fillRect/>
+          </a:stretch>
+        </p:blipFill>
+        <p:spPr>
+          <a:xfrm>
+            <a:off x="8001000" y="1554480"/>
+            <a:ext cx="3017520" cy="4526280"/>
+          </a:xfrm>
+          <a:prstGeom prst="rect">
+            <a:avLst/>
+          </a:prstGeom>
+          <a:ln w="76200">
+            <a:solidFill>
+              <a:srgbClr val="FFFFFF"/>
+            </a:solidFill>
+          </a:ln>
+          <a:effectLst>
+            <a:outerShdw blurRad="63500" dist="25400" dir="5400000" rotWithShape="0">
+              <a:srgbClr val="000000">
+                <a:alpha val="35000"/>
+              </a:srgbClr>
+            </a:outerShdw>
+          </a:effectLst>
+        </p:spPr>
+      </p:pic>
     </p:spTree>
   </p:cSld>
   <p:clrMapOvr>
@@ -8954,7 +8940,7 @@
                 </a:solidFill>
                 <a:latin typeface="Cambria"/>
               </a:rPr>
-              <a:t>Re-Entry Check-In</a:t>
+              <a:t>Opening Container — the Eight Steps</a:t>
             </a:r>
           </a:p>
         </p:txBody>
@@ -8968,7 +8954,7 @@
         <p:spPr>
           <a:xfrm>
             <a:off x="822960" y="1554480"/>
-            <a:ext cx="6675120" cy="4892040"/>
+            <a:ext cx="10515600" cy="4892040"/>
           </a:xfrm>
           <a:prstGeom prst="rect">
             <a:avLst/>
@@ -8979,9 +8965,9 @@
           <a:bodyPr wrap="square" lIns="91440" tIns="91440" rIns="91440" bIns="91440"/>
           <a:lstStyle/>
           <a:p>
-            <a:pPr marL="274320" indent="-274320">
+            <a:pPr marL="342900" indent="-342900">
               <a:spcAft>
-                <a:spcPts val="900"/>
+                <a:spcPts val="650"/>
               </a:spcAft>
             </a:pPr>
             <a:r>
@@ -8991,7 +8977,7 @@
                 </a:solidFill>
                 <a:latin typeface="Calibri"/>
               </a:rPr>
-              <a:t>•  </a:t>
+              <a:t>1   </a:t>
             </a:r>
             <a:r>
               <a:rPr sz="2400" b="0" i="0">
@@ -9000,13 +8986,13 @@
                 </a:solidFill>
                 <a:latin typeface="Calibri"/>
               </a:rPr>
-              <a:t>First gathering of Quarter 2 — the container re-held slowly after the break</a:t>
-            </a:r>
-          </a:p>
-          <a:p>
-            <a:pPr marL="274320" indent="-274320">
+              <a:t>Welcome — five minutes to open the container</a:t>
+            </a:r>
+          </a:p>
+          <a:p>
+            <a:pPr marL="342900" indent="-342900">
               <a:spcAft>
-                <a:spcPts val="900"/>
+                <a:spcPts val="650"/>
               </a:spcAft>
             </a:pPr>
             <a:r>
@@ -9016,7 +9002,7 @@
                 </a:solidFill>
                 <a:latin typeface="Calibri"/>
               </a:rPr>
-              <a:t>•  </a:t>
+              <a:t>2   </a:t>
             </a:r>
             <a:r>
               <a:rPr sz="2400" b="0" i="0">
@@ -9025,38 +9011,38 @@
                 </a:solidFill>
                 <a:latin typeface="Calibri"/>
               </a:rPr>
-              <a:t>“Take ninety seconds: one sentence about the Examen, or about how the break treated your practice, or anything that has shifted.”</a:t>
-            </a:r>
-          </a:p>
-          <a:p>
-            <a:pPr marL="685800" indent="-274320">
+              <a:t>Phones silenced and put away</a:t>
+            </a:r>
+          </a:p>
+          <a:p>
+            <a:pPr marL="342900" indent="-342900">
               <a:spcAft>
-                <a:spcPts val="700"/>
+                <a:spcPts val="650"/>
               </a:spcAft>
             </a:pPr>
             <a:r>
-              <a:rPr sz="1800" b="1" i="0">
+              <a:rPr sz="2400" b="1" i="0">
                 <a:solidFill>
                   <a:srgbClr val="97BC62"/>
                 </a:solidFill>
                 <a:latin typeface="Calibri"/>
               </a:rPr>
-              <a:t>–  </a:t>
-            </a:r>
-            <a:r>
-              <a:rPr sz="1800" b="0" i="1">
+              <a:t>3   </a:t>
+            </a:r>
+            <a:r>
+              <a:rPr sz="2400" b="0" i="0">
                 <a:solidFill>
                   <a:srgbClr val="222B22"/>
                 </a:solidFill>
                 <a:latin typeface="Calibri"/>
               </a:rPr>
-              <a:t>“Thinned out over the break is a completely normal answer — the practice picks up where you are.”</a:t>
-            </a:r>
-          </a:p>
-          <a:p>
-            <a:pPr marL="274320" indent="-274320">
+              <a:t>Stand in a circle</a:t>
+            </a:r>
+          </a:p>
+          <a:p>
+            <a:pPr marL="342900" indent="-342900">
               <a:spcAft>
-                <a:spcPts val="900"/>
+                <a:spcPts val="650"/>
               </a:spcAft>
             </a:pPr>
             <a:r>
@@ -9066,7 +9052,7 @@
                 </a:solidFill>
                 <a:latin typeface="Calibri"/>
               </a:rPr>
-              <a:t>•  </a:t>
+              <a:t>4   </a:t>
             </a:r>
             <a:r>
               <a:rPr sz="2400" b="0" i="0">
@@ -9075,13 +9061,13 @@
                 </a:solidFill>
                 <a:latin typeface="Calibri"/>
               </a:rPr>
-              <a:t>A parent starts the round — pass-anytime holds</a:t>
-            </a:r>
-          </a:p>
-          <a:p>
-            <a:pPr marL="274320" indent="-274320">
+              <a:t>One-word check-in — how you actually are, right now</a:t>
+            </a:r>
+          </a:p>
+          <a:p>
+            <a:pPr marL="342900" indent="-342900">
               <a:spcAft>
-                <a:spcPts val="900"/>
+                <a:spcPts val="650"/>
               </a:spcAft>
             </a:pPr>
             <a:r>
@@ -9091,7 +9077,7 @@
                 </a:solidFill>
                 <a:latin typeface="Calibri"/>
               </a:rPr>
-              <a:t>•  </a:t>
+              <a:t>5   </a:t>
             </a:r>
             <a:r>
               <a:rPr sz="2400" b="0" i="0">
@@ -9100,7 +9086,82 @@
                 </a:solidFill>
                 <a:latin typeface="Calibri"/>
               </a:rPr>
-              <a:t>Week 6 still sitting heavy? “The team is here. Find one of us before you leave tonight.”</a:t>
+              <a:t>Put out / bring in — set something down; bring a blessing in</a:t>
+            </a:r>
+          </a:p>
+          <a:p>
+            <a:pPr marL="342900" indent="-342900">
+              <a:spcAft>
+                <a:spcPts val="650"/>
+              </a:spcAft>
+            </a:pPr>
+            <a:r>
+              <a:rPr sz="2400" b="1" i="0">
+                <a:solidFill>
+                  <a:srgbClr val="97BC62"/>
+                </a:solidFill>
+                <a:latin typeface="Calibri"/>
+              </a:rPr>
+              <a:t>6   </a:t>
+            </a:r>
+            <a:r>
+              <a:rPr sz="2400" b="0" i="0">
+                <a:solidFill>
+                  <a:srgbClr val="222B22"/>
+                </a:solidFill>
+                <a:latin typeface="Calibri"/>
+              </a:rPr>
+              <a:t>Spoken commitment: “I am here. I am paying attention. I am willing to be moved.”</a:t>
+            </a:r>
+          </a:p>
+          <a:p>
+            <a:pPr marL="342900" indent="-342900">
+              <a:spcAft>
+                <a:spcPts val="650"/>
+              </a:spcAft>
+            </a:pPr>
+            <a:r>
+              <a:rPr sz="2400" b="1" i="0">
+                <a:solidFill>
+                  <a:srgbClr val="97BC62"/>
+                </a:solidFill>
+                <a:latin typeface="Calibri"/>
+              </a:rPr>
+              <a:t>7   </a:t>
+            </a:r>
+            <a:r>
+              <a:rPr sz="2400" b="0" i="0">
+                <a:solidFill>
+                  <a:srgbClr val="222B22"/>
+                </a:solidFill>
+                <a:latin typeface="Calibri"/>
+              </a:rPr>
+              <a:t>Opening prayer — “Holy Spirit, you are welcome here. Speak. We are listening.”</a:t>
+            </a:r>
+          </a:p>
+          <a:p>
+            <a:pPr marL="342900" indent="-342900">
+              <a:spcAft>
+                <a:spcPts val="650"/>
+              </a:spcAft>
+            </a:pPr>
+            <a:r>
+              <a:rPr sz="2400" b="1" i="0">
+                <a:solidFill>
+                  <a:srgbClr val="97BC62"/>
+                </a:solidFill>
+                <a:latin typeface="Calibri"/>
+              </a:rPr>
+              <a:t>8   </a:t>
+            </a:r>
+            <a:r>
+              <a:rPr sz="2400" b="0" i="0">
+                <a:solidFill>
+                  <a:srgbClr val="222B22"/>
+                </a:solidFill>
+                <a:latin typeface="Calibri"/>
+              </a:rPr>
+              <a:t>Sit. Begin.</a:t>
             </a:r>
           </a:p>
         </p:txBody>
@@ -9127,7 +9188,7 @@
           <a:p>
             <a:pPr algn="r"/>
             <a:r>
-              <a:t>90</a:t>
+              <a:t>89</a:t>
             </a:r>
             <a:endParaRPr sz="1000" b="1">
               <a:solidFill>
@@ -9138,42 +9199,6 @@
           </a:p>
         </p:txBody>
       </p:sp>
-      <p:pic>
-        <p:nvPicPr>
-          <p:cNvPr id="32" name="Picture 32" descr="trail cairn - the weekly check-in"/>
-          <p:cNvPicPr>
-            <a:picLocks noChangeAspect="1"/>
-          </p:cNvPicPr>
-          <p:nvPr/>
-        </p:nvPicPr>
-        <p:blipFill>
-          <a:blip r:embed="rId3"/>
-          <a:stretch>
-            <a:fillRect/>
-          </a:stretch>
-        </p:blipFill>
-        <p:spPr>
-          <a:xfrm>
-            <a:off x="8103612" y="1463040"/>
-            <a:ext cx="3262379" cy="4892040"/>
-          </a:xfrm>
-          <a:prstGeom prst="rect">
-            <a:avLst/>
-          </a:prstGeom>
-          <a:ln w="76200">
-            <a:solidFill>
-              <a:srgbClr val="FFFFFF"/>
-            </a:solidFill>
-          </a:ln>
-          <a:effectLst>
-            <a:outerShdw blurRad="63500" dist="25400" dir="5400000" rotWithShape="0">
-              <a:srgbClr val="000000">
-                <a:alpha val="35000"/>
-              </a:srgbClr>
-            </a:outerShdw>
-          </a:effectLst>
-        </p:spPr>
-      </p:pic>
     </p:spTree>
   </p:cSld>
   <p:clrMapOvr>
@@ -9262,21 +9287,21 @@
                 </a:solidFill>
                 <a:latin typeface="Cambria"/>
               </a:rPr>
-              <a:t>The Round, for All of Us</a:t>
-            </a:r>
-          </a:p>
-        </p:txBody>
-      </p:sp>
-      <p:sp>
-        <p:nvSpPr>
-          <p:cNvPr id="90" name="SlideNum"/>
+              <a:t>Re-Entry Check-In</a:t>
+            </a:r>
+          </a:p>
+        </p:txBody>
+      </p:sp>
+      <p:sp>
+        <p:nvSpPr>
+          <p:cNvPr id="4" name="TextBox 4"/>
           <p:cNvSpPr txBox="1"/>
           <p:nvPr/>
         </p:nvSpPr>
         <p:spPr>
           <a:xfrm>
-            <a:off x="11384280" y="6446520"/>
-            <a:ext cx="640080" cy="292608"/>
+            <a:off x="822960" y="1554480"/>
+            <a:ext cx="6675120" cy="4892040"/>
           </a:xfrm>
           <a:prstGeom prst="rect">
             <a:avLst/>
@@ -9284,12 +9309,158 @@
           <a:noFill/>
         </p:spPr>
         <p:txBody>
+          <a:bodyPr wrap="square" lIns="91440" tIns="91440" rIns="91440" bIns="91440"/>
+          <a:lstStyle/>
+          <a:p>
+            <a:pPr marL="274320" indent="-274320">
+              <a:spcAft>
+                <a:spcPts val="900"/>
+              </a:spcAft>
+            </a:pPr>
+            <a:r>
+              <a:rPr sz="2400" b="1" i="0">
+                <a:solidFill>
+                  <a:srgbClr val="97BC62"/>
+                </a:solidFill>
+                <a:latin typeface="Calibri"/>
+              </a:rPr>
+              <a:t>•  </a:t>
+            </a:r>
+            <a:r>
+              <a:rPr sz="2400" b="0" i="0">
+                <a:solidFill>
+                  <a:srgbClr val="222B22"/>
+                </a:solidFill>
+                <a:latin typeface="Calibri"/>
+              </a:rPr>
+              <a:t>First gathering of Quarter 2 — the container re-held slowly after the break</a:t>
+            </a:r>
+          </a:p>
+          <a:p>
+            <a:pPr marL="274320" indent="-274320">
+              <a:spcAft>
+                <a:spcPts val="900"/>
+              </a:spcAft>
+            </a:pPr>
+            <a:r>
+              <a:rPr sz="2400" b="1" i="0">
+                <a:solidFill>
+                  <a:srgbClr val="97BC62"/>
+                </a:solidFill>
+                <a:latin typeface="Calibri"/>
+              </a:rPr>
+              <a:t>•  </a:t>
+            </a:r>
+            <a:r>
+              <a:rPr sz="2400" b="0" i="0">
+                <a:solidFill>
+                  <a:srgbClr val="222B22"/>
+                </a:solidFill>
+                <a:latin typeface="Calibri"/>
+              </a:rPr>
+              <a:t>“Take ninety seconds: one sentence about the Examen, or about how the break treated your practice, or anything that has shifted.”</a:t>
+            </a:r>
+          </a:p>
+          <a:p>
+            <a:pPr marL="685800" indent="-274320">
+              <a:spcAft>
+                <a:spcPts val="700"/>
+              </a:spcAft>
+            </a:pPr>
+            <a:r>
+              <a:rPr sz="1800" b="1" i="0">
+                <a:solidFill>
+                  <a:srgbClr val="97BC62"/>
+                </a:solidFill>
+                <a:latin typeface="Calibri"/>
+              </a:rPr>
+              <a:t>–  </a:t>
+            </a:r>
+            <a:r>
+              <a:rPr sz="1800" b="0" i="1">
+                <a:solidFill>
+                  <a:srgbClr val="222B22"/>
+                </a:solidFill>
+                <a:latin typeface="Calibri"/>
+              </a:rPr>
+              <a:t>“Thinned out over the break is a completely normal answer — the practice picks up where you are.”</a:t>
+            </a:r>
+          </a:p>
+          <a:p>
+            <a:pPr marL="274320" indent="-274320">
+              <a:spcAft>
+                <a:spcPts val="900"/>
+              </a:spcAft>
+            </a:pPr>
+            <a:r>
+              <a:rPr sz="2400" b="1" i="0">
+                <a:solidFill>
+                  <a:srgbClr val="97BC62"/>
+                </a:solidFill>
+                <a:latin typeface="Calibri"/>
+              </a:rPr>
+              <a:t>•  </a:t>
+            </a:r>
+            <a:r>
+              <a:rPr sz="2400" b="0" i="0">
+                <a:solidFill>
+                  <a:srgbClr val="222B22"/>
+                </a:solidFill>
+                <a:latin typeface="Calibri"/>
+              </a:rPr>
+              <a:t>A parent starts the round — pass-anytime holds</a:t>
+            </a:r>
+          </a:p>
+          <a:p>
+            <a:pPr marL="274320" indent="-274320">
+              <a:spcAft>
+                <a:spcPts val="900"/>
+              </a:spcAft>
+            </a:pPr>
+            <a:r>
+              <a:rPr sz="2400" b="1" i="0">
+                <a:solidFill>
+                  <a:srgbClr val="97BC62"/>
+                </a:solidFill>
+                <a:latin typeface="Calibri"/>
+              </a:rPr>
+              <a:t>•  </a:t>
+            </a:r>
+            <a:r>
+              <a:rPr sz="2400" b="0" i="0">
+                <a:solidFill>
+                  <a:srgbClr val="222B22"/>
+                </a:solidFill>
+                <a:latin typeface="Calibri"/>
+              </a:rPr>
+              <a:t>Week 6 still sitting heavy? “The team is here. Find one of us before you leave tonight.”</a:t>
+            </a:r>
+          </a:p>
+        </p:txBody>
+      </p:sp>
+      <p:sp>
+        <p:nvSpPr>
+          <p:cNvPr id="90" name="SlideNum"/>
+          <p:cNvSpPr txBox="1"/>
+          <p:nvPr/>
+        </p:nvSpPr>
+        <p:spPr>
+          <a:xfrm>
+            <a:off x="11384280" y="6446520"/>
+            <a:ext cx="640080" cy="292608"/>
+          </a:xfrm>
+          <a:prstGeom prst="rect">
+            <a:avLst/>
+          </a:prstGeom>
+          <a:noFill/>
+        </p:spPr>
+        <p:txBody>
           <a:bodyPr wrap="none" lIns="0" tIns="0" rIns="45720" bIns="0" anchor="ctr"/>
           <a:lstStyle/>
           <a:p>
             <a:pPr algn="r"/>
             <a:r>
-              <a:t>91</a:t>
+              <a:t>90</a:t>
             </a:r>
             <a:endParaRPr sz="1000" b="1">
               <a:solidFill>
@@ -9300,137 +9471,42 @@
           </a:p>
         </p:txBody>
       </p:sp>
-      <p:sp>
-        <p:nvSpPr>
-          <p:cNvPr id="290" name="RoomSelfRead"/>
-          <p:cNvSpPr txBox="1"/>
+      <p:pic>
+        <p:nvPicPr>
+          <p:cNvPr id="32" name="Picture 32" descr="trail cairn - the weekly check-in"/>
+          <p:cNvPicPr>
+            <a:picLocks noChangeAspect="1"/>
+          </p:cNvPicPr>
           <p:nvPr/>
-        </p:nvSpPr>
-        <p:spPr>
-          <a:xfrm>
-            <a:off x="822960" y="1417320"/>
-            <a:ext cx="10515600" cy="5029200"/>
+        </p:nvPicPr>
+        <p:blipFill>
+          <a:blip r:embed="rId3"/>
+          <a:stretch>
+            <a:fillRect/>
+          </a:stretch>
+        </p:blipFill>
+        <p:spPr>
+          <a:xfrm>
+            <a:off x="8103612" y="1463040"/>
+            <a:ext cx="3262379" cy="4892040"/>
           </a:xfrm>
           <a:prstGeom prst="rect">
             <a:avLst/>
           </a:prstGeom>
-          <a:noFill/>
-        </p:spPr>
-        <p:txBody>
-          <a:bodyPr wrap="square"/>
-          <a:lstStyle/>
-          <a:p>
-            <a:pPr algn="l">
-              <a:spcAft>
-                <a:spcPts val="1300"/>
-              </a:spcAft>
-            </a:pPr>
-            <a:r>
-              <a:rPr sz="1900" b="0" i="0">
-                <a:solidFill>
-                  <a:srgbClr val="222B22"/>
-                </a:solidFill>
-                <a:latin typeface="Calibri"/>
-              </a:rPr>
-              <a:t>Same process as every week’s leader reflection — now for the group:</a:t>
-            </a:r>
-          </a:p>
-          <a:p>
-            <a:pPr algn="l">
-              <a:spcAft>
-                <a:spcPts val="1100"/>
-              </a:spcAft>
-            </a:pPr>
-            <a:r>
-              <a:rPr sz="2400" b="1" i="0">
-                <a:solidFill>
-                  <a:srgbClr val="97BC62"/>
-                </a:solidFill>
-                <a:latin typeface="Calibri"/>
-              </a:rPr>
-              <a:t>1   </a:t>
-            </a:r>
-            <a:r>
-              <a:rPr sz="2400" b="0" i="0">
-                <a:solidFill>
-                  <a:srgbClr val="222B22"/>
-                </a:solidFill>
-                <a:latin typeface="Calibri"/>
-              </a:rPr>
-              <a:t>What’s working well that we ought to keep doing next quarter?</a:t>
-            </a:r>
-          </a:p>
-          <a:p>
-            <a:pPr algn="l">
-              <a:spcAft>
-                <a:spcPts val="1100"/>
-              </a:spcAft>
-            </a:pPr>
-            <a:r>
-              <a:rPr sz="2400" b="1" i="0">
-                <a:solidFill>
-                  <a:srgbClr val="97BC62"/>
-                </a:solidFill>
-                <a:latin typeface="Calibri"/>
-              </a:rPr>
-              <a:t>2   </a:t>
-            </a:r>
-            <a:r>
-              <a:rPr sz="2400" b="0" i="0">
-                <a:solidFill>
-                  <a:srgbClr val="222B22"/>
-                </a:solidFill>
-                <a:latin typeface="Calibri"/>
-              </a:rPr>
-              <a:t>What could we do differently that would make things even better?</a:t>
-            </a:r>
-          </a:p>
-          <a:p>
-            <a:pPr algn="l">
-              <a:spcAft>
-                <a:spcPts val="1100"/>
-              </a:spcAft>
-            </a:pPr>
-            <a:r>
-              <a:rPr sz="2400" b="1" i="0">
-                <a:solidFill>
-                  <a:srgbClr val="97BC62"/>
-                </a:solidFill>
-                <a:latin typeface="Calibri"/>
-              </a:rPr>
-              <a:t>3   </a:t>
-            </a:r>
-            <a:r>
-              <a:rPr sz="2400" b="0" i="0">
-                <a:solidFill>
-                  <a:srgbClr val="222B22"/>
-                </a:solidFill>
-                <a:latin typeface="Calibri"/>
-              </a:rPr>
-              <a:t>What would you tell somebody else about what this group is like?</a:t>
-            </a:r>
-          </a:p>
-          <a:p>
-            <a:pPr algn="l">
-              <a:spcBef>
-                <a:spcPts val="1300"/>
-              </a:spcBef>
-              <a:spcAft>
-                <a:spcPts val="1000"/>
-              </a:spcAft>
-            </a:pPr>
-            <a:r>
-              <a:rPr sz="2000" b="0" i="1">
-                <a:solidFill>
-                  <a:srgbClr val="222B22"/>
-                </a:solidFill>
-                <a:latin typeface="Cambria"/>
-              </a:rPr>
-              <a:t>The leader answers first, same as always. Any question, any order.</a:t>
-            </a:r>
-          </a:p>
-        </p:txBody>
-      </p:sp>
+          <a:ln w="76200">
+            <a:solidFill>
+              <a:srgbClr val="FFFFFF"/>
+            </a:solidFill>
+          </a:ln>
+          <a:effectLst>
+            <a:outerShdw blurRad="63500" dist="25400" dir="5400000" rotWithShape="0">
+              <a:srgbClr val="000000">
+                <a:alpha val="35000"/>
+              </a:srgbClr>
+            </a:outerShdw>
+          </a:effectLst>
+        </p:spPr>
+      </p:pic>
     </p:spTree>
   </p:cSld>
   <p:clrMapOvr>
@@ -9519,21 +9595,21 @@
                 </a:solidFill>
                 <a:latin typeface="Cambria"/>
               </a:rPr>
-              <a:t>Romans 10:17 — The Chain</a:t>
-            </a:r>
-          </a:p>
-        </p:txBody>
-      </p:sp>
-      <p:sp>
-        <p:nvSpPr>
-          <p:cNvPr id="4" name="TextBox 4"/>
+              <a:t>The Round, for All of Us</a:t>
+            </a:r>
+          </a:p>
+        </p:txBody>
+      </p:sp>
+      <p:sp>
+        <p:nvSpPr>
+          <p:cNvPr id="90" name="SlideNum"/>
           <p:cNvSpPr txBox="1"/>
           <p:nvPr/>
         </p:nvSpPr>
         <p:spPr>
           <a:xfrm>
-            <a:off x="822960" y="1600200"/>
-            <a:ext cx="5669280" cy="4572000"/>
+            <a:off x="11384280" y="6446520"/>
+            <a:ext cx="640080" cy="292608"/>
           </a:xfrm>
           <a:prstGeom prst="rect">
             <a:avLst/>
@@ -9541,213 +9617,12 @@
           <a:noFill/>
         </p:spPr>
         <p:txBody>
-          <a:bodyPr wrap="square" lIns="91440" tIns="91440" rIns="91440" bIns="91440"/>
-          <a:lstStyle/>
-          <a:p>
-            <a:pPr marL="274320" indent="-274320">
-              <a:spcAft>
-                <a:spcPts val="800"/>
-              </a:spcAft>
-            </a:pPr>
-            <a:r>
-              <a:rPr sz="2000" b="1" i="0">
-                <a:solidFill>
-                  <a:srgbClr val="97BC62"/>
-                </a:solidFill>
-                <a:latin typeface="Calibri"/>
-              </a:rPr>
-              <a:t>•  </a:t>
-            </a:r>
-            <a:r>
-              <a:rPr sz="2000" b="0" i="0">
-                <a:solidFill>
-                  <a:srgbClr val="222B22"/>
-                </a:solidFill>
-                <a:latin typeface="Calibri"/>
-              </a:rPr>
-              <a:t>One short verse, three steps: Word → Hearing → Faith — the order matters</a:t>
-            </a:r>
-          </a:p>
-          <a:p>
-            <a:pPr marL="274320" indent="-274320">
-              <a:spcAft>
-                <a:spcPts val="800"/>
-              </a:spcAft>
-            </a:pPr>
-            <a:r>
-              <a:rPr sz="2000" b="1" i="0">
-                <a:solidFill>
-                  <a:srgbClr val="97BC62"/>
-                </a:solidFill>
-                <a:latin typeface="Calibri"/>
-              </a:rPr>
-              <a:t>•  </a:t>
-            </a:r>
-            <a:r>
-              <a:rPr sz="2000" b="0" i="0">
-                <a:solidFill>
-                  <a:srgbClr val="222B22"/>
-                </a:solidFill>
-                <a:latin typeface="Calibri"/>
-              </a:rPr>
-              <a:t>Not trying harder, not emotional experience — faith is a fruit of a particular practice</a:t>
-            </a:r>
-          </a:p>
-          <a:p>
-            <a:pPr marL="274320" indent="-274320">
-              <a:spcAft>
-                <a:spcPts val="800"/>
-              </a:spcAft>
-            </a:pPr>
-            <a:r>
-              <a:rPr sz="2000" b="1" i="0">
-                <a:solidFill>
-                  <a:srgbClr val="97BC62"/>
-                </a:solidFill>
-                <a:latin typeface="Calibri"/>
-              </a:rPr>
-              <a:t>•  </a:t>
-            </a:r>
-            <a:r>
-              <a:rPr sz="2000" b="0" i="0">
-                <a:solidFill>
-                  <a:srgbClr val="222B22"/>
-                </a:solidFill>
-                <a:latin typeface="Calibri"/>
-              </a:rPr>
-              <a:t>How much of our “Bible time” is actually hearing, and how much is reading without hearing?</a:t>
-            </a:r>
-          </a:p>
-          <a:p>
-            <a:pPr marL="274320" indent="-274320">
-              <a:spcAft>
-                <a:spcPts val="800"/>
-              </a:spcAft>
-            </a:pPr>
-            <a:r>
-              <a:rPr sz="2000" b="1" i="0">
-                <a:solidFill>
-                  <a:srgbClr val="97BC62"/>
-                </a:solidFill>
-                <a:latin typeface="Calibri"/>
-              </a:rPr>
-              <a:t>•  </a:t>
-            </a:r>
-            <a:r>
-              <a:rPr sz="2000" b="0" i="0">
-                <a:solidFill>
-                  <a:srgbClr val="222B22"/>
-                </a:solidFill>
-                <a:latin typeface="Calibri"/>
-              </a:rPr>
-              <a:t>Hearing is a skill — skills develop with practice</a:t>
-            </a:r>
-          </a:p>
-          <a:p>
-            <a:pPr marL="274320" indent="-274320">
-              <a:spcAft>
-                <a:spcPts val="800"/>
-              </a:spcAft>
-            </a:pPr>
-            <a:r>
-              <a:rPr sz="2000" b="1" i="0">
-                <a:solidFill>
-                  <a:srgbClr val="97BC62"/>
-                </a:solidFill>
-                <a:latin typeface="Calibri"/>
-              </a:rPr>
-              <a:t>•  </a:t>
-            </a:r>
-            <a:r>
-              <a:rPr sz="2000" b="0" i="0">
-                <a:solidFill>
-                  <a:srgbClr val="222B22"/>
-                </a:solidFill>
-                <a:latin typeface="Calibri"/>
-              </a:rPr>
-              <a:t>The practice: PROAPT — Pray, Read, Observe, Apply, Pray again, Tell (Truro Church, 1980s)</a:t>
-            </a:r>
-          </a:p>
-        </p:txBody>
-      </p:sp>
-      <p:sp>
-        <p:nvSpPr>
-          <p:cNvPr id="6" name="TextBox 6"/>
-          <p:cNvSpPr txBox="1"/>
-          <p:nvPr/>
-        </p:nvSpPr>
-        <p:spPr>
-          <a:xfrm>
-            <a:off x="6766560" y="1737360"/>
-            <a:ext cx="4663440" cy="2194560"/>
-          </a:xfrm>
-          <a:prstGeom prst="rect">
-            <a:avLst/>
-          </a:prstGeom>
-          <a:solidFill>
-            <a:srgbClr val="F1F6EC"/>
-          </a:solidFill>
-        </p:spPr>
-        <p:txBody>
-          <a:bodyPr wrap="square" lIns="91440" tIns="91440" rIns="91440" bIns="91440" anchor="ctr"/>
-          <a:lstStyle/>
-          <a:p>
-            <a:pPr>
-              <a:spcAft>
-                <a:spcPts val="900"/>
-              </a:spcAft>
-            </a:pPr>
-            <a:r>
-              <a:rPr sz="1200" b="1" i="0">
-                <a:solidFill>
-                  <a:srgbClr val="97BC62"/>
-                </a:solidFill>
-                <a:latin typeface="Calibri"/>
-              </a:rPr>
-              <a:t>ROMANS 10:17</a:t>
-            </a:r>
-          </a:p>
-          <a:p>
-            <a:pPr>
-              <a:spcAft>
-                <a:spcPts val="600"/>
-              </a:spcAft>
-            </a:pPr>
-            <a:r>
-              <a:rPr sz="2400" b="0" i="1">
-                <a:solidFill>
-                  <a:srgbClr val="222B22"/>
-                </a:solidFill>
-                <a:latin typeface="Cambria"/>
-              </a:rPr>
-              <a:t>“So faith comes from hearing, and hearing through the word of Christ.”</a:t>
-            </a:r>
-          </a:p>
-        </p:txBody>
-      </p:sp>
-      <p:sp>
-        <p:nvSpPr>
-          <p:cNvPr id="90" name="SlideNum"/>
-          <p:cNvSpPr txBox="1"/>
-          <p:nvPr/>
-        </p:nvSpPr>
-        <p:spPr>
-          <a:xfrm>
-            <a:off x="11384280" y="6446520"/>
-            <a:ext cx="640080" cy="292608"/>
-          </a:xfrm>
-          <a:prstGeom prst="rect">
-            <a:avLst/>
-          </a:prstGeom>
-          <a:noFill/>
-        </p:spPr>
-        <p:txBody>
           <a:bodyPr wrap="none" lIns="0" tIns="0" rIns="45720" bIns="0" anchor="ctr"/>
           <a:lstStyle/>
           <a:p>
             <a:pPr algn="r"/>
             <a:r>
-              <a:t>92</a:t>
+              <a:t>91</a:t>
             </a:r>
             <a:endParaRPr sz="1000" b="1">
               <a:solidFill>
@@ -9755,6 +9630,137 @@
               </a:solidFill>
               <a:latin typeface="Calibri"/>
             </a:endParaRPr>
+          </a:p>
+        </p:txBody>
+      </p:sp>
+      <p:sp>
+        <p:nvSpPr>
+          <p:cNvPr id="290" name="RoomSelfRead"/>
+          <p:cNvSpPr txBox="1"/>
+          <p:nvPr/>
+        </p:nvSpPr>
+        <p:spPr>
+          <a:xfrm>
+            <a:off x="822960" y="1417320"/>
+            <a:ext cx="10515600" cy="5029200"/>
+          </a:xfrm>
+          <a:prstGeom prst="rect">
+            <a:avLst/>
+          </a:prstGeom>
+          <a:noFill/>
+        </p:spPr>
+        <p:txBody>
+          <a:bodyPr wrap="square"/>
+          <a:lstStyle/>
+          <a:p>
+            <a:pPr algn="l">
+              <a:spcAft>
+                <a:spcPts val="1300"/>
+              </a:spcAft>
+            </a:pPr>
+            <a:r>
+              <a:rPr sz="1900" b="0" i="0">
+                <a:solidFill>
+                  <a:srgbClr val="222B22"/>
+                </a:solidFill>
+                <a:latin typeface="Calibri"/>
+              </a:rPr>
+              <a:t>Same process as every week’s leader reflection — now for the group:</a:t>
+            </a:r>
+          </a:p>
+          <a:p>
+            <a:pPr algn="l">
+              <a:spcAft>
+                <a:spcPts val="1100"/>
+              </a:spcAft>
+            </a:pPr>
+            <a:r>
+              <a:rPr sz="2400" b="1" i="0">
+                <a:solidFill>
+                  <a:srgbClr val="97BC62"/>
+                </a:solidFill>
+                <a:latin typeface="Calibri"/>
+              </a:rPr>
+              <a:t>1   </a:t>
+            </a:r>
+            <a:r>
+              <a:rPr sz="2400" b="0" i="0">
+                <a:solidFill>
+                  <a:srgbClr val="222B22"/>
+                </a:solidFill>
+                <a:latin typeface="Calibri"/>
+              </a:rPr>
+              <a:t>What’s working well that we ought to keep doing next quarter?</a:t>
+            </a:r>
+          </a:p>
+          <a:p>
+            <a:pPr algn="l">
+              <a:spcAft>
+                <a:spcPts val="1100"/>
+              </a:spcAft>
+            </a:pPr>
+            <a:r>
+              <a:rPr sz="2400" b="1" i="0">
+                <a:solidFill>
+                  <a:srgbClr val="97BC62"/>
+                </a:solidFill>
+                <a:latin typeface="Calibri"/>
+              </a:rPr>
+              <a:t>2   </a:t>
+            </a:r>
+            <a:r>
+              <a:rPr sz="2400" b="0" i="0">
+                <a:solidFill>
+                  <a:srgbClr val="222B22"/>
+                </a:solidFill>
+                <a:latin typeface="Calibri"/>
+              </a:rPr>
+              <a:t>What could we do differently that would make things even better?</a:t>
+            </a:r>
+          </a:p>
+          <a:p>
+            <a:pPr algn="l">
+              <a:spcAft>
+                <a:spcPts val="1100"/>
+              </a:spcAft>
+            </a:pPr>
+            <a:r>
+              <a:rPr sz="2400" b="1" i="0">
+                <a:solidFill>
+                  <a:srgbClr val="97BC62"/>
+                </a:solidFill>
+                <a:latin typeface="Calibri"/>
+              </a:rPr>
+              <a:t>3   </a:t>
+            </a:r>
+            <a:r>
+              <a:rPr sz="2400" b="0" i="0">
+                <a:solidFill>
+                  <a:srgbClr val="222B22"/>
+                </a:solidFill>
+                <a:latin typeface="Calibri"/>
+              </a:rPr>
+              <a:t>What would you tell somebody else about what this group is like?</a:t>
+            </a:r>
+          </a:p>
+          <a:p>
+            <a:pPr algn="l">
+              <a:spcBef>
+                <a:spcPts val="1300"/>
+              </a:spcBef>
+              <a:spcAft>
+                <a:spcPts val="1000"/>
+              </a:spcAft>
+            </a:pPr>
+            <a:r>
+              <a:rPr sz="2000" b="0" i="1">
+                <a:solidFill>
+                  <a:srgbClr val="222B22"/>
+                </a:solidFill>
+                <a:latin typeface="Cambria"/>
+              </a:rPr>
+              <a:t>The leader answers first, same as always. Any question, any order.</a:t>
+            </a:r>
           </a:p>
         </p:txBody>
       </p:sp>
@@ -9846,7 +9852,7 @@
                 </a:solidFill>
                 <a:latin typeface="Cambria"/>
               </a:rPr>
-              <a:t>PROAPT Walked Together — Mark 1:14–20</a:t>
+              <a:t>Romans 10:17 — The Chain</a:t>
             </a:r>
           </a:p>
         </p:txBody>
@@ -9859,8 +9865,8 @@
         </p:nvSpPr>
         <p:spPr>
           <a:xfrm>
-            <a:off x="822960" y="1554480"/>
-            <a:ext cx="6675120" cy="4892040"/>
+            <a:off x="822960" y="1600200"/>
+            <a:ext cx="5669280" cy="4572000"/>
           </a:xfrm>
           <a:prstGeom prst="rect">
             <a:avLst/>
@@ -9871,9 +9877,9 @@
           <a:bodyPr wrap="square" lIns="91440" tIns="91440" rIns="91440" bIns="91440"/>
           <a:lstStyle/>
           <a:p>
-            <a:pPr marL="342900" indent="-342900">
+            <a:pPr marL="274320" indent="-274320">
               <a:spcAft>
-                <a:spcPts val="750"/>
+                <a:spcPts val="800"/>
               </a:spcAft>
             </a:pPr>
             <a:r>
@@ -9883,7 +9889,7 @@
                 </a:solidFill>
                 <a:latin typeface="Calibri"/>
               </a:rPr>
-              <a:t>1   </a:t>
+              <a:t>•  </a:t>
             </a:r>
             <a:r>
               <a:rPr sz="2000" b="0" i="0">
@@ -9892,13 +9898,13 @@
                 </a:solidFill>
                 <a:latin typeface="Calibri"/>
               </a:rPr>
-              <a:t>Pray — “Holy Spirit, you are welcome here. Speak. We are listening.”</a:t>
-            </a:r>
-          </a:p>
-          <a:p>
-            <a:pPr marL="342900" indent="-342900">
+              <a:t>One short verse, three steps: Word → Hearing → Faith — the order matters</a:t>
+            </a:r>
+          </a:p>
+          <a:p>
+            <a:pPr marL="274320" indent="-274320">
               <a:spcAft>
-                <a:spcPts val="750"/>
+                <a:spcPts val="800"/>
               </a:spcAft>
             </a:pPr>
             <a:r>
@@ -9908,7 +9914,7 @@
                 </a:solidFill>
                 <a:latin typeface="Calibri"/>
               </a:rPr>
-              <a:t>2   </a:t>
+              <a:t>•  </a:t>
             </a:r>
             <a:r>
               <a:rPr sz="2000" b="0" i="0">
@@ -9917,13 +9923,13 @@
                 </a:solidFill>
                 <a:latin typeface="Calibri"/>
               </a:rPr>
-              <a:t>Read — slowly, to receive it; don’t analyze yet</a:t>
-            </a:r>
-          </a:p>
-          <a:p>
-            <a:pPr marL="342900" indent="-342900">
+              <a:t>Not trying harder, not emotional experience — faith is a fruit of a particular practice</a:t>
+            </a:r>
+          </a:p>
+          <a:p>
+            <a:pPr marL="274320" indent="-274320">
               <a:spcAft>
-                <a:spcPts val="750"/>
+                <a:spcPts val="800"/>
               </a:spcAft>
             </a:pPr>
             <a:r>
@@ -9933,7 +9939,7 @@
                 </a:solidFill>
                 <a:latin typeface="Calibri"/>
               </a:rPr>
-              <a:t>3   </a:t>
+              <a:t>•  </a:t>
             </a:r>
             <a:r>
               <a:rPr sz="2000" b="0" i="0">
@@ -9942,13 +9948,13 @@
                 </a:solidFill>
                 <a:latin typeface="Calibri"/>
               </a:rPr>
-              <a:t>Observe — two layers, in order: first the data (who, what, when, where — straight off the page), then the interpretation — what stands out or surprises you in it</a:t>
-            </a:r>
-          </a:p>
-          <a:p>
-            <a:pPr marL="342900" indent="-342900">
+              <a:t>How much of our “Bible time” is actually hearing, and how much is reading without hearing?</a:t>
+            </a:r>
+          </a:p>
+          <a:p>
+            <a:pPr marL="274320" indent="-274320">
               <a:spcAft>
-                <a:spcPts val="750"/>
+                <a:spcPts val="800"/>
               </a:spcAft>
             </a:pPr>
             <a:r>
@@ -9958,7 +9964,7 @@
                 </a:solidFill>
                 <a:latin typeface="Calibri"/>
               </a:rPr>
-              <a:t>4   </a:t>
+              <a:t>•  </a:t>
             </a:r>
             <a:r>
               <a:rPr sz="2000" b="0" i="0">
@@ -9967,13 +9973,13 @@
                 </a:solidFill>
                 <a:latin typeface="Calibri"/>
               </a:rPr>
-              <a:t>Apply — “What does this passage mean FOR YOU, TODAY, in your specific life?” — logos becomes rhema</a:t>
-            </a:r>
-          </a:p>
-          <a:p>
-            <a:pPr marL="342900" indent="-342900">
+              <a:t>Hearing is a skill — skills develop with practice</a:t>
+            </a:r>
+          </a:p>
+          <a:p>
+            <a:pPr marL="274320" indent="-274320">
               <a:spcAft>
-                <a:spcPts val="750"/>
+                <a:spcPts val="800"/>
               </a:spcAft>
             </a:pPr>
             <a:r>
@@ -9983,7 +9989,7 @@
                 </a:solidFill>
                 <a:latin typeface="Calibri"/>
               </a:rPr>
-              <a:t>5   </a:t>
+              <a:t>•  </a:t>
             </a:r>
             <a:r>
               <a:rPr sz="2000" b="0" i="0">
@@ -9992,32 +9998,62 @@
                 </a:solidFill>
                 <a:latin typeface="Calibri"/>
               </a:rPr>
-              <a:t>Pray again — tell God what you heard, what you are willing to do, what you’re struggling to be willing to do</a:t>
-            </a:r>
-          </a:p>
-          <a:p>
-            <a:pPr marL="342900" indent="-342900">
+              <a:t>The practice: PROAPT — Pray, Read, Observe, Apply, Pray again, Tell (Truro Church, 1980s)</a:t>
+            </a:r>
+          </a:p>
+        </p:txBody>
+      </p:sp>
+      <p:sp>
+        <p:nvSpPr>
+          <p:cNvPr id="6" name="TextBox 6"/>
+          <p:cNvSpPr txBox="1"/>
+          <p:nvPr/>
+        </p:nvSpPr>
+        <p:spPr>
+          <a:xfrm>
+            <a:off x="6766560" y="1737360"/>
+            <a:ext cx="4663440" cy="2194560"/>
+          </a:xfrm>
+          <a:prstGeom prst="rect">
+            <a:avLst/>
+          </a:prstGeom>
+          <a:solidFill>
+            <a:srgbClr val="F1F6EC"/>
+          </a:solidFill>
+        </p:spPr>
+        <p:txBody>
+          <a:bodyPr wrap="square" lIns="91440" tIns="91440" rIns="91440" bIns="91440" anchor="ctr"/>
+          <a:lstStyle/>
+          <a:p>
+            <a:pPr>
               <a:spcAft>
-                <a:spcPts val="750"/>
+                <a:spcPts val="900"/>
               </a:spcAft>
             </a:pPr>
             <a:r>
-              <a:rPr sz="2000" b="1" i="0">
+              <a:rPr sz="1200" b="1" i="0">
                 <a:solidFill>
                   <a:srgbClr val="97BC62"/>
                 </a:solidFill>
                 <a:latin typeface="Calibri"/>
               </a:rPr>
-              <a:t>6   </a:t>
-            </a:r>
-            <a:r>
-              <a:rPr sz="2000" b="0" i="0">
+              <a:t>ROMANS 10:17</a:t>
+            </a:r>
+          </a:p>
+          <a:p>
+            <a:pPr>
+              <a:spcAft>
+                <a:spcPts val="600"/>
+              </a:spcAft>
+            </a:pPr>
+            <a:r>
+              <a:rPr sz="2400" b="0" i="1">
                 <a:solidFill>
                   <a:srgbClr val="222B22"/>
                 </a:solidFill>
-                <a:latin typeface="Calibri"/>
-              </a:rPr>
-              <a:t>Tell — the most-often-skipped step; hearing spoken aloud has a different staying power</a:t>
+                <a:latin typeface="Cambria"/>
+              </a:rPr>
+              <a:t>“So faith comes from hearing, and hearing through the word of Christ.”</a:t>
             </a:r>
           </a:p>
         </p:txBody>
@@ -10044,7 +10080,7 @@
           <a:p>
             <a:pPr algn="r"/>
             <a:r>
-              <a:t>93</a:t>
+              <a:t>92</a:t>
             </a:r>
             <a:endParaRPr sz="1000" b="1">
               <a:solidFill>
@@ -10055,42 +10091,6 @@
           </a:p>
         </p:txBody>
       </p:sp>
-      <p:pic>
-        <p:nvPicPr>
-          <p:cNvPr id="91" name="Picture 91" descr="an old wooden boat left ashore among moss and pines"/>
-          <p:cNvPicPr>
-            <a:picLocks noChangeAspect="1"/>
-          </p:cNvPicPr>
-          <p:nvPr/>
-        </p:nvPicPr>
-        <p:blipFill>
-          <a:blip r:embed="rId3"/>
-          <a:stretch>
-            <a:fillRect/>
-          </a:stretch>
-        </p:blipFill>
-        <p:spPr>
-          <a:xfrm>
-            <a:off x="7696962" y="1463040"/>
-            <a:ext cx="3669030" cy="4892040"/>
-          </a:xfrm>
-          <a:prstGeom prst="rect">
-            <a:avLst/>
-          </a:prstGeom>
-          <a:ln w="76200">
-            <a:solidFill>
-              <a:srgbClr val="FFFFFF"/>
-            </a:solidFill>
-          </a:ln>
-          <a:effectLst>
-            <a:outerShdw blurRad="63500" dist="25400" dir="5400000" rotWithShape="0">
-              <a:srgbClr val="000000">
-                <a:alpha val="35000"/>
-              </a:srgbClr>
-            </a:outerShdw>
-          </a:effectLst>
-        </p:spPr>
-      </p:pic>
     </p:spTree>
   </p:cSld>
   <p:clrMapOvr>

--- a/_implementation-notes/evening-series/FotH Evening Session 7 Slides DRAFT v1.pptx
+++ b/_implementation-notes/evening-series/FotH Evening Session 7 Slides DRAFT v1.pptx
@@ -8078,7 +8078,7 @@
           <p:nvPr/>
         </p:nvPicPr>
         <p:blipFill>
-          <a:blip r:embed="rId4"/>
+          <a:blip r:embed="rId5"/>
           <a:stretch>
             <a:fillRect/>
           </a:stretch>

--- a/_implementation-notes/evening-series/FotH Evening Session 7 Slides DRAFT v1.pptx
+++ b/_implementation-notes/evening-series/FotH Evening Session 7 Slides DRAFT v1.pptx
@@ -5292,7 +5292,7 @@
           <a:p>
             <a:pPr algn="r"/>
             <a:r>
-              <a:t>93</a:t>
+              <a:t>106</a:t>
             </a:r>
             <a:endParaRPr sz="1000" b="1">
               <a:solidFill>
@@ -5600,7 +5600,7 @@
           <a:p>
             <a:pPr algn="r"/>
             <a:r>
-              <a:t>94</a:t>
+              <a:t>107</a:t>
             </a:r>
             <a:endParaRPr sz="1000" b="1">
               <a:solidFill>
@@ -5897,7 +5897,7 @@
           <a:p>
             <a:pPr algn="r"/>
             <a:r>
-              <a:t>95</a:t>
+              <a:t>108</a:t>
             </a:r>
             <a:endParaRPr sz="1000" b="1">
               <a:solidFill>
@@ -6169,7 +6169,7 @@
           <a:p>
             <a:pPr algn="r"/>
             <a:r>
-              <a:t>96</a:t>
+              <a:t>109</a:t>
             </a:r>
             <a:endParaRPr sz="1000" b="1">
               <a:solidFill>
@@ -6466,7 +6466,7 @@
           <a:p>
             <a:pPr algn="r"/>
             <a:r>
-              <a:t>97</a:t>
+              <a:t>110</a:t>
             </a:r>
             <a:endParaRPr sz="1000" b="1">
               <a:solidFill>
@@ -6694,7 +6694,7 @@
           <a:p>
             <a:pPr algn="r"/>
             <a:r>
-              <a:t>98</a:t>
+              <a:t>111</a:t>
             </a:r>
             <a:endParaRPr sz="1000" b="1">
               <a:solidFill>
@@ -6886,7 +6886,7 @@
           <a:p>
             <a:pPr algn="r"/>
             <a:r>
-              <a:t>98a</a:t>
+              <a:t>112</a:t>
             </a:r>
             <a:endParaRPr sz="1000" b="1">
               <a:solidFill>
@@ -7183,7 +7183,7 @@
           <a:p>
             <a:pPr algn="r"/>
             <a:r>
-              <a:t>99</a:t>
+              <a:t>113</a:t>
             </a:r>
             <a:endParaRPr sz="1000" b="1">
               <a:solidFill>
@@ -7628,7 +7628,7 @@
           <a:p>
             <a:pPr algn="r"/>
             <a:r>
-              <a:t>100</a:t>
+              <a:t>114</a:t>
             </a:r>
             <a:endParaRPr sz="1000" b="1">
               <a:solidFill>
@@ -7877,7 +7877,7 @@
           <a:p>
             <a:pPr algn="r"/>
             <a:r>
-              <a:t>86</a:t>
+              <a:t>98</a:t>
             </a:r>
             <a:endParaRPr sz="1000" b="1">
               <a:solidFill>
@@ -8058,7 +8058,7 @@
           <a:p>
             <a:pPr algn="r"/>
             <a:r>
-              <a:t>86a</a:t>
+              <a:t>99</a:t>
             </a:r>
             <a:endParaRPr sz="1000" b="1">
               <a:solidFill>
@@ -8390,7 +8390,7 @@
           <a:p>
             <a:pPr algn="r"/>
             <a:r>
-              <a:t>87</a:t>
+              <a:t>100</a:t>
             </a:r>
             <a:endParaRPr sz="1000" b="1">
               <a:solidFill>
@@ -8805,7 +8805,7 @@
           <a:p>
             <a:pPr algn="r"/>
             <a:r>
-              <a:t>88</a:t>
+              <a:t>101</a:t>
             </a:r>
             <a:endParaRPr sz="1000" b="1">
               <a:solidFill>
@@ -9188,7 +9188,7 @@
           <a:p>
             <a:pPr algn="r"/>
             <a:r>
-              <a:t>89</a:t>
+              <a:t>102</a:t>
             </a:r>
             <a:endParaRPr sz="1000" b="1">
               <a:solidFill>
@@ -9460,7 +9460,7 @@
           <a:p>
             <a:pPr algn="r"/>
             <a:r>
-              <a:t>90</a:t>
+              <a:t>103</a:t>
             </a:r>
             <a:endParaRPr sz="1000" b="1">
               <a:solidFill>
@@ -9622,7 +9622,7 @@
           <a:p>
             <a:pPr algn="r"/>
             <a:r>
-              <a:t>91</a:t>
+              <a:t>104</a:t>
             </a:r>
             <a:endParaRPr sz="1000" b="1">
               <a:solidFill>
@@ -10080,7 +10080,7 @@
           <a:p>
             <a:pPr algn="r"/>
             <a:r>
-              <a:t>92</a:t>
+              <a:t>105</a:t>
             </a:r>
             <a:endParaRPr sz="1000" b="1">
               <a:solidFill>

--- a/_implementation-notes/evening-series/FotH Evening Session 7 Slides DRAFT v1.pptx
+++ b/_implementation-notes/evening-series/FotH Evening Session 7 Slides DRAFT v1.pptx
@@ -8078,7 +8078,7 @@
           <p:nvPr/>
         </p:nvPicPr>
         <p:blipFill>
-          <a:blip r:embed="rId5"/>
+          <a:blip r:embed="rId6"/>
           <a:stretch>
             <a:fillRect/>
           </a:stretch>

--- a/_implementation-notes/evening-series/FotH Evening Session 7 Slides DRAFT v1.pptx
+++ b/_implementation-notes/evening-series/FotH Evening Session 7 Slides DRAFT v1.pptx
@@ -1507,7 +1507,7 @@
           <a:p>
             <a:r>
               <a:rPr lang="en-US" sz="1200"/>
-              <a:t>CUES: leadsanions settle odd numbers across families. If the room is about ten or fewer, skip the pairing — one circle, pair up in place.</a:t>
+              <a:t>CUES: Lead Companions settle odd numbers across families. If the room is about ten or fewer, skip the pairing — one circle, pair up in place.</a:t>
             </a:r>
           </a:p>
         </p:txBody>
@@ -5548,7 +5548,7 @@
                 </a:solidFill>
                 <a:latin typeface="Calibri"/>
               </a:rPr>
-              <a:t>Your leadsanion settles the pairs and completes any odd numbers</a:t>
+              <a:t>Your Lead Companion settles the pairs and completes any odd numbers</a:t>
             </a:r>
           </a:p>
           <a:p>

--- a/_implementation-notes/evening-series/FotH Evening Session 7 Slides DRAFT v1.pptx
+++ b/_implementation-notes/evening-series/FotH Evening Session 7 Slides DRAFT v1.pptx
@@ -1672,7 +1672,7 @@
           <a:p>
             <a:r>
               <a:rPr lang="en-US" sz="1200"/>
-              <a:t>S7 · 8:19–8:20 · LEAD: CONTENT PRESENTER</a:t>
+              <a:t>S7 · 8:19–8:20 · LEAD: CONTAINER HOLDER</a:t>
             </a:r>
           </a:p>
           <a:p>

--- a/_implementation-notes/evening-series/FotH Evening Session 7 Slides DRAFT v1.pptx
+++ b/_implementation-notes/evening-series/FotH Evening Session 7 Slides DRAFT v1.pptx
@@ -1121,7 +1121,7 @@
           <a:p>
             <a:r>
               <a:rPr lang="en-US" sz="1200"/>
-              <a:t>CUES: First night back after the quarter break — Pulse 1 returns go in the bin at the door.</a:t>
+              <a:t>CUES: First night back — Session 6’s three questions are answered together tonight, in the 7:25 block.</a:t>
             </a:r>
           </a:p>
         </p:txBody>

--- a/_implementation-notes/evening-series/FotH Evening Session 7 Slides DRAFT v1.pptx
+++ b/_implementation-notes/evening-series/FotH Evening Session 7 Slides DRAFT v1.pptx
@@ -5292,7 +5292,7 @@
           <a:p>
             <a:pPr algn="r"/>
             <a:r>
-              <a:t>106</a:t>
+              <a:t>107</a:t>
             </a:r>
             <a:endParaRPr sz="1000" b="1">
               <a:solidFill>
@@ -5600,7 +5600,7 @@
           <a:p>
             <a:pPr algn="r"/>
             <a:r>
-              <a:t>107</a:t>
+              <a:t>108</a:t>
             </a:r>
             <a:endParaRPr sz="1000" b="1">
               <a:solidFill>
@@ -5897,7 +5897,7 @@
           <a:p>
             <a:pPr algn="r"/>
             <a:r>
-              <a:t>108</a:t>
+              <a:t>109</a:t>
             </a:r>
             <a:endParaRPr sz="1000" b="1">
               <a:solidFill>
@@ -6169,7 +6169,7 @@
           <a:p>
             <a:pPr algn="r"/>
             <a:r>
-              <a:t>109</a:t>
+              <a:t>110</a:t>
             </a:r>
             <a:endParaRPr sz="1000" b="1">
               <a:solidFill>
@@ -6466,7 +6466,7 @@
           <a:p>
             <a:pPr algn="r"/>
             <a:r>
-              <a:t>110</a:t>
+              <a:t>111</a:t>
             </a:r>
             <a:endParaRPr sz="1000" b="1">
               <a:solidFill>
@@ -6694,7 +6694,7 @@
           <a:p>
             <a:pPr algn="r"/>
             <a:r>
-              <a:t>111</a:t>
+              <a:t>112</a:t>
             </a:r>
             <a:endParaRPr sz="1000" b="1">
               <a:solidFill>
@@ -6886,7 +6886,7 @@
           <a:p>
             <a:pPr algn="r"/>
             <a:r>
-              <a:t>112</a:t>
+              <a:t>113</a:t>
             </a:r>
             <a:endParaRPr sz="1000" b="1">
               <a:solidFill>
@@ -7183,7 +7183,7 @@
           <a:p>
             <a:pPr algn="r"/>
             <a:r>
-              <a:t>113</a:t>
+              <a:t>114</a:t>
             </a:r>
             <a:endParaRPr sz="1000" b="1">
               <a:solidFill>
@@ -7628,7 +7628,7 @@
           <a:p>
             <a:pPr algn="r"/>
             <a:r>
-              <a:t>114</a:t>
+              <a:t>115</a:t>
             </a:r>
             <a:endParaRPr sz="1000" b="1">
               <a:solidFill>
@@ -7877,7 +7877,7 @@
           <a:p>
             <a:pPr algn="r"/>
             <a:r>
-              <a:t>98</a:t>
+              <a:t>99</a:t>
             </a:r>
             <a:endParaRPr sz="1000" b="1">
               <a:solidFill>
@@ -8058,7 +8058,7 @@
           <a:p>
             <a:pPr algn="r"/>
             <a:r>
-              <a:t>99</a:t>
+              <a:t>100</a:t>
             </a:r>
             <a:endParaRPr sz="1000" b="1">
               <a:solidFill>
@@ -8390,7 +8390,7 @@
           <a:p>
             <a:pPr algn="r"/>
             <a:r>
-              <a:t>100</a:t>
+              <a:t>101</a:t>
             </a:r>
             <a:endParaRPr sz="1000" b="1">
               <a:solidFill>
@@ -8805,7 +8805,7 @@
           <a:p>
             <a:pPr algn="r"/>
             <a:r>
-              <a:t>101</a:t>
+              <a:t>102</a:t>
             </a:r>
             <a:endParaRPr sz="1000" b="1">
               <a:solidFill>
@@ -9188,7 +9188,7 @@
           <a:p>
             <a:pPr algn="r"/>
             <a:r>
-              <a:t>102</a:t>
+              <a:t>103</a:t>
             </a:r>
             <a:endParaRPr sz="1000" b="1">
               <a:solidFill>
@@ -9460,7 +9460,7 @@
           <a:p>
             <a:pPr algn="r"/>
             <a:r>
-              <a:t>103</a:t>
+              <a:t>104</a:t>
             </a:r>
             <a:endParaRPr sz="1000" b="1">
               <a:solidFill>
@@ -9622,7 +9622,7 @@
           <a:p>
             <a:pPr algn="r"/>
             <a:r>
-              <a:t>104</a:t>
+              <a:t>105</a:t>
             </a:r>
             <a:endParaRPr sz="1000" b="1">
               <a:solidFill>
@@ -10080,7 +10080,7 @@
           <a:p>
             <a:pPr algn="r"/>
             <a:r>
-              <a:t>105</a:t>
+              <a:t>106</a:t>
             </a:r>
             <a:endParaRPr sz="1000" b="1">
               <a:solidFill>

--- a/_implementation-notes/evening-series/FotH Evening Session 7 Slides DRAFT v1.pptx
+++ b/_implementation-notes/evening-series/FotH Evening Session 7 Slides DRAFT v1.pptx
@@ -1789,20 +1789,22 @@
           <a:lstStyle/>
           <a:p>
             <a:r>
-              <a:rPr lang="en-US" sz="1200"/>
               <a:t>S7 · 8:28–8:30 · LEAD: CONTAINER HOLDER</a:t>
             </a:r>
           </a:p>
           <a:p>
             <a:r>
-              <a:rPr lang="en-US" sz="1200"/>
               <a:t>BEATS: 1. Bridge the weeks: last week we named hard places, today we practiced hearing — both are real, both are how the Father walks us home; the place named last week is the place PROAPT will keep speaking into. 2. Aaronic blessing, hands up. 3. Send: 'PROAPT one passage tomorrow. See you evenings.'</a:t>
             </a:r>
           </a:p>
           <a:p>
             <a:r>
-              <a:rPr lang="en-US" sz="1200"/>
               <a:t>CUES: Stay accessible after the close for anyone still carrying Week 6.</a:t>
+            </a:r>
+          </a:p>
+          <a:p>
+            <a:r>
+              <a:t>BLESSINGS: eyes on the person, not the screen — nothing to read; say what is on your heart for them, specific and short.</a:t>
             </a:r>
           </a:p>
         </p:txBody>
@@ -7489,7 +7491,7 @@
                 </a:solidFill>
                 <a:latin typeface="Calibri"/>
               </a:rPr>
-              <a:t>Blessings — specific, witnessed, short</a:t>
+              <a:t>Blessings — eyes on the person, not the screen: say what is on your heart for them. Specific, witnessed, short</a:t>
             </a:r>
           </a:p>
           <a:p>

--- a/_implementation-notes/evening-series/FotH Evening Session 7 Slides DRAFT v1.pptx
+++ b/_implementation-notes/evening-series/FotH Evening Session 7 Slides DRAFT v1.pptx
@@ -1619,13 +1619,19 @@
           <a:p>
             <a:r>
               <a:rPr lang="en-US" sz="1200"/>
-              <a:t>BEATS: 1. Re-form pairs out of pairs. 2. Each person tells ONE specific thing they heard today — one sentence, witnessed. 3. Receive each with 'We hear that' or 'Thank you for naming that' — no preaching, no interpreting. 4. Close the pair: what we heard is given to be walked out this week.</a:t>
+              <a:t>BEATS: 1. Stay in the pair you worked in: the Tell happens where you heard, before anyone moves. 2. Each person tells ONE specific thing they heard today — one sentence, witnessed. 3. Receive each with 'We hear that' or 'Thank you for naming that' — no preaching, no interpreting. 4. Close the pair: what we heard is given to be walked out this week.</a:t>
             </a:r>
           </a:p>
           <a:p>
             <a:r>
               <a:rPr lang="en-US" sz="1200"/>
               <a:t>CUES: Arranged parent opens the round (check the Run Card) — never cold-call a teen; teens choose their own depth; pass-anytime holds.</a:t>
+            </a:r>
+          </a:p>
+          <a:p>
+            <a:r>
+              <a:rPr lang="en-US" sz="1200"/>
+              <a:t>IF TIME RAN SHORT: If only one of you walked the six steps, that one still tells. The Listener tells one thing they noticed while listening.</a:t>
             </a:r>
           </a:p>
         </p:txBody>
@@ -6044,7 +6050,7 @@
                 </a:solidFill>
                 <a:latin typeface="Calibri"/>
               </a:rPr>
-              <a:t>Back in the family pair — each of us tells ONE specific thing we heard tonight</a:t>
+              <a:t>Still in your family pair — each of us tells ONE specific thing we heard tonight</a:t>
             </a:r>
           </a:p>
           <a:p>

--- a/_implementation-notes/evening-series/FotH Evening Session 7 Slides DRAFT v1.pptx
+++ b/_implementation-notes/evening-series/FotH Evening Session 7 Slides DRAFT v1.pptx
@@ -1613,7 +1613,7 @@
           <a:p>
             <a:r>
               <a:rPr lang="en-US" sz="1200"/>
-              <a:t>S7 · 8:13–8:19 · LEAD: CONTENT PRESENTER · PAIRS</a:t>
+              <a:t>S7 · 8:13–8:16 · LEAD: CONTENT PRESENTER · PAIRS</a:t>
             </a:r>
           </a:p>
           <a:p>
@@ -1631,7 +1631,7 @@
           <a:p>
             <a:r>
               <a:rPr lang="en-US" sz="1200"/>
-              <a:t>IF TIME RAN SHORT: If only one of you walked the six steps, that one still tells. The Listener tells one thing they noticed while listening.</a:t>
+              <a:t>IF TIME RAN SHORT: If only one of you walked the steps, that one tells; the Listener tells what they noticed.</a:t>
             </a:r>
           </a:p>
         </p:txBody>
@@ -1678,19 +1678,19 @@
           <a:p>
             <a:r>
               <a:rPr lang="en-US" sz="1200"/>
-              <a:t>S7 · 8:19–8:20 · LEAD: CONTAINER HOLDER</a:t>
+              <a:t>S7 · 8:16–8:20 · LEAD: CONTAINER HOLDER</a:t>
             </a:r>
           </a:p>
           <a:p>
             <a:r>
               <a:rPr lang="en-US" sz="1200"/>
-              <a:t>BEATS: 1. One word each — not what you heard (that is yours), but what the practice was like. 2. Introduce daily PROAPT: one short passage, five to ten minutes, every day — the journal Week 7 pages have the template. 3. Hold up H7.3: passage paths for teens and parents. 4. 'The chain only works if we work it.'</a:t>
+              <a:t>BEATS: 1. Each person says briefly what they heard tonight — the one sentence told in the pair. Receive it with 'We hear that'; no comment. On 26 October this was when the room came alive. 2. Introduce daily PROAPT: one short passage, five to ten minutes, every day — the journal Week 7 pages have the template. 3. Hold up H7.3: passage paths for teens and parents. 4. 'The chain only works if we work it.'</a:t>
             </a:r>
           </a:p>
           <a:p>
             <a:r>
               <a:rPr lang="en-US" sz="1200"/>
-              <a:t>CUES: Arranged parent begins the word round; anyone may pass.</a:t>
+              <a:t>CUES: Arranged parent begins; anyone may pass; one sentence each.</a:t>
             </a:r>
           </a:p>
         </p:txBody>
@@ -6322,7 +6322,7 @@
                 </a:solidFill>
                 <a:latin typeface="Calibri"/>
               </a:rPr>
-              <a:t>One word each — not what you heard (that’s yours), but what tonight’s practice was like; a parent begins</a:t>
+              <a:t>Back in the circle — each of us says briefly what we heard tonight: one sentence; a parent begins; pass-anytime holds</a:t>
             </a:r>
           </a:p>
           <a:p>
